--- a/slides/datasets-in-10-minutes-snli.pptx
+++ b/slides/datasets-in-10-minutes-snli.pptx
@@ -64,6 +64,7 @@
     <p:sldId id="304" r:id="rId55"/>
     <p:sldId id="305" r:id="rId56"/>
     <p:sldId id="306" r:id="rId57"/>
+    <p:sldId id="315" r:id="rId65"/>
   </p:sldIdLst>
   <p:sldSz cx="9144000" cy="5143500" type="screen16x9"/>
   <p:notesSz cx="6858000" cy="9144000"/>
@@ -887,7 +888,7 @@
             </a:lvl9pPr>
           </a:lstStyle>
           <a:p>
-            <a:pPr algn="l">
+            <a:pPr algn="r">
               <a:lnSpc>
                 <a:spcPct val="100000"/>
               </a:lnSpc>
@@ -922,8 +923,8 @@
         </p:nvSpPr>
         <p:spPr>
           <a:xfrm>
-            <a:off x="5486400" y="4498848"/>
-            <a:ext cx="3108960" cy="228600"/>
+            <a:off x="5486400" y="4416552"/>
+            <a:ext cx="3108960" cy="402336"/>
           </a:xfrm>
           <a:prstGeom prst="rect">
             <a:avLst/>
@@ -1069,7 +1070,7 @@
             </a:lvl9pPr>
           </a:lstStyle>
           <a:p>
-            <a:pPr algn="l">
+            <a:pPr algn="r">
               <a:lnSpc>
                 <a:spcPct val="100000"/>
               </a:lnSpc>
@@ -1079,7 +1080,7 @@
               <a:spcAft>
                 <a:spcPts val="0"/>
               </a:spcAft>
-              <a:defRPr sz="1400" b="0">
+              <a:defRPr sz="2000" b="0">
                 <a:solidFill>
                   <a:srgbClr val="626669"/>
                 </a:solidFill>
@@ -1087,6 +1088,11 @@
               </a:defRPr>
             </a:pPr>
             <a:r>
+              <a:rPr sz="2000">
+                <a:solidFill>
+                  <a:srgbClr val="303437"/>
+                </a:solidFill>
+              </a:rPr>
               <a:t>氏名　［氏名］</a:t>
             </a:r>
           </a:p>
@@ -5864,36 +5870,38 @@
         </p:nvSpPr>
         <p:spPr>
           <a:xfrm>
-            <a:off x="5486400" y="4498848"/>
-            <a:ext cx="3108960" cy="228600"/>
-          </a:xfrm>
-        </p:spPr>
-        <p:txBody>
-          <a:bodyPr wrap="square" lIns="0" rIns="0" tIns="0" bIns="0" anchor="ctr"/>
-          <a:lstStyle/>
-          <a:p>
-            <a:pPr algn="l" marL="0" indent="0">
+            <a:off x="5486400" y="4416552"/>
+            <a:ext cx="3108960" cy="402336"/>
+          </a:xfrm>
+        </p:spPr>
+        <p:txBody>
+          <a:bodyPr wrap="square" lIns="0" rIns="0" tIns="0" bIns="0" anchor="t"/>
+          <a:lstStyle/>
+          <a:p>
+            <a:pPr algn="r" marL="0" indent="0">
+              <a:buNone/>
               <a:lnSpc>
                 <a:spcPct val="110000"/>
               </a:lnSpc>
               <a:spcBef>
                 <a:spcPts val="0"/>
               </a:spcBef>
-              <a:spcAft>
-                <a:spcPts val="0"/>
-              </a:spcAft>
-              <a:defRPr sz="1400" b="0">
+              <a:defRPr sz="2000" b="0" lang="ja-JP">
                 <a:solidFill>
                   <a:srgbClr val="626669"/>
                 </a:solidFill>
                 <a:latin typeface="Noto Sans CJK JP"/>
-              </a:defRPr>
-              <a:buNone/>
-            </a:pPr>
-            <a:r>
-              <a:rPr sz="1400" lang="ja-JP">
-                <a:solidFill>
-                  <a:srgbClr val="626669"/>
+                <a:ea typeface="Noto Sans CJK JP"/>
+              </a:defRPr>
+              <a:spcAft>
+                <a:spcPts val="600"/>
+              </a:spcAft>
+              <a:buNone/>
+            </a:pPr>
+            <a:r>
+              <a:rPr sz="2000" lang="ja-JP">
+                <a:solidFill>
+                  <a:srgbClr val="303437"/>
                 </a:solidFill>
                 <a:latin typeface="Noto Sans CJK JP"/>
                 <a:ea typeface="Noto Sans CJK JP"/>
@@ -10096,25 +10104,28 @@
               <a:spcBef>
                 <a:spcPts val="0"/>
               </a:spcBef>
-              <a:spcAft>
-                <a:spcPts val="1200"/>
-              </a:spcAft>
-              <a:defRPr sz="2400">
-                <a:latin typeface="Noto Sans CJK JP"/>
-              </a:defRPr>
+              <a:defRPr sz="2800" lang="ja-JP">
+                <a:latin typeface="Noto Sans CJK JP"/>
+                <a:ea typeface="Noto Sans CJK JP"/>
+                <a:cs typeface="Noto Sans CJK JP"/>
+              </a:defRPr>
+              <a:spcAft>
+                <a:spcPts val="1100"/>
+              </a:spcAft>
               <a:buAutoNum type="arabicPeriod" startAt="1"/>
             </a:pPr>
             <a:r>
-              <a:rPr sz="2400" lang="ja-JP">
-                <a:solidFill>
-                  <a:srgbClr val="303437"/>
-                </a:solidFill>
-                <a:latin typeface="Noto Sans CJK JP"/>
-                <a:ea typeface="Noto Sans CJK JP"/>
+              <a:rPr sz="2800" lang="ja-JP">
+                <a:solidFill>
+                  <a:srgbClr val="303437"/>
+                </a:solidFill>
+                <a:latin typeface="Noto Sans CJK JP"/>
+                <a:ea typeface="Noto Sans CJK JP"/>
+                <a:cs typeface="Noto Sans CJK JP"/>
               </a:rPr>
               <a:t>概要とタスク</a:t>
             </a:r>
-            <a:endParaRPr sz="2400"/>
+            <a:endParaRPr sz="2800" lang="ja-JP"/>
           </a:p>
           <a:p>
             <a:pPr algn="l" marL="533400" indent="-482600">
@@ -10124,25 +10135,28 @@
               <a:spcBef>
                 <a:spcPts val="0"/>
               </a:spcBef>
-              <a:spcAft>
-                <a:spcPts val="1200"/>
-              </a:spcAft>
-              <a:defRPr sz="2400">
-                <a:latin typeface="Noto Sans CJK JP"/>
-              </a:defRPr>
+              <a:defRPr sz="2800" lang="ja-JP">
+                <a:latin typeface="Noto Sans CJK JP"/>
+                <a:ea typeface="Noto Sans CJK JP"/>
+                <a:cs typeface="Noto Sans CJK JP"/>
+              </a:defRPr>
+              <a:spcAft>
+                <a:spcPts val="1100"/>
+              </a:spcAft>
               <a:buAutoNum type="arabicPeriod" startAt="2"/>
             </a:pPr>
             <a:r>
-              <a:rPr sz="2400" lang="ja-JP">
-                <a:solidFill>
-                  <a:srgbClr val="303437"/>
-                </a:solidFill>
-                <a:latin typeface="Noto Sans CJK JP"/>
-                <a:ea typeface="Noto Sans CJK JP"/>
+              <a:rPr sz="2800" lang="ja-JP">
+                <a:solidFill>
+                  <a:srgbClr val="303437"/>
+                </a:solidFill>
+                <a:latin typeface="Noto Sans CJK JP"/>
+                <a:ea typeface="Noto Sans CJK JP"/>
+                <a:cs typeface="Noto Sans CJK JP"/>
               </a:rPr>
               <a:t>作成方法と規模</a:t>
             </a:r>
-            <a:endParaRPr sz="2400"/>
+            <a:endParaRPr sz="2800" lang="ja-JP"/>
           </a:p>
           <a:p>
             <a:pPr algn="l" marL="533400" indent="-482600">
@@ -10152,25 +10166,28 @@
               <a:spcBef>
                 <a:spcPts val="0"/>
               </a:spcBef>
-              <a:spcAft>
-                <a:spcPts val="1200"/>
-              </a:spcAft>
-              <a:defRPr sz="2400">
-                <a:latin typeface="Noto Sans CJK JP"/>
-              </a:defRPr>
+              <a:defRPr sz="2800" lang="ja-JP">
+                <a:latin typeface="Noto Sans CJK JP"/>
+                <a:ea typeface="Noto Sans CJK JP"/>
+                <a:cs typeface="Noto Sans CJK JP"/>
+              </a:defRPr>
+              <a:spcAft>
+                <a:spcPts val="1100"/>
+              </a:spcAft>
               <a:buAutoNum type="arabicPeriod" startAt="3"/>
             </a:pPr>
             <a:r>
-              <a:rPr sz="2400" lang="ja-JP">
-                <a:solidFill>
-                  <a:srgbClr val="303437"/>
-                </a:solidFill>
-                <a:latin typeface="Noto Sans CJK JP"/>
-                <a:ea typeface="Noto Sans CJK JP"/>
+              <a:rPr sz="2800" lang="ja-JP">
+                <a:solidFill>
+                  <a:srgbClr val="303437"/>
+                </a:solidFill>
+                <a:latin typeface="Noto Sans CJK JP"/>
+                <a:ea typeface="Noto Sans CJK JP"/>
+                <a:cs typeface="Noto Sans CJK JP"/>
               </a:rPr>
               <a:t>評価と性能</a:t>
             </a:r>
-            <a:endParaRPr sz="2400"/>
+            <a:endParaRPr sz="2800" lang="ja-JP"/>
           </a:p>
           <a:p>
             <a:pPr algn="l" marL="533400" indent="-482600">
@@ -10180,25 +10197,28 @@
               <a:spcBef>
                 <a:spcPts val="0"/>
               </a:spcBef>
-              <a:spcAft>
-                <a:spcPts val="1200"/>
-              </a:spcAft>
-              <a:defRPr sz="2400">
-                <a:latin typeface="Noto Sans CJK JP"/>
-              </a:defRPr>
+              <a:defRPr sz="2800" lang="ja-JP">
+                <a:latin typeface="Noto Sans CJK JP"/>
+                <a:ea typeface="Noto Sans CJK JP"/>
+                <a:cs typeface="Noto Sans CJK JP"/>
+              </a:defRPr>
+              <a:spcAft>
+                <a:spcPts val="1100"/>
+              </a:spcAft>
               <a:buAutoNum type="arabicPeriod" startAt="4"/>
             </a:pPr>
             <a:r>
-              <a:rPr sz="2400" lang="ja-JP">
-                <a:solidFill>
-                  <a:srgbClr val="303437"/>
-                </a:solidFill>
-                <a:latin typeface="Noto Sans CJK JP"/>
-                <a:ea typeface="Noto Sans CJK JP"/>
+              <a:rPr sz="2800" lang="ja-JP">
+                <a:solidFill>
+                  <a:srgbClr val="303437"/>
+                </a:solidFill>
+                <a:latin typeface="Noto Sans CJK JP"/>
+                <a:ea typeface="Noto Sans CJK JP"/>
+                <a:cs typeface="Noto Sans CJK JP"/>
               </a:rPr>
               <a:t>利用の変遷と現在</a:t>
             </a:r>
-            <a:endParaRPr sz="2400"/>
+            <a:endParaRPr sz="2800" lang="ja-JP"/>
           </a:p>
           <a:p>
             <a:pPr algn="l" marL="533400" indent="-482600">
@@ -10208,25 +10228,28 @@
               <a:spcBef>
                 <a:spcPts val="0"/>
               </a:spcBef>
-              <a:spcAft>
-                <a:spcPts val="1200"/>
-              </a:spcAft>
-              <a:defRPr sz="2400">
-                <a:latin typeface="Noto Sans CJK JP"/>
-              </a:defRPr>
+              <a:defRPr sz="2800" lang="ja-JP">
+                <a:latin typeface="Noto Sans CJK JP"/>
+                <a:ea typeface="Noto Sans CJK JP"/>
+                <a:cs typeface="Noto Sans CJK JP"/>
+              </a:defRPr>
+              <a:spcAft>
+                <a:spcPts val="1100"/>
+              </a:spcAft>
               <a:buAutoNum type="arabicPeriod" startAt="5"/>
             </a:pPr>
             <a:r>
-              <a:rPr sz="2400" lang="ja-JP">
-                <a:solidFill>
-                  <a:srgbClr val="303437"/>
-                </a:solidFill>
-                <a:latin typeface="Noto Sans CJK JP"/>
-                <a:ea typeface="Noto Sans CJK JP"/>
+              <a:rPr sz="2800" lang="ja-JP">
+                <a:solidFill>
+                  <a:srgbClr val="303437"/>
+                </a:solidFill>
+                <a:latin typeface="Noto Sans CJK JP"/>
+                <a:ea typeface="Noto Sans CJK JP"/>
+                <a:cs typeface="Noto Sans CJK JP"/>
               </a:rPr>
               <a:t>入手方法とまとめ</a:t>
             </a:r>
-            <a:endParaRPr sz="2400"/>
+            <a:endParaRPr sz="2800" lang="ja-JP"/>
           </a:p>
         </p:txBody>
       </p:sp>
@@ -13467,7 +13490,7 @@
         <p:spPr>
           <a:xfrm>
             <a:off x="548640" y="1481328"/>
-            <a:ext cx="8046720" cy="2084832"/>
+            <a:ext cx="8046720" cy="1864359"/>
           </a:xfrm>
           <a:prstGeom prst="rect">
             <a:avLst/>
@@ -13510,8 +13533,8 @@
         </p:nvSpPr>
         <p:spPr>
           <a:xfrm>
-            <a:off x="685800" y="1609344"/>
-            <a:ext cx="7772400" cy="1828800"/>
+            <a:off x="548640" y="1481328"/>
+            <a:ext cx="8046720" cy="1864359"/>
           </a:xfrm>
           <a:prstGeom prst="rect">
             <a:avLst/>
@@ -13519,219 +13542,209 @@
           <a:noFill/>
         </p:spPr>
         <p:txBody>
-          <a:bodyPr wrap="square" lIns="0" rIns="0" tIns="0" bIns="0" anchor="t">
+          <a:bodyPr wrap="none" lIns="152400" rIns="152400" tIns="114300" bIns="114300" anchor="t">
             <a:spAutoFit/>
           </a:bodyPr>
           <a:lstStyle/>
           <a:p>
-            <a:pPr algn="l">
-              <a:lnSpc>
-                <a:spcPts val="2080"/>
-              </a:lnSpc>
-              <a:spcBef>
-                <a:spcPts val="0"/>
-              </a:spcBef>
-              <a:spcAft>
-                <a:spcPts val="0"/>
-              </a:spcAft>
-              <a:defRPr sz="1600" b="0">
+            <a:pPr algn="l" marL="0" indent="0">
+              <a:buNone/>
+              <a:lnSpc>
+                <a:spcPts val="1839"/>
+              </a:lnSpc>
+              <a:spcBef>
+                <a:spcPts val="0"/>
+              </a:spcBef>
+              <a:spcAft>
+                <a:spcPts val="0"/>
+              </a:spcAft>
+              <a:defRPr sz="1600" b="0" lang="ja-JP">
                 <a:solidFill>
                   <a:srgbClr val="303437"/>
                 </a:solidFill>
                 <a:latin typeface="Liberation Mono"/>
-              </a:defRPr>
-            </a:pPr>
-            <a:r>
-              <a:rPr sz="1600" b="0" lang="en-US">
+                <a:ea typeface="Noto Sans CJK JP"/>
+              </a:defRPr>
+            </a:pPr>
+            <a:r>
+              <a:rPr sz="1600" lang="ja-JP">
                 <a:solidFill>
                   <a:srgbClr val="303437"/>
                 </a:solidFill>
                 <a:latin typeface="Liberation Mono"/>
-                <a:ea typeface="Liberation Mono"/>
+                <a:ea typeface="Noto Sans CJK JP"/>
               </a:rPr>
               <a:t>from datasets import load_dataset</a:t>
             </a:r>
             <a:endParaRPr sz="1600" lang="en-US"/>
           </a:p>
           <a:p>
-            <a:pPr algn="l">
-              <a:lnSpc>
-                <a:spcPts val="2080"/>
-              </a:lnSpc>
-              <a:spcBef>
-                <a:spcPts val="0"/>
-              </a:spcBef>
-              <a:spcAft>
-                <a:spcPts val="0"/>
-              </a:spcAft>
-              <a:defRPr sz="1600" b="0">
-                <a:solidFill>
-                  <a:srgbClr val="303437"/>
-                </a:solidFill>
+            <a:pPr algn="l" marL="0" indent="0">
+              <a:buNone/>
+              <a:lnSpc>
+                <a:spcPts val="1839"/>
+              </a:lnSpc>
+              <a:spcBef>
+                <a:spcPts val="0"/>
+              </a:spcBef>
+              <a:spcAft>
+                <a:spcPts val="0"/>
+              </a:spcAft>
+              <a:defRPr sz="1600" lang="ja-JP">
                 <a:latin typeface="Liberation Mono"/>
-              </a:defRPr>
-            </a:pPr>
-            <a:r>
-              <a:rPr sz="1600" b="0" lang="en-US">
+                <a:ea typeface="Noto Sans CJK JP"/>
+              </a:defRPr>
+            </a:pPr>
+            <a:r>
+              <a:rPr sz="1600" lang="ja-JP">
                 <a:solidFill>
                   <a:srgbClr val="303437"/>
                 </a:solidFill>
                 <a:latin typeface="Liberation Mono"/>
-                <a:ea typeface="Liberation Mono"/>
+                <a:ea typeface="Noto Sans CJK JP"/>
               </a:rPr>
               <a:t/>
             </a:r>
-            <a:endParaRPr sz="1600" lang="en-US"/>
-          </a:p>
-          <a:p>
-            <a:pPr algn="l">
-              <a:lnSpc>
-                <a:spcPts val="2080"/>
-              </a:lnSpc>
-              <a:spcBef>
-                <a:spcPts val="0"/>
-              </a:spcBef>
-              <a:spcAft>
-                <a:spcPts val="0"/>
-              </a:spcAft>
-              <a:defRPr sz="1600" b="0">
-                <a:solidFill>
-                  <a:srgbClr val="303437"/>
-                </a:solidFill>
+          </a:p>
+          <a:p>
+            <a:pPr algn="l" marL="0" indent="0">
+              <a:buNone/>
+              <a:lnSpc>
+                <a:spcPts val="1839"/>
+              </a:lnSpc>
+              <a:spcBef>
+                <a:spcPts val="0"/>
+              </a:spcBef>
+              <a:spcAft>
+                <a:spcPts val="0"/>
+              </a:spcAft>
+              <a:defRPr sz="1600" lang="ja-JP">
                 <a:latin typeface="Liberation Mono"/>
-              </a:defRPr>
-            </a:pPr>
-            <a:r>
-              <a:rPr sz="1600" b="0" lang="en-US">
+                <a:ea typeface="Noto Sans CJK JP"/>
+              </a:defRPr>
+            </a:pPr>
+            <a:r>
+              <a:rPr sz="1600" lang="ja-JP">
                 <a:solidFill>
                   <a:srgbClr val="303437"/>
                 </a:solidFill>
                 <a:latin typeface="Liberation Mono"/>
-                <a:ea typeface="Liberation Mono"/>
+                <a:ea typeface="Noto Sans CJK JP"/>
               </a:rPr>
               <a:t>ds = load_dataset("stanfordnlp/snli")</a:t>
             </a:r>
-            <a:endParaRPr sz="1600" lang="en-US"/>
-          </a:p>
-          <a:p>
-            <a:pPr algn="l">
-              <a:lnSpc>
-                <a:spcPts val="2080"/>
-              </a:lnSpc>
-              <a:spcBef>
-                <a:spcPts val="0"/>
-              </a:spcBef>
-              <a:spcAft>
-                <a:spcPts val="0"/>
-              </a:spcAft>
-              <a:defRPr sz="1600" b="0">
-                <a:solidFill>
-                  <a:srgbClr val="303437"/>
-                </a:solidFill>
+          </a:p>
+          <a:p>
+            <a:pPr algn="l" marL="0" indent="0">
+              <a:buNone/>
+              <a:lnSpc>
+                <a:spcPts val="1839"/>
+              </a:lnSpc>
+              <a:spcBef>
+                <a:spcPts val="0"/>
+              </a:spcBef>
+              <a:spcAft>
+                <a:spcPts val="0"/>
+              </a:spcAft>
+              <a:defRPr sz="1600" lang="ja-JP">
                 <a:latin typeface="Liberation Mono"/>
-              </a:defRPr>
-            </a:pPr>
-            <a:r>
-              <a:rPr sz="1600" b="0" lang="en-US">
+                <a:ea typeface="Noto Sans CJK JP"/>
+              </a:defRPr>
+            </a:pPr>
+            <a:r>
+              <a:rPr sz="1600" lang="ja-JP">
                 <a:solidFill>
                   <a:srgbClr val="303437"/>
                 </a:solidFill>
                 <a:latin typeface="Liberation Mono"/>
-                <a:ea typeface="Liberation Mono"/>
+                <a:ea typeface="Noto Sans CJK JP"/>
               </a:rPr>
               <a:t>valid = ds.filter(lambda row: row["label"] &gt;= 0)</a:t>
             </a:r>
-            <a:endParaRPr sz="1600" lang="en-US"/>
-          </a:p>
-          <a:p>
-            <a:pPr algn="l">
-              <a:lnSpc>
-                <a:spcPts val="2080"/>
-              </a:lnSpc>
-              <a:spcBef>
-                <a:spcPts val="0"/>
-              </a:spcBef>
-              <a:spcAft>
-                <a:spcPts val="0"/>
-              </a:spcAft>
-              <a:defRPr sz="1600" b="0">
-                <a:solidFill>
-                  <a:srgbClr val="303437"/>
-                </a:solidFill>
+          </a:p>
+          <a:p>
+            <a:pPr algn="l" marL="0" indent="0">
+              <a:buNone/>
+              <a:lnSpc>
+                <a:spcPts val="1839"/>
+              </a:lnSpc>
+              <a:spcBef>
+                <a:spcPts val="0"/>
+              </a:spcBef>
+              <a:spcAft>
+                <a:spcPts val="0"/>
+              </a:spcAft>
+              <a:defRPr sz="1600" lang="ja-JP">
                 <a:latin typeface="Liberation Mono"/>
-              </a:defRPr>
-            </a:pPr>
-            <a:r>
-              <a:rPr sz="1600" b="0" lang="en-US">
+                <a:ea typeface="Noto Sans CJK JP"/>
+              </a:defRPr>
+            </a:pPr>
+            <a:r>
+              <a:rPr sz="1600" lang="ja-JP">
                 <a:solidFill>
                   <a:srgbClr val="303437"/>
                 </a:solidFill>
                 <a:latin typeface="Liberation Mono"/>
-                <a:ea typeface="Liberation Mono"/>
+                <a:ea typeface="Noto Sans CJK JP"/>
               </a:rPr>
               <a:t/>
             </a:r>
-            <a:endParaRPr sz="1600" lang="en-US"/>
-          </a:p>
-          <a:p>
-            <a:pPr algn="l">
-              <a:lnSpc>
-                <a:spcPts val="2080"/>
-              </a:lnSpc>
-              <a:spcBef>
-                <a:spcPts val="0"/>
-              </a:spcBef>
-              <a:spcAft>
-                <a:spcPts val="0"/>
-              </a:spcAft>
-              <a:defRPr sz="1600" b="0">
-                <a:solidFill>
-                  <a:srgbClr val="303437"/>
-                </a:solidFill>
+          </a:p>
+          <a:p>
+            <a:pPr algn="l" marL="0" indent="0">
+              <a:buNone/>
+              <a:lnSpc>
+                <a:spcPts val="1839"/>
+              </a:lnSpc>
+              <a:spcBef>
+                <a:spcPts val="0"/>
+              </a:spcBef>
+              <a:spcAft>
+                <a:spcPts val="0"/>
+              </a:spcAft>
+              <a:defRPr sz="1600" lang="ja-JP">
                 <a:latin typeface="Liberation Mono"/>
-              </a:defRPr>
-            </a:pPr>
-            <a:r>
-              <a:rPr sz="1600" b="0" lang="en-US">
+                <a:ea typeface="Noto Sans CJK JP"/>
+              </a:defRPr>
+            </a:pPr>
+            <a:r>
+              <a:rPr sz="1600" lang="ja-JP">
                 <a:solidFill>
                   <a:srgbClr val="303437"/>
                 </a:solidFill>
                 <a:latin typeface="Liberation Mono"/>
-                <a:ea typeface="Liberation Mono"/>
+                <a:ea typeface="Noto Sans CJK JP"/>
               </a:rPr>
               <a:t>print(valid["test"][0])</a:t>
             </a:r>
-            <a:endParaRPr sz="1600" lang="en-US"/>
-          </a:p>
-          <a:p>
-            <a:pPr algn="l">
-              <a:lnSpc>
-                <a:spcPts val="2080"/>
-              </a:lnSpc>
-              <a:spcBef>
-                <a:spcPts val="0"/>
-              </a:spcBef>
-              <a:spcAft>
-                <a:spcPts val="0"/>
-              </a:spcAft>
-              <a:defRPr sz="1600" b="0">
-                <a:solidFill>
-                  <a:srgbClr val="303437"/>
-                </a:solidFill>
+          </a:p>
+          <a:p>
+            <a:pPr algn="l" marL="0" indent="0">
+              <a:buNone/>
+              <a:lnSpc>
+                <a:spcPts val="1839"/>
+              </a:lnSpc>
+              <a:spcBef>
+                <a:spcPts val="0"/>
+              </a:spcBef>
+              <a:spcAft>
+                <a:spcPts val="0"/>
+              </a:spcAft>
+              <a:defRPr sz="1600" lang="ja-JP">
                 <a:latin typeface="Liberation Mono"/>
-              </a:defRPr>
-            </a:pPr>
-            <a:r>
-              <a:rPr sz="1600" b="0" lang="en-US">
+                <a:ea typeface="Noto Sans CJK JP"/>
+              </a:defRPr>
+            </a:pPr>
+            <a:r>
+              <a:rPr sz="1600" lang="ja-JP">
                 <a:solidFill>
                   <a:srgbClr val="303437"/>
                 </a:solidFill>
                 <a:latin typeface="Liberation Mono"/>
-                <a:ea typeface="Liberation Mono"/>
+                <a:ea typeface="Noto Sans CJK JP"/>
               </a:rPr>
               <a:t>print(ds["train"].features["label"].names)</a:t>
             </a:r>
-            <a:endParaRPr sz="1600" lang="en-US"/>
           </a:p>
         </p:txBody>
       </p:sp>
@@ -14379,29 +14392,32 @@
               <a:spcBef>
                 <a:spcPts val="0"/>
               </a:spcBef>
-              <a:spcAft>
-                <a:spcPts val="1200"/>
-              </a:spcAft>
-              <a:defRPr sz="2400" b="0">
-                <a:solidFill>
-                  <a:srgbClr val="303437"/>
-                </a:solidFill>
-                <a:latin typeface="Noto Sans CJK JP"/>
-              </a:defRPr>
+              <a:defRPr sz="2800" b="0" lang="ja-JP">
+                <a:solidFill>
+                  <a:srgbClr val="303437"/>
+                </a:solidFill>
+                <a:latin typeface="Noto Sans CJK JP"/>
+                <a:ea typeface="Noto Sans CJK JP"/>
+                <a:cs typeface="Noto Sans CJK JP"/>
+              </a:defRPr>
+              <a:spcAft>
+                <a:spcPts val="1100"/>
+              </a:spcAft>
               <a:buAutoNum type="arabicPeriod" startAt="1"/>
             </a:pPr>
             <a:r>
-              <a:rPr sz="2400" lang="ja-JP">
-                <a:solidFill>
-                  <a:srgbClr val="303437"/>
-                </a:solidFill>
-                <a:latin typeface="Noto Sans CJK JP"/>
-                <a:ea typeface="Noto Sans CJK JP"/>
+              <a:rPr sz="2800" lang="ja-JP">
+                <a:solidFill>
+                  <a:srgbClr val="303437"/>
+                </a:solidFill>
+                <a:latin typeface="Noto Sans CJK JP"/>
+                <a:ea typeface="Noto Sans CJK JP"/>
+                <a:cs typeface="Noto Sans CJK JP"/>
               </a:rPr>
               <a:t>著者と発表先</a:t>
             </a:r>
-            <a:endParaRPr sz="2200" lang="ja-JP"/>
-            <a:endParaRPr sz="2400"/>
+            <a:endParaRPr sz="2800" lang="ja-JP"/>
+            <a:endParaRPr sz="2800" lang="ja-JP"/>
           </a:p>
         </p:txBody>
       </p:sp>
@@ -14434,29 +14450,32 @@
               <a:spcBef>
                 <a:spcPts val="0"/>
               </a:spcBef>
-              <a:spcAft>
-                <a:spcPts val="1200"/>
-              </a:spcAft>
-              <a:defRPr sz="2400" b="0">
-                <a:solidFill>
-                  <a:srgbClr val="303437"/>
-                </a:solidFill>
-                <a:latin typeface="Noto Sans CJK JP"/>
-              </a:defRPr>
+              <a:defRPr sz="2800" b="0" lang="ja-JP">
+                <a:solidFill>
+                  <a:srgbClr val="303437"/>
+                </a:solidFill>
+                <a:latin typeface="Noto Sans CJK JP"/>
+                <a:ea typeface="Noto Sans CJK JP"/>
+                <a:cs typeface="Noto Sans CJK JP"/>
+              </a:defRPr>
+              <a:spcAft>
+                <a:spcPts val="1100"/>
+              </a:spcAft>
               <a:buAutoNum type="arabicPeriod" startAt="2"/>
             </a:pPr>
             <a:r>
-              <a:rPr sz="2400" lang="ja-JP">
-                <a:solidFill>
-                  <a:srgbClr val="303437"/>
-                </a:solidFill>
-                <a:latin typeface="Noto Sans CJK JP"/>
-                <a:ea typeface="Noto Sans CJK JP"/>
+              <a:rPr sz="2800" lang="ja-JP">
+                <a:solidFill>
+                  <a:srgbClr val="303437"/>
+                </a:solidFill>
+                <a:latin typeface="Noto Sans CJK JP"/>
+                <a:ea typeface="Noto Sans CJK JP"/>
+                <a:cs typeface="Noto Sans CJK JP"/>
               </a:rPr>
               <a:t>追加の実例</a:t>
             </a:r>
-            <a:endParaRPr sz="2200" lang="ja-JP"/>
-            <a:endParaRPr sz="2400"/>
+            <a:endParaRPr sz="2800" lang="ja-JP"/>
+            <a:endParaRPr sz="2800" lang="ja-JP"/>
           </a:p>
         </p:txBody>
       </p:sp>
@@ -14489,29 +14508,32 @@
               <a:spcBef>
                 <a:spcPts val="0"/>
               </a:spcBef>
-              <a:spcAft>
-                <a:spcPts val="1200"/>
-              </a:spcAft>
-              <a:defRPr sz="2400" b="0">
-                <a:solidFill>
-                  <a:srgbClr val="303437"/>
-                </a:solidFill>
-                <a:latin typeface="Noto Sans CJK JP"/>
-              </a:defRPr>
+              <a:defRPr sz="2800" b="0" lang="ja-JP">
+                <a:solidFill>
+                  <a:srgbClr val="303437"/>
+                </a:solidFill>
+                <a:latin typeface="Noto Sans CJK JP"/>
+                <a:ea typeface="Noto Sans CJK JP"/>
+                <a:cs typeface="Noto Sans CJK JP"/>
+              </a:defRPr>
+              <a:spcAft>
+                <a:spcPts val="1100"/>
+              </a:spcAft>
               <a:buAutoNum type="arabicPeriod" startAt="3"/>
             </a:pPr>
             <a:r>
-              <a:rPr sz="2400" lang="ja-JP">
-                <a:solidFill>
-                  <a:srgbClr val="303437"/>
-                </a:solidFill>
-                <a:latin typeface="Noto Sans CJK JP"/>
-                <a:ea typeface="Noto Sans CJK JP"/>
+              <a:rPr sz="2800" lang="ja-JP">
+                <a:solidFill>
+                  <a:srgbClr val="303437"/>
+                </a:solidFill>
+                <a:latin typeface="Noto Sans CJK JP"/>
+                <a:ea typeface="Noto Sans CJK JP"/>
+                <a:cs typeface="Noto Sans CJK JP"/>
               </a:rPr>
               <a:t>件数・長さの統計と実例</a:t>
             </a:r>
-            <a:endParaRPr sz="2200" lang="ja-JP"/>
-            <a:endParaRPr sz="2400"/>
+            <a:endParaRPr sz="2800" lang="ja-JP"/>
+            <a:endParaRPr sz="2800" lang="ja-JP"/>
           </a:p>
         </p:txBody>
       </p:sp>
@@ -14544,29 +14566,32 @@
               <a:spcBef>
                 <a:spcPts val="0"/>
               </a:spcBef>
-              <a:spcAft>
-                <a:spcPts val="1200"/>
-              </a:spcAft>
-              <a:defRPr sz="2400" b="0">
-                <a:solidFill>
-                  <a:srgbClr val="303437"/>
-                </a:solidFill>
-                <a:latin typeface="Noto Sans CJK JP"/>
-              </a:defRPr>
+              <a:defRPr sz="2800" b="0" lang="ja-JP">
+                <a:solidFill>
+                  <a:srgbClr val="303437"/>
+                </a:solidFill>
+                <a:latin typeface="Noto Sans CJK JP"/>
+                <a:ea typeface="Noto Sans CJK JP"/>
+                <a:cs typeface="Noto Sans CJK JP"/>
+              </a:defRPr>
+              <a:spcAft>
+                <a:spcPts val="1100"/>
+              </a:spcAft>
               <a:buAutoNum type="arabicPeriod" startAt="4"/>
             </a:pPr>
             <a:r>
-              <a:rPr sz="2400" lang="ja-JP">
-                <a:solidFill>
-                  <a:srgbClr val="303437"/>
-                </a:solidFill>
-                <a:latin typeface="Noto Sans CJK JP"/>
-                <a:ea typeface="Noto Sans CJK JP"/>
+              <a:rPr sz="2800" lang="ja-JP">
+                <a:solidFill>
+                  <a:srgbClr val="303437"/>
+                </a:solidFill>
+                <a:latin typeface="Noto Sans CJK JP"/>
+                <a:ea typeface="Noto Sans CJK JP"/>
+                <a:cs typeface="Noto Sans CJK JP"/>
               </a:rPr>
               <a:t>モデル・入手・作成の補足</a:t>
             </a:r>
-            <a:endParaRPr sz="2200" lang="ja-JP"/>
-            <a:endParaRPr sz="2400"/>
+            <a:endParaRPr sz="2800" lang="ja-JP"/>
+            <a:endParaRPr sz="2800" lang="ja-JP"/>
           </a:p>
         </p:txBody>
       </p:sp>
@@ -14599,29 +14624,32 @@
               <a:spcBef>
                 <a:spcPts val="0"/>
               </a:spcBef>
-              <a:spcAft>
-                <a:spcPts val="1200"/>
-              </a:spcAft>
-              <a:defRPr sz="2400" b="0">
-                <a:solidFill>
-                  <a:srgbClr val="303437"/>
-                </a:solidFill>
-                <a:latin typeface="Noto Sans CJK JP"/>
-              </a:defRPr>
+              <a:defRPr sz="2800" b="0" lang="ja-JP">
+                <a:solidFill>
+                  <a:srgbClr val="303437"/>
+                </a:solidFill>
+                <a:latin typeface="Noto Sans CJK JP"/>
+                <a:ea typeface="Noto Sans CJK JP"/>
+                <a:cs typeface="Noto Sans CJK JP"/>
+              </a:defRPr>
+              <a:spcAft>
+                <a:spcPts val="1100"/>
+              </a:spcAft>
               <a:buAutoNum type="arabicPeriod" startAt="5"/>
             </a:pPr>
             <a:r>
-              <a:rPr sz="2400" lang="ja-JP">
-                <a:solidFill>
-                  <a:srgbClr val="303437"/>
-                </a:solidFill>
-                <a:latin typeface="Noto Sans CJK JP"/>
-                <a:ea typeface="Noto Sans CJK JP"/>
+              <a:rPr sz="2800" lang="ja-JP">
+                <a:solidFill>
+                  <a:srgbClr val="303437"/>
+                </a:solidFill>
+                <a:latin typeface="Noto Sans CJK JP"/>
+                <a:ea typeface="Noto Sans CJK JP"/>
+                <a:cs typeface="Noto Sans CJK JP"/>
               </a:rPr>
               <a:t>参考文献と集計条件</a:t>
             </a:r>
-            <a:endParaRPr sz="2200" lang="ja-JP"/>
-            <a:endParaRPr sz="2400"/>
+            <a:endParaRPr sz="2800" lang="ja-JP"/>
+            <a:endParaRPr sz="2800" lang="ja-JP"/>
           </a:p>
         </p:txBody>
       </p:sp>
@@ -33896,7 +33924,7 @@
         <p:spPr>
           <a:xfrm>
             <a:off x="548640" y="1481328"/>
-            <a:ext cx="8046720" cy="2549652"/>
+            <a:ext cx="8046720" cy="2273300"/>
           </a:xfrm>
           <a:prstGeom prst="rect">
             <a:avLst/>
@@ -33939,8 +33967,8 @@
         </p:nvSpPr>
         <p:spPr>
           <a:xfrm>
-            <a:off x="685800" y="1609344"/>
-            <a:ext cx="7772400" cy="2293620"/>
+            <a:off x="548640" y="1481328"/>
+            <a:ext cx="8046720" cy="2273300"/>
           </a:xfrm>
           <a:prstGeom prst="rect">
             <a:avLst/>
@@ -33948,309 +33976,293 @@
           <a:noFill/>
         </p:spPr>
         <p:txBody>
-          <a:bodyPr wrap="square" lIns="0" rIns="0" tIns="0" bIns="0" anchor="t">
+          <a:bodyPr wrap="none" lIns="152400" rIns="152400" tIns="114300" bIns="114300" anchor="t">
             <a:spAutoFit/>
           </a:bodyPr>
           <a:lstStyle/>
           <a:p>
-            <a:pPr algn="l">
-              <a:lnSpc>
-                <a:spcPts val="1820"/>
-              </a:lnSpc>
-              <a:spcBef>
-                <a:spcPts val="0"/>
-              </a:spcBef>
-              <a:spcAft>
-                <a:spcPts val="0"/>
-              </a:spcAft>
-              <a:defRPr sz="1400" b="0">
+            <a:pPr algn="l" marL="0" indent="0">
+              <a:buNone/>
+              <a:lnSpc>
+                <a:spcPts val="1609"/>
+              </a:lnSpc>
+              <a:spcBef>
+                <a:spcPts val="0"/>
+              </a:spcBef>
+              <a:spcAft>
+                <a:spcPts val="0"/>
+              </a:spcAft>
+              <a:defRPr sz="1400" b="0" lang="ja-JP">
                 <a:solidFill>
                   <a:srgbClr val="303437"/>
                 </a:solidFill>
                 <a:latin typeface="Liberation Mono"/>
-              </a:defRPr>
-            </a:pPr>
-            <a:r>
-              <a:rPr sz="1400" b="0" lang="en-US">
+                <a:ea typeface="Noto Sans CJK JP"/>
+              </a:defRPr>
+            </a:pPr>
+            <a:r>
+              <a:rPr sz="1400" lang="ja-JP">
                 <a:solidFill>
                   <a:srgbClr val="303437"/>
                 </a:solidFill>
                 <a:latin typeface="Liberation Mono"/>
-                <a:ea typeface="Liberation Mono"/>
+                <a:ea typeface="Noto Sans CJK JP"/>
               </a:rPr>
               <a:t>import json</a:t>
             </a:r>
             <a:endParaRPr sz="1400" lang="en-US"/>
           </a:p>
           <a:p>
-            <a:pPr algn="l">
-              <a:lnSpc>
-                <a:spcPts val="1820"/>
-              </a:lnSpc>
-              <a:spcBef>
-                <a:spcPts val="0"/>
-              </a:spcBef>
-              <a:spcAft>
-                <a:spcPts val="0"/>
-              </a:spcAft>
-              <a:defRPr sz="1400" b="0">
-                <a:solidFill>
-                  <a:srgbClr val="303437"/>
-                </a:solidFill>
+            <a:pPr algn="l" marL="0" indent="0">
+              <a:buNone/>
+              <a:lnSpc>
+                <a:spcPts val="1609"/>
+              </a:lnSpc>
+              <a:spcBef>
+                <a:spcPts val="0"/>
+              </a:spcBef>
+              <a:spcAft>
+                <a:spcPts val="0"/>
+              </a:spcAft>
+              <a:defRPr sz="1400" lang="ja-JP">
                 <a:latin typeface="Liberation Mono"/>
-              </a:defRPr>
-            </a:pPr>
-            <a:r>
-              <a:rPr sz="1400" b="0" lang="en-US">
+                <a:ea typeface="Noto Sans CJK JP"/>
+              </a:defRPr>
+            </a:pPr>
+            <a:r>
+              <a:rPr sz="1400" lang="ja-JP">
                 <a:solidFill>
                   <a:srgbClr val="303437"/>
                 </a:solidFill>
                 <a:latin typeface="Liberation Mono"/>
-                <a:ea typeface="Liberation Mono"/>
+                <a:ea typeface="Noto Sans CJK JP"/>
               </a:rPr>
               <a:t>from urllib.request import urlretrieve</a:t>
             </a:r>
-            <a:endParaRPr sz="1400" lang="en-US"/>
-          </a:p>
-          <a:p>
-            <a:pPr algn="l">
-              <a:lnSpc>
-                <a:spcPts val="1820"/>
-              </a:lnSpc>
-              <a:spcBef>
-                <a:spcPts val="0"/>
-              </a:spcBef>
-              <a:spcAft>
-                <a:spcPts val="0"/>
-              </a:spcAft>
-              <a:defRPr sz="1400" b="0">
-                <a:solidFill>
-                  <a:srgbClr val="303437"/>
-                </a:solidFill>
+          </a:p>
+          <a:p>
+            <a:pPr algn="l" marL="0" indent="0">
+              <a:buNone/>
+              <a:lnSpc>
+                <a:spcPts val="1609"/>
+              </a:lnSpc>
+              <a:spcBef>
+                <a:spcPts val="0"/>
+              </a:spcBef>
+              <a:spcAft>
+                <a:spcPts val="0"/>
+              </a:spcAft>
+              <a:defRPr sz="1400" lang="ja-JP">
                 <a:latin typeface="Liberation Mono"/>
-              </a:defRPr>
-            </a:pPr>
-            <a:r>
-              <a:rPr sz="1400" b="0" lang="en-US">
+                <a:ea typeface="Noto Sans CJK JP"/>
+              </a:defRPr>
+            </a:pPr>
+            <a:r>
+              <a:rPr sz="1400" lang="ja-JP">
                 <a:solidFill>
                   <a:srgbClr val="303437"/>
                 </a:solidFill>
                 <a:latin typeface="Liberation Mono"/>
-                <a:ea typeface="Liberation Mono"/>
+                <a:ea typeface="Noto Sans CJK JP"/>
               </a:rPr>
               <a:t>from zipfile import ZipFile</a:t>
             </a:r>
-            <a:endParaRPr sz="1400" lang="en-US"/>
-          </a:p>
-          <a:p>
-            <a:pPr algn="l">
-              <a:lnSpc>
-                <a:spcPts val="1820"/>
-              </a:lnSpc>
-              <a:spcBef>
-                <a:spcPts val="0"/>
-              </a:spcBef>
-              <a:spcAft>
-                <a:spcPts val="0"/>
-              </a:spcAft>
-              <a:defRPr sz="1400" b="0">
-                <a:solidFill>
-                  <a:srgbClr val="303437"/>
-                </a:solidFill>
+          </a:p>
+          <a:p>
+            <a:pPr algn="l" marL="0" indent="0">
+              <a:buNone/>
+              <a:lnSpc>
+                <a:spcPts val="1609"/>
+              </a:lnSpc>
+              <a:spcBef>
+                <a:spcPts val="0"/>
+              </a:spcBef>
+              <a:spcAft>
+                <a:spcPts val="0"/>
+              </a:spcAft>
+              <a:defRPr sz="1400" lang="ja-JP">
                 <a:latin typeface="Liberation Mono"/>
-              </a:defRPr>
-            </a:pPr>
-            <a:r>
-              <a:rPr sz="1400" b="0" lang="en-US">
+                <a:ea typeface="Noto Sans CJK JP"/>
+              </a:defRPr>
+            </a:pPr>
+            <a:r>
+              <a:rPr sz="1400" lang="ja-JP">
                 <a:solidFill>
                   <a:srgbClr val="303437"/>
                 </a:solidFill>
                 <a:latin typeface="Liberation Mono"/>
-                <a:ea typeface="Liberation Mono"/>
+                <a:ea typeface="Noto Sans CJK JP"/>
               </a:rPr>
               <a:t/>
             </a:r>
-            <a:endParaRPr sz="1400" lang="en-US"/>
-          </a:p>
-          <a:p>
-            <a:pPr algn="l">
-              <a:lnSpc>
-                <a:spcPts val="1820"/>
-              </a:lnSpc>
-              <a:spcBef>
-                <a:spcPts val="0"/>
-              </a:spcBef>
-              <a:spcAft>
-                <a:spcPts val="0"/>
-              </a:spcAft>
-              <a:defRPr sz="1400" b="0">
-                <a:solidFill>
-                  <a:srgbClr val="303437"/>
-                </a:solidFill>
+          </a:p>
+          <a:p>
+            <a:pPr algn="l" marL="0" indent="0">
+              <a:buNone/>
+              <a:lnSpc>
+                <a:spcPts val="1609"/>
+              </a:lnSpc>
+              <a:spcBef>
+                <a:spcPts val="0"/>
+              </a:spcBef>
+              <a:spcAft>
+                <a:spcPts val="0"/>
+              </a:spcAft>
+              <a:defRPr sz="1400" lang="ja-JP">
                 <a:latin typeface="Liberation Mono"/>
-              </a:defRPr>
-            </a:pPr>
-            <a:r>
-              <a:rPr sz="1400" b="0" lang="en-US">
+                <a:ea typeface="Noto Sans CJK JP"/>
+              </a:defRPr>
+            </a:pPr>
+            <a:r>
+              <a:rPr sz="1400" lang="ja-JP">
                 <a:solidFill>
                   <a:srgbClr val="303437"/>
                 </a:solidFill>
                 <a:latin typeface="Liberation Mono"/>
-                <a:ea typeface="Liberation Mono"/>
+                <a:ea typeface="Noto Sans CJK JP"/>
               </a:rPr>
               <a:t>url = "https://nlp.stanford.edu/projects/snli/snli_1.0.zip"</a:t>
             </a:r>
-            <a:endParaRPr sz="1400" lang="en-US"/>
-          </a:p>
-          <a:p>
-            <a:pPr algn="l">
-              <a:lnSpc>
-                <a:spcPts val="1820"/>
-              </a:lnSpc>
-              <a:spcBef>
-                <a:spcPts val="0"/>
-              </a:spcBef>
-              <a:spcAft>
-                <a:spcPts val="0"/>
-              </a:spcAft>
-              <a:defRPr sz="1400" b="0">
-                <a:solidFill>
-                  <a:srgbClr val="303437"/>
-                </a:solidFill>
+          </a:p>
+          <a:p>
+            <a:pPr algn="l" marL="0" indent="0">
+              <a:buNone/>
+              <a:lnSpc>
+                <a:spcPts val="1609"/>
+              </a:lnSpc>
+              <a:spcBef>
+                <a:spcPts val="0"/>
+              </a:spcBef>
+              <a:spcAft>
+                <a:spcPts val="0"/>
+              </a:spcAft>
+              <a:defRPr sz="1400" lang="ja-JP">
                 <a:latin typeface="Liberation Mono"/>
-              </a:defRPr>
-            </a:pPr>
-            <a:r>
-              <a:rPr sz="1400" b="0" lang="en-US">
+                <a:ea typeface="Noto Sans CJK JP"/>
+              </a:defRPr>
+            </a:pPr>
+            <a:r>
+              <a:rPr sz="1400" lang="ja-JP">
                 <a:solidFill>
                   <a:srgbClr val="303437"/>
                 </a:solidFill>
                 <a:latin typeface="Liberation Mono"/>
-                <a:ea typeface="Liberation Mono"/>
+                <a:ea typeface="Noto Sans CJK JP"/>
               </a:rPr>
               <a:t>urlretrieve(url, "snli_1.0.zip")</a:t>
             </a:r>
-            <a:endParaRPr sz="1400" lang="en-US"/>
-          </a:p>
-          <a:p>
-            <a:pPr algn="l">
-              <a:lnSpc>
-                <a:spcPts val="1820"/>
-              </a:lnSpc>
-              <a:spcBef>
-                <a:spcPts val="0"/>
-              </a:spcBef>
-              <a:spcAft>
-                <a:spcPts val="0"/>
-              </a:spcAft>
-              <a:defRPr sz="1400" b="0">
-                <a:solidFill>
-                  <a:srgbClr val="303437"/>
-                </a:solidFill>
+          </a:p>
+          <a:p>
+            <a:pPr algn="l" marL="0" indent="0">
+              <a:buNone/>
+              <a:lnSpc>
+                <a:spcPts val="1609"/>
+              </a:lnSpc>
+              <a:spcBef>
+                <a:spcPts val="0"/>
+              </a:spcBef>
+              <a:spcAft>
+                <a:spcPts val="0"/>
+              </a:spcAft>
+              <a:defRPr sz="1400" lang="ja-JP">
                 <a:latin typeface="Liberation Mono"/>
-              </a:defRPr>
-            </a:pPr>
-            <a:r>
-              <a:rPr sz="1400" b="0" lang="en-US">
+                <a:ea typeface="Noto Sans CJK JP"/>
+              </a:defRPr>
+            </a:pPr>
+            <a:r>
+              <a:rPr sz="1400" lang="ja-JP">
                 <a:solidFill>
                   <a:srgbClr val="303437"/>
                 </a:solidFill>
                 <a:latin typeface="Liberation Mono"/>
-                <a:ea typeface="Liberation Mono"/>
+                <a:ea typeface="Noto Sans CJK JP"/>
               </a:rPr>
               <a:t>with ZipFile("snli_1.0.zip") as z:</a:t>
             </a:r>
-            <a:endParaRPr sz="1400" lang="en-US"/>
-          </a:p>
-          <a:p>
-            <a:pPr algn="l">
-              <a:lnSpc>
-                <a:spcPts val="1820"/>
-              </a:lnSpc>
-              <a:spcBef>
-                <a:spcPts val="0"/>
-              </a:spcBef>
-              <a:spcAft>
-                <a:spcPts val="0"/>
-              </a:spcAft>
-              <a:defRPr sz="1400" b="0">
-                <a:solidFill>
-                  <a:srgbClr val="303437"/>
-                </a:solidFill>
+          </a:p>
+          <a:p>
+            <a:pPr algn="l" marL="0" indent="0">
+              <a:buNone/>
+              <a:lnSpc>
+                <a:spcPts val="1609"/>
+              </a:lnSpc>
+              <a:spcBef>
+                <a:spcPts val="0"/>
+              </a:spcBef>
+              <a:spcAft>
+                <a:spcPts val="0"/>
+              </a:spcAft>
+              <a:defRPr sz="1400" lang="ja-JP">
                 <a:latin typeface="Liberation Mono"/>
-              </a:defRPr>
-            </a:pPr>
-            <a:r>
-              <a:rPr sz="1400" b="0" lang="en-US">
+                <a:ea typeface="Noto Sans CJK JP"/>
+              </a:defRPr>
+            </a:pPr>
+            <a:r>
+              <a:rPr sz="1400" lang="ja-JP">
                 <a:solidFill>
                   <a:srgbClr val="303437"/>
                 </a:solidFill>
                 <a:latin typeface="Liberation Mono"/>
-                <a:ea typeface="Liberation Mono"/>
+                <a:ea typeface="Noto Sans CJK JP"/>
               </a:rPr>
               <a:t>    path = "snli_1.0/snli_1.0_test.jsonl"</a:t>
             </a:r>
-            <a:endParaRPr sz="1400" lang="en-US"/>
-          </a:p>
-          <a:p>
-            <a:pPr algn="l">
-              <a:lnSpc>
-                <a:spcPts val="1820"/>
-              </a:lnSpc>
-              <a:spcBef>
-                <a:spcPts val="0"/>
-              </a:spcBef>
-              <a:spcAft>
-                <a:spcPts val="0"/>
-              </a:spcAft>
-              <a:defRPr sz="1400" b="0">
-                <a:solidFill>
-                  <a:srgbClr val="303437"/>
-                </a:solidFill>
+          </a:p>
+          <a:p>
+            <a:pPr algn="l" marL="0" indent="0">
+              <a:buNone/>
+              <a:lnSpc>
+                <a:spcPts val="1609"/>
+              </a:lnSpc>
+              <a:spcBef>
+                <a:spcPts val="0"/>
+              </a:spcBef>
+              <a:spcAft>
+                <a:spcPts val="0"/>
+              </a:spcAft>
+              <a:defRPr sz="1400" lang="ja-JP">
                 <a:latin typeface="Liberation Mono"/>
-              </a:defRPr>
-            </a:pPr>
-            <a:r>
-              <a:rPr sz="1400" b="0" lang="en-US">
+                <a:ea typeface="Noto Sans CJK JP"/>
+              </a:defRPr>
+            </a:pPr>
+            <a:r>
+              <a:rPr sz="1400" lang="ja-JP">
                 <a:solidFill>
                   <a:srgbClr val="303437"/>
                 </a:solidFill>
                 <a:latin typeface="Liberation Mono"/>
-                <a:ea typeface="Liberation Mono"/>
+                <a:ea typeface="Noto Sans CJK JP"/>
               </a:rPr>
               <a:t>    row = json.loads(next(z.open(path)))</a:t>
             </a:r>
-            <a:endParaRPr sz="1400" lang="en-US"/>
-          </a:p>
-          <a:p>
-            <a:pPr algn="l">
-              <a:lnSpc>
-                <a:spcPts val="1820"/>
-              </a:lnSpc>
-              <a:spcBef>
-                <a:spcPts val="0"/>
-              </a:spcBef>
-              <a:spcAft>
-                <a:spcPts val="0"/>
-              </a:spcAft>
-              <a:defRPr sz="1400" b="0">
-                <a:solidFill>
-                  <a:srgbClr val="303437"/>
-                </a:solidFill>
+          </a:p>
+          <a:p>
+            <a:pPr algn="l" marL="0" indent="0">
+              <a:buNone/>
+              <a:lnSpc>
+                <a:spcPts val="1609"/>
+              </a:lnSpc>
+              <a:spcBef>
+                <a:spcPts val="0"/>
+              </a:spcBef>
+              <a:spcAft>
+                <a:spcPts val="0"/>
+              </a:spcAft>
+              <a:defRPr sz="1400" lang="ja-JP">
                 <a:latin typeface="Liberation Mono"/>
-              </a:defRPr>
-            </a:pPr>
-            <a:r>
-              <a:rPr sz="1400" b="0" lang="en-US">
+                <a:ea typeface="Noto Sans CJK JP"/>
+              </a:defRPr>
+            </a:pPr>
+            <a:r>
+              <a:rPr sz="1400" lang="ja-JP">
                 <a:solidFill>
                   <a:srgbClr val="303437"/>
                 </a:solidFill>
                 <a:latin typeface="Liberation Mono"/>
-                <a:ea typeface="Liberation Mono"/>
+                <a:ea typeface="Noto Sans CJK JP"/>
               </a:rPr>
               <a:t>print(row["pairID"], row["annotator_labels"])</a:t>
             </a:r>
-            <a:endParaRPr sz="1400" lang="en-US"/>
           </a:p>
         </p:txBody>
       </p:sp>
@@ -34803,25 +34815,27 @@
           </a:xfrm>
         </p:spPr>
         <p:txBody>
-          <a:bodyPr wrap="none" lIns="0" rIns="0" tIns="0" bIns="0" anchor="t"/>
+          <a:bodyPr wrap="square" lIns="0" rIns="0" tIns="0" bIns="0" anchor="t"/>
           <a:lstStyle/>
           <a:p>
             <a:pPr algn="l" marL="0" indent="0">
+              <a:buNone/>
               <a:lnSpc>
                 <a:spcPct val="110000"/>
               </a:lnSpc>
               <a:spcBef>
                 <a:spcPts val="0"/>
               </a:spcBef>
-              <a:spcAft>
-                <a:spcPts val="0"/>
-              </a:spcAft>
-              <a:defRPr sz="2800" b="1">
-                <a:solidFill>
-                  <a:srgbClr val="303437"/>
-                </a:solidFill>
-                <a:latin typeface="Noto Sans CJK JP"/>
-              </a:defRPr>
+              <a:defRPr sz="2800" b="1" lang="ja-JP">
+                <a:solidFill>
+                  <a:srgbClr val="303437"/>
+                </a:solidFill>
+                <a:latin typeface="Noto Sans CJK JP"/>
+                <a:ea typeface="Noto Sans CJK JP"/>
+              </a:defRPr>
+              <a:spcAft>
+                <a:spcPts val="600"/>
+              </a:spcAft>
               <a:buNone/>
             </a:pPr>
             <a:r>
@@ -34832,7 +34846,7 @@
                 <a:latin typeface="Noto Sans CJK JP"/>
                 <a:ea typeface="Noto Sans CJK JP"/>
               </a:rPr>
-              <a:t>参考文献（データと関連研究）</a:t>
+              <a:t>参考文献と参照した内容</a:t>
             </a:r>
             <a:endParaRPr sz="2800" lang="ja-JP"/>
             <a:endParaRPr sz="2800"/>
@@ -34859,25 +34873,27 @@
           <a:bodyPr wrap="square" lIns="0" rIns="0" tIns="0" bIns="0" anchor="ctr"/>
           <a:lstStyle/>
           <a:p>
-            <a:pPr algn="l">
-              <a:lnSpc>
-                <a:spcPct val="100000"/>
-              </a:lnSpc>
-              <a:spcBef>
-                <a:spcPts val="0"/>
-              </a:spcBef>
-              <a:spcAft>
-                <a:spcPts val="0"/>
-              </a:spcAft>
-              <a:defRPr sz="1400" b="1">
+            <a:pPr algn="l" marL="0" indent="0">
+              <a:buNone/>
+              <a:lnSpc>
+                <a:spcPct val="110000"/>
+              </a:lnSpc>
+              <a:spcBef>
+                <a:spcPts val="0"/>
+              </a:spcBef>
+              <a:spcAft>
+                <a:spcPts val="0"/>
+              </a:spcAft>
+              <a:defRPr sz="1400" b="1" lang="ja-JP">
                 <a:solidFill>
                   <a:srgbClr val="FFFEF8"/>
                 </a:solidFill>
                 <a:latin typeface="Noto Sans CJK JP"/>
-              </a:defRPr>
-            </a:pPr>
-            <a:r>
-              <a:rPr sz="1400" b="1" lang="ja-JP">
+                <a:ea typeface="Noto Sans CJK JP"/>
+              </a:defRPr>
+            </a:pPr>
+            <a:r>
+              <a:rPr sz="1400" lang="ja-JP" b="1">
                 <a:solidFill>
                   <a:srgbClr val="FFFEF8"/>
                 </a:solidFill>
@@ -34898,8 +34914,8 @@
         </p:nvSpPr>
         <p:spPr>
           <a:xfrm>
-            <a:off x="548640" y="1371600"/>
-            <a:ext cx="8046720" cy="292608"/>
+            <a:off x="594360" y="1280160"/>
+            <a:ext cx="7955279" cy="320040"/>
           </a:xfrm>
           <a:prstGeom prst="rect">
             <a:avLst/>
@@ -34912,7 +34928,8 @@
           </a:bodyPr>
           <a:lstStyle/>
           <a:p>
-            <a:pPr algn="l">
+            <a:pPr algn="l" marL="0" indent="0">
+              <a:buNone/>
               <a:lnSpc>
                 <a:spcPct val="110000"/>
               </a:lnSpc>
@@ -34920,26 +34937,23 @@
                 <a:spcPts val="0"/>
               </a:spcBef>
               <a:spcAft>
-                <a:spcPts val="0"/>
-              </a:spcAft>
-              <a:defRPr sz="1800" b="0">
-                <a:solidFill>
-                  <a:srgbClr val="303437"/>
-                </a:solidFill>
-                <a:latin typeface="Noto Sans CJK JP"/>
-              </a:defRPr>
-            </a:pPr>
-            <a:r>
-              <a:rPr sz="1800" b="0" lang="ja-JP">
-                <a:solidFill>
-                  <a:srgbClr val="303437"/>
-                </a:solidFill>
-                <a:latin typeface="Noto Sans CJK JP"/>
-                <a:ea typeface="Noto Sans CJK JP"/>
-              </a:rPr>
-              <a:t>Bowman et al. (2015), SNLI, EMNLP</a:t>
-            </a:r>
-            <a:endParaRPr sz="1800" lang="ja-JP"/>
+                <a:spcPts val="600"/>
+              </a:spcAft>
+              <a:defRPr sz="1900" lang="ja-JP">
+                <a:latin typeface="Noto Sans CJK JP"/>
+                <a:ea typeface="Noto Sans CJK JP"/>
+              </a:defRPr>
+            </a:pPr>
+            <a:r>
+              <a:rPr sz="1900" lang="ja-JP">
+                <a:solidFill>
+                  <a:srgbClr val="303437"/>
+                </a:solidFill>
+                <a:latin typeface="Noto Sans CJK JP"/>
+                <a:ea typeface="Noto Sans CJK JP"/>
+              </a:rPr>
+              <a:t>Bowman et al. (2015). SNLI. EMNLP.</a:t>
+            </a:r>
           </a:p>
         </p:txBody>
       </p:sp>
@@ -34951,8 +34965,8 @@
         </p:nvSpPr>
         <p:spPr>
           <a:xfrm>
-            <a:off x="548640" y="1773936"/>
-            <a:ext cx="8046720" cy="256032"/>
+            <a:off x="594360" y="1600200"/>
+            <a:ext cx="7955279" cy="292608"/>
           </a:xfrm>
           <a:prstGeom prst="rect">
             <a:avLst/>
@@ -34965,7 +34979,8 @@
           </a:bodyPr>
           <a:lstStyle/>
           <a:p>
-            <a:pPr algn="l">
+            <a:pPr algn="l" marL="0" indent="0">
+              <a:buNone/>
               <a:lnSpc>
                 <a:spcPct val="110000"/>
               </a:lnSpc>
@@ -34973,27 +34988,23 @@
                 <a:spcPts val="0"/>
               </a:spcBef>
               <a:spcAft>
-                <a:spcPts val="0"/>
-              </a:spcAft>
-              <a:defRPr sz="1000" b="0">
+                <a:spcPts val="600"/>
+              </a:spcAft>
+              <a:defRPr sz="1700" lang="ja-JP">
+                <a:latin typeface="Noto Sans CJK JP"/>
+                <a:ea typeface="Noto Sans CJK JP"/>
+              </a:defRPr>
+            </a:pPr>
+            <a:r>
+              <a:rPr sz="1700" lang="ja-JP">
                 <a:solidFill>
                   <a:srgbClr val="626669"/>
                 </a:solidFill>
-                <a:latin typeface="Liberation Sans"/>
-              </a:defRPr>
-            </a:pPr>
-            <a:r>
-              <a:rPr sz="1000" b="0" lang="en-US">
-                <a:solidFill>
-                  <a:srgbClr val="626669"/>
-                </a:solidFill>
-                <a:latin typeface="Liberation Sans"/>
-                <a:ea typeface="Liberation Sans"/>
-                <a:hlinkClick r:id="rId2"/>
-              </a:rPr>
-              <a:t>https://aclanthology.org/D15-1075/</a:t>
-            </a:r>
-            <a:endParaRPr sz="1000" lang="en-US"/>
+                <a:latin typeface="Noto Sans CJK JP"/>
+                <a:ea typeface="Noto Sans CJK JP"/>
+              </a:rPr>
+              <a:t>構築目的、作成・検証方法、初期モデルの評価を示す原著。</a:t>
+            </a:r>
           </a:p>
         </p:txBody>
       </p:sp>
@@ -35005,8 +35016,8 @@
         </p:nvSpPr>
         <p:spPr>
           <a:xfrm>
-            <a:off x="548640" y="1984248"/>
-            <a:ext cx="8046720" cy="292608"/>
+            <a:off x="594360" y="2011680"/>
+            <a:ext cx="7955279" cy="256032"/>
           </a:xfrm>
           <a:prstGeom prst="rect">
             <a:avLst/>
@@ -35019,7 +35030,8 @@
           </a:bodyPr>
           <a:lstStyle/>
           <a:p>
-            <a:pPr algn="l">
+            <a:pPr algn="l" marL="0" indent="0">
+              <a:buNone/>
               <a:lnSpc>
                 <a:spcPct val="110000"/>
               </a:lnSpc>
@@ -35029,24 +35041,21 @@
               <a:spcAft>
                 <a:spcPts val="0"/>
               </a:spcAft>
-              <a:defRPr sz="1800" b="0">
-                <a:solidFill>
-                  <a:srgbClr val="303437"/>
-                </a:solidFill>
-                <a:latin typeface="Noto Sans CJK JP"/>
-              </a:defRPr>
-            </a:pPr>
-            <a:r>
-              <a:rPr sz="1800" b="0" lang="ja-JP">
-                <a:solidFill>
-                  <a:srgbClr val="303437"/>
-                </a:solidFill>
-                <a:latin typeface="Noto Sans CJK JP"/>
-                <a:ea typeface="Noto Sans CJK JP"/>
-              </a:rPr>
-              <a:t>Williams et al. (2018), MultiNLI, NAACL</a:t>
-            </a:r>
-            <a:endParaRPr sz="1800" lang="ja-JP"/>
+              <a:defRPr sz="850" lang="ja-JP">
+                <a:latin typeface="Liberation Sans"/>
+                <a:ea typeface="Noto Sans CJK JP"/>
+              </a:defRPr>
+            </a:pPr>
+            <a:r>
+              <a:rPr sz="850" lang="ja-JP">
+                <a:solidFill>
+                  <a:srgbClr val="626669"/>
+                </a:solidFill>
+                <a:latin typeface="Liberation Sans"/>
+                <a:ea typeface="Noto Sans CJK JP"/>
+              </a:rPr>
+              <a:t>https://aclanthology.org/D15-1075/</a:t>
+            </a:r>
           </a:p>
         </p:txBody>
       </p:sp>
@@ -35058,8 +35067,8 @@
         </p:nvSpPr>
         <p:spPr>
           <a:xfrm>
-            <a:off x="548640" y="2386584"/>
-            <a:ext cx="8046720" cy="256032"/>
+            <a:off x="594360" y="2194560"/>
+            <a:ext cx="7955279" cy="320040"/>
           </a:xfrm>
           <a:prstGeom prst="rect">
             <a:avLst/>
@@ -35072,7 +35081,8 @@
           </a:bodyPr>
           <a:lstStyle/>
           <a:p>
-            <a:pPr algn="l">
+            <a:pPr algn="l" marL="0" indent="0">
+              <a:buNone/>
               <a:lnSpc>
                 <a:spcPct val="110000"/>
               </a:lnSpc>
@@ -35080,27 +35090,23 @@
                 <a:spcPts val="0"/>
               </a:spcBef>
               <a:spcAft>
-                <a:spcPts val="0"/>
-              </a:spcAft>
-              <a:defRPr sz="1000" b="0">
-                <a:solidFill>
-                  <a:srgbClr val="626669"/>
-                </a:solidFill>
-                <a:latin typeface="Liberation Sans"/>
-              </a:defRPr>
-            </a:pPr>
-            <a:r>
-              <a:rPr sz="1000" b="0" lang="en-US">
-                <a:solidFill>
-                  <a:srgbClr val="626669"/>
-                </a:solidFill>
-                <a:latin typeface="Liberation Sans"/>
-                <a:ea typeface="Liberation Sans"/>
-                <a:hlinkClick r:id="rId3"/>
-              </a:rPr>
-              <a:t>https://aclanthology.org/N18-1101/</a:t>
-            </a:r>
-            <a:endParaRPr sz="1000" lang="en-US"/>
+                <a:spcPts val="600"/>
+              </a:spcAft>
+              <a:defRPr sz="1900" lang="ja-JP">
+                <a:latin typeface="Noto Sans CJK JP"/>
+                <a:ea typeface="Noto Sans CJK JP"/>
+              </a:defRPr>
+            </a:pPr>
+            <a:r>
+              <a:rPr sz="1900" lang="ja-JP">
+                <a:solidFill>
+                  <a:srgbClr val="303437"/>
+                </a:solidFill>
+                <a:latin typeface="Noto Sans CJK JP"/>
+                <a:ea typeface="Noto Sans CJK JP"/>
+              </a:rPr>
+              <a:t>Williams et al. (2018). MultiNLI. NAACL.</a:t>
+            </a:r>
           </a:p>
         </p:txBody>
       </p:sp>
@@ -35112,8 +35118,8 @@
         </p:nvSpPr>
         <p:spPr>
           <a:xfrm>
-            <a:off x="548640" y="2596896"/>
-            <a:ext cx="8046720" cy="292608"/>
+            <a:off x="594360" y="2514600"/>
+            <a:ext cx="7955279" cy="292608"/>
           </a:xfrm>
           <a:prstGeom prst="rect">
             <a:avLst/>
@@ -35126,7 +35132,8 @@
           </a:bodyPr>
           <a:lstStyle/>
           <a:p>
-            <a:pPr algn="l">
+            <a:pPr algn="l" marL="0" indent="0">
+              <a:buNone/>
               <a:lnSpc>
                 <a:spcPct val="110000"/>
               </a:lnSpc>
@@ -35134,26 +35141,23 @@
                 <a:spcPts val="0"/>
               </a:spcBef>
               <a:spcAft>
-                <a:spcPts val="0"/>
-              </a:spcAft>
-              <a:defRPr sz="1800" b="0">
-                <a:solidFill>
-                  <a:srgbClr val="303437"/>
-                </a:solidFill>
-                <a:latin typeface="Noto Sans CJK JP"/>
-              </a:defRPr>
-            </a:pPr>
-            <a:r>
-              <a:rPr sz="1800" b="0" lang="ja-JP">
-                <a:solidFill>
-                  <a:srgbClr val="303437"/>
-                </a:solidFill>
-                <a:latin typeface="Noto Sans CJK JP"/>
-                <a:ea typeface="Noto Sans CJK JP"/>
-              </a:rPr>
-              <a:t>Camburu et al. (2018), e-SNLI, NeurIPS</a:t>
-            </a:r>
-            <a:endParaRPr sz="1800" lang="ja-JP"/>
+                <a:spcPts val="600"/>
+              </a:spcAft>
+              <a:defRPr sz="1700" lang="ja-JP">
+                <a:latin typeface="Noto Sans CJK JP"/>
+                <a:ea typeface="Noto Sans CJK JP"/>
+              </a:defRPr>
+            </a:pPr>
+            <a:r>
+              <a:rPr sz="1700" lang="ja-JP">
+                <a:solidFill>
+                  <a:srgbClr val="626669"/>
+                </a:solidFill>
+                <a:latin typeface="Noto Sans CJK JP"/>
+                <a:ea typeface="Noto Sans CJK JP"/>
+              </a:rPr>
+              <a:t>写真説明から10ジャンルへ対象を広げた後続データの原著。</a:t>
+            </a:r>
           </a:p>
         </p:txBody>
       </p:sp>
@@ -35165,8 +35169,8 @@
         </p:nvSpPr>
         <p:spPr>
           <a:xfrm>
-            <a:off x="548640" y="2999232"/>
-            <a:ext cx="8046720" cy="256032"/>
+            <a:off x="594360" y="2926080"/>
+            <a:ext cx="7955279" cy="256032"/>
           </a:xfrm>
           <a:prstGeom prst="rect">
             <a:avLst/>
@@ -35179,7 +35183,8 @@
           </a:bodyPr>
           <a:lstStyle/>
           <a:p>
-            <a:pPr algn="l">
+            <a:pPr algn="l" marL="0" indent="0">
+              <a:buNone/>
               <a:lnSpc>
                 <a:spcPct val="110000"/>
               </a:lnSpc>
@@ -35189,25 +35194,21 @@
               <a:spcAft>
                 <a:spcPts val="0"/>
               </a:spcAft>
-              <a:defRPr sz="1000" b="0">
+              <a:defRPr sz="850" lang="ja-JP">
+                <a:latin typeface="Liberation Sans"/>
+                <a:ea typeface="Noto Sans CJK JP"/>
+              </a:defRPr>
+            </a:pPr>
+            <a:r>
+              <a:rPr sz="850" lang="ja-JP">
                 <a:solidFill>
                   <a:srgbClr val="626669"/>
                 </a:solidFill>
                 <a:latin typeface="Liberation Sans"/>
-              </a:defRPr>
-            </a:pPr>
-            <a:r>
-              <a:rPr sz="1000" b="0" lang="en-US">
-                <a:solidFill>
-                  <a:srgbClr val="626669"/>
-                </a:solidFill>
-                <a:latin typeface="Liberation Sans"/>
-                <a:ea typeface="Liberation Sans"/>
-                <a:hlinkClick r:id="rId4"/>
-              </a:rPr>
-              <a:t>https://github.com/OanaMariaCamburu/e-SNLI</a:t>
-            </a:r>
-            <a:endParaRPr sz="1000" lang="en-US"/>
+                <a:ea typeface="Noto Sans CJK JP"/>
+              </a:rPr>
+              <a:t>https://aclanthology.org/N18-1101/</a:t>
+            </a:r>
           </a:p>
         </p:txBody>
       </p:sp>
@@ -35219,8 +35220,8 @@
         </p:nvSpPr>
         <p:spPr>
           <a:xfrm>
-            <a:off x="548640" y="3209544"/>
-            <a:ext cx="8046720" cy="292608"/>
+            <a:off x="594360" y="3108960"/>
+            <a:ext cx="7955279" cy="320040"/>
           </a:xfrm>
           <a:prstGeom prst="rect">
             <a:avLst/>
@@ -35233,7 +35234,8 @@
           </a:bodyPr>
           <a:lstStyle/>
           <a:p>
-            <a:pPr algn="l">
+            <a:pPr algn="l" marL="0" indent="0">
+              <a:buNone/>
               <a:lnSpc>
                 <a:spcPct val="110000"/>
               </a:lnSpc>
@@ -35241,26 +35243,23 @@
                 <a:spcPts val="0"/>
               </a:spcBef>
               <a:spcAft>
-                <a:spcPts val="0"/>
-              </a:spcAft>
-              <a:defRPr sz="1800" b="0">
-                <a:solidFill>
-                  <a:srgbClr val="303437"/>
-                </a:solidFill>
-                <a:latin typeface="Noto Sans CJK JP"/>
-              </a:defRPr>
-            </a:pPr>
-            <a:r>
-              <a:rPr sz="1800" b="0" lang="ja-JP">
-                <a:solidFill>
-                  <a:srgbClr val="303437"/>
-                </a:solidFill>
-                <a:latin typeface="Noto Sans CJK JP"/>
-                <a:ea typeface="Noto Sans CJK JP"/>
-              </a:rPr>
-              <a:t>Nie et al. (2020), ANLI, ACL</a:t>
-            </a:r>
-            <a:endParaRPr sz="1800" lang="ja-JP"/>
+                <a:spcPts val="600"/>
+              </a:spcAft>
+              <a:defRPr sz="1900" lang="ja-JP">
+                <a:latin typeface="Noto Sans CJK JP"/>
+                <a:ea typeface="Noto Sans CJK JP"/>
+              </a:defRPr>
+            </a:pPr>
+            <a:r>
+              <a:rPr sz="1900" lang="ja-JP">
+                <a:solidFill>
+                  <a:srgbClr val="303437"/>
+                </a:solidFill>
+                <a:latin typeface="Noto Sans CJK JP"/>
+                <a:ea typeface="Noto Sans CJK JP"/>
+              </a:rPr>
+              <a:t>Camburu et al. (2018). e-SNLI. NeurIPS.</a:t>
+            </a:r>
           </a:p>
         </p:txBody>
       </p:sp>
@@ -35272,8 +35271,8 @@
         </p:nvSpPr>
         <p:spPr>
           <a:xfrm>
-            <a:off x="548640" y="3611880"/>
-            <a:ext cx="8046720" cy="256032"/>
+            <a:off x="594360" y="3429000"/>
+            <a:ext cx="7955279" cy="292608"/>
           </a:xfrm>
           <a:prstGeom prst="rect">
             <a:avLst/>
@@ -35286,7 +35285,8 @@
           </a:bodyPr>
           <a:lstStyle/>
           <a:p>
-            <a:pPr algn="l">
+            <a:pPr algn="l" marL="0" indent="0">
+              <a:buNone/>
               <a:lnSpc>
                 <a:spcPct val="110000"/>
               </a:lnSpc>
@@ -35294,27 +35294,23 @@
                 <a:spcPts val="0"/>
               </a:spcBef>
               <a:spcAft>
-                <a:spcPts val="0"/>
-              </a:spcAft>
-              <a:defRPr sz="1000" b="0">
+                <a:spcPts val="600"/>
+              </a:spcAft>
+              <a:defRPr sz="1700" lang="ja-JP">
+                <a:latin typeface="Noto Sans CJK JP"/>
+                <a:ea typeface="Noto Sans CJK JP"/>
+              </a:defRPr>
+            </a:pPr>
+            <a:r>
+              <a:rPr sz="1700" lang="ja-JP">
                 <a:solidFill>
                   <a:srgbClr val="626669"/>
                 </a:solidFill>
-                <a:latin typeface="Liberation Sans"/>
-              </a:defRPr>
-            </a:pPr>
-            <a:r>
-              <a:rPr sz="1000" b="0" lang="en-US">
-                <a:solidFill>
-                  <a:srgbClr val="626669"/>
-                </a:solidFill>
-                <a:latin typeface="Liberation Sans"/>
-                <a:ea typeface="Liberation Sans"/>
-                <a:hlinkClick r:id="rId5"/>
-              </a:rPr>
-              <a:t>https://github.com/facebookresearch/anli</a:t>
-            </a:r>
-            <a:endParaRPr sz="1000" lang="en-US"/>
+                <a:latin typeface="Noto Sans CJK JP"/>
+                <a:ea typeface="Noto Sans CJK JP"/>
+              </a:rPr>
+              <a:t>SNLIの判断に自然言語の説明を加えた拡張の根拠。</a:t>
+            </a:r>
           </a:p>
         </p:txBody>
       </p:sp>
@@ -35326,8 +35322,8 @@
         </p:nvSpPr>
         <p:spPr>
           <a:xfrm>
-            <a:off x="548640" y="3822191"/>
-            <a:ext cx="8046720" cy="292608"/>
+            <a:off x="594360" y="3840480"/>
+            <a:ext cx="7955279" cy="256032"/>
           </a:xfrm>
           <a:prstGeom prst="rect">
             <a:avLst/>
@@ -35340,7 +35336,8 @@
           </a:bodyPr>
           <a:lstStyle/>
           <a:p>
-            <a:pPr algn="l">
+            <a:pPr algn="l" marL="0" indent="0">
+              <a:buNone/>
               <a:lnSpc>
                 <a:spcPct val="110000"/>
               </a:lnSpc>
@@ -35350,24 +35347,21 @@
               <a:spcAft>
                 <a:spcPts val="0"/>
               </a:spcAft>
-              <a:defRPr sz="1800" b="0">
-                <a:solidFill>
-                  <a:srgbClr val="303437"/>
-                </a:solidFill>
-                <a:latin typeface="Noto Sans CJK JP"/>
-              </a:defRPr>
-            </a:pPr>
-            <a:r>
-              <a:rPr sz="1800" b="0" lang="ja-JP">
-                <a:solidFill>
-                  <a:srgbClr val="303437"/>
-                </a:solidFill>
-                <a:latin typeface="Noto Sans CJK JP"/>
-                <a:ea typeface="Noto Sans CJK JP"/>
-              </a:rPr>
-              <a:t>Gururangan et al. (2018), Annotation Artifacts, NAACL</a:t>
-            </a:r>
-            <a:endParaRPr sz="1800" lang="ja-JP"/>
+              <a:defRPr sz="850" lang="ja-JP">
+                <a:latin typeface="Liberation Sans"/>
+                <a:ea typeface="Noto Sans CJK JP"/>
+              </a:defRPr>
+            </a:pPr>
+            <a:r>
+              <a:rPr sz="850" lang="ja-JP">
+                <a:solidFill>
+                  <a:srgbClr val="626669"/>
+                </a:solidFill>
+                <a:latin typeface="Liberation Sans"/>
+                <a:ea typeface="Noto Sans CJK JP"/>
+              </a:rPr>
+              <a:t>https://github.com/OanaMariaCamburu/e-SNLI</a:t>
+            </a:r>
           </a:p>
         </p:txBody>
       </p:sp>
@@ -35379,8 +35373,8 @@
         </p:nvSpPr>
         <p:spPr>
           <a:xfrm>
-            <a:off x="548640" y="4224528"/>
-            <a:ext cx="8046720" cy="256032"/>
+            <a:off x="594360" y="4023360"/>
+            <a:ext cx="7955279" cy="320040"/>
           </a:xfrm>
           <a:prstGeom prst="rect">
             <a:avLst/>
@@ -35393,7 +35387,8 @@
           </a:bodyPr>
           <a:lstStyle/>
           <a:p>
-            <a:pPr algn="l">
+            <a:pPr algn="l" marL="0" indent="0">
+              <a:buNone/>
               <a:lnSpc>
                 <a:spcPct val="110000"/>
               </a:lnSpc>
@@ -35401,27 +35396,23 @@
                 <a:spcPts val="0"/>
               </a:spcBef>
               <a:spcAft>
-                <a:spcPts val="0"/>
-              </a:spcAft>
-              <a:defRPr sz="1000" b="0">
-                <a:solidFill>
-                  <a:srgbClr val="626669"/>
-                </a:solidFill>
-                <a:latin typeface="Liberation Sans"/>
-              </a:defRPr>
-            </a:pPr>
-            <a:r>
-              <a:rPr sz="1000" b="0" lang="en-US">
-                <a:solidFill>
-                  <a:srgbClr val="626669"/>
-                </a:solidFill>
-                <a:latin typeface="Liberation Sans"/>
-                <a:ea typeface="Liberation Sans"/>
-                <a:hlinkClick r:id="rId6"/>
-              </a:rPr>
-              <a:t>https://aclanthology.org/N18-2017/</a:t>
-            </a:r>
-            <a:endParaRPr sz="1000" lang="en-US"/>
+                <a:spcPts val="600"/>
+              </a:spcAft>
+              <a:defRPr sz="1900" lang="ja-JP">
+                <a:latin typeface="Noto Sans CJK JP"/>
+                <a:ea typeface="Noto Sans CJK JP"/>
+              </a:defRPr>
+            </a:pPr>
+            <a:r>
+              <a:rPr sz="1900" lang="ja-JP">
+                <a:solidFill>
+                  <a:srgbClr val="303437"/>
+                </a:solidFill>
+                <a:latin typeface="Noto Sans CJK JP"/>
+                <a:ea typeface="Noto Sans CJK JP"/>
+              </a:rPr>
+              <a:t>Nie et al. (2020). ANLI. ACL.</a:t>
+            </a:r>
           </a:p>
         </p:txBody>
       </p:sp>
@@ -35433,8 +35424,8 @@
         </p:nvSpPr>
         <p:spPr>
           <a:xfrm>
-            <a:off x="548640" y="4434840"/>
-            <a:ext cx="8046720" cy="292608"/>
+            <a:off x="594360" y="4343400"/>
+            <a:ext cx="7955279" cy="292608"/>
           </a:xfrm>
           <a:prstGeom prst="rect">
             <a:avLst/>
@@ -35447,7 +35438,8 @@
           </a:bodyPr>
           <a:lstStyle/>
           <a:p>
-            <a:pPr algn="l">
+            <a:pPr algn="l" marL="0" indent="0">
+              <a:buNone/>
               <a:lnSpc>
                 <a:spcPct val="110000"/>
               </a:lnSpc>
@@ -35455,26 +35447,23 @@
                 <a:spcPts val="0"/>
               </a:spcBef>
               <a:spcAft>
-                <a:spcPts val="0"/>
-              </a:spcAft>
-              <a:defRPr sz="1800" b="0">
-                <a:solidFill>
-                  <a:srgbClr val="303437"/>
-                </a:solidFill>
-                <a:latin typeface="Noto Sans CJK JP"/>
-              </a:defRPr>
-            </a:pPr>
-            <a:r>
-              <a:rPr sz="1800" b="0" lang="ja-JP">
-                <a:solidFill>
-                  <a:srgbClr val="303437"/>
-                </a:solidFill>
-                <a:latin typeface="Noto Sans CJK JP"/>
-                <a:ea typeface="Noto Sans CJK JP"/>
-              </a:rPr>
-              <a:t>Giampiccolo et al. (2007), RTE第3回</a:t>
-            </a:r>
-            <a:endParaRPr sz="1800" lang="ja-JP"/>
+                <a:spcPts val="600"/>
+              </a:spcAft>
+              <a:defRPr sz="1700" lang="ja-JP">
+                <a:latin typeface="Noto Sans CJK JP"/>
+                <a:ea typeface="Noto Sans CJK JP"/>
+              </a:defRPr>
+            </a:pPr>
+            <a:r>
+              <a:rPr sz="1700" lang="ja-JP">
+                <a:solidFill>
+                  <a:srgbClr val="626669"/>
+                </a:solidFill>
+                <a:latin typeface="Noto Sans CJK JP"/>
+                <a:ea typeface="Noto Sans CJK JP"/>
+              </a:rPr>
+              <a:t>モデルが誤る例を人が作る後続データの構築方法。</a:t>
+            </a:r>
           </a:p>
         </p:txBody>
       </p:sp>
@@ -35486,8 +35475,8 @@
         </p:nvSpPr>
         <p:spPr>
           <a:xfrm>
-            <a:off x="548640" y="4837176"/>
-            <a:ext cx="8046720" cy="256032"/>
+            <a:off x="594360" y="4754880"/>
+            <a:ext cx="7955279" cy="256032"/>
           </a:xfrm>
           <a:prstGeom prst="rect">
             <a:avLst/>
@@ -35500,7 +35489,8 @@
           </a:bodyPr>
           <a:lstStyle/>
           <a:p>
-            <a:pPr algn="l">
+            <a:pPr algn="l" marL="0" indent="0">
+              <a:buNone/>
               <a:lnSpc>
                 <a:spcPct val="110000"/>
               </a:lnSpc>
@@ -35510,25 +35500,21 @@
               <a:spcAft>
                 <a:spcPts val="0"/>
               </a:spcAft>
-              <a:defRPr sz="1000" b="0">
+              <a:defRPr sz="850" lang="ja-JP">
+                <a:latin typeface="Liberation Sans"/>
+                <a:ea typeface="Noto Sans CJK JP"/>
+              </a:defRPr>
+            </a:pPr>
+            <a:r>
+              <a:rPr sz="850" lang="ja-JP">
                 <a:solidFill>
                   <a:srgbClr val="626669"/>
                 </a:solidFill>
                 <a:latin typeface="Liberation Sans"/>
-              </a:defRPr>
-            </a:pPr>
-            <a:r>
-              <a:rPr sz="1000" b="0" lang="en-US">
-                <a:solidFill>
-                  <a:srgbClr val="626669"/>
-                </a:solidFill>
-                <a:latin typeface="Liberation Sans"/>
-                <a:ea typeface="Liberation Sans"/>
-                <a:hlinkClick r:id="rId7"/>
-              </a:rPr>
-              <a:t>https://aclanthology.org/W07-1401/</a:t>
-            </a:r>
-            <a:endParaRPr sz="1000" lang="en-US"/>
+                <a:ea typeface="Noto Sans CJK JP"/>
+              </a:rPr>
+              <a:t>https://github.com/facebookresearch/anli</a:t>
+            </a:r>
           </a:p>
         </p:txBody>
       </p:sp>
@@ -35567,25 +35553,27 @@
           </a:xfrm>
         </p:spPr>
         <p:txBody>
-          <a:bodyPr wrap="none" lIns="0" rIns="0" tIns="0" bIns="0" anchor="t"/>
+          <a:bodyPr wrap="square" lIns="0" rIns="0" tIns="0" bIns="0" anchor="t"/>
           <a:lstStyle/>
           <a:p>
             <a:pPr algn="l" marL="0" indent="0">
+              <a:buNone/>
               <a:lnSpc>
                 <a:spcPct val="110000"/>
               </a:lnSpc>
               <a:spcBef>
                 <a:spcPts val="0"/>
               </a:spcBef>
-              <a:spcAft>
-                <a:spcPts val="0"/>
-              </a:spcAft>
-              <a:defRPr sz="2800" b="1">
-                <a:solidFill>
-                  <a:srgbClr val="303437"/>
-                </a:solidFill>
-                <a:latin typeface="Noto Sans CJK JP"/>
-              </a:defRPr>
+              <a:defRPr sz="2800" b="1" lang="ja-JP">
+                <a:solidFill>
+                  <a:srgbClr val="303437"/>
+                </a:solidFill>
+                <a:latin typeface="Noto Sans CJK JP"/>
+                <a:ea typeface="Noto Sans CJK JP"/>
+              </a:defRPr>
+              <a:spcAft>
+                <a:spcPts val="600"/>
+              </a:spcAft>
               <a:buNone/>
             </a:pPr>
             <a:r>
@@ -35596,7 +35584,7 @@
                 <a:latin typeface="Noto Sans CJK JP"/>
                 <a:ea typeface="Noto Sans CJK JP"/>
               </a:rPr>
-              <a:t>参考文献（モデルと利用例）</a:t>
+              <a:t>参考文献と参照した内容</a:t>
             </a:r>
             <a:endParaRPr sz="2800" lang="ja-JP"/>
             <a:endParaRPr sz="2800"/>
@@ -35623,25 +35611,27 @@
           <a:bodyPr wrap="square" lIns="0" rIns="0" tIns="0" bIns="0" anchor="ctr"/>
           <a:lstStyle/>
           <a:p>
-            <a:pPr algn="l">
-              <a:lnSpc>
-                <a:spcPct val="100000"/>
-              </a:lnSpc>
-              <a:spcBef>
-                <a:spcPts val="0"/>
-              </a:spcBef>
-              <a:spcAft>
-                <a:spcPts val="0"/>
-              </a:spcAft>
-              <a:defRPr sz="1400" b="1">
+            <a:pPr algn="l" marL="0" indent="0">
+              <a:buNone/>
+              <a:lnSpc>
+                <a:spcPct val="110000"/>
+              </a:lnSpc>
+              <a:spcBef>
+                <a:spcPts val="0"/>
+              </a:spcBef>
+              <a:spcAft>
+                <a:spcPts val="0"/>
+              </a:spcAft>
+              <a:defRPr sz="1400" b="1" lang="ja-JP">
                 <a:solidFill>
                   <a:srgbClr val="FFFEF8"/>
                 </a:solidFill>
                 <a:latin typeface="Noto Sans CJK JP"/>
-              </a:defRPr>
-            </a:pPr>
-            <a:r>
-              <a:rPr sz="1400" b="1" lang="ja-JP">
+                <a:ea typeface="Noto Sans CJK JP"/>
+              </a:defRPr>
+            </a:pPr>
+            <a:r>
+              <a:rPr sz="1400" lang="ja-JP" b="1">
                 <a:solidFill>
                   <a:srgbClr val="FFFEF8"/>
                 </a:solidFill>
@@ -35662,8 +35652,8 @@
         </p:nvSpPr>
         <p:spPr>
           <a:xfrm>
-            <a:off x="548640" y="1371600"/>
-            <a:ext cx="8046720" cy="292608"/>
+            <a:off x="594360" y="1280160"/>
+            <a:ext cx="7955279" cy="320040"/>
           </a:xfrm>
           <a:prstGeom prst="rect">
             <a:avLst/>
@@ -35676,7 +35666,8 @@
           </a:bodyPr>
           <a:lstStyle/>
           <a:p>
-            <a:pPr algn="l">
+            <a:pPr algn="l" marL="0" indent="0">
+              <a:buNone/>
               <a:lnSpc>
                 <a:spcPct val="110000"/>
               </a:lnSpc>
@@ -35684,26 +35675,23 @@
                 <a:spcPts val="0"/>
               </a:spcBef>
               <a:spcAft>
-                <a:spcPts val="0"/>
-              </a:spcAft>
-              <a:defRPr sz="1800" b="0">
-                <a:solidFill>
-                  <a:srgbClr val="303437"/>
-                </a:solidFill>
-                <a:latin typeface="Noto Sans CJK JP"/>
-              </a:defRPr>
-            </a:pPr>
-            <a:r>
-              <a:rPr sz="1800" b="0" lang="ja-JP">
-                <a:solidFill>
-                  <a:srgbClr val="303437"/>
-                </a:solidFill>
-                <a:latin typeface="Noto Sans CJK JP"/>
-                <a:ea typeface="Noto Sans CJK JP"/>
-              </a:rPr>
-              <a:t>ESIM公開実装とSNLIの評価結果</a:t>
-            </a:r>
-            <a:endParaRPr sz="1800" lang="ja-JP"/>
+                <a:spcPts val="600"/>
+              </a:spcAft>
+              <a:defRPr sz="1900" lang="ja-JP">
+                <a:latin typeface="Noto Sans CJK JP"/>
+                <a:ea typeface="Noto Sans CJK JP"/>
+              </a:defRPr>
+            </a:pPr>
+            <a:r>
+              <a:rPr sz="1900" lang="ja-JP">
+                <a:solidFill>
+                  <a:srgbClr val="303437"/>
+                </a:solidFill>
+                <a:latin typeface="Noto Sans CJK JP"/>
+                <a:ea typeface="Noto Sans CJK JP"/>
+              </a:rPr>
+              <a:t>Gururangan et al. (2018). Annotation Artifacts. NAACL.</a:t>
+            </a:r>
           </a:p>
         </p:txBody>
       </p:sp>
@@ -35715,8 +35703,8 @@
         </p:nvSpPr>
         <p:spPr>
           <a:xfrm>
-            <a:off x="548640" y="1773936"/>
-            <a:ext cx="8046720" cy="256032"/>
+            <a:off x="594360" y="1600200"/>
+            <a:ext cx="7955279" cy="292608"/>
           </a:xfrm>
           <a:prstGeom prst="rect">
             <a:avLst/>
@@ -35729,7 +35717,8 @@
           </a:bodyPr>
           <a:lstStyle/>
           <a:p>
-            <a:pPr algn="l">
+            <a:pPr algn="l" marL="0" indent="0">
+              <a:buNone/>
               <a:lnSpc>
                 <a:spcPct val="110000"/>
               </a:lnSpc>
@@ -35737,27 +35726,23 @@
                 <a:spcPts val="0"/>
               </a:spcBef>
               <a:spcAft>
-                <a:spcPts val="0"/>
-              </a:spcAft>
-              <a:defRPr sz="1000" b="0">
+                <a:spcPts val="600"/>
+              </a:spcAft>
+              <a:defRPr sz="1700" lang="ja-JP">
+                <a:latin typeface="Noto Sans CJK JP"/>
+                <a:ea typeface="Noto Sans CJK JP"/>
+              </a:defRPr>
+            </a:pPr>
+            <a:r>
+              <a:rPr sz="1700" lang="ja-JP">
                 <a:solidFill>
                   <a:srgbClr val="626669"/>
                 </a:solidFill>
-                <a:latin typeface="Liberation Sans"/>
-              </a:defRPr>
-            </a:pPr>
-            <a:r>
-              <a:rPr sz="1000" b="0" lang="en-US">
-                <a:solidFill>
-                  <a:srgbClr val="626669"/>
-                </a:solidFill>
-                <a:latin typeface="Liberation Sans"/>
-                <a:ea typeface="Liberation Sans"/>
-                <a:hlinkClick r:id="rId2"/>
-              </a:rPr>
-              <a:t>https://github.com/coetaur0/ESIM</a:t>
-            </a:r>
-            <a:endParaRPr sz="1000" lang="en-US"/>
+                <a:latin typeface="Noto Sans CJK JP"/>
+                <a:ea typeface="Noto Sans CJK JP"/>
+              </a:rPr>
+              <a:t>仮説文だけでも予測できる注釈の偏りを示した研究。</a:t>
+            </a:r>
           </a:p>
         </p:txBody>
       </p:sp>
@@ -35769,8 +35754,8 @@
         </p:nvSpPr>
         <p:spPr>
           <a:xfrm>
-            <a:off x="548640" y="1984248"/>
-            <a:ext cx="8046720" cy="292608"/>
+            <a:off x="594360" y="2011680"/>
+            <a:ext cx="7955279" cy="256032"/>
           </a:xfrm>
           <a:prstGeom prst="rect">
             <a:avLst/>
@@ -35783,7 +35768,8 @@
           </a:bodyPr>
           <a:lstStyle/>
           <a:p>
-            <a:pPr algn="l">
+            <a:pPr algn="l" marL="0" indent="0">
+              <a:buNone/>
               <a:lnSpc>
                 <a:spcPct val="110000"/>
               </a:lnSpc>
@@ -35793,24 +35779,21 @@
               <a:spcAft>
                 <a:spcPts val="0"/>
               </a:spcAft>
-              <a:defRPr sz="1800" b="0">
-                <a:solidFill>
-                  <a:srgbClr val="303437"/>
-                </a:solidFill>
-                <a:latin typeface="Noto Sans CJK JP"/>
-              </a:defRPr>
-            </a:pPr>
-            <a:r>
-              <a:rPr sz="1800" b="0" lang="ja-JP">
-                <a:solidFill>
-                  <a:srgbClr val="303437"/>
-                </a:solidFill>
-                <a:latin typeface="Noto Sans CJK JP"/>
-                <a:ea typeface="Noto Sans CJK JP"/>
-              </a:rPr>
-              <a:t>Zhang et al. (2020), SemBERT, AAAI</a:t>
-            </a:r>
-            <a:endParaRPr sz="1800" lang="ja-JP"/>
+              <a:defRPr sz="850" lang="ja-JP">
+                <a:latin typeface="Liberation Sans"/>
+                <a:ea typeface="Noto Sans CJK JP"/>
+              </a:defRPr>
+            </a:pPr>
+            <a:r>
+              <a:rPr sz="850" lang="ja-JP">
+                <a:solidFill>
+                  <a:srgbClr val="626669"/>
+                </a:solidFill>
+                <a:latin typeface="Liberation Sans"/>
+                <a:ea typeface="Noto Sans CJK JP"/>
+              </a:rPr>
+              <a:t>https://aclanthology.org/N18-2017/</a:t>
+            </a:r>
           </a:p>
         </p:txBody>
       </p:sp>
@@ -35822,8 +35805,8 @@
         </p:nvSpPr>
         <p:spPr>
           <a:xfrm>
-            <a:off x="548640" y="2386584"/>
-            <a:ext cx="8046720" cy="256032"/>
+            <a:off x="594360" y="2194560"/>
+            <a:ext cx="7955279" cy="320040"/>
           </a:xfrm>
           <a:prstGeom prst="rect">
             <a:avLst/>
@@ -35836,7 +35819,8 @@
           </a:bodyPr>
           <a:lstStyle/>
           <a:p>
-            <a:pPr algn="l">
+            <a:pPr algn="l" marL="0" indent="0">
+              <a:buNone/>
               <a:lnSpc>
                 <a:spcPct val="110000"/>
               </a:lnSpc>
@@ -35844,27 +35828,23 @@
                 <a:spcPts val="0"/>
               </a:spcBef>
               <a:spcAft>
-                <a:spcPts val="0"/>
-              </a:spcAft>
-              <a:defRPr sz="1000" b="0">
-                <a:solidFill>
-                  <a:srgbClr val="626669"/>
-                </a:solidFill>
-                <a:latin typeface="Liberation Sans"/>
-              </a:defRPr>
-            </a:pPr>
-            <a:r>
-              <a:rPr sz="1000" b="0" lang="en-US">
-                <a:solidFill>
-                  <a:srgbClr val="626669"/>
-                </a:solidFill>
-                <a:latin typeface="Liberation Sans"/>
-                <a:ea typeface="Liberation Sans"/>
-                <a:hlinkClick r:id="rId3"/>
-              </a:rPr>
-              <a:t>https://github.com/cooelf/SemBERT</a:t>
-            </a:r>
-            <a:endParaRPr sz="1000" lang="en-US"/>
+                <a:spcPts val="600"/>
+              </a:spcAft>
+              <a:defRPr sz="1900" lang="ja-JP">
+                <a:latin typeface="Noto Sans CJK JP"/>
+                <a:ea typeface="Noto Sans CJK JP"/>
+              </a:defRPr>
+            </a:pPr>
+            <a:r>
+              <a:rPr sz="1900" lang="ja-JP">
+                <a:solidFill>
+                  <a:srgbClr val="303437"/>
+                </a:solidFill>
+                <a:latin typeface="Noto Sans CJK JP"/>
+                <a:ea typeface="Noto Sans CJK JP"/>
+              </a:rPr>
+              <a:t>Giampiccolo et al. (2007). RTE第3回.</a:t>
+            </a:r>
           </a:p>
         </p:txBody>
       </p:sp>
@@ -35876,8 +35856,8 @@
         </p:nvSpPr>
         <p:spPr>
           <a:xfrm>
-            <a:off x="548640" y="2596896"/>
-            <a:ext cx="8046720" cy="292608"/>
+            <a:off x="594360" y="2514600"/>
+            <a:ext cx="7955279" cy="292608"/>
           </a:xfrm>
           <a:prstGeom prst="rect">
             <a:avLst/>
@@ -35890,7 +35870,8 @@
           </a:bodyPr>
           <a:lstStyle/>
           <a:p>
-            <a:pPr algn="l">
+            <a:pPr algn="l" marL="0" indent="0">
+              <a:buNone/>
               <a:lnSpc>
                 <a:spcPct val="110000"/>
               </a:lnSpc>
@@ -35898,26 +35879,23 @@
                 <a:spcPts val="0"/>
               </a:spcBef>
               <a:spcAft>
-                <a:spcPts val="0"/>
-              </a:spcAft>
-              <a:defRPr sz="1800" b="0">
-                <a:solidFill>
-                  <a:srgbClr val="303437"/>
-                </a:solidFill>
-                <a:latin typeface="Noto Sans CJK JP"/>
-              </a:defRPr>
-            </a:pPr>
-            <a:r>
-              <a:rPr sz="1800" b="0" lang="ja-JP">
-                <a:solidFill>
-                  <a:srgbClr val="303437"/>
-                </a:solidFill>
-                <a:latin typeface="Noto Sans CJK JP"/>
-                <a:ea typeface="Noto Sans CJK JP"/>
-              </a:rPr>
-              <a:t>Yang et al. (2019), RE2, ACL</a:t>
-            </a:r>
-            <a:endParaRPr sz="1800" lang="ja-JP"/>
+                <a:spcPts val="600"/>
+              </a:spcAft>
+              <a:defRPr sz="1700" lang="ja-JP">
+                <a:latin typeface="Noto Sans CJK JP"/>
+                <a:ea typeface="Noto Sans CJK JP"/>
+              </a:defRPr>
+            </a:pPr>
+            <a:r>
+              <a:rPr sz="1700" lang="ja-JP">
+                <a:solidFill>
+                  <a:srgbClr val="626669"/>
+                </a:solidFill>
+                <a:latin typeface="Noto Sans CJK JP"/>
+                <a:ea typeface="Noto Sans CJK JP"/>
+              </a:rPr>
+              <a:t>SNLI以前の含意認識ベンチマークと規模の比較。</a:t>
+            </a:r>
           </a:p>
         </p:txBody>
       </p:sp>
@@ -35929,8 +35907,8 @@
         </p:nvSpPr>
         <p:spPr>
           <a:xfrm>
-            <a:off x="548640" y="2999232"/>
-            <a:ext cx="8046720" cy="256032"/>
+            <a:off x="594360" y="2926080"/>
+            <a:ext cx="7955279" cy="256032"/>
           </a:xfrm>
           <a:prstGeom prst="rect">
             <a:avLst/>
@@ -35943,7 +35921,8 @@
           </a:bodyPr>
           <a:lstStyle/>
           <a:p>
-            <a:pPr algn="l">
+            <a:pPr algn="l" marL="0" indent="0">
+              <a:buNone/>
               <a:lnSpc>
                 <a:spcPct val="110000"/>
               </a:lnSpc>
@@ -35953,25 +35932,21 @@
               <a:spcAft>
                 <a:spcPts val="0"/>
               </a:spcAft>
-              <a:defRPr sz="1000" b="0">
+              <a:defRPr sz="850" lang="ja-JP">
+                <a:latin typeface="Liberation Sans"/>
+                <a:ea typeface="Noto Sans CJK JP"/>
+              </a:defRPr>
+            </a:pPr>
+            <a:r>
+              <a:rPr sz="850" lang="ja-JP">
                 <a:solidFill>
                   <a:srgbClr val="626669"/>
                 </a:solidFill>
                 <a:latin typeface="Liberation Sans"/>
-              </a:defRPr>
-            </a:pPr>
-            <a:r>
-              <a:rPr sz="1000" b="0" lang="en-US">
-                <a:solidFill>
-                  <a:srgbClr val="626669"/>
-                </a:solidFill>
-                <a:latin typeface="Liberation Sans"/>
-                <a:ea typeface="Liberation Sans"/>
-                <a:hlinkClick r:id="rId4"/>
-              </a:rPr>
-              <a:t>https://github.com/alibaba-edu/simple-effective-text-matching</a:t>
-            </a:r>
-            <a:endParaRPr sz="1000" lang="en-US"/>
+                <a:ea typeface="Noto Sans CJK JP"/>
+              </a:rPr>
+              <a:t>https://aclanthology.org/W07-1401/</a:t>
+            </a:r>
           </a:p>
         </p:txBody>
       </p:sp>
@@ -35983,8 +35958,8 @@
         </p:nvSpPr>
         <p:spPr>
           <a:xfrm>
-            <a:off x="548640" y="3209544"/>
-            <a:ext cx="8046720" cy="292608"/>
+            <a:off x="594360" y="3108960"/>
+            <a:ext cx="7955279" cy="320040"/>
           </a:xfrm>
           <a:prstGeom prst="rect">
             <a:avLst/>
@@ -35997,7 +35972,8 @@
           </a:bodyPr>
           <a:lstStyle/>
           <a:p>
-            <a:pPr algn="l">
+            <a:pPr algn="l" marL="0" indent="0">
+              <a:buNone/>
               <a:lnSpc>
                 <a:spcPct val="110000"/>
               </a:lnSpc>
@@ -36005,26 +35981,23 @@
                 <a:spcPts val="0"/>
               </a:spcBef>
               <a:spcAft>
-                <a:spcPts val="0"/>
-              </a:spcAft>
-              <a:defRPr sz="1800" b="0">
-                <a:solidFill>
-                  <a:srgbClr val="303437"/>
-                </a:solidFill>
-                <a:latin typeface="Noto Sans CJK JP"/>
-              </a:defRPr>
-            </a:pPr>
-            <a:r>
-              <a:rPr sz="1800" b="0" lang="ja-JP">
-                <a:solidFill>
-                  <a:srgbClr val="303437"/>
-                </a:solidFill>
-                <a:latin typeface="Noto Sans CJK JP"/>
-                <a:ea typeface="Noto Sans CJK JP"/>
-              </a:rPr>
-              <a:t>Gao et al. (2021), SimCSE, EMNLP</a:t>
-            </a:r>
-            <a:endParaRPr sz="1800" lang="ja-JP"/>
+                <a:spcPts val="600"/>
+              </a:spcAft>
+              <a:defRPr sz="1900" lang="ja-JP">
+                <a:latin typeface="Noto Sans CJK JP"/>
+                <a:ea typeface="Noto Sans CJK JP"/>
+              </a:defRPr>
+            </a:pPr>
+            <a:r>
+              <a:rPr sz="1900" lang="ja-JP">
+                <a:solidFill>
+                  <a:srgbClr val="303437"/>
+                </a:solidFill>
+                <a:latin typeface="Noto Sans CJK JP"/>
+                <a:ea typeface="Noto Sans CJK JP"/>
+              </a:rPr>
+              <a:t>ESIM公開実装とSNLIの評価結果</a:t>
+            </a:r>
           </a:p>
         </p:txBody>
       </p:sp>
@@ -36036,8 +36009,8 @@
         </p:nvSpPr>
         <p:spPr>
           <a:xfrm>
-            <a:off x="548640" y="3611880"/>
-            <a:ext cx="8046720" cy="256032"/>
+            <a:off x="594360" y="3429000"/>
+            <a:ext cx="7955279" cy="292608"/>
           </a:xfrm>
           <a:prstGeom prst="rect">
             <a:avLst/>
@@ -36050,7 +36023,8 @@
           </a:bodyPr>
           <a:lstStyle/>
           <a:p>
-            <a:pPr algn="l">
+            <a:pPr algn="l" marL="0" indent="0">
+              <a:buNone/>
               <a:lnSpc>
                 <a:spcPct val="110000"/>
               </a:lnSpc>
@@ -36058,27 +36032,23 @@
                 <a:spcPts val="0"/>
               </a:spcBef>
               <a:spcAft>
-                <a:spcPts val="0"/>
-              </a:spcAft>
-              <a:defRPr sz="1000" b="0">
+                <a:spcPts val="600"/>
+              </a:spcAft>
+              <a:defRPr sz="1700" lang="ja-JP">
+                <a:latin typeface="Noto Sans CJK JP"/>
+                <a:ea typeface="Noto Sans CJK JP"/>
+              </a:defRPr>
+            </a:pPr>
+            <a:r>
+              <a:rPr sz="1700" lang="ja-JP">
                 <a:solidFill>
                   <a:srgbClr val="626669"/>
                 </a:solidFill>
-                <a:latin typeface="Liberation Sans"/>
-              </a:defRPr>
-            </a:pPr>
-            <a:r>
-              <a:rPr sz="1000" b="0" lang="en-US">
-                <a:solidFill>
-                  <a:srgbClr val="626669"/>
-                </a:solidFill>
-                <a:latin typeface="Liberation Sans"/>
-                <a:ea typeface="Liberation Sans"/>
-                <a:hlinkClick r:id="rId5"/>
-              </a:rPr>
-              <a:t>https://github.com/princeton-nlp/SimCSE</a:t>
-            </a:r>
-            <a:endParaRPr sz="1000" lang="en-US"/>
+                <a:latin typeface="Noto Sans CJK JP"/>
+                <a:ea typeface="Noto Sans CJK JP"/>
+              </a:rPr>
+              <a:t>SNLI上の分類性能を比較するためのモデル実装と報告値。</a:t>
+            </a:r>
           </a:p>
         </p:txBody>
       </p:sp>
@@ -36090,8 +36060,8 @@
         </p:nvSpPr>
         <p:spPr>
           <a:xfrm>
-            <a:off x="548640" y="3822191"/>
-            <a:ext cx="8046720" cy="292608"/>
+            <a:off x="594360" y="3840480"/>
+            <a:ext cx="7955279" cy="256032"/>
           </a:xfrm>
           <a:prstGeom prst="rect">
             <a:avLst/>
@@ -36104,7 +36074,8 @@
           </a:bodyPr>
           <a:lstStyle/>
           <a:p>
-            <a:pPr algn="l">
+            <a:pPr algn="l" marL="0" indent="0">
+              <a:buNone/>
               <a:lnSpc>
                 <a:spcPct val="110000"/>
               </a:lnSpc>
@@ -36114,24 +36085,21 @@
               <a:spcAft>
                 <a:spcPts val="0"/>
               </a:spcAft>
-              <a:defRPr sz="1800" b="0">
-                <a:solidFill>
-                  <a:srgbClr val="303437"/>
-                </a:solidFill>
-                <a:latin typeface="Noto Sans CJK JP"/>
-              </a:defRPr>
-            </a:pPr>
-            <a:r>
-              <a:rPr sz="1800" b="0" lang="ja-JP">
-                <a:solidFill>
-                  <a:srgbClr val="303437"/>
-                </a:solidFill>
-                <a:latin typeface="Noto Sans CJK JP"/>
-                <a:ea typeface="Noto Sans CJK JP"/>
-              </a:rPr>
-              <a:t>Sentence TransformersのAllNLI学習例</a:t>
-            </a:r>
-            <a:endParaRPr sz="1800" lang="ja-JP"/>
+              <a:defRPr sz="850" lang="ja-JP">
+                <a:latin typeface="Liberation Sans"/>
+                <a:ea typeface="Noto Sans CJK JP"/>
+              </a:defRPr>
+            </a:pPr>
+            <a:r>
+              <a:rPr sz="850" lang="ja-JP">
+                <a:solidFill>
+                  <a:srgbClr val="626669"/>
+                </a:solidFill>
+                <a:latin typeface="Liberation Sans"/>
+                <a:ea typeface="Noto Sans CJK JP"/>
+              </a:rPr>
+              <a:t>https://github.com/coetaur0/ESIM</a:t>
+            </a:r>
           </a:p>
         </p:txBody>
       </p:sp>
@@ -36143,8 +36111,8 @@
         </p:nvSpPr>
         <p:spPr>
           <a:xfrm>
-            <a:off x="548640" y="4224528"/>
-            <a:ext cx="8046720" cy="256032"/>
+            <a:off x="594360" y="4023360"/>
+            <a:ext cx="7955279" cy="320040"/>
           </a:xfrm>
           <a:prstGeom prst="rect">
             <a:avLst/>
@@ -36157,7 +36125,8 @@
           </a:bodyPr>
           <a:lstStyle/>
           <a:p>
-            <a:pPr algn="l">
+            <a:pPr algn="l" marL="0" indent="0">
+              <a:buNone/>
               <a:lnSpc>
                 <a:spcPct val="110000"/>
               </a:lnSpc>
@@ -36165,27 +36134,23 @@
                 <a:spcPts val="0"/>
               </a:spcBef>
               <a:spcAft>
-                <a:spcPts val="0"/>
-              </a:spcAft>
-              <a:defRPr sz="1000" b="0">
-                <a:solidFill>
-                  <a:srgbClr val="626669"/>
-                </a:solidFill>
-                <a:latin typeface="Liberation Sans"/>
-              </a:defRPr>
-            </a:pPr>
-            <a:r>
-              <a:rPr sz="1000" b="0" lang="en-US">
-                <a:solidFill>
-                  <a:srgbClr val="626669"/>
-                </a:solidFill>
-                <a:latin typeface="Liberation Sans"/>
-                <a:ea typeface="Liberation Sans"/>
-                <a:hlinkClick r:id="rId6"/>
-              </a:rPr>
-              <a:t>https://github.com/UKPLab/sentence-transformers/tree/master/examples/sentence_transformer/training/nli</a:t>
-            </a:r>
-            <a:endParaRPr sz="1000" lang="en-US"/>
+                <a:spcPts val="600"/>
+              </a:spcAft>
+              <a:defRPr sz="1900" lang="ja-JP">
+                <a:latin typeface="Noto Sans CJK JP"/>
+                <a:ea typeface="Noto Sans CJK JP"/>
+              </a:defRPr>
+            </a:pPr>
+            <a:r>
+              <a:rPr sz="1900" lang="ja-JP">
+                <a:solidFill>
+                  <a:srgbClr val="303437"/>
+                </a:solidFill>
+                <a:latin typeface="Noto Sans CJK JP"/>
+                <a:ea typeface="Noto Sans CJK JP"/>
+              </a:rPr>
+              <a:t>Zhang et al. (2020). SemBERT. AAAI.</a:t>
+            </a:r>
           </a:p>
         </p:txBody>
       </p:sp>
@@ -36197,8 +36162,8 @@
         </p:nvSpPr>
         <p:spPr>
           <a:xfrm>
-            <a:off x="548640" y="4434840"/>
-            <a:ext cx="8046720" cy="292608"/>
+            <a:off x="594360" y="4343400"/>
+            <a:ext cx="7955279" cy="292608"/>
           </a:xfrm>
           <a:prstGeom prst="rect">
             <a:avLst/>
@@ -36211,7 +36176,8 @@
           </a:bodyPr>
           <a:lstStyle/>
           <a:p>
-            <a:pPr algn="l">
+            <a:pPr algn="l" marL="0" indent="0">
+              <a:buNone/>
               <a:lnSpc>
                 <a:spcPct val="110000"/>
               </a:lnSpc>
@@ -36219,26 +36185,23 @@
                 <a:spcPts val="0"/>
               </a:spcBef>
               <a:spcAft>
-                <a:spcPts val="0"/>
-              </a:spcAft>
-              <a:defRPr sz="1800" b="0">
-                <a:solidFill>
-                  <a:srgbClr val="303437"/>
-                </a:solidFill>
-                <a:latin typeface="Noto Sans CJK JP"/>
-              </a:defRPr>
-            </a:pPr>
-            <a:r>
-              <a:rPr sz="1800" b="0" lang="ja-JP">
-                <a:solidFill>
-                  <a:srgbClr val="303437"/>
-                </a:solidFill>
-                <a:latin typeface="Noto Sans CJK JP"/>
-                <a:ea typeface="Noto Sans CJK JP"/>
-              </a:rPr>
-              <a:t>Solatorio (2024), GISTEmbed</a:t>
-            </a:r>
-            <a:endParaRPr sz="1800" lang="ja-JP"/>
+                <a:spcPts val="600"/>
+              </a:spcAft>
+              <a:defRPr sz="1700" lang="ja-JP">
+                <a:latin typeface="Noto Sans CJK JP"/>
+                <a:ea typeface="Noto Sans CJK JP"/>
+              </a:defRPr>
+            </a:pPr>
+            <a:r>
+              <a:rPr sz="1700" lang="ja-JP">
+                <a:solidFill>
+                  <a:srgbClr val="626669"/>
+                </a:solidFill>
+                <a:latin typeface="Noto Sans CJK JP"/>
+                <a:ea typeface="Noto Sans CJK JP"/>
+              </a:rPr>
+              <a:t>意味役割を加えたモデルのSNLI評価結果。</a:t>
+            </a:r>
           </a:p>
         </p:txBody>
       </p:sp>
@@ -36250,8 +36213,8 @@
         </p:nvSpPr>
         <p:spPr>
           <a:xfrm>
-            <a:off x="548640" y="4837176"/>
-            <a:ext cx="8046720" cy="256032"/>
+            <a:off x="594360" y="4754880"/>
+            <a:ext cx="7955279" cy="256032"/>
           </a:xfrm>
           <a:prstGeom prst="rect">
             <a:avLst/>
@@ -36264,7 +36227,8 @@
           </a:bodyPr>
           <a:lstStyle/>
           <a:p>
-            <a:pPr algn="l">
+            <a:pPr algn="l" marL="0" indent="0">
+              <a:buNone/>
               <a:lnSpc>
                 <a:spcPct val="110000"/>
               </a:lnSpc>
@@ -36274,25 +36238,21 @@
               <a:spcAft>
                 <a:spcPts val="0"/>
               </a:spcAft>
-              <a:defRPr sz="1000" b="0">
+              <a:defRPr sz="850" lang="ja-JP">
+                <a:latin typeface="Liberation Sans"/>
+                <a:ea typeface="Noto Sans CJK JP"/>
+              </a:defRPr>
+            </a:pPr>
+            <a:r>
+              <a:rPr sz="850" lang="ja-JP">
                 <a:solidFill>
                   <a:srgbClr val="626669"/>
                 </a:solidFill>
                 <a:latin typeface="Liberation Sans"/>
-              </a:defRPr>
-            </a:pPr>
-            <a:r>
-              <a:rPr sz="1000" b="0" lang="en-US">
-                <a:solidFill>
-                  <a:srgbClr val="626669"/>
-                </a:solidFill>
-                <a:latin typeface="Liberation Sans"/>
-                <a:ea typeface="Liberation Sans"/>
-                <a:hlinkClick r:id="rId7"/>
-              </a:rPr>
-              <a:t>https://arxiv.org/abs/2402.16829</a:t>
-            </a:r>
-            <a:endParaRPr sz="1000" lang="en-US"/>
+                <a:ea typeface="Noto Sans CJK JP"/>
+              </a:rPr>
+              <a:t>https://github.com/cooelf/SemBERT</a:t>
+            </a:r>
           </a:p>
         </p:txBody>
       </p:sp>
@@ -36888,6 +36848,728 @@
               <a:t> SNLI 1.0公式データ. https://nlp.stanford.edu/projects/snli/  文対ID 1034985636.jpg#3r1e</a:t>
             </a:r>
             <a:endParaRPr sz="850"/>
+          </a:p>
+        </p:txBody>
+      </p:sp>
+    </p:spTree>
+  </p:cSld>
+  <p:clrMapOvr>
+    <a:masterClrMapping/>
+  </p:clrMapOvr>
+</p:sld>
+</file>
+
+<file path=ppt/slides/slide60.xml><?xml version="1.0" encoding="utf-8"?>
+<p:sld xmlns:a="http://schemas.openxmlformats.org/drawingml/2006/main" xmlns:p="http://schemas.openxmlformats.org/presentationml/2006/main" xmlns:r="http://schemas.openxmlformats.org/officeDocument/2006/relationships">
+  <p:cSld>
+    <p:spTree>
+      <p:nvGrpSpPr>
+        <p:cNvPr id="1" name=""/>
+        <p:cNvGrpSpPr/>
+        <p:nvPr/>
+      </p:nvGrpSpPr>
+      <p:grpSpPr/>
+      <p:sp>
+        <p:nvSpPr>
+          <p:cNvPr id="2" name="Title 1"/>
+          <p:cNvSpPr>
+            <a:spLocks noGrp="1"/>
+          </p:cNvSpPr>
+          <p:nvPr>
+            <p:ph type="title"/>
+          </p:nvPr>
+        </p:nvSpPr>
+        <p:spPr/>
+        <p:txBody>
+          <a:bodyPr wrap="square" lIns="0" rIns="0" tIns="0" bIns="0" anchor="t"/>
+          <a:lstStyle/>
+          <a:p>
+            <a:pPr algn="l" marL="0" indent="0">
+              <a:buNone/>
+              <a:spcAft>
+                <a:spcPts val="600"/>
+              </a:spcAft>
+              <a:buNone/>
+              <a:lnSpc>
+                <a:spcPct val="110000"/>
+              </a:lnSpc>
+              <a:spcBef>
+                <a:spcPts val="0"/>
+              </a:spcBef>
+              <a:defRPr sz="2800" lang="ja-JP">
+                <a:latin typeface="Noto Sans CJK JP"/>
+                <a:ea typeface="Noto Sans CJK JP"/>
+                <a:ea typeface="Noto Sans CJK JP"/>
+              </a:defRPr>
+            </a:pPr>
+            <a:r>
+              <a:rPr sz="2800" lang="ja-JP" b="1">
+                <a:solidFill>
+                  <a:srgbClr val="303437"/>
+                </a:solidFill>
+                <a:latin typeface="Noto Sans CJK JP"/>
+                <a:ea typeface="Noto Sans CJK JP"/>
+              </a:rPr>
+              <a:t>参考文献と参照した内容</a:t>
+            </a:r>
+          </a:p>
+        </p:txBody>
+      </p:sp>
+      <p:sp>
+        <p:nvSpPr>
+          <p:cNvPr id="3" name="Title 2"/>
+          <p:cNvSpPr>
+            <a:spLocks noGrp="1"/>
+          </p:cNvSpPr>
+          <p:nvPr>
+            <p:ph type="title" idx="2"/>
+          </p:nvPr>
+        </p:nvSpPr>
+        <p:spPr/>
+        <p:txBody>
+          <a:bodyPr wrap="square" lIns="0" rIns="0" tIns="0" bIns="0" anchor="ctr"/>
+          <a:lstStyle/>
+          <a:p>
+            <a:pPr algn="l" marL="0" indent="0">
+              <a:buNone/>
+              <a:spcAft>
+                <a:spcPts val="0"/>
+              </a:spcAft>
+              <a:buNone/>
+              <a:lnSpc>
+                <a:spcPct val="110000"/>
+              </a:lnSpc>
+              <a:spcBef>
+                <a:spcPts val="0"/>
+              </a:spcBef>
+              <a:defRPr sz="1400" lang="ja-JP">
+                <a:latin typeface="Noto Sans CJK JP"/>
+                <a:ea typeface="Noto Sans CJK JP"/>
+                <a:ea typeface="Noto Sans CJK JP"/>
+              </a:defRPr>
+            </a:pPr>
+            <a:r>
+              <a:rPr sz="1400" lang="ja-JP" b="1">
+                <a:solidFill>
+                  <a:srgbClr val="FFFEF8"/>
+                </a:solidFill>
+                <a:latin typeface="Noto Sans CJK JP"/>
+                <a:ea typeface="Noto Sans CJK JP"/>
+              </a:rPr>
+              <a:t>Appendix: 5 参考文献</a:t>
+            </a:r>
+          </a:p>
+        </p:txBody>
+      </p:sp>
+      <p:sp>
+        <p:nvSpPr>
+          <p:cNvPr id="4" name="TextBox 3"/>
+          <p:cNvSpPr txBox="1"/>
+          <p:nvPr/>
+        </p:nvSpPr>
+        <p:spPr>
+          <a:xfrm>
+            <a:off x="594360" y="1280160"/>
+            <a:ext cx="7955279" cy="320040"/>
+          </a:xfrm>
+          <a:prstGeom prst="rect">
+            <a:avLst/>
+          </a:prstGeom>
+          <a:noFill/>
+        </p:spPr>
+        <p:txBody>
+          <a:bodyPr wrap="square" lIns="0" rIns="0" tIns="0" bIns="0" anchor="t">
+            <a:spAutoFit/>
+          </a:bodyPr>
+          <a:lstStyle/>
+          <a:p>
+            <a:pPr algn="l" marL="0" indent="0">
+              <a:buNone/>
+              <a:lnSpc>
+                <a:spcPct val="110000"/>
+              </a:lnSpc>
+              <a:spcBef>
+                <a:spcPts val="0"/>
+              </a:spcBef>
+              <a:spcAft>
+                <a:spcPts val="600"/>
+              </a:spcAft>
+              <a:defRPr sz="1900" lang="ja-JP">
+                <a:latin typeface="Noto Sans CJK JP"/>
+                <a:ea typeface="Noto Sans CJK JP"/>
+              </a:defRPr>
+            </a:pPr>
+            <a:r>
+              <a:rPr sz="1900" lang="ja-JP">
+                <a:solidFill>
+                  <a:srgbClr val="303437"/>
+                </a:solidFill>
+                <a:latin typeface="Noto Sans CJK JP"/>
+                <a:ea typeface="Noto Sans CJK JP"/>
+              </a:rPr>
+              <a:t>Yang et al. (2019). RE2. ACL.</a:t>
+            </a:r>
+          </a:p>
+        </p:txBody>
+      </p:sp>
+      <p:sp>
+        <p:nvSpPr>
+          <p:cNvPr id="5" name="TextBox 4"/>
+          <p:cNvSpPr txBox="1"/>
+          <p:nvPr/>
+        </p:nvSpPr>
+        <p:spPr>
+          <a:xfrm>
+            <a:off x="594360" y="1600200"/>
+            <a:ext cx="7955279" cy="292608"/>
+          </a:xfrm>
+          <a:prstGeom prst="rect">
+            <a:avLst/>
+          </a:prstGeom>
+          <a:noFill/>
+        </p:spPr>
+        <p:txBody>
+          <a:bodyPr wrap="square" lIns="0" rIns="0" tIns="0" bIns="0" anchor="t">
+            <a:spAutoFit/>
+          </a:bodyPr>
+          <a:lstStyle/>
+          <a:p>
+            <a:pPr algn="l" marL="0" indent="0">
+              <a:buNone/>
+              <a:lnSpc>
+                <a:spcPct val="110000"/>
+              </a:lnSpc>
+              <a:spcBef>
+                <a:spcPts val="0"/>
+              </a:spcBef>
+              <a:spcAft>
+                <a:spcPts val="600"/>
+              </a:spcAft>
+              <a:defRPr sz="1700" lang="ja-JP">
+                <a:latin typeface="Noto Sans CJK JP"/>
+                <a:ea typeface="Noto Sans CJK JP"/>
+              </a:defRPr>
+            </a:pPr>
+            <a:r>
+              <a:rPr sz="1700" lang="ja-JP">
+                <a:solidFill>
+                  <a:srgbClr val="626669"/>
+                </a:solidFill>
+                <a:latin typeface="Noto Sans CJK JP"/>
+                <a:ea typeface="Noto Sans CJK JP"/>
+              </a:rPr>
+              <a:t>単語間の対応を利用したモデルの反復評価結果。</a:t>
+            </a:r>
+          </a:p>
+        </p:txBody>
+      </p:sp>
+      <p:sp>
+        <p:nvSpPr>
+          <p:cNvPr id="6" name="TextBox 5"/>
+          <p:cNvSpPr txBox="1"/>
+          <p:nvPr/>
+        </p:nvSpPr>
+        <p:spPr>
+          <a:xfrm>
+            <a:off x="594360" y="2011680"/>
+            <a:ext cx="7955279" cy="256032"/>
+          </a:xfrm>
+          <a:prstGeom prst="rect">
+            <a:avLst/>
+          </a:prstGeom>
+          <a:noFill/>
+        </p:spPr>
+        <p:txBody>
+          <a:bodyPr wrap="square" lIns="0" rIns="0" tIns="0" bIns="0" anchor="t">
+            <a:spAutoFit/>
+          </a:bodyPr>
+          <a:lstStyle/>
+          <a:p>
+            <a:pPr algn="l" marL="0" indent="0">
+              <a:buNone/>
+              <a:lnSpc>
+                <a:spcPct val="110000"/>
+              </a:lnSpc>
+              <a:spcBef>
+                <a:spcPts val="0"/>
+              </a:spcBef>
+              <a:spcAft>
+                <a:spcPts val="0"/>
+              </a:spcAft>
+              <a:defRPr sz="850" lang="ja-JP">
+                <a:latin typeface="Liberation Sans"/>
+                <a:ea typeface="Noto Sans CJK JP"/>
+              </a:defRPr>
+            </a:pPr>
+            <a:r>
+              <a:rPr sz="850" lang="ja-JP">
+                <a:solidFill>
+                  <a:srgbClr val="626669"/>
+                </a:solidFill>
+                <a:latin typeface="Liberation Sans"/>
+                <a:ea typeface="Noto Sans CJK JP"/>
+              </a:rPr>
+              <a:t>https://github.com/alibaba-edu/simple-effective-text-matching</a:t>
+            </a:r>
+          </a:p>
+        </p:txBody>
+      </p:sp>
+      <p:sp>
+        <p:nvSpPr>
+          <p:cNvPr id="7" name="TextBox 6"/>
+          <p:cNvSpPr txBox="1"/>
+          <p:nvPr/>
+        </p:nvSpPr>
+        <p:spPr>
+          <a:xfrm>
+            <a:off x="594360" y="2194560"/>
+            <a:ext cx="7955279" cy="320040"/>
+          </a:xfrm>
+          <a:prstGeom prst="rect">
+            <a:avLst/>
+          </a:prstGeom>
+          <a:noFill/>
+        </p:spPr>
+        <p:txBody>
+          <a:bodyPr wrap="square" lIns="0" rIns="0" tIns="0" bIns="0" anchor="t">
+            <a:spAutoFit/>
+          </a:bodyPr>
+          <a:lstStyle/>
+          <a:p>
+            <a:pPr algn="l" marL="0" indent="0">
+              <a:buNone/>
+              <a:lnSpc>
+                <a:spcPct val="110000"/>
+              </a:lnSpc>
+              <a:spcBef>
+                <a:spcPts val="0"/>
+              </a:spcBef>
+              <a:spcAft>
+                <a:spcPts val="600"/>
+              </a:spcAft>
+              <a:defRPr sz="1900" lang="ja-JP">
+                <a:latin typeface="Noto Sans CJK JP"/>
+                <a:ea typeface="Noto Sans CJK JP"/>
+              </a:defRPr>
+            </a:pPr>
+            <a:r>
+              <a:rPr sz="1900" lang="ja-JP">
+                <a:solidFill>
+                  <a:srgbClr val="303437"/>
+                </a:solidFill>
+                <a:latin typeface="Noto Sans CJK JP"/>
+                <a:ea typeface="Noto Sans CJK JP"/>
+              </a:rPr>
+              <a:t>Gao et al. (2021). SimCSE. EMNLP.</a:t>
+            </a:r>
+          </a:p>
+        </p:txBody>
+      </p:sp>
+      <p:sp>
+        <p:nvSpPr>
+          <p:cNvPr id="8" name="TextBox 7"/>
+          <p:cNvSpPr txBox="1"/>
+          <p:nvPr/>
+        </p:nvSpPr>
+        <p:spPr>
+          <a:xfrm>
+            <a:off x="594360" y="2514600"/>
+            <a:ext cx="7955279" cy="292608"/>
+          </a:xfrm>
+          <a:prstGeom prst="rect">
+            <a:avLst/>
+          </a:prstGeom>
+          <a:noFill/>
+        </p:spPr>
+        <p:txBody>
+          <a:bodyPr wrap="square" lIns="0" rIns="0" tIns="0" bIns="0" anchor="t">
+            <a:spAutoFit/>
+          </a:bodyPr>
+          <a:lstStyle/>
+          <a:p>
+            <a:pPr algn="l" marL="0" indent="0">
+              <a:buNone/>
+              <a:lnSpc>
+                <a:spcPct val="110000"/>
+              </a:lnSpc>
+              <a:spcBef>
+                <a:spcPts val="0"/>
+              </a:spcBef>
+              <a:spcAft>
+                <a:spcPts val="600"/>
+              </a:spcAft>
+              <a:defRPr sz="1700" lang="ja-JP">
+                <a:latin typeface="Noto Sans CJK JP"/>
+                <a:ea typeface="Noto Sans CJK JP"/>
+              </a:defRPr>
+            </a:pPr>
+            <a:r>
+              <a:rPr sz="1700" lang="ja-JP">
+                <a:solidFill>
+                  <a:srgbClr val="626669"/>
+                </a:solidFill>
+                <a:latin typeface="Noto Sans CJK JP"/>
+                <a:ea typeface="Noto Sans CJK JP"/>
+              </a:rPr>
+              <a:t>SNLIを文埋め込みの教師データに使う利用例。</a:t>
+            </a:r>
+          </a:p>
+        </p:txBody>
+      </p:sp>
+      <p:sp>
+        <p:nvSpPr>
+          <p:cNvPr id="9" name="TextBox 8"/>
+          <p:cNvSpPr txBox="1"/>
+          <p:nvPr/>
+        </p:nvSpPr>
+        <p:spPr>
+          <a:xfrm>
+            <a:off x="594360" y="2926080"/>
+            <a:ext cx="7955279" cy="256032"/>
+          </a:xfrm>
+          <a:prstGeom prst="rect">
+            <a:avLst/>
+          </a:prstGeom>
+          <a:noFill/>
+        </p:spPr>
+        <p:txBody>
+          <a:bodyPr wrap="square" lIns="0" rIns="0" tIns="0" bIns="0" anchor="t">
+            <a:spAutoFit/>
+          </a:bodyPr>
+          <a:lstStyle/>
+          <a:p>
+            <a:pPr algn="l" marL="0" indent="0">
+              <a:buNone/>
+              <a:lnSpc>
+                <a:spcPct val="110000"/>
+              </a:lnSpc>
+              <a:spcBef>
+                <a:spcPts val="0"/>
+              </a:spcBef>
+              <a:spcAft>
+                <a:spcPts val="0"/>
+              </a:spcAft>
+              <a:defRPr sz="850" lang="ja-JP">
+                <a:latin typeface="Liberation Sans"/>
+                <a:ea typeface="Noto Sans CJK JP"/>
+              </a:defRPr>
+            </a:pPr>
+            <a:r>
+              <a:rPr sz="850" lang="ja-JP">
+                <a:solidFill>
+                  <a:srgbClr val="626669"/>
+                </a:solidFill>
+                <a:latin typeface="Liberation Sans"/>
+                <a:ea typeface="Noto Sans CJK JP"/>
+              </a:rPr>
+              <a:t>https://github.com/princeton-nlp/SimCSE</a:t>
+            </a:r>
+          </a:p>
+        </p:txBody>
+      </p:sp>
+      <p:sp>
+        <p:nvSpPr>
+          <p:cNvPr id="10" name="TextBox 9"/>
+          <p:cNvSpPr txBox="1"/>
+          <p:nvPr/>
+        </p:nvSpPr>
+        <p:spPr>
+          <a:xfrm>
+            <a:off x="594360" y="3108960"/>
+            <a:ext cx="7955279" cy="320040"/>
+          </a:xfrm>
+          <a:prstGeom prst="rect">
+            <a:avLst/>
+          </a:prstGeom>
+          <a:noFill/>
+        </p:spPr>
+        <p:txBody>
+          <a:bodyPr wrap="square" lIns="0" rIns="0" tIns="0" bIns="0" anchor="t">
+            <a:spAutoFit/>
+          </a:bodyPr>
+          <a:lstStyle/>
+          <a:p>
+            <a:pPr algn="l" marL="0" indent="0">
+              <a:buNone/>
+              <a:lnSpc>
+                <a:spcPct val="110000"/>
+              </a:lnSpc>
+              <a:spcBef>
+                <a:spcPts val="0"/>
+              </a:spcBef>
+              <a:spcAft>
+                <a:spcPts val="600"/>
+              </a:spcAft>
+              <a:defRPr sz="1900" lang="ja-JP">
+                <a:latin typeface="Noto Sans CJK JP"/>
+                <a:ea typeface="Noto Sans CJK JP"/>
+              </a:defRPr>
+            </a:pPr>
+            <a:r>
+              <a:rPr sz="1900" lang="ja-JP">
+                <a:solidFill>
+                  <a:srgbClr val="303437"/>
+                </a:solidFill>
+                <a:latin typeface="Noto Sans CJK JP"/>
+                <a:ea typeface="Noto Sans CJK JP"/>
+              </a:rPr>
+              <a:t>Sentence TransformersのAllNLI学習例</a:t>
+            </a:r>
+          </a:p>
+        </p:txBody>
+      </p:sp>
+      <p:sp>
+        <p:nvSpPr>
+          <p:cNvPr id="11" name="TextBox 10"/>
+          <p:cNvSpPr txBox="1"/>
+          <p:nvPr/>
+        </p:nvSpPr>
+        <p:spPr>
+          <a:xfrm>
+            <a:off x="594360" y="3429000"/>
+            <a:ext cx="7955279" cy="292608"/>
+          </a:xfrm>
+          <a:prstGeom prst="rect">
+            <a:avLst/>
+          </a:prstGeom>
+          <a:noFill/>
+        </p:spPr>
+        <p:txBody>
+          <a:bodyPr wrap="square" lIns="0" rIns="0" tIns="0" bIns="0" anchor="t">
+            <a:spAutoFit/>
+          </a:bodyPr>
+          <a:lstStyle/>
+          <a:p>
+            <a:pPr algn="l" marL="0" indent="0">
+              <a:buNone/>
+              <a:lnSpc>
+                <a:spcPct val="110000"/>
+              </a:lnSpc>
+              <a:spcBef>
+                <a:spcPts val="0"/>
+              </a:spcBef>
+              <a:spcAft>
+                <a:spcPts val="600"/>
+              </a:spcAft>
+              <a:defRPr sz="1700" lang="ja-JP">
+                <a:latin typeface="Noto Sans CJK JP"/>
+                <a:ea typeface="Noto Sans CJK JP"/>
+              </a:defRPr>
+            </a:pPr>
+            <a:r>
+              <a:rPr sz="1700" lang="ja-JP">
+                <a:solidFill>
+                  <a:srgbClr val="626669"/>
+                </a:solidFill>
+                <a:latin typeface="Noto Sans CJK JP"/>
+                <a:ea typeface="Noto Sans CJK JP"/>
+              </a:rPr>
+              <a:t>SNLIを含む学習手順が現在も公開されている根拠。</a:t>
+            </a:r>
+          </a:p>
+        </p:txBody>
+      </p:sp>
+      <p:sp>
+        <p:nvSpPr>
+          <p:cNvPr id="12" name="TextBox 11"/>
+          <p:cNvSpPr txBox="1"/>
+          <p:nvPr/>
+        </p:nvSpPr>
+        <p:spPr>
+          <a:xfrm>
+            <a:off x="594360" y="3840480"/>
+            <a:ext cx="7955279" cy="256032"/>
+          </a:xfrm>
+          <a:prstGeom prst="rect">
+            <a:avLst/>
+          </a:prstGeom>
+          <a:noFill/>
+        </p:spPr>
+        <p:txBody>
+          <a:bodyPr wrap="square" lIns="0" rIns="0" tIns="0" bIns="0" anchor="t">
+            <a:spAutoFit/>
+          </a:bodyPr>
+          <a:lstStyle/>
+          <a:p>
+            <a:pPr algn="l" marL="0" indent="0">
+              <a:buNone/>
+              <a:lnSpc>
+                <a:spcPct val="110000"/>
+              </a:lnSpc>
+              <a:spcBef>
+                <a:spcPts val="0"/>
+              </a:spcBef>
+              <a:spcAft>
+                <a:spcPts val="0"/>
+              </a:spcAft>
+              <a:defRPr sz="850" lang="ja-JP">
+                <a:latin typeface="Liberation Sans"/>
+                <a:ea typeface="Noto Sans CJK JP"/>
+              </a:defRPr>
+            </a:pPr>
+            <a:r>
+              <a:rPr sz="850" lang="ja-JP">
+                <a:solidFill>
+                  <a:srgbClr val="626669"/>
+                </a:solidFill>
+                <a:latin typeface="Liberation Sans"/>
+                <a:ea typeface="Noto Sans CJK JP"/>
+              </a:rPr>
+              <a:t>https://github.com/UKPLab/sentence-transformers/tree/master/examples/sentence_transformer/training/nli</a:t>
+            </a:r>
+          </a:p>
+        </p:txBody>
+      </p:sp>
+      <p:sp>
+        <p:nvSpPr>
+          <p:cNvPr id="13" name="TextBox 12"/>
+          <p:cNvSpPr txBox="1"/>
+          <p:nvPr/>
+        </p:nvSpPr>
+        <p:spPr>
+          <a:xfrm>
+            <a:off x="594360" y="4023360"/>
+            <a:ext cx="7955279" cy="320040"/>
+          </a:xfrm>
+          <a:prstGeom prst="rect">
+            <a:avLst/>
+          </a:prstGeom>
+          <a:noFill/>
+        </p:spPr>
+        <p:txBody>
+          <a:bodyPr wrap="square" lIns="0" rIns="0" tIns="0" bIns="0" anchor="t">
+            <a:spAutoFit/>
+          </a:bodyPr>
+          <a:lstStyle/>
+          <a:p>
+            <a:pPr algn="l" marL="0" indent="0">
+              <a:buNone/>
+              <a:lnSpc>
+                <a:spcPct val="110000"/>
+              </a:lnSpc>
+              <a:spcBef>
+                <a:spcPts val="0"/>
+              </a:spcBef>
+              <a:spcAft>
+                <a:spcPts val="600"/>
+              </a:spcAft>
+              <a:defRPr sz="1900" lang="ja-JP">
+                <a:latin typeface="Noto Sans CJK JP"/>
+                <a:ea typeface="Noto Sans CJK JP"/>
+              </a:defRPr>
+            </a:pPr>
+            <a:r>
+              <a:rPr sz="1900" lang="ja-JP">
+                <a:solidFill>
+                  <a:srgbClr val="303437"/>
+                </a:solidFill>
+                <a:latin typeface="Noto Sans CJK JP"/>
+                <a:ea typeface="Noto Sans CJK JP"/>
+              </a:rPr>
+              <a:t>Solatorio (2024). GISTEmbed.</a:t>
+            </a:r>
+          </a:p>
+        </p:txBody>
+      </p:sp>
+      <p:sp>
+        <p:nvSpPr>
+          <p:cNvPr id="14" name="TextBox 13"/>
+          <p:cNvSpPr txBox="1"/>
+          <p:nvPr/>
+        </p:nvSpPr>
+        <p:spPr>
+          <a:xfrm>
+            <a:off x="594360" y="4343400"/>
+            <a:ext cx="7955279" cy="292608"/>
+          </a:xfrm>
+          <a:prstGeom prst="rect">
+            <a:avLst/>
+          </a:prstGeom>
+          <a:noFill/>
+        </p:spPr>
+        <p:txBody>
+          <a:bodyPr wrap="square" lIns="0" rIns="0" tIns="0" bIns="0" anchor="t">
+            <a:spAutoFit/>
+          </a:bodyPr>
+          <a:lstStyle/>
+          <a:p>
+            <a:pPr algn="l" marL="0" indent="0">
+              <a:buNone/>
+              <a:lnSpc>
+                <a:spcPct val="110000"/>
+              </a:lnSpc>
+              <a:spcBef>
+                <a:spcPts val="0"/>
+              </a:spcBef>
+              <a:spcAft>
+                <a:spcPts val="600"/>
+              </a:spcAft>
+              <a:defRPr sz="1700" lang="ja-JP">
+                <a:latin typeface="Noto Sans CJK JP"/>
+                <a:ea typeface="Noto Sans CJK JP"/>
+              </a:defRPr>
+            </a:pPr>
+            <a:r>
+              <a:rPr sz="1700" lang="ja-JP">
+                <a:solidFill>
+                  <a:srgbClr val="626669"/>
+                </a:solidFill>
+                <a:latin typeface="Noto Sans CJK JP"/>
+                <a:ea typeface="Noto Sans CJK JP"/>
+              </a:rPr>
+              <a:t>文埋め込みの負例を選ぶために含意データを用いる利用例。</a:t>
+            </a:r>
+          </a:p>
+        </p:txBody>
+      </p:sp>
+      <p:sp>
+        <p:nvSpPr>
+          <p:cNvPr id="15" name="TextBox 14"/>
+          <p:cNvSpPr txBox="1"/>
+          <p:nvPr/>
+        </p:nvSpPr>
+        <p:spPr>
+          <a:xfrm>
+            <a:off x="594360" y="4754880"/>
+            <a:ext cx="7955279" cy="256032"/>
+          </a:xfrm>
+          <a:prstGeom prst="rect">
+            <a:avLst/>
+          </a:prstGeom>
+          <a:noFill/>
+        </p:spPr>
+        <p:txBody>
+          <a:bodyPr wrap="square" lIns="0" rIns="0" tIns="0" bIns="0" anchor="t">
+            <a:spAutoFit/>
+          </a:bodyPr>
+          <a:lstStyle/>
+          <a:p>
+            <a:pPr algn="l" marL="0" indent="0">
+              <a:buNone/>
+              <a:lnSpc>
+                <a:spcPct val="110000"/>
+              </a:lnSpc>
+              <a:spcBef>
+                <a:spcPts val="0"/>
+              </a:spcBef>
+              <a:spcAft>
+                <a:spcPts val="0"/>
+              </a:spcAft>
+              <a:defRPr sz="850" lang="ja-JP">
+                <a:latin typeface="Liberation Sans"/>
+                <a:ea typeface="Noto Sans CJK JP"/>
+              </a:defRPr>
+            </a:pPr>
+            <a:r>
+              <a:rPr sz="850" lang="ja-JP">
+                <a:solidFill>
+                  <a:srgbClr val="626669"/>
+                </a:solidFill>
+                <a:latin typeface="Liberation Sans"/>
+                <a:ea typeface="Noto Sans CJK JP"/>
+              </a:rPr>
+              <a:t>https://arxiv.org/abs/2402.16829</a:t>
+            </a:r>
           </a:p>
         </p:txBody>
       </p:sp>

--- a/slides/datasets-in-10-minutes-snli.pptx
+++ b/slides/datasets-in-10-minutes-snli.pptx
@@ -372,7 +372,6 @@
               <a:buClr>
                 <a:schemeClr val="dk1"/>
               </a:buClr>
-              <a:buSzPts val="5200"/>
               <a:buNone/>
               <a:defRPr sz="5200" b="1" lang="ja-JP">
                 <a:solidFill>
@@ -390,7 +389,6 @@
               <a:spcAft>
                 <a:spcPts val="0"/>
               </a:spcAft>
-              <a:buSzPts val="5200"/>
               <a:buNone/>
               <a:defRPr sz="5200" lang="ja-JP">
                 <a:latin typeface="Noto Sans"/>
@@ -405,7 +403,6 @@
               <a:spcAft>
                 <a:spcPts val="0"/>
               </a:spcAft>
-              <a:buSzPts val="5200"/>
               <a:buNone/>
               <a:defRPr sz="5200" lang="ja-JP">
                 <a:latin typeface="Noto Sans"/>
@@ -420,7 +417,6 @@
               <a:spcAft>
                 <a:spcPts val="0"/>
               </a:spcAft>
-              <a:buSzPts val="5200"/>
               <a:buNone/>
               <a:defRPr sz="5200" lang="ja-JP">
                 <a:latin typeface="Noto Sans"/>
@@ -435,7 +431,6 @@
               <a:spcAft>
                 <a:spcPts val="0"/>
               </a:spcAft>
-              <a:buSzPts val="5200"/>
               <a:buNone/>
               <a:defRPr sz="5200" lang="ja-JP">
                 <a:latin typeface="Noto Sans"/>
@@ -450,7 +445,6 @@
               <a:spcAft>
                 <a:spcPts val="0"/>
               </a:spcAft>
-              <a:buSzPts val="5200"/>
               <a:buNone/>
               <a:defRPr sz="5200" lang="ja-JP">
                 <a:latin typeface="Noto Sans"/>
@@ -465,7 +459,6 @@
               <a:spcAft>
                 <a:spcPts val="0"/>
               </a:spcAft>
-              <a:buSzPts val="5200"/>
               <a:buNone/>
               <a:defRPr sz="5200" lang="ja-JP">
                 <a:latin typeface="Noto Sans"/>
@@ -480,7 +473,6 @@
               <a:spcAft>
                 <a:spcPts val="0"/>
               </a:spcAft>
-              <a:buSzPts val="5200"/>
               <a:buNone/>
               <a:defRPr sz="5200" lang="ja-JP">
                 <a:latin typeface="Noto Sans"/>
@@ -495,7 +487,6 @@
               <a:spcAft>
                 <a:spcPts val="0"/>
               </a:spcAft>
-              <a:buSzPts val="5200"/>
               <a:buNone/>
               <a:defRPr sz="5200" lang="ja-JP">
                 <a:latin typeface="Noto Sans"/>
@@ -550,7 +541,6 @@
               <a:buClr>
                 <a:schemeClr val="dk1"/>
               </a:buClr>
-              <a:buSzPts val="2800"/>
               <a:buNone/>
               <a:defRPr sz="2800" lang="ja-JP">
                 <a:solidFill>
@@ -571,7 +561,6 @@
               <a:spcAft>
                 <a:spcPts val="0"/>
               </a:spcAft>
-              <a:buSzPts val="2800"/>
               <a:buNone/>
               <a:defRPr sz="2800" lang="ja-JP">
                 <a:latin typeface="Noto Sans"/>
@@ -589,7 +578,6 @@
               <a:spcAft>
                 <a:spcPts val="0"/>
               </a:spcAft>
-              <a:buSzPts val="2800"/>
               <a:buNone/>
               <a:defRPr sz="2800" lang="ja-JP">
                 <a:latin typeface="Noto Sans"/>
@@ -607,7 +595,6 @@
               <a:spcAft>
                 <a:spcPts val="0"/>
               </a:spcAft>
-              <a:buSzPts val="2800"/>
               <a:buNone/>
               <a:defRPr sz="2800" lang="ja-JP">
                 <a:latin typeface="Noto Sans"/>
@@ -625,7 +612,6 @@
               <a:spcAft>
                 <a:spcPts val="0"/>
               </a:spcAft>
-              <a:buSzPts val="2800"/>
               <a:buNone/>
               <a:defRPr sz="2800" lang="ja-JP">
                 <a:latin typeface="Noto Sans"/>
@@ -643,7 +629,6 @@
               <a:spcAft>
                 <a:spcPts val="0"/>
               </a:spcAft>
-              <a:buSzPts val="2800"/>
               <a:buNone/>
               <a:defRPr sz="2800" lang="ja-JP">
                 <a:latin typeface="Noto Sans"/>
@@ -661,7 +646,6 @@
               <a:spcAft>
                 <a:spcPts val="0"/>
               </a:spcAft>
-              <a:buSzPts val="2800"/>
               <a:buNone/>
               <a:defRPr sz="2800" lang="ja-JP">
                 <a:latin typeface="Noto Sans"/>
@@ -679,7 +663,6 @@
               <a:spcAft>
                 <a:spcPts val="0"/>
               </a:spcAft>
-              <a:buSzPts val="2800"/>
               <a:buNone/>
               <a:defRPr sz="2800" lang="ja-JP">
                 <a:latin typeface="Noto Sans"/>
@@ -697,7 +680,6 @@
               <a:spcAft>
                 <a:spcPts val="0"/>
               </a:spcAft>
-              <a:buSzPts val="2800"/>
               <a:buNone/>
               <a:defRPr sz="2800" lang="ja-JP">
                 <a:latin typeface="Noto Sans"/>
@@ -856,7 +838,8 @@
               <a:buClr>
                 <a:srgbClr val="303437"/>
               </a:buClr>
-              <a:buSzPts val="2000"/>
+              <a:buSzPct val="66500"/>
+              <a:buFont typeface="Noto Sans CJK JP"/>
               <a:buChar char="●"/>
               <a:defRPr sz="2000" lang="ja-JP">
                 <a:solidFill>
@@ -877,7 +860,8 @@
               <a:buClr>
                 <a:srgbClr val="303437"/>
               </a:buClr>
-              <a:buSzPts val="2000"/>
+              <a:buSzPct val="66500"/>
+              <a:buFont typeface="Noto Sans CJK JP"/>
               <a:buChar char="○"/>
               <a:defRPr sz="2000" lang="ja-JP">
                 <a:solidFill>
@@ -898,8 +882,9 @@
               <a:buClr>
                 <a:srgbClr val="303437"/>
               </a:buClr>
-              <a:buSzPts val="2000"/>
-              <a:buChar char="■"/>
+              <a:buSzPct val="66500"/>
+              <a:buFont typeface="Noto Sans CJK JP"/>
+              <a:buChar char="○"/>
               <a:defRPr sz="2000" lang="ja-JP">
                 <a:solidFill>
                   <a:srgbClr val="303437"/>
@@ -919,7 +904,8 @@
               <a:buClr>
                 <a:srgbClr val="303437"/>
               </a:buClr>
-              <a:buSzPts val="2200"/>
+              <a:buSzPct val="60455"/>
+              <a:buFont typeface="Noto Sans CJK JP"/>
               <a:buChar char="●"/>
               <a:defRPr sz="2200" lang="ja-JP">
                 <a:solidFill>
@@ -940,7 +926,8 @@
               <a:buClr>
                 <a:srgbClr val="303437"/>
               </a:buClr>
-              <a:buSzPts val="2000"/>
+              <a:buSzPct val="66500"/>
+              <a:buFont typeface="Noto Sans CJK JP"/>
               <a:buChar char="○"/>
               <a:defRPr sz="2000" lang="ja-JP">
                 <a:solidFill>
@@ -961,8 +948,9 @@
               <a:buClr>
                 <a:srgbClr val="303437"/>
               </a:buClr>
-              <a:buSzPts val="2000"/>
-              <a:buChar char="■"/>
+              <a:buSzPct val="66500"/>
+              <a:buFont typeface="Noto Sans CJK JP"/>
+              <a:buChar char="○"/>
               <a:defRPr sz="2000" lang="ja-JP">
                 <a:solidFill>
                   <a:srgbClr val="303437"/>
@@ -982,7 +970,8 @@
               <a:buClr>
                 <a:srgbClr val="303437"/>
               </a:buClr>
-              <a:buSzPts val="2000"/>
+              <a:buSzPct val="66500"/>
+              <a:buFont typeface="Noto Sans CJK JP"/>
               <a:buChar char="●"/>
               <a:defRPr sz="2000" lang="ja-JP">
                 <a:solidFill>
@@ -1003,7 +992,8 @@
               <a:buClr>
                 <a:srgbClr val="303437"/>
               </a:buClr>
-              <a:buSzPts val="2000"/>
+              <a:buSzPct val="66500"/>
+              <a:buFont typeface="Noto Sans CJK JP"/>
               <a:buChar char="○"/>
               <a:defRPr sz="2000" lang="ja-JP">
                 <a:solidFill>
@@ -1024,8 +1014,9 @@
               <a:buClr>
                 <a:srgbClr val="303437"/>
               </a:buClr>
-              <a:buSzPts val="2000"/>
-              <a:buChar char="■"/>
+              <a:buSzPct val="66500"/>
+              <a:buFont typeface="Noto Sans CJK JP"/>
+              <a:buChar char="○"/>
               <a:defRPr sz="2000" lang="ja-JP">
                 <a:solidFill>
                   <a:srgbClr val="303437"/>
@@ -1096,7 +1087,8 @@
               <a:buClr>
                 <a:srgbClr val="303437"/>
               </a:buClr>
-              <a:buSzPts val="2000"/>
+              <a:buSzPct val="66500"/>
+              <a:buFont typeface="Noto Sans CJK JP"/>
               <a:buChar char="●"/>
               <a:defRPr sz="2000" lang="ja-JP">
                 <a:solidFill>
@@ -1117,7 +1109,8 @@
               <a:buClr>
                 <a:srgbClr val="303437"/>
               </a:buClr>
-              <a:buSzPts val="2000"/>
+              <a:buSzPct val="66500"/>
+              <a:buFont typeface="Noto Sans CJK JP"/>
               <a:buChar char="○"/>
               <a:defRPr sz="2000" lang="ja-JP">
                 <a:solidFill>
@@ -1138,8 +1131,9 @@
               <a:buClr>
                 <a:srgbClr val="303437"/>
               </a:buClr>
-              <a:buSzPts val="2000"/>
-              <a:buChar char="■"/>
+              <a:buSzPct val="66500"/>
+              <a:buFont typeface="Noto Sans CJK JP"/>
+              <a:buChar char="○"/>
               <a:defRPr sz="2000" lang="ja-JP">
                 <a:solidFill>
                   <a:srgbClr val="303437"/>
@@ -1159,7 +1153,8 @@
               <a:buClr>
                 <a:srgbClr val="303437"/>
               </a:buClr>
-              <a:buSzPts val="2200"/>
+              <a:buSzPct val="60455"/>
+              <a:buFont typeface="Noto Sans CJK JP"/>
               <a:buChar char="●"/>
               <a:defRPr sz="2200" lang="ja-JP">
                 <a:solidFill>
@@ -1180,7 +1175,8 @@
               <a:buClr>
                 <a:srgbClr val="303437"/>
               </a:buClr>
-              <a:buSzPts val="2000"/>
+              <a:buSzPct val="66500"/>
+              <a:buFont typeface="Noto Sans CJK JP"/>
               <a:buChar char="○"/>
               <a:defRPr sz="2000" lang="ja-JP">
                 <a:solidFill>
@@ -1201,8 +1197,9 @@
               <a:buClr>
                 <a:srgbClr val="303437"/>
               </a:buClr>
-              <a:buSzPts val="2000"/>
-              <a:buChar char="■"/>
+              <a:buSzPct val="66500"/>
+              <a:buFont typeface="Noto Sans CJK JP"/>
+              <a:buChar char="○"/>
               <a:defRPr sz="2000" lang="ja-JP">
                 <a:solidFill>
                   <a:srgbClr val="303437"/>
@@ -1222,7 +1219,8 @@
               <a:buClr>
                 <a:srgbClr val="303437"/>
               </a:buClr>
-              <a:buSzPts val="2000"/>
+              <a:buSzPct val="66500"/>
+              <a:buFont typeface="Noto Sans CJK JP"/>
               <a:buChar char="●"/>
               <a:defRPr sz="2000" lang="ja-JP">
                 <a:solidFill>
@@ -1243,7 +1241,8 @@
               <a:buClr>
                 <a:srgbClr val="303437"/>
               </a:buClr>
-              <a:buSzPts val="2000"/>
+              <a:buSzPct val="66500"/>
+              <a:buFont typeface="Noto Sans CJK JP"/>
               <a:buChar char="○"/>
               <a:defRPr sz="2000" lang="ja-JP">
                 <a:solidFill>
@@ -1264,8 +1263,9 @@
               <a:buClr>
                 <a:srgbClr val="303437"/>
               </a:buClr>
-              <a:buSzPts val="2000"/>
-              <a:buChar char="■"/>
+              <a:buSzPct val="66500"/>
+              <a:buFont typeface="Noto Sans CJK JP"/>
+              <a:buChar char="○"/>
               <a:defRPr sz="2000" lang="ja-JP">
                 <a:solidFill>
                   <a:srgbClr val="303437"/>
@@ -1344,7 +1344,8 @@
               <a:buClr>
                 <a:srgbClr val="303437"/>
               </a:buClr>
-              <a:buSzPts val="2000"/>
+              <a:buSzPct val="66500"/>
+              <a:buFont typeface="Noto Sans CJK JP"/>
               <a:buChar char="●"/>
               <a:defRPr sz="2000" lang="ja-JP">
                 <a:solidFill>
@@ -1365,7 +1366,8 @@
               <a:buClr>
                 <a:srgbClr val="303437"/>
               </a:buClr>
-              <a:buSzPts val="2000"/>
+              <a:buSzPct val="66500"/>
+              <a:buFont typeface="Noto Sans CJK JP"/>
               <a:buChar char="○"/>
               <a:defRPr sz="2000" lang="ja-JP">
                 <a:solidFill>
@@ -1386,8 +1388,9 @@
               <a:buClr>
                 <a:srgbClr val="303437"/>
               </a:buClr>
-              <a:buSzPts val="2000"/>
-              <a:buChar char="■"/>
+              <a:buSzPct val="66500"/>
+              <a:buFont typeface="Noto Sans CJK JP"/>
+              <a:buChar char="○"/>
               <a:defRPr sz="2000" lang="ja-JP">
                 <a:solidFill>
                   <a:srgbClr val="303437"/>
@@ -1407,7 +1410,8 @@
               <a:buClr>
                 <a:srgbClr val="303437"/>
               </a:buClr>
-              <a:buSzPts val="2200"/>
+              <a:buSzPct val="60455"/>
+              <a:buFont typeface="Noto Sans CJK JP"/>
               <a:buChar char="●"/>
               <a:defRPr sz="2200" lang="ja-JP">
                 <a:solidFill>
@@ -1428,7 +1432,8 @@
               <a:buClr>
                 <a:srgbClr val="303437"/>
               </a:buClr>
-              <a:buSzPts val="2000"/>
+              <a:buSzPct val="66500"/>
+              <a:buFont typeface="Noto Sans CJK JP"/>
               <a:buChar char="○"/>
               <a:defRPr sz="2000" lang="ja-JP">
                 <a:solidFill>
@@ -1449,8 +1454,9 @@
               <a:buClr>
                 <a:srgbClr val="303437"/>
               </a:buClr>
-              <a:buSzPts val="2000"/>
-              <a:buChar char="■"/>
+              <a:buSzPct val="66500"/>
+              <a:buFont typeface="Noto Sans CJK JP"/>
+              <a:buChar char="○"/>
               <a:defRPr sz="2000" lang="ja-JP">
                 <a:solidFill>
                   <a:srgbClr val="303437"/>
@@ -1470,7 +1476,8 @@
               <a:buClr>
                 <a:srgbClr val="303437"/>
               </a:buClr>
-              <a:buSzPts val="2000"/>
+              <a:buSzPct val="66500"/>
+              <a:buFont typeface="Noto Sans CJK JP"/>
               <a:buChar char="●"/>
               <a:defRPr sz="2000" lang="ja-JP">
                 <a:solidFill>
@@ -1491,7 +1498,8 @@
               <a:buClr>
                 <a:srgbClr val="303437"/>
               </a:buClr>
-              <a:buSzPts val="2000"/>
+              <a:buSzPct val="66500"/>
+              <a:buFont typeface="Noto Sans CJK JP"/>
               <a:buChar char="○"/>
               <a:defRPr sz="2000" lang="ja-JP">
                 <a:solidFill>
@@ -1512,8 +1520,9 @@
               <a:buClr>
                 <a:srgbClr val="303437"/>
               </a:buClr>
-              <a:buSzPts val="2000"/>
-              <a:buChar char="■"/>
+              <a:buSzPct val="66500"/>
+              <a:buFont typeface="Noto Sans CJK JP"/>
+              <a:buChar char="○"/>
               <a:defRPr sz="2000" lang="ja-JP">
                 <a:solidFill>
                   <a:srgbClr val="303437"/>
@@ -1752,7 +1761,6 @@
               <a:buClr>
                 <a:schemeClr val="dk1"/>
               </a:buClr>
-              <a:buSzPts val="1018"/>
               <a:buFont typeface="Noto Sans CJK JP"/>
               <a:buNone/>
               <a:tabLst/>
@@ -1844,7 +1852,6 @@
               <a:buClr>
                 <a:schemeClr val="dk1"/>
               </a:buClr>
-              <a:buSzPts val="1018"/>
               <a:buFont typeface="Noto Sans CJK JP"/>
               <a:buNone/>
               <a:tabLst/>
@@ -1936,7 +1943,6 @@
               <a:buClr>
                 <a:schemeClr val="dk1"/>
               </a:buClr>
-              <a:buSzPts val="1018"/>
               <a:buFont typeface="Noto Sans CJK JP"/>
               <a:buNone/>
               <a:tabLst/>
@@ -2028,7 +2034,6 @@
               <a:buClr>
                 <a:schemeClr val="dk1"/>
               </a:buClr>
-              <a:buSzPts val="1018"/>
               <a:buFont typeface="Noto Sans CJK JP"/>
               <a:buNone/>
               <a:tabLst/>
@@ -2165,7 +2170,6 @@
               <a:buClr>
                 <a:schemeClr val="dk1"/>
               </a:buClr>
-              <a:buSzPts val="1018"/>
               <a:buFont typeface="Noto Sans CJK JP"/>
               <a:buNone/>
               <a:tabLst/>
@@ -2368,7 +2372,6 @@
               <a:buClr>
                 <a:schemeClr val="dk1"/>
               </a:buClr>
-              <a:buSzPts val="3000"/>
               <a:buNone/>
               <a:defRPr sz="3000" b="1" lang="ja-JP">
                 <a:solidFill>
@@ -2386,7 +2389,6 @@
               <a:spcAft>
                 <a:spcPts val="0"/>
               </a:spcAft>
-              <a:buSzPts val="2800"/>
               <a:buNone/>
               <a:defRPr lang="ja-JP">
                 <a:latin typeface="Noto Sans"/>
@@ -2401,7 +2403,6 @@
               <a:spcAft>
                 <a:spcPts val="0"/>
               </a:spcAft>
-              <a:buSzPts val="2800"/>
               <a:buNone/>
               <a:defRPr lang="ja-JP">
                 <a:latin typeface="Noto Sans"/>
@@ -2416,7 +2417,6 @@
               <a:spcAft>
                 <a:spcPts val="0"/>
               </a:spcAft>
-              <a:buSzPts val="2800"/>
               <a:buNone/>
               <a:defRPr lang="ja-JP">
                 <a:latin typeface="Noto Sans"/>
@@ -2431,7 +2431,6 @@
               <a:spcAft>
                 <a:spcPts val="0"/>
               </a:spcAft>
-              <a:buSzPts val="2800"/>
               <a:buNone/>
               <a:defRPr lang="ja-JP">
                 <a:latin typeface="Noto Sans"/>
@@ -2446,7 +2445,6 @@
               <a:spcAft>
                 <a:spcPts val="0"/>
               </a:spcAft>
-              <a:buSzPts val="2800"/>
               <a:buNone/>
               <a:defRPr lang="ja-JP">
                 <a:latin typeface="Noto Sans"/>
@@ -2461,7 +2459,6 @@
               <a:spcAft>
                 <a:spcPts val="0"/>
               </a:spcAft>
-              <a:buSzPts val="2800"/>
               <a:buNone/>
               <a:defRPr lang="ja-JP">
                 <a:latin typeface="Noto Sans"/>
@@ -2476,7 +2473,6 @@
               <a:spcAft>
                 <a:spcPts val="0"/>
               </a:spcAft>
-              <a:buSzPts val="2800"/>
               <a:buNone/>
               <a:defRPr lang="ja-JP">
                 <a:latin typeface="Noto Sans"/>
@@ -2491,7 +2487,6 @@
               <a:spcAft>
                 <a:spcPts val="0"/>
               </a:spcAft>
-              <a:buSzPts val="2800"/>
               <a:buNone/>
               <a:defRPr lang="ja-JP">
                 <a:latin typeface="Noto Sans"/>
@@ -2543,7 +2538,8 @@
               <a:buClr>
                 <a:srgbClr val="303437"/>
               </a:buClr>
-              <a:buSzPts val="2000"/>
+              <a:buSzPct val="66500"/>
+              <a:buFont typeface="Noto Sans CJK JP"/>
               <a:buChar char="●"/>
               <a:defRPr sz="2000" lang="ja-JP">
                 <a:solidFill>
@@ -2564,7 +2560,8 @@
               <a:buClr>
                 <a:srgbClr val="303437"/>
               </a:buClr>
-              <a:buSzPts val="2000"/>
+              <a:buSzPct val="66500"/>
+              <a:buFont typeface="Noto Sans CJK JP"/>
               <a:buChar char="○"/>
               <a:defRPr sz="2000" lang="ja-JP">
                 <a:solidFill>
@@ -2585,8 +2582,9 @@
               <a:buClr>
                 <a:srgbClr val="303437"/>
               </a:buClr>
-              <a:buSzPts val="2000"/>
-              <a:buChar char="■"/>
+              <a:buSzPct val="66500"/>
+              <a:buFont typeface="Noto Sans CJK JP"/>
+              <a:buChar char="○"/>
               <a:defRPr sz="2000" lang="ja-JP">
                 <a:solidFill>
                   <a:srgbClr val="303437"/>
@@ -2606,7 +2604,8 @@
               <a:buClr>
                 <a:srgbClr val="303437"/>
               </a:buClr>
-              <a:buSzPts val="2200"/>
+              <a:buSzPct val="60455"/>
+              <a:buFont typeface="Noto Sans CJK JP"/>
               <a:buChar char="●"/>
               <a:defRPr sz="2200" lang="ja-JP">
                 <a:solidFill>
@@ -2627,7 +2626,8 @@
               <a:buClr>
                 <a:srgbClr val="303437"/>
               </a:buClr>
-              <a:buSzPts val="2000"/>
+              <a:buSzPct val="66500"/>
+              <a:buFont typeface="Noto Sans CJK JP"/>
               <a:buChar char="○"/>
               <a:defRPr sz="2000" lang="ja-JP">
                 <a:solidFill>
@@ -2648,8 +2648,9 @@
               <a:buClr>
                 <a:srgbClr val="303437"/>
               </a:buClr>
-              <a:buSzPts val="2000"/>
-              <a:buChar char="■"/>
+              <a:buSzPct val="66500"/>
+              <a:buFont typeface="Noto Sans CJK JP"/>
+              <a:buChar char="○"/>
               <a:defRPr sz="2000" lang="ja-JP">
                 <a:solidFill>
                   <a:srgbClr val="303437"/>
@@ -2669,7 +2670,8 @@
               <a:buClr>
                 <a:srgbClr val="303437"/>
               </a:buClr>
-              <a:buSzPts val="2000"/>
+              <a:buSzPct val="66500"/>
+              <a:buFont typeface="Noto Sans CJK JP"/>
               <a:buChar char="●"/>
               <a:defRPr sz="2000" lang="ja-JP">
                 <a:solidFill>
@@ -2690,7 +2692,8 @@
               <a:buClr>
                 <a:srgbClr val="303437"/>
               </a:buClr>
-              <a:buSzPts val="2000"/>
+              <a:buSzPct val="66500"/>
+              <a:buFont typeface="Noto Sans CJK JP"/>
               <a:buChar char="○"/>
               <a:defRPr sz="2000" lang="ja-JP">
                 <a:solidFill>
@@ -2711,8 +2714,9 @@
               <a:buClr>
                 <a:srgbClr val="303437"/>
               </a:buClr>
-              <a:buSzPts val="2000"/>
-              <a:buChar char="■"/>
+              <a:buSzPct val="66500"/>
+              <a:buFont typeface="Noto Sans CJK JP"/>
+              <a:buChar char="○"/>
               <a:defRPr sz="2000" lang="ja-JP">
                 <a:solidFill>
                   <a:srgbClr val="303437"/>
@@ -2769,7 +2773,6 @@
               <a:buClr>
                 <a:schemeClr val="lt1"/>
               </a:buClr>
-              <a:buSzPts val="1400"/>
               <a:buNone/>
               <a:defRPr sz="1400" b="1" lang="ja-JP">
                 <a:solidFill>
@@ -2787,7 +2790,6 @@
               <a:spcAft>
                 <a:spcPts val="0"/>
               </a:spcAft>
-              <a:buSzPts val="2800"/>
               <a:buNone/>
               <a:defRPr lang="ja-JP">
                 <a:latin typeface="Noto Sans"/>
@@ -2802,7 +2804,6 @@
               <a:spcAft>
                 <a:spcPts val="0"/>
               </a:spcAft>
-              <a:buSzPts val="2800"/>
               <a:buNone/>
               <a:defRPr lang="ja-JP">
                 <a:latin typeface="Noto Sans"/>
@@ -2817,7 +2818,6 @@
               <a:spcAft>
                 <a:spcPts val="0"/>
               </a:spcAft>
-              <a:buSzPts val="2800"/>
               <a:buNone/>
               <a:defRPr lang="ja-JP">
                 <a:latin typeface="Noto Sans"/>
@@ -2832,7 +2832,6 @@
               <a:spcAft>
                 <a:spcPts val="0"/>
               </a:spcAft>
-              <a:buSzPts val="2800"/>
               <a:buNone/>
               <a:defRPr lang="ja-JP">
                 <a:latin typeface="Noto Sans"/>
@@ -2847,7 +2846,6 @@
               <a:spcAft>
                 <a:spcPts val="0"/>
               </a:spcAft>
-              <a:buSzPts val="2800"/>
               <a:buNone/>
               <a:defRPr lang="ja-JP">
                 <a:latin typeface="Noto Sans"/>
@@ -2862,7 +2860,6 @@
               <a:spcAft>
                 <a:spcPts val="0"/>
               </a:spcAft>
-              <a:buSzPts val="2800"/>
               <a:buNone/>
               <a:defRPr lang="ja-JP">
                 <a:latin typeface="Noto Sans"/>
@@ -2877,7 +2874,6 @@
               <a:spcAft>
                 <a:spcPts val="0"/>
               </a:spcAft>
-              <a:buSzPts val="2800"/>
               <a:buNone/>
               <a:defRPr lang="ja-JP">
                 <a:latin typeface="Noto Sans"/>
@@ -2892,7 +2888,6 @@
               <a:spcAft>
                 <a:spcPts val="0"/>
               </a:spcAft>
-              <a:buSzPts val="2800"/>
               <a:buNone/>
               <a:defRPr lang="ja-JP">
                 <a:latin typeface="Noto Sans"/>
@@ -3070,7 +3065,6 @@
               <a:buClr>
                 <a:schemeClr val="dk1"/>
               </a:buClr>
-              <a:buSzPts val="3000"/>
               <a:buNone/>
               <a:defRPr sz="3000" b="1" lang="ja-JP">
                 <a:solidFill>
@@ -3088,7 +3082,6 @@
               <a:spcAft>
                 <a:spcPts val="0"/>
               </a:spcAft>
-              <a:buSzPts val="2800"/>
               <a:buNone/>
               <a:defRPr lang="ja-JP">
                 <a:latin typeface="Noto Sans"/>
@@ -3103,7 +3096,6 @@
               <a:spcAft>
                 <a:spcPts val="0"/>
               </a:spcAft>
-              <a:buSzPts val="2800"/>
               <a:buNone/>
               <a:defRPr lang="ja-JP">
                 <a:latin typeface="Noto Sans"/>
@@ -3118,7 +3110,6 @@
               <a:spcAft>
                 <a:spcPts val="0"/>
               </a:spcAft>
-              <a:buSzPts val="2800"/>
               <a:buNone/>
               <a:defRPr lang="ja-JP">
                 <a:latin typeface="Noto Sans"/>
@@ -3133,7 +3124,6 @@
               <a:spcAft>
                 <a:spcPts val="0"/>
               </a:spcAft>
-              <a:buSzPts val="2800"/>
               <a:buNone/>
               <a:defRPr lang="ja-JP">
                 <a:latin typeface="Noto Sans"/>
@@ -3148,7 +3138,6 @@
               <a:spcAft>
                 <a:spcPts val="0"/>
               </a:spcAft>
-              <a:buSzPts val="2800"/>
               <a:buNone/>
               <a:defRPr lang="ja-JP">
                 <a:latin typeface="Noto Sans"/>
@@ -3163,7 +3152,6 @@
               <a:spcAft>
                 <a:spcPts val="0"/>
               </a:spcAft>
-              <a:buSzPts val="2800"/>
               <a:buNone/>
               <a:defRPr lang="ja-JP">
                 <a:latin typeface="Noto Sans"/>
@@ -3178,7 +3166,6 @@
               <a:spcAft>
                 <a:spcPts val="0"/>
               </a:spcAft>
-              <a:buSzPts val="2800"/>
               <a:buNone/>
               <a:defRPr lang="ja-JP">
                 <a:latin typeface="Noto Sans"/>
@@ -3193,7 +3180,6 @@
               <a:spcAft>
                 <a:spcPts val="0"/>
               </a:spcAft>
-              <a:buSzPts val="2800"/>
               <a:buNone/>
               <a:defRPr lang="ja-JP">
                 <a:latin typeface="Noto Sans"/>
@@ -3248,7 +3234,6 @@
               <a:buClr>
                 <a:schemeClr val="lt1"/>
               </a:buClr>
-              <a:buSzPts val="1400"/>
               <a:buNone/>
               <a:defRPr sz="1400" b="1" lang="ja-JP">
                 <a:solidFill>
@@ -3266,7 +3251,6 @@
               <a:spcAft>
                 <a:spcPts val="0"/>
               </a:spcAft>
-              <a:buSzPts val="2800"/>
               <a:buNone/>
               <a:defRPr lang="ja-JP">
                 <a:latin typeface="Noto Sans"/>
@@ -3281,7 +3265,6 @@
               <a:spcAft>
                 <a:spcPts val="0"/>
               </a:spcAft>
-              <a:buSzPts val="2800"/>
               <a:buNone/>
               <a:defRPr lang="ja-JP">
                 <a:latin typeface="Noto Sans"/>
@@ -3296,7 +3279,6 @@
               <a:spcAft>
                 <a:spcPts val="0"/>
               </a:spcAft>
-              <a:buSzPts val="2800"/>
               <a:buNone/>
               <a:defRPr lang="ja-JP">
                 <a:latin typeface="Noto Sans"/>
@@ -3311,7 +3293,6 @@
               <a:spcAft>
                 <a:spcPts val="0"/>
               </a:spcAft>
-              <a:buSzPts val="2800"/>
               <a:buNone/>
               <a:defRPr lang="ja-JP">
                 <a:latin typeface="Noto Sans"/>
@@ -3326,7 +3307,6 @@
               <a:spcAft>
                 <a:spcPts val="0"/>
               </a:spcAft>
-              <a:buSzPts val="2800"/>
               <a:buNone/>
               <a:defRPr lang="ja-JP">
                 <a:latin typeface="Noto Sans"/>
@@ -3341,7 +3321,6 @@
               <a:spcAft>
                 <a:spcPts val="0"/>
               </a:spcAft>
-              <a:buSzPts val="2800"/>
               <a:buNone/>
               <a:defRPr lang="ja-JP">
                 <a:latin typeface="Noto Sans"/>
@@ -3356,7 +3335,6 @@
               <a:spcAft>
                 <a:spcPts val="0"/>
               </a:spcAft>
-              <a:buSzPts val="2800"/>
               <a:buNone/>
               <a:defRPr lang="ja-JP">
                 <a:latin typeface="Noto Sans"/>
@@ -3371,7 +3349,6 @@
               <a:spcAft>
                 <a:spcPts val="0"/>
               </a:spcAft>
-              <a:buSzPts val="2800"/>
               <a:buNone/>
               <a:defRPr lang="ja-JP">
                 <a:latin typeface="Noto Sans"/>
@@ -3549,7 +3526,6 @@
               <a:buClr>
                 <a:schemeClr val="dk1"/>
               </a:buClr>
-              <a:buSzPts val="3000"/>
               <a:buNone/>
               <a:defRPr sz="3000" b="1" lang="ja-JP">
                 <a:solidFill>
@@ -3567,7 +3543,6 @@
               <a:spcAft>
                 <a:spcPts val="0"/>
               </a:spcAft>
-              <a:buSzPts val="2800"/>
               <a:buNone/>
               <a:defRPr lang="ja-JP">
                 <a:latin typeface="Noto Sans"/>
@@ -3582,7 +3557,6 @@
               <a:spcAft>
                 <a:spcPts val="0"/>
               </a:spcAft>
-              <a:buSzPts val="2800"/>
               <a:buNone/>
               <a:defRPr lang="ja-JP">
                 <a:latin typeface="Noto Sans"/>
@@ -3597,7 +3571,6 @@
               <a:spcAft>
                 <a:spcPts val="0"/>
               </a:spcAft>
-              <a:buSzPts val="2800"/>
               <a:buNone/>
               <a:defRPr lang="ja-JP">
                 <a:latin typeface="Noto Sans"/>
@@ -3612,7 +3585,6 @@
               <a:spcAft>
                 <a:spcPts val="0"/>
               </a:spcAft>
-              <a:buSzPts val="2800"/>
               <a:buNone/>
               <a:defRPr lang="ja-JP">
                 <a:latin typeface="Noto Sans"/>
@@ -3627,7 +3599,6 @@
               <a:spcAft>
                 <a:spcPts val="0"/>
               </a:spcAft>
-              <a:buSzPts val="2800"/>
               <a:buNone/>
               <a:defRPr lang="ja-JP">
                 <a:latin typeface="Noto Sans"/>
@@ -3642,7 +3613,6 @@
               <a:spcAft>
                 <a:spcPts val="0"/>
               </a:spcAft>
-              <a:buSzPts val="2800"/>
               <a:buNone/>
               <a:defRPr lang="ja-JP">
                 <a:latin typeface="Noto Sans"/>
@@ -3657,7 +3627,6 @@
               <a:spcAft>
                 <a:spcPts val="0"/>
               </a:spcAft>
-              <a:buSzPts val="2800"/>
               <a:buNone/>
               <a:defRPr lang="ja-JP">
                 <a:latin typeface="Noto Sans"/>
@@ -3672,7 +3641,6 @@
               <a:spcAft>
                 <a:spcPts val="0"/>
               </a:spcAft>
-              <a:buSzPts val="2800"/>
               <a:buNone/>
               <a:defRPr lang="ja-JP">
                 <a:latin typeface="Noto Sans"/>
@@ -3727,7 +3695,6 @@
               <a:buClr>
                 <a:schemeClr val="lt1"/>
               </a:buClr>
-              <a:buSzPts val="1400"/>
               <a:buNone/>
               <a:defRPr sz="1400" b="1" lang="ja-JP">
                 <a:solidFill>
@@ -3745,7 +3712,6 @@
               <a:spcAft>
                 <a:spcPts val="0"/>
               </a:spcAft>
-              <a:buSzPts val="2800"/>
               <a:buNone/>
               <a:defRPr lang="ja-JP">
                 <a:latin typeface="Noto Sans"/>
@@ -3760,7 +3726,6 @@
               <a:spcAft>
                 <a:spcPts val="0"/>
               </a:spcAft>
-              <a:buSzPts val="2800"/>
               <a:buNone/>
               <a:defRPr lang="ja-JP">
                 <a:latin typeface="Noto Sans"/>
@@ -3775,7 +3740,6 @@
               <a:spcAft>
                 <a:spcPts val="0"/>
               </a:spcAft>
-              <a:buSzPts val="2800"/>
               <a:buNone/>
               <a:defRPr lang="ja-JP">
                 <a:latin typeface="Noto Sans"/>
@@ -3790,7 +3754,6 @@
               <a:spcAft>
                 <a:spcPts val="0"/>
               </a:spcAft>
-              <a:buSzPts val="2800"/>
               <a:buNone/>
               <a:defRPr lang="ja-JP">
                 <a:latin typeface="Noto Sans"/>
@@ -3805,7 +3768,6 @@
               <a:spcAft>
                 <a:spcPts val="0"/>
               </a:spcAft>
-              <a:buSzPts val="2800"/>
               <a:buNone/>
               <a:defRPr lang="ja-JP">
                 <a:latin typeface="Noto Sans"/>
@@ -3820,7 +3782,6 @@
               <a:spcAft>
                 <a:spcPts val="0"/>
               </a:spcAft>
-              <a:buSzPts val="2800"/>
               <a:buNone/>
               <a:defRPr lang="ja-JP">
                 <a:latin typeface="Noto Sans"/>
@@ -3835,7 +3796,6 @@
               <a:spcAft>
                 <a:spcPts val="0"/>
               </a:spcAft>
-              <a:buSzPts val="2800"/>
               <a:buNone/>
               <a:defRPr lang="ja-JP">
                 <a:latin typeface="Noto Sans"/>
@@ -3850,7 +3810,6 @@
               <a:spcAft>
                 <a:spcPts val="0"/>
               </a:spcAft>
-              <a:buSzPts val="2800"/>
               <a:buNone/>
               <a:defRPr lang="ja-JP">
                 <a:latin typeface="Noto Sans"/>
@@ -4028,7 +3987,8 @@
               <a:buClr>
                 <a:srgbClr val="303437"/>
               </a:buClr>
-              <a:buSzPts val="2000"/>
+              <a:buSzPct val="66500"/>
+              <a:buFont typeface="Noto Sans CJK JP"/>
               <a:buChar char="●"/>
               <a:defRPr sz="2000" lang="ja-JP">
                 <a:solidFill>
@@ -4049,7 +4009,8 @@
               <a:buClr>
                 <a:srgbClr val="303437"/>
               </a:buClr>
-              <a:buSzPts val="2000"/>
+              <a:buSzPct val="66500"/>
+              <a:buFont typeface="Noto Sans CJK JP"/>
               <a:buChar char="○"/>
               <a:defRPr sz="2000" lang="ja-JP">
                 <a:solidFill>
@@ -4070,8 +4031,9 @@
               <a:buClr>
                 <a:srgbClr val="303437"/>
               </a:buClr>
-              <a:buSzPts val="2000"/>
-              <a:buChar char="■"/>
+              <a:buSzPct val="66500"/>
+              <a:buFont typeface="Noto Sans CJK JP"/>
+              <a:buChar char="○"/>
               <a:defRPr sz="2000" lang="ja-JP">
                 <a:solidFill>
                   <a:srgbClr val="303437"/>
@@ -4091,7 +4053,8 @@
               <a:buClr>
                 <a:srgbClr val="303437"/>
               </a:buClr>
-              <a:buSzPts val="2200"/>
+              <a:buSzPct val="60455"/>
+              <a:buFont typeface="Noto Sans CJK JP"/>
               <a:buChar char="●"/>
               <a:defRPr sz="2200" lang="ja-JP">
                 <a:solidFill>
@@ -4112,7 +4075,8 @@
               <a:buClr>
                 <a:srgbClr val="303437"/>
               </a:buClr>
-              <a:buSzPts val="2000"/>
+              <a:buSzPct val="66500"/>
+              <a:buFont typeface="Noto Sans CJK JP"/>
               <a:buChar char="○"/>
               <a:defRPr sz="2000" lang="ja-JP">
                 <a:solidFill>
@@ -4133,8 +4097,9 @@
               <a:buClr>
                 <a:srgbClr val="303437"/>
               </a:buClr>
-              <a:buSzPts val="2000"/>
-              <a:buChar char="■"/>
+              <a:buSzPct val="66500"/>
+              <a:buFont typeface="Noto Sans CJK JP"/>
+              <a:buChar char="○"/>
               <a:defRPr sz="2000" lang="ja-JP">
                 <a:solidFill>
                   <a:srgbClr val="303437"/>
@@ -4154,7 +4119,8 @@
               <a:buClr>
                 <a:srgbClr val="303437"/>
               </a:buClr>
-              <a:buSzPts val="2000"/>
+              <a:buSzPct val="66500"/>
+              <a:buFont typeface="Noto Sans CJK JP"/>
               <a:buChar char="●"/>
               <a:defRPr sz="2000" lang="ja-JP">
                 <a:solidFill>
@@ -4175,7 +4141,8 @@
               <a:buClr>
                 <a:srgbClr val="303437"/>
               </a:buClr>
-              <a:buSzPts val="2000"/>
+              <a:buSzPct val="66500"/>
+              <a:buFont typeface="Noto Sans CJK JP"/>
               <a:buChar char="○"/>
               <a:defRPr sz="2000" lang="ja-JP">
                 <a:solidFill>
@@ -4196,8 +4163,9 @@
               <a:buClr>
                 <a:srgbClr val="303437"/>
               </a:buClr>
-              <a:buSzPts val="2000"/>
-              <a:buChar char="■"/>
+              <a:buSzPct val="66500"/>
+              <a:buFont typeface="Noto Sans CJK JP"/>
+              <a:buChar char="○"/>
               <a:defRPr sz="2000" lang="ja-JP">
                 <a:solidFill>
                   <a:srgbClr val="303437"/>
@@ -4254,7 +4222,6 @@
               <a:buClr>
                 <a:schemeClr val="lt1"/>
               </a:buClr>
-              <a:buSzPts val="1400"/>
               <a:buNone/>
               <a:defRPr sz="1400" b="1" lang="ja-JP">
                 <a:solidFill>
@@ -4272,7 +4239,6 @@
               <a:spcAft>
                 <a:spcPts val="0"/>
               </a:spcAft>
-              <a:buSzPts val="2800"/>
               <a:buNone/>
               <a:defRPr lang="ja-JP">
                 <a:latin typeface="Noto Sans"/>
@@ -4287,7 +4253,6 @@
               <a:spcAft>
                 <a:spcPts val="0"/>
               </a:spcAft>
-              <a:buSzPts val="2800"/>
               <a:buNone/>
               <a:defRPr lang="ja-JP">
                 <a:latin typeface="Noto Sans"/>
@@ -4302,7 +4267,6 @@
               <a:spcAft>
                 <a:spcPts val="0"/>
               </a:spcAft>
-              <a:buSzPts val="2800"/>
               <a:buNone/>
               <a:defRPr lang="ja-JP">
                 <a:latin typeface="Noto Sans"/>
@@ -4317,7 +4281,6 @@
               <a:spcAft>
                 <a:spcPts val="0"/>
               </a:spcAft>
-              <a:buSzPts val="2800"/>
               <a:buNone/>
               <a:defRPr lang="ja-JP">
                 <a:latin typeface="Noto Sans"/>
@@ -4332,7 +4295,6 @@
               <a:spcAft>
                 <a:spcPts val="0"/>
               </a:spcAft>
-              <a:buSzPts val="2800"/>
               <a:buNone/>
               <a:defRPr lang="ja-JP">
                 <a:latin typeface="Noto Sans"/>
@@ -4347,7 +4309,6 @@
               <a:spcAft>
                 <a:spcPts val="0"/>
               </a:spcAft>
-              <a:buSzPts val="2800"/>
               <a:buNone/>
               <a:defRPr lang="ja-JP">
                 <a:latin typeface="Noto Sans"/>
@@ -4362,7 +4323,6 @@
               <a:spcAft>
                 <a:spcPts val="0"/>
               </a:spcAft>
-              <a:buSzPts val="2800"/>
               <a:buNone/>
               <a:defRPr lang="ja-JP">
                 <a:latin typeface="Noto Sans"/>
@@ -4377,7 +4337,6 @@
               <a:spcAft>
                 <a:spcPts val="0"/>
               </a:spcAft>
-              <a:buSzPts val="2800"/>
               <a:buNone/>
               <a:defRPr lang="ja-JP">
                 <a:latin typeface="Noto Sans"/>
@@ -4558,7 +4517,6 @@
               <a:buClr>
                 <a:schemeClr val="lt1"/>
               </a:buClr>
-              <a:buSzPts val="1400"/>
               <a:buNone/>
               <a:defRPr sz="1400" b="1" lang="ja-JP">
                 <a:solidFill>
@@ -4576,7 +4534,6 @@
               <a:spcAft>
                 <a:spcPts val="0"/>
               </a:spcAft>
-              <a:buSzPts val="2800"/>
               <a:buNone/>
               <a:defRPr lang="ja-JP">
                 <a:latin typeface="Noto Sans"/>
@@ -4591,7 +4548,6 @@
               <a:spcAft>
                 <a:spcPts val="0"/>
               </a:spcAft>
-              <a:buSzPts val="2800"/>
               <a:buNone/>
               <a:defRPr lang="ja-JP">
                 <a:latin typeface="Noto Sans"/>
@@ -4606,7 +4562,6 @@
               <a:spcAft>
                 <a:spcPts val="0"/>
               </a:spcAft>
-              <a:buSzPts val="2800"/>
               <a:buNone/>
               <a:defRPr lang="ja-JP">
                 <a:latin typeface="Noto Sans"/>
@@ -4621,7 +4576,6 @@
               <a:spcAft>
                 <a:spcPts val="0"/>
               </a:spcAft>
-              <a:buSzPts val="2800"/>
               <a:buNone/>
               <a:defRPr lang="ja-JP">
                 <a:latin typeface="Noto Sans"/>
@@ -4636,7 +4590,6 @@
               <a:spcAft>
                 <a:spcPts val="0"/>
               </a:spcAft>
-              <a:buSzPts val="2800"/>
               <a:buNone/>
               <a:defRPr lang="ja-JP">
                 <a:latin typeface="Noto Sans"/>
@@ -4651,7 +4604,6 @@
               <a:spcAft>
                 <a:spcPts val="0"/>
               </a:spcAft>
-              <a:buSzPts val="2800"/>
               <a:buNone/>
               <a:defRPr lang="ja-JP">
                 <a:latin typeface="Noto Sans"/>
@@ -4666,7 +4618,6 @@
               <a:spcAft>
                 <a:spcPts val="0"/>
               </a:spcAft>
-              <a:buSzPts val="2800"/>
               <a:buNone/>
               <a:defRPr lang="ja-JP">
                 <a:latin typeface="Noto Sans"/>
@@ -4681,7 +4632,6 @@
               <a:spcAft>
                 <a:spcPts val="0"/>
               </a:spcAft>
-              <a:buSzPts val="2800"/>
               <a:buNone/>
               <a:defRPr lang="ja-JP">
                 <a:latin typeface="Noto Sans"/>
@@ -4906,7 +4856,8 @@
               <a:buClr>
                 <a:srgbClr val="303437"/>
               </a:buClr>
-              <a:buSzPts val="2000"/>
+              <a:buSzPct val="66500"/>
+              <a:buFont typeface="Noto Sans CJK JP"/>
               <a:buChar char="●"/>
               <a:defRPr sz="2000" lang="ja-JP">
                 <a:solidFill>
@@ -4927,7 +4878,8 @@
               <a:buClr>
                 <a:srgbClr val="303437"/>
               </a:buClr>
-              <a:buSzPts val="2000"/>
+              <a:buSzPct val="66500"/>
+              <a:buFont typeface="Noto Sans CJK JP"/>
               <a:buChar char="○"/>
               <a:defRPr sz="2000" lang="ja-JP">
                 <a:solidFill>
@@ -4948,8 +4900,9 @@
               <a:buClr>
                 <a:srgbClr val="303437"/>
               </a:buClr>
-              <a:buSzPts val="2000"/>
-              <a:buChar char="■"/>
+              <a:buSzPct val="66500"/>
+              <a:buFont typeface="Noto Sans CJK JP"/>
+              <a:buChar char="○"/>
               <a:defRPr sz="2000" lang="ja-JP">
                 <a:solidFill>
                   <a:srgbClr val="303437"/>
@@ -4969,7 +4922,8 @@
               <a:buClr>
                 <a:srgbClr val="303437"/>
               </a:buClr>
-              <a:buSzPts val="2200"/>
+              <a:buSzPct val="60455"/>
+              <a:buFont typeface="Noto Sans CJK JP"/>
               <a:buChar char="●"/>
               <a:defRPr sz="2200" lang="ja-JP">
                 <a:solidFill>
@@ -4990,7 +4944,8 @@
               <a:buClr>
                 <a:srgbClr val="303437"/>
               </a:buClr>
-              <a:buSzPts val="2000"/>
+              <a:buSzPct val="66500"/>
+              <a:buFont typeface="Noto Sans CJK JP"/>
               <a:buChar char="○"/>
               <a:defRPr sz="2000" lang="ja-JP">
                 <a:solidFill>
@@ -5011,8 +4966,9 @@
               <a:buClr>
                 <a:srgbClr val="303437"/>
               </a:buClr>
-              <a:buSzPts val="2000"/>
-              <a:buChar char="■"/>
+              <a:buSzPct val="66500"/>
+              <a:buFont typeface="Noto Sans CJK JP"/>
+              <a:buChar char="○"/>
               <a:defRPr sz="2000" lang="ja-JP">
                 <a:solidFill>
                   <a:srgbClr val="303437"/>
@@ -5032,7 +4988,8 @@
               <a:buClr>
                 <a:srgbClr val="303437"/>
               </a:buClr>
-              <a:buSzPts val="2000"/>
+              <a:buSzPct val="66500"/>
+              <a:buFont typeface="Noto Sans CJK JP"/>
               <a:buChar char="●"/>
               <a:defRPr sz="2000" lang="ja-JP">
                 <a:solidFill>
@@ -5053,7 +5010,8 @@
               <a:buClr>
                 <a:srgbClr val="303437"/>
               </a:buClr>
-              <a:buSzPts val="2000"/>
+              <a:buSzPct val="66500"/>
+              <a:buFont typeface="Noto Sans CJK JP"/>
               <a:buChar char="○"/>
               <a:defRPr sz="2000" lang="ja-JP">
                 <a:solidFill>
@@ -5074,8 +5032,9 @@
               <a:buClr>
                 <a:srgbClr val="303437"/>
               </a:buClr>
-              <a:buSzPts val="2000"/>
-              <a:buChar char="■"/>
+              <a:buSzPct val="66500"/>
+              <a:buFont typeface="Noto Sans CJK JP"/>
+              <a:buChar char="○"/>
               <a:defRPr sz="2000" lang="ja-JP">
                 <a:solidFill>
                   <a:srgbClr val="303437"/>
@@ -5131,7 +5090,8 @@
               <a:buClr>
                 <a:srgbClr val="303437"/>
               </a:buClr>
-              <a:buSzPts val="2000"/>
+              <a:buSzPct val="66500"/>
+              <a:buFont typeface="Noto Sans CJK JP"/>
               <a:buChar char="●"/>
               <a:defRPr sz="2000" lang="ja-JP">
                 <a:solidFill>
@@ -5152,7 +5112,8 @@
               <a:buClr>
                 <a:srgbClr val="303437"/>
               </a:buClr>
-              <a:buSzPts val="2000"/>
+              <a:buSzPct val="66500"/>
+              <a:buFont typeface="Noto Sans CJK JP"/>
               <a:buChar char="○"/>
               <a:defRPr sz="2000" lang="ja-JP">
                 <a:solidFill>
@@ -5173,8 +5134,9 @@
               <a:buClr>
                 <a:srgbClr val="303437"/>
               </a:buClr>
-              <a:buSzPts val="2000"/>
-              <a:buChar char="■"/>
+              <a:buSzPct val="66500"/>
+              <a:buFont typeface="Noto Sans CJK JP"/>
+              <a:buChar char="○"/>
               <a:defRPr sz="2000" lang="ja-JP">
                 <a:solidFill>
                   <a:srgbClr val="303437"/>
@@ -5194,7 +5156,8 @@
               <a:buClr>
                 <a:srgbClr val="303437"/>
               </a:buClr>
-              <a:buSzPts val="2200"/>
+              <a:buSzPct val="60455"/>
+              <a:buFont typeface="Noto Sans CJK JP"/>
               <a:buChar char="●"/>
               <a:defRPr sz="2200" lang="ja-JP">
                 <a:solidFill>
@@ -5215,7 +5178,8 @@
               <a:buClr>
                 <a:srgbClr val="303437"/>
               </a:buClr>
-              <a:buSzPts val="2000"/>
+              <a:buSzPct val="66500"/>
+              <a:buFont typeface="Noto Sans CJK JP"/>
               <a:buChar char="○"/>
               <a:defRPr sz="2000" lang="ja-JP">
                 <a:solidFill>
@@ -5236,8 +5200,9 @@
               <a:buClr>
                 <a:srgbClr val="303437"/>
               </a:buClr>
-              <a:buSzPts val="2000"/>
-              <a:buChar char="■"/>
+              <a:buSzPct val="66500"/>
+              <a:buFont typeface="Noto Sans CJK JP"/>
+              <a:buChar char="○"/>
               <a:defRPr sz="2000" lang="ja-JP">
                 <a:solidFill>
                   <a:srgbClr val="303437"/>
@@ -5257,7 +5222,8 @@
               <a:buClr>
                 <a:srgbClr val="303437"/>
               </a:buClr>
-              <a:buSzPts val="2000"/>
+              <a:buSzPct val="66500"/>
+              <a:buFont typeface="Noto Sans CJK JP"/>
               <a:buChar char="●"/>
               <a:defRPr sz="2000" lang="ja-JP">
                 <a:solidFill>
@@ -5278,7 +5244,8 @@
               <a:buClr>
                 <a:srgbClr val="303437"/>
               </a:buClr>
-              <a:buSzPts val="2000"/>
+              <a:buSzPct val="66500"/>
+              <a:buFont typeface="Noto Sans CJK JP"/>
               <a:buChar char="○"/>
               <a:defRPr sz="2000" lang="ja-JP">
                 <a:solidFill>
@@ -5299,8 +5266,9 @@
               <a:buClr>
                 <a:srgbClr val="303437"/>
               </a:buClr>
-              <a:buSzPts val="2000"/>
-              <a:buChar char="■"/>
+              <a:buSzPct val="66500"/>
+              <a:buFont typeface="Noto Sans CJK JP"/>
+              <a:buChar char="○"/>
               <a:defRPr sz="2000" lang="ja-JP">
                 <a:solidFill>
                   <a:srgbClr val="303437"/>
@@ -5454,7 +5422,6 @@
               <a:buClr>
                 <a:schemeClr val="lt1"/>
               </a:buClr>
-              <a:buSzPts val="2800"/>
               <a:buNone/>
               <a:defRPr b="1" lang="ja-JP">
                 <a:solidFill>
@@ -5475,7 +5442,6 @@
               <a:buClr>
                 <a:schemeClr val="lt1"/>
               </a:buClr>
-              <a:buSzPts val="3200"/>
               <a:buNone/>
               <a:defRPr sz="3200" b="1" lang="ja-JP">
                 <a:solidFill>
@@ -5496,7 +5462,6 @@
               <a:buClr>
                 <a:schemeClr val="lt1"/>
               </a:buClr>
-              <a:buSzPts val="3200"/>
               <a:buNone/>
               <a:defRPr sz="3200" b="1" lang="ja-JP">
                 <a:solidFill>
@@ -5517,7 +5482,6 @@
               <a:buClr>
                 <a:schemeClr val="lt1"/>
               </a:buClr>
-              <a:buSzPts val="3200"/>
               <a:buNone/>
               <a:defRPr sz="3200" b="1" lang="ja-JP">
                 <a:solidFill>
@@ -5538,7 +5502,6 @@
               <a:buClr>
                 <a:schemeClr val="lt1"/>
               </a:buClr>
-              <a:buSzPts val="3200"/>
               <a:buNone/>
               <a:defRPr sz="3200" b="1" lang="ja-JP">
                 <a:solidFill>
@@ -5559,7 +5522,6 @@
               <a:buClr>
                 <a:schemeClr val="lt1"/>
               </a:buClr>
-              <a:buSzPts val="3200"/>
               <a:buNone/>
               <a:defRPr sz="3200" b="1" lang="ja-JP">
                 <a:solidFill>
@@ -5580,7 +5542,6 @@
               <a:buClr>
                 <a:schemeClr val="lt1"/>
               </a:buClr>
-              <a:buSzPts val="3200"/>
               <a:buNone/>
               <a:defRPr sz="3200" b="1" lang="ja-JP">
                 <a:solidFill>
@@ -5601,7 +5562,6 @@
               <a:buClr>
                 <a:schemeClr val="lt1"/>
               </a:buClr>
-              <a:buSzPts val="3200"/>
               <a:buNone/>
               <a:defRPr sz="3200" b="1" lang="ja-JP">
                 <a:solidFill>
@@ -5622,7 +5582,6 @@
               <a:buClr>
                 <a:schemeClr val="lt1"/>
               </a:buClr>
-              <a:buSzPts val="3200"/>
               <a:buNone/>
               <a:defRPr sz="3200" b="1" lang="ja-JP">
                 <a:solidFill>
@@ -5757,7 +5716,6 @@
               <a:buClr>
                 <a:schemeClr val="dk1"/>
               </a:buClr>
-              <a:buSzPts val="2800"/>
               <a:buNone/>
               <a:defRPr sz="2800" lang="ja-JP">
                 <a:solidFill>
@@ -5778,7 +5736,6 @@
               <a:buClr>
                 <a:schemeClr val="dk1"/>
               </a:buClr>
-              <a:buSzPts val="2800"/>
               <a:buNone/>
               <a:defRPr sz="2800" lang="ja-JP">
                 <a:solidFill>
@@ -5799,7 +5756,6 @@
               <a:buClr>
                 <a:schemeClr val="dk1"/>
               </a:buClr>
-              <a:buSzPts val="2800"/>
               <a:buNone/>
               <a:defRPr sz="2800" lang="ja-JP">
                 <a:solidFill>
@@ -5820,7 +5776,6 @@
               <a:buClr>
                 <a:schemeClr val="dk1"/>
               </a:buClr>
-              <a:buSzPts val="2800"/>
               <a:buNone/>
               <a:defRPr sz="2800" lang="ja-JP">
                 <a:solidFill>
@@ -5841,7 +5796,6 @@
               <a:buClr>
                 <a:schemeClr val="dk1"/>
               </a:buClr>
-              <a:buSzPts val="2800"/>
               <a:buNone/>
               <a:defRPr sz="2800" lang="ja-JP">
                 <a:solidFill>
@@ -5862,7 +5816,6 @@
               <a:buClr>
                 <a:schemeClr val="dk1"/>
               </a:buClr>
-              <a:buSzPts val="2800"/>
               <a:buNone/>
               <a:defRPr sz="2800" lang="ja-JP">
                 <a:solidFill>
@@ -5883,7 +5836,6 @@
               <a:buClr>
                 <a:schemeClr val="dk1"/>
               </a:buClr>
-              <a:buSzPts val="2800"/>
               <a:buNone/>
               <a:defRPr sz="2800" lang="ja-JP">
                 <a:solidFill>
@@ -5904,7 +5856,6 @@
               <a:buClr>
                 <a:schemeClr val="dk1"/>
               </a:buClr>
-              <a:buSzPts val="2800"/>
               <a:buNone/>
               <a:defRPr sz="2800" lang="ja-JP">
                 <a:solidFill>
@@ -5925,7 +5876,6 @@
               <a:buClr>
                 <a:schemeClr val="dk1"/>
               </a:buClr>
-              <a:buSzPts val="2800"/>
               <a:buNone/>
               <a:defRPr sz="2800" lang="ja-JP">
                 <a:solidFill>
@@ -5987,8 +5937,9 @@
               <a:buClr>
                 <a:schemeClr val="dk2"/>
               </a:buClr>
-              <a:buSzPts val="1800"/>
-              <a:buChar char="•"/>
+              <a:buSzPct val="73889"/>
+              <a:buFont typeface="Noto Sans CJK JP"/>
+              <a:buChar char="●"/>
               <a:defRPr sz="1800" lang="ja-JP">
                 <a:solidFill>
                   <a:schemeClr val="dk2"/>
@@ -6011,7 +5962,8 @@
               <a:buClr>
                 <a:schemeClr val="dk2"/>
               </a:buClr>
-              <a:buSzPts val="1400"/>
+              <a:buSzPct val="66500"/>
+              <a:buFont typeface="Noto Sans CJK JP"/>
               <a:buChar char="○"/>
               <a:defRPr lang="ja-JP">
                 <a:solidFill>
@@ -6035,8 +5987,9 @@
               <a:buClr>
                 <a:schemeClr val="dk2"/>
               </a:buClr>
-              <a:buSzPts val="1400"/>
-              <a:buChar char="■"/>
+              <a:buSzPct val="66500"/>
+              <a:buFont typeface="Noto Sans CJK JP"/>
+              <a:buChar char="○"/>
               <a:defRPr lang="ja-JP">
                 <a:solidFill>
                   <a:schemeClr val="dk2"/>
@@ -6059,8 +6012,9 @@
               <a:buClr>
                 <a:schemeClr val="dk2"/>
               </a:buClr>
-              <a:buSzPts val="1400"/>
-              <a:buChar char="•"/>
+              <a:buSzPct val="66500"/>
+              <a:buFont typeface="Noto Sans CJK JP"/>
+              <a:buChar char="○"/>
               <a:defRPr lang="ja-JP">
                 <a:solidFill>
                   <a:schemeClr val="dk2"/>
@@ -6083,7 +6037,8 @@
               <a:buClr>
                 <a:schemeClr val="dk2"/>
               </a:buClr>
-              <a:buSzPts val="1400"/>
+              <a:buSzPct val="66500"/>
+              <a:buFont typeface="Noto Sans CJK JP"/>
               <a:buChar char="○"/>
               <a:defRPr lang="ja-JP">
                 <a:solidFill>
@@ -6107,8 +6062,9 @@
               <a:buClr>
                 <a:schemeClr val="dk2"/>
               </a:buClr>
-              <a:buSzPts val="1400"/>
-              <a:buChar char="■"/>
+              <a:buSzPct val="66500"/>
+              <a:buFont typeface="Noto Sans CJK JP"/>
+              <a:buChar char="○"/>
               <a:defRPr lang="ja-JP">
                 <a:solidFill>
                   <a:schemeClr val="dk2"/>
@@ -6131,8 +6087,9 @@
               <a:buClr>
                 <a:schemeClr val="dk2"/>
               </a:buClr>
-              <a:buSzPts val="1400"/>
-              <a:buChar char="•"/>
+              <a:buSzPct val="66500"/>
+              <a:buFont typeface="Noto Sans CJK JP"/>
+              <a:buChar char="○"/>
               <a:defRPr lang="ja-JP">
                 <a:solidFill>
                   <a:schemeClr val="dk2"/>
@@ -6155,7 +6112,8 @@
               <a:buClr>
                 <a:schemeClr val="dk2"/>
               </a:buClr>
-              <a:buSzPts val="1400"/>
+              <a:buSzPct val="66500"/>
+              <a:buFont typeface="Noto Sans CJK JP"/>
               <a:buChar char="○"/>
               <a:defRPr lang="ja-JP">
                 <a:solidFill>
@@ -6179,8 +6137,9 @@
               <a:buClr>
                 <a:schemeClr val="dk2"/>
               </a:buClr>
-              <a:buSzPts val="1400"/>
-              <a:buChar char="■"/>
+              <a:buSzPct val="66500"/>
+              <a:buFont typeface="Noto Sans CJK JP"/>
+              <a:buChar char="○"/>
               <a:defRPr lang="ja-JP">
                 <a:solidFill>
                   <a:schemeClr val="dk2"/>
@@ -6610,7 +6569,8 @@
         <a:buClr>
           <a:srgbClr val="303437"/>
         </a:buClr>
-        <a:buSzPts val="2000"/>
+        <a:buSzPct val="66500"/>
+        <a:buFont typeface="Noto Sans CJK JP"/>
         <a:buChar char="●"/>
         <a:defRPr sz="2000" lang="ja-JP">
           <a:solidFill>
@@ -6631,7 +6591,8 @@
         <a:buClr>
           <a:srgbClr val="303437"/>
         </a:buClr>
-        <a:buSzPts val="2000"/>
+        <a:buSzPct val="66500"/>
+        <a:buFont typeface="Noto Sans CJK JP"/>
         <a:buChar char="○"/>
         <a:defRPr sz="2000" lang="ja-JP">
           <a:solidFill>
@@ -6652,8 +6613,9 @@
         <a:buClr>
           <a:srgbClr val="303437"/>
         </a:buClr>
-        <a:buSzPts val="2000"/>
-        <a:buChar char="■"/>
+        <a:buSzPct val="66500"/>
+        <a:buFont typeface="Noto Sans CJK JP"/>
+        <a:buChar char="○"/>
         <a:defRPr sz="2000" lang="ja-JP">
           <a:solidFill>
             <a:srgbClr val="303437"/>
@@ -6673,7 +6635,8 @@
         <a:buClr>
           <a:srgbClr val="303437"/>
         </a:buClr>
-        <a:buSzPts val="2200"/>
+        <a:buSzPct val="60455"/>
+        <a:buFont typeface="Noto Sans CJK JP"/>
         <a:buChar char="●"/>
         <a:defRPr sz="2200" lang="ja-JP">
           <a:solidFill>
@@ -6694,7 +6657,8 @@
         <a:buClr>
           <a:srgbClr val="303437"/>
         </a:buClr>
-        <a:buSzPts val="2000"/>
+        <a:buSzPct val="66500"/>
+        <a:buFont typeface="Noto Sans CJK JP"/>
         <a:buChar char="○"/>
         <a:defRPr sz="2000" lang="ja-JP">
           <a:solidFill>
@@ -6715,8 +6679,9 @@
         <a:buClr>
           <a:srgbClr val="303437"/>
         </a:buClr>
-        <a:buSzPts val="2000"/>
-        <a:buChar char="■"/>
+        <a:buSzPct val="66500"/>
+        <a:buFont typeface="Noto Sans CJK JP"/>
+        <a:buChar char="○"/>
         <a:defRPr sz="2000" lang="ja-JP">
           <a:solidFill>
             <a:srgbClr val="303437"/>
@@ -6736,7 +6701,8 @@
         <a:buClr>
           <a:srgbClr val="303437"/>
         </a:buClr>
-        <a:buSzPts val="2000"/>
+        <a:buSzPct val="66500"/>
+        <a:buFont typeface="Noto Sans CJK JP"/>
         <a:buChar char="●"/>
         <a:defRPr sz="2000" lang="ja-JP">
           <a:solidFill>
@@ -6757,7 +6723,8 @@
         <a:buClr>
           <a:srgbClr val="303437"/>
         </a:buClr>
-        <a:buSzPts val="2000"/>
+        <a:buSzPct val="66500"/>
+        <a:buFont typeface="Noto Sans CJK JP"/>
         <a:buChar char="○"/>
         <a:defRPr sz="2000" lang="ja-JP">
           <a:solidFill>
@@ -6778,8 +6745,9 @@
         <a:buClr>
           <a:srgbClr val="303437"/>
         </a:buClr>
-        <a:buSzPts val="2000"/>
-        <a:buChar char="■"/>
+        <a:buSzPct val="66500"/>
+        <a:buFont typeface="Noto Sans CJK JP"/>
+        <a:buChar char="○"/>
         <a:defRPr sz="2000" lang="ja-JP">
           <a:solidFill>
             <a:srgbClr val="303437"/>
@@ -7555,9 +7523,10 @@
           <a:lstStyle/>
           <a:p>
             <a:pPr algn="l" lvl="0" marL="457200" indent="-355600">
-              <a:buSzPts val="2000"/>
+              <a:buSzPct val="60455"/>
+              <a:buFont typeface="Noto Sans CJK JP"/>
               <a:buChar char="●"/>
-              <a:defRPr sz="2100" b="0" lang="ja-JP">
+              <a:defRPr sz="2200" b="0" lang="ja-JP">
                 <a:solidFill>
                   <a:srgbClr val="303437"/>
                 </a:solidFill>
@@ -7567,7 +7536,7 @@
               </a:defRPr>
             </a:pPr>
             <a:r>
-              <a:rPr sz="2100" lang="ja-JP">
+              <a:rPr sz="2200" lang="ja-JP">
                 <a:solidFill>
                   <a:srgbClr val="303437"/>
                 </a:solidFill>
@@ -7577,7 +7546,7 @@
               </a:rPr>
               <a:t>先行する含意判定の課題であるRTEは、評価用の規模だった。</a:t>
             </a:r>
-            <a:endParaRPr sz="2100" lang="ja-JP">
+            <a:endParaRPr sz="2200" lang="ja-JP">
               <a:latin typeface="Noto Sans"/>
               <a:ea typeface="Noto Sans CJK JP"/>
               <a:cs typeface="Noto Sans"/>
@@ -7585,16 +7554,17 @@
           </a:p>
           <a:p>
             <a:pPr algn="l" lvl="1" marL="914400" indent="-355600">
-              <a:buSzPts val="2000"/>
+              <a:buSzPct val="60455"/>
+              <a:buFont typeface="Noto Sans CJK JP"/>
               <a:buChar char="○"/>
-              <a:defRPr sz="2100" lang="ja-JP">
+              <a:defRPr sz="2200" lang="ja-JP">
                 <a:latin typeface="Noto Sans"/>
                 <a:ea typeface="Noto Sans CJK JP"/>
                 <a:cs typeface="Noto Sans"/>
               </a:defRPr>
             </a:pPr>
             <a:r>
-              <a:rPr sz="2100" lang="ja-JP">
+              <a:rPr sz="2200" lang="ja-JP">
                 <a:solidFill>
                   <a:srgbClr val="303437"/>
                 </a:solidFill>
@@ -7604,7 +7574,7 @@
               </a:rPr>
               <a:t>大規模なニューラルモデルの教師あり学習には限界があった。</a:t>
             </a:r>
-            <a:endParaRPr sz="2100" lang="ja-JP">
+            <a:endParaRPr sz="2200" lang="ja-JP">
               <a:latin typeface="Noto Sans"/>
               <a:ea typeface="Noto Sans CJK JP"/>
               <a:cs typeface="Noto Sans"/>
@@ -7612,16 +7582,17 @@
           </a:p>
           <a:p>
             <a:pPr algn="l" lvl="0" marL="457200" indent="-355600">
-              <a:buSzPts val="2000"/>
+              <a:buSzPct val="60455"/>
+              <a:buFont typeface="Noto Sans CJK JP"/>
               <a:buChar char="●"/>
-              <a:defRPr sz="2100" lang="ja-JP">
+              <a:defRPr sz="2200" lang="ja-JP">
                 <a:latin typeface="Noto Sans"/>
                 <a:ea typeface="Noto Sans CJK JP"/>
                 <a:cs typeface="Noto Sans"/>
               </a:defRPr>
             </a:pPr>
             <a:r>
-              <a:rPr sz="2100" lang="ja-JP">
+              <a:rPr sz="2200" lang="ja-JP">
                 <a:solidFill>
                   <a:srgbClr val="303437"/>
                 </a:solidFill>
@@ -7632,7 +7603,7 @@
               <a:t>これに対してSNLIは、人手で570,152組を作った </a:t>
             </a:r>
             <a:r>
-              <a:rPr sz="2100" lang="ja-JP">
+              <a:rPr sz="2200" lang="ja-JP">
                 <a:solidFill>
                   <a:srgbClr val="303437"/>
                 </a:solidFill>
@@ -7643,7 +7614,7 @@
               <a:t>[1]</a:t>
             </a:r>
             <a:r>
-              <a:rPr sz="2100" lang="ja-JP">
+              <a:rPr sz="2200" lang="ja-JP">
                 <a:solidFill>
                   <a:srgbClr val="303437"/>
                 </a:solidFill>
@@ -7653,7 +7624,7 @@
               </a:rPr>
               <a:t>。</a:t>
             </a:r>
-            <a:endParaRPr sz="2100" lang="ja-JP">
+            <a:endParaRPr sz="2200" lang="ja-JP">
               <a:latin typeface="Noto Sans"/>
               <a:ea typeface="Noto Sans CJK JP"/>
               <a:cs typeface="Noto Sans"/>
@@ -7661,16 +7632,17 @@
           </a:p>
           <a:p>
             <a:pPr algn="l" lvl="1" marL="914400" indent="-355600">
-              <a:buSzPts val="2000"/>
+              <a:buSzPct val="60455"/>
+              <a:buFont typeface="Noto Sans CJK JP"/>
               <a:buChar char="○"/>
-              <a:defRPr sz="2100" lang="ja-JP">
+              <a:defRPr sz="2200" lang="ja-JP">
                 <a:latin typeface="Noto Sans"/>
                 <a:ea typeface="Noto Sans CJK JP"/>
                 <a:cs typeface="Noto Sans"/>
               </a:defRPr>
             </a:pPr>
             <a:r>
-              <a:rPr sz="2100" lang="ja-JP">
+              <a:rPr sz="2200" lang="ja-JP">
                 <a:solidFill>
                   <a:srgbClr val="303437"/>
                 </a:solidFill>
@@ -7680,7 +7652,7 @@
               </a:rPr>
               <a:t>語彙・構文・意味を扱う文表現モデルの学習と評価に使う。</a:t>
             </a:r>
-            <a:endParaRPr sz="2100" lang="ja-JP">
+            <a:endParaRPr sz="2200" lang="ja-JP">
               <a:latin typeface="Noto Sans"/>
               <a:ea typeface="Noto Sans CJK JP"/>
               <a:cs typeface="Noto Sans"/>
@@ -7688,16 +7660,17 @@
           </a:p>
           <a:p>
             <a:pPr algn="l" lvl="0" marL="457200" indent="-355600">
-              <a:buSzPts val="2000"/>
+              <a:buSzPct val="60455"/>
+              <a:buFont typeface="Noto Sans CJK JP"/>
               <a:buChar char="●"/>
-              <a:defRPr sz="2100" lang="ja-JP">
+              <a:defRPr sz="2200" lang="ja-JP">
                 <a:latin typeface="Noto Sans"/>
                 <a:ea typeface="Noto Sans CJK JP"/>
                 <a:cs typeface="Noto Sans"/>
               </a:defRPr>
             </a:pPr>
             <a:r>
-              <a:rPr sz="2100" lang="ja-JP">
+              <a:rPr sz="2200" lang="ja-JP">
                 <a:solidFill>
                   <a:srgbClr val="303437"/>
                 </a:solidFill>
@@ -7707,7 +7680,7 @@
               </a:rPr>
               <a:t>写真の同じ状況を想定し、文の関係を判断しやすくした。</a:t>
             </a:r>
-            <a:endParaRPr sz="2100" lang="ja-JP">
+            <a:endParaRPr sz="2200" lang="ja-JP">
               <a:latin typeface="Noto Sans"/>
               <a:ea typeface="Noto Sans CJK JP"/>
               <a:cs typeface="Noto Sans"/>
@@ -7944,9 +7917,10 @@
           <a:lstStyle/>
           <a:p>
             <a:pPr algn="l" lvl="0" marL="457200" indent="-355600">
-              <a:buSzPts val="2000"/>
+              <a:buSzPct val="63333"/>
+              <a:buFont typeface="Noto Sans CJK JP"/>
               <a:buChar char="●"/>
-              <a:defRPr sz="2000" b="0" lang="ja-JP">
+              <a:defRPr sz="2100" b="0" lang="ja-JP">
                 <a:solidFill>
                   <a:srgbClr val="303437"/>
                 </a:solidFill>
@@ -7956,7 +7930,7 @@
               </a:defRPr>
             </a:pPr>
             <a:r>
-              <a:rPr sz="2000" lang="ja-JP">
+              <a:rPr sz="2100" lang="ja-JP">
                 <a:solidFill>
                   <a:srgbClr val="303437"/>
                 </a:solidFill>
@@ -7967,7 +7941,7 @@
               <a:t>写真に英語の説明文を付けたFlickr30kなどを素材にした </a:t>
             </a:r>
             <a:r>
-              <a:rPr sz="2000" lang="ja-JP">
+              <a:rPr sz="2100" lang="ja-JP">
                 <a:solidFill>
                   <a:srgbClr val="303437"/>
                 </a:solidFill>
@@ -7978,7 +7952,7 @@
               <a:t>[1]</a:t>
             </a:r>
             <a:r>
-              <a:rPr sz="2000" lang="ja-JP">
+              <a:rPr sz="2100" lang="ja-JP">
                 <a:solidFill>
                   <a:srgbClr val="303437"/>
                 </a:solidFill>
@@ -7988,7 +7962,7 @@
               </a:rPr>
               <a:t>。</a:t>
             </a:r>
-            <a:endParaRPr sz="2000" lang="ja-JP">
+            <a:endParaRPr sz="2100" lang="ja-JP">
               <a:latin typeface="Noto Sans"/>
               <a:ea typeface="Noto Sans CJK JP"/>
               <a:cs typeface="Noto Sans"/>
@@ -7996,16 +7970,17 @@
           </a:p>
           <a:p>
             <a:pPr algn="l" lvl="1" marL="914400" indent="-355600">
-              <a:buSzPts val="2000"/>
+              <a:buSzPct val="63333"/>
+              <a:buFont typeface="Noto Sans CJK JP"/>
               <a:buChar char="○"/>
-              <a:defRPr sz="2000" lang="ja-JP">
+              <a:defRPr sz="2100" lang="ja-JP">
                 <a:latin typeface="Noto Sans"/>
                 <a:ea typeface="Noto Sans CJK JP"/>
                 <a:cs typeface="Noto Sans"/>
               </a:defRPr>
             </a:pPr>
             <a:r>
-              <a:rPr sz="2000" lang="ja-JP">
+              <a:rPr sz="2100" lang="ja-JP">
                 <a:solidFill>
                   <a:srgbClr val="303437"/>
                 </a:solidFill>
@@ -8015,7 +7990,7 @@
               </a:rPr>
               <a:t>物体や関係を注釈したVisual Genomeの初期データも使った。</a:t>
             </a:r>
-            <a:endParaRPr sz="2000" lang="ja-JP">
+            <a:endParaRPr sz="2100" lang="ja-JP">
               <a:latin typeface="Noto Sans"/>
               <a:ea typeface="Noto Sans CJK JP"/>
               <a:cs typeface="Noto Sans"/>
@@ -8023,16 +7998,17 @@
           </a:p>
           <a:p>
             <a:pPr algn="l" lvl="0" marL="457200" indent="-355600">
-              <a:buSzPts val="2000"/>
+              <a:buSzPct val="63333"/>
+              <a:buFont typeface="Noto Sans CJK JP"/>
               <a:buChar char="●"/>
-              <a:defRPr sz="2000" lang="ja-JP">
+              <a:defRPr sz="2100" lang="ja-JP">
                 <a:latin typeface="Noto Sans"/>
                 <a:ea typeface="Noto Sans CJK JP"/>
                 <a:cs typeface="Noto Sans"/>
               </a:defRPr>
             </a:pPr>
             <a:r>
-              <a:rPr sz="2000" lang="ja-JP">
+              <a:rPr sz="2100" lang="ja-JP">
                 <a:solidFill>
                   <a:srgbClr val="303437"/>
                 </a:solidFill>
@@ -8042,7 +8018,7 @@
               </a:rPr>
               <a:t>作業者には説明文だけを提示し、写真は見せなかった。</a:t>
             </a:r>
-            <a:endParaRPr sz="2000" lang="ja-JP">
+            <a:endParaRPr sz="2100" lang="ja-JP">
               <a:latin typeface="Noto Sans"/>
               <a:ea typeface="Noto Sans CJK JP"/>
               <a:cs typeface="Noto Sans"/>
@@ -8050,16 +8026,17 @@
           </a:p>
           <a:p>
             <a:pPr algn="l" lvl="1" marL="914400" indent="-355600">
-              <a:buSzPts val="2000"/>
+              <a:buSzPct val="63333"/>
+              <a:buFont typeface="Noto Sans CJK JP"/>
               <a:buChar char="○"/>
-              <a:defRPr sz="2000" lang="ja-JP">
+              <a:defRPr sz="2100" lang="ja-JP">
                 <a:latin typeface="Noto Sans"/>
                 <a:ea typeface="Noto Sans CJK JP"/>
                 <a:cs typeface="Noto Sans"/>
               </a:defRPr>
             </a:pPr>
             <a:r>
-              <a:rPr sz="2000" lang="ja-JP">
+              <a:rPr sz="2100" lang="ja-JP">
                 <a:solidFill>
                   <a:srgbClr val="303437"/>
                 </a:solidFill>
@@ -8069,7 +8046,7 @@
               </a:rPr>
               <a:t>確実に真・真かもしれない・確実に偽の文を各1つ書く。</a:t>
             </a:r>
-            <a:endParaRPr sz="2000" lang="ja-JP">
+            <a:endParaRPr sz="2100" lang="ja-JP">
               <a:latin typeface="Noto Sans"/>
               <a:ea typeface="Noto Sans CJK JP"/>
               <a:cs typeface="Noto Sans"/>
@@ -8077,16 +8054,17 @@
           </a:p>
           <a:p>
             <a:pPr algn="l" lvl="0" marL="457200" indent="-355600">
-              <a:buSzPts val="2000"/>
+              <a:buSzPct val="63333"/>
+              <a:buFont typeface="Noto Sans CJK JP"/>
               <a:buChar char="●"/>
-              <a:defRPr sz="2000" lang="ja-JP">
+              <a:defRPr sz="2100" lang="ja-JP">
                 <a:latin typeface="Noto Sans"/>
                 <a:ea typeface="Noto Sans CJK JP"/>
                 <a:cs typeface="Noto Sans"/>
               </a:defRPr>
             </a:pPr>
             <a:r>
-              <a:rPr sz="2000" lang="ja-JP">
+              <a:rPr sz="2100" lang="ja-JP">
                 <a:solidFill>
                   <a:srgbClr val="303437"/>
                 </a:solidFill>
@@ -8097,7 +8075,7 @@
               <a:t>この仮説文の作成には約2,500人の作業者が参加した </a:t>
             </a:r>
             <a:r>
-              <a:rPr sz="2000" lang="ja-JP">
+              <a:rPr sz="2100" lang="ja-JP">
                 <a:solidFill>
                   <a:srgbClr val="303437"/>
                 </a:solidFill>
@@ -8108,7 +8086,7 @@
               <a:t>[1]</a:t>
             </a:r>
             <a:r>
-              <a:rPr sz="2000" lang="ja-JP">
+              <a:rPr sz="2100" lang="ja-JP">
                 <a:solidFill>
                   <a:srgbClr val="303437"/>
                 </a:solidFill>
@@ -8118,7 +8096,7 @@
               </a:rPr>
               <a:t>。</a:t>
             </a:r>
-            <a:endParaRPr sz="2000" lang="ja-JP">
+            <a:endParaRPr sz="2100" lang="ja-JP">
               <a:latin typeface="Noto Sans"/>
               <a:ea typeface="Noto Sans CJK JP"/>
               <a:cs typeface="Noto Sans"/>
@@ -8355,9 +8333,10 @@
           <a:lstStyle/>
           <a:p>
             <a:pPr algn="l" lvl="0" marL="457200" indent="-355600">
-              <a:buSzPts val="2000"/>
+              <a:buSzPct val="63333"/>
+              <a:buFont typeface="Noto Sans CJK JP"/>
               <a:buChar char="●"/>
-              <a:defRPr sz="2000" b="0" lang="ja-JP">
+              <a:defRPr sz="2100" b="0" lang="ja-JP">
                 <a:solidFill>
                   <a:srgbClr val="303437"/>
                 </a:solidFill>
@@ -8367,7 +8346,7 @@
               </a:defRPr>
             </a:pPr>
             <a:r>
-              <a:rPr sz="2000" lang="ja-JP">
+              <a:rPr sz="2100" lang="ja-JP">
                 <a:solidFill>
                   <a:srgbClr val="303437"/>
                 </a:solidFill>
@@ -8378,7 +8357,7 @@
               <a:t>56,951組について、4人の判定を追加した </a:t>
             </a:r>
             <a:r>
-              <a:rPr sz="2000" lang="ja-JP">
+              <a:rPr sz="2100" lang="ja-JP">
                 <a:solidFill>
                   <a:srgbClr val="303437"/>
                 </a:solidFill>
@@ -8389,7 +8368,7 @@
               <a:t>[1, 2]</a:t>
             </a:r>
             <a:r>
-              <a:rPr sz="2000" lang="ja-JP">
+              <a:rPr sz="2100" lang="ja-JP">
                 <a:solidFill>
                   <a:srgbClr val="303437"/>
                 </a:solidFill>
@@ -8399,7 +8378,7 @@
               </a:rPr>
               <a:t>。</a:t>
             </a:r>
-            <a:endParaRPr sz="2000" lang="ja-JP">
+            <a:endParaRPr sz="2100" lang="ja-JP">
               <a:latin typeface="Noto Sans"/>
               <a:ea typeface="Noto Sans CJK JP"/>
               <a:cs typeface="Noto Sans"/>
@@ -8407,16 +8386,17 @@
           </a:p>
           <a:p>
             <a:pPr algn="l" lvl="1" marL="914400" indent="-355600">
-              <a:buSzPts val="2000"/>
+              <a:buSzPct val="63333"/>
+              <a:buFont typeface="Noto Sans CJK JP"/>
               <a:buChar char="○"/>
-              <a:defRPr sz="2000" lang="ja-JP">
+              <a:defRPr sz="2100" lang="ja-JP">
                 <a:latin typeface="Noto Sans"/>
                 <a:ea typeface="Noto Sans CJK JP"/>
                 <a:cs typeface="Noto Sans"/>
               </a:defRPr>
             </a:pPr>
             <a:r>
-              <a:rPr sz="2000" lang="ja-JP">
+              <a:rPr sz="2100" lang="ja-JP">
                 <a:solidFill>
                   <a:srgbClr val="303437"/>
                 </a:solidFill>
@@ -8426,7 +8406,7 @@
               </a:rPr>
               <a:t>作成者のラベルを含め、1組あたり5票を得た。</a:t>
             </a:r>
-            <a:endParaRPr sz="2000" lang="ja-JP">
+            <a:endParaRPr sz="2100" lang="ja-JP">
               <a:latin typeface="Noto Sans"/>
               <a:ea typeface="Noto Sans CJK JP"/>
               <a:cs typeface="Noto Sans"/>
@@ -8434,16 +8414,17 @@
           </a:p>
           <a:p>
             <a:pPr algn="l" lvl="0" marL="457200" indent="-355600">
-              <a:buSzPts val="2000"/>
+              <a:buSzPct val="63333"/>
+              <a:buFont typeface="Noto Sans CJK JP"/>
               <a:buChar char="●"/>
-              <a:defRPr sz="2000" lang="ja-JP">
+              <a:defRPr sz="2100" lang="ja-JP">
                 <a:latin typeface="Noto Sans"/>
                 <a:ea typeface="Noto Sans CJK JP"/>
                 <a:cs typeface="Noto Sans"/>
               </a:defRPr>
             </a:pPr>
             <a:r>
-              <a:rPr sz="2000" lang="ja-JP">
+              <a:rPr sz="2100" lang="ja-JP">
                 <a:solidFill>
                   <a:srgbClr val="303437"/>
                 </a:solidFill>
@@ -8453,7 +8434,7 @@
               </a:rPr>
               <a:t>3票以上が一致したクラスを正解ラベルとした。</a:t>
             </a:r>
-            <a:endParaRPr sz="2000" lang="ja-JP">
+            <a:endParaRPr sz="2100" lang="ja-JP">
               <a:latin typeface="Noto Sans"/>
               <a:ea typeface="Noto Sans CJK JP"/>
               <a:cs typeface="Noto Sans"/>
@@ -8461,16 +8442,17 @@
           </a:p>
           <a:p>
             <a:pPr algn="l" lvl="1" marL="914400" indent="-355600">
-              <a:buSzPts val="2000"/>
+              <a:buSzPct val="63333"/>
+              <a:buFont typeface="Noto Sans CJK JP"/>
               <a:buChar char="○"/>
-              <a:defRPr sz="2000" lang="ja-JP">
+              <a:defRPr sz="2100" lang="ja-JP">
                 <a:latin typeface="Noto Sans"/>
                 <a:ea typeface="Noto Sans CJK JP"/>
                 <a:cs typeface="Noto Sans"/>
               </a:defRPr>
             </a:pPr>
             <a:r>
-              <a:rPr sz="2000" lang="ja-JP">
+              <a:rPr sz="2100" lang="ja-JP">
                 <a:solidFill>
                   <a:srgbClr val="303437"/>
                 </a:solidFill>
@@ -8480,7 +8462,7 @@
               </a:rPr>
               <a:t>検証対象の98%で3票以上が一致し、58.3%は全員一致。</a:t>
             </a:r>
-            <a:endParaRPr sz="2000" lang="ja-JP">
+            <a:endParaRPr sz="2100" lang="ja-JP">
               <a:latin typeface="Noto Sans"/>
               <a:ea typeface="Noto Sans CJK JP"/>
               <a:cs typeface="Noto Sans"/>
@@ -8488,16 +8470,17 @@
           </a:p>
           <a:p>
             <a:pPr algn="l" lvl="0" marL="457200" indent="-355600">
-              <a:buSzPts val="2000"/>
+              <a:buSzPct val="63333"/>
+              <a:buFont typeface="Noto Sans CJK JP"/>
               <a:buChar char="●"/>
-              <a:defRPr sz="2000" lang="ja-JP">
+              <a:defRPr sz="2100" lang="ja-JP">
                 <a:latin typeface="Noto Sans"/>
                 <a:ea typeface="Noto Sans CJK JP"/>
                 <a:cs typeface="Noto Sans"/>
               </a:defRPr>
             </a:pPr>
             <a:r>
-              <a:rPr sz="2000" lang="ja-JP">
+              <a:rPr sz="2100" lang="ja-JP">
                 <a:solidFill>
                   <a:srgbClr val="303437"/>
                 </a:solidFill>
@@ -8508,7 +8491,7 @@
               <a:t>検証は約30人の信頼された作業者が担当した </a:t>
             </a:r>
             <a:r>
-              <a:rPr sz="2000" lang="ja-JP">
+              <a:rPr sz="2100" lang="ja-JP">
                 <a:solidFill>
                   <a:srgbClr val="303437"/>
                 </a:solidFill>
@@ -8519,7 +8502,7 @@
               <a:t>[1]</a:t>
             </a:r>
             <a:r>
-              <a:rPr sz="2000" lang="ja-JP">
+              <a:rPr sz="2100" lang="ja-JP">
                 <a:solidFill>
                   <a:srgbClr val="303437"/>
                 </a:solidFill>
@@ -8529,7 +8512,7 @@
               </a:rPr>
               <a:t>。</a:t>
             </a:r>
-            <a:endParaRPr sz="2000" lang="ja-JP">
+            <a:endParaRPr sz="2100" lang="ja-JP">
               <a:latin typeface="Noto Sans"/>
               <a:ea typeface="Noto Sans CJK JP"/>
               <a:cs typeface="Noto Sans"/>
@@ -8537,16 +8520,17 @@
           </a:p>
           <a:p>
             <a:pPr algn="l" lvl="0" marL="457200" indent="-355600">
-              <a:buSzPts val="2000"/>
+              <a:buSzPct val="63333"/>
+              <a:buFont typeface="Noto Sans CJK JP"/>
               <a:buChar char="●"/>
-              <a:defRPr sz="2000" lang="ja-JP">
+              <a:defRPr sz="2100" lang="ja-JP">
                 <a:latin typeface="Noto Sans"/>
                 <a:ea typeface="Noto Sans CJK JP"/>
                 <a:cs typeface="Noto Sans"/>
               </a:defRPr>
             </a:pPr>
             <a:r>
-              <a:rPr sz="2000" lang="ja-JP">
+              <a:rPr sz="2100" lang="ja-JP">
                 <a:solidFill>
                   <a:srgbClr val="303437"/>
                 </a:solidFill>
@@ -8556,7 +8540,7 @@
               </a:rPr>
               <a:t>一致しない文対には「-」を付け、通常の3分類から除く。</a:t>
             </a:r>
-            <a:endParaRPr sz="2000" lang="ja-JP">
+            <a:endParaRPr sz="2100" lang="ja-JP">
               <a:latin typeface="Noto Sans"/>
               <a:ea typeface="Noto Sans CJK JP"/>
               <a:cs typeface="Noto Sans"/>
@@ -9778,7 +9762,7 @@
         <p:spPr>
           <a:xfrm>
             <a:off x="594360" y="4246880"/>
-            <a:ext cx="7955279" cy="334263"/>
+            <a:ext cx="7955279" cy="368300"/>
           </a:xfrm>
           <a:prstGeom prst="rect">
             <a:avLst/>
@@ -9812,7 +9796,7 @@
               </a:defRPr>
             </a:pPr>
             <a:r>
-              <a:rPr sz="1700" lang="ja-JP">
+              <a:rPr sz="2000" lang="ja-JP">
                 <a:solidFill>
                   <a:srgbClr val="303437"/>
                 </a:solidFill>
@@ -10098,7 +10082,7 @@
               </a:defRPr>
             </a:pPr>
             <a:r>
-              <a:rPr sz="1700" lang="ja-JP">
+              <a:rPr sz="2000" lang="ja-JP">
                 <a:solidFill>
                   <a:srgbClr val="303437"/>
                 </a:solidFill>
@@ -10339,7 +10323,7 @@
               </a:defRPr>
             </a:pPr>
             <a:r>
-              <a:rPr sz="1700" lang="ja-JP">
+              <a:rPr sz="2000" lang="ja-JP">
                 <a:solidFill>
                   <a:srgbClr val="303437"/>
                 </a:solidFill>
@@ -10659,9 +10643,10 @@
           <a:lstStyle/>
           <a:p>
             <a:pPr algn="l" lvl="0" marL="457200" indent="-355600">
-              <a:buSzPts val="2000"/>
+              <a:buSzPct val="57826"/>
+              <a:buFont typeface="Noto Sans CJK JP"/>
               <a:buChar char="●"/>
-              <a:defRPr sz="2100" b="0" lang="ja-JP">
+              <a:defRPr sz="2300" b="0" lang="ja-JP">
                 <a:solidFill>
                   <a:srgbClr val="303437"/>
                 </a:solidFill>
@@ -10671,7 +10656,7 @@
               </a:defRPr>
             </a:pPr>
             <a:r>
-              <a:rPr sz="2100" lang="ja-JP">
+              <a:rPr sz="2300" lang="ja-JP">
                 <a:solidFill>
                   <a:srgbClr val="303437"/>
                 </a:solidFill>
@@ -10681,7 +10666,7 @@
               </a:rPr>
               <a:t>1組の予測クラスが正解と一致すれば1、不一致なら0。</a:t>
             </a:r>
-            <a:endParaRPr sz="2100" lang="ja-JP">
+            <a:endParaRPr sz="2300" lang="ja-JP">
               <a:latin typeface="Noto Sans"/>
               <a:ea typeface="Noto Sans CJK JP"/>
               <a:cs typeface="Noto Sans"/>
@@ -10689,16 +10674,17 @@
           </a:p>
           <a:p>
             <a:pPr algn="l" lvl="0" marL="457200" indent="-355600">
-              <a:buSzPts val="2000"/>
+              <a:buSzPct val="57826"/>
+              <a:buFont typeface="Noto Sans CJK JP"/>
               <a:buChar char="●"/>
-              <a:defRPr sz="2100" lang="ja-JP">
+              <a:defRPr sz="2300" lang="ja-JP">
                 <a:latin typeface="Noto Sans"/>
                 <a:ea typeface="Noto Sans CJK JP"/>
                 <a:cs typeface="Noto Sans"/>
               </a:defRPr>
             </a:pPr>
             <a:r>
-              <a:rPr sz="2100" lang="ja-JP">
+              <a:rPr sz="2300" lang="ja-JP">
                 <a:solidFill>
                   <a:srgbClr val="303437"/>
                 </a:solidFill>
@@ -10708,7 +10694,7 @@
               </a:rPr>
               <a:t>正解率は正解した組数を評価対象の組数で割る。3組中2組が正解なら、正解率は66.7%となる。</a:t>
             </a:r>
-            <a:endParaRPr sz="2100" lang="ja-JP">
+            <a:endParaRPr sz="2300" lang="ja-JP">
               <a:latin typeface="Noto Sans"/>
               <a:ea typeface="Noto Sans CJK JP"/>
               <a:cs typeface="Noto Sans"/>
@@ -10716,16 +10702,17 @@
           </a:p>
           <a:p>
             <a:pPr algn="l" lvl="0" marL="457200" indent="-355600">
-              <a:buSzPts val="2000"/>
+              <a:buSzPct val="57826"/>
+              <a:buFont typeface="Noto Sans CJK JP"/>
               <a:buChar char="●"/>
-              <a:defRPr sz="2100" lang="ja-JP">
+              <a:defRPr sz="2300" lang="ja-JP">
                 <a:latin typeface="Noto Sans"/>
                 <a:ea typeface="Noto Sans CJK JP"/>
                 <a:cs typeface="Noto Sans"/>
               </a:defRPr>
             </a:pPr>
             <a:r>
-              <a:rPr sz="2100" lang="ja-JP">
+              <a:rPr sz="2300" lang="ja-JP">
                 <a:solidFill>
                   <a:srgbClr val="303437"/>
                 </a:solidFill>
@@ -10735,7 +10722,7 @@
               </a:rPr>
               <a:t>正解ラベルがない「-」の文対は3分類の評価から除く。</a:t>
             </a:r>
-            <a:endParaRPr sz="2100" lang="ja-JP">
+            <a:endParaRPr sz="2300" lang="ja-JP">
               <a:latin typeface="Noto Sans"/>
               <a:ea typeface="Noto Sans CJK JP"/>
               <a:cs typeface="Noto Sans"/>
@@ -10743,16 +10730,17 @@
           </a:p>
           <a:p>
             <a:pPr algn="l" lvl="0" marL="457200" indent="-355600">
-              <a:buSzPts val="2000"/>
+              <a:buSzPct val="57826"/>
+              <a:buFont typeface="Noto Sans CJK JP"/>
               <a:buChar char="●"/>
-              <a:defRPr sz="2100" lang="ja-JP">
+              <a:defRPr sz="2300" lang="ja-JP">
                 <a:latin typeface="Noto Sans"/>
                 <a:ea typeface="Noto Sans CJK JP"/>
                 <a:cs typeface="Noto Sans"/>
               </a:defRPr>
             </a:pPr>
             <a:r>
-              <a:rPr sz="2100" lang="ja-JP">
+              <a:rPr sz="2300" lang="ja-JP">
                 <a:solidFill>
                   <a:srgbClr val="303437"/>
                 </a:solidFill>
@@ -10763,7 +10751,7 @@
               <a:t>テスト用では正解付き9,824組を評価対象とする </a:t>
             </a:r>
             <a:r>
-              <a:rPr sz="2100" lang="ja-JP">
+              <a:rPr sz="2300" lang="ja-JP">
                 <a:solidFill>
                   <a:srgbClr val="303437"/>
                 </a:solidFill>
@@ -10774,7 +10762,7 @@
               <a:t>[1]</a:t>
             </a:r>
             <a:r>
-              <a:rPr sz="2100" lang="ja-JP">
+              <a:rPr sz="2300" lang="ja-JP">
                 <a:solidFill>
                   <a:srgbClr val="303437"/>
                 </a:solidFill>
@@ -10784,7 +10772,7 @@
               </a:rPr>
               <a:t>。</a:t>
             </a:r>
-            <a:endParaRPr sz="2100" lang="ja-JP">
+            <a:endParaRPr sz="2300" lang="ja-JP">
               <a:latin typeface="Noto Sans"/>
               <a:ea typeface="Noto Sans CJK JP"/>
               <a:cs typeface="Noto Sans"/>
@@ -12761,7 +12749,7 @@
               </a:defRPr>
             </a:pPr>
             <a:r>
-              <a:rPr sz="1700" lang="ja-JP">
+              <a:rPr sz="2000" lang="ja-JP">
                 <a:solidFill>
                   <a:srgbClr val="303437"/>
                 </a:solidFill>
@@ -13054,9 +13042,10 @@
           <a:lstStyle/>
           <a:p>
             <a:pPr algn="l" lvl="0" marL="457200" indent="-355600">
-              <a:buSzPts val="2000"/>
+              <a:buSzPct val="60455"/>
+              <a:buFont typeface="Noto Sans CJK JP"/>
               <a:buChar char="●"/>
-              <a:defRPr sz="2100" b="0" lang="ja-JP">
+              <a:defRPr sz="2200" b="0" lang="ja-JP">
                 <a:solidFill>
                   <a:srgbClr val="303437"/>
                 </a:solidFill>
@@ -13066,7 +13055,7 @@
               </a:defRPr>
             </a:pPr>
             <a:r>
-              <a:rPr sz="2100" lang="ja-JP">
+              <a:rPr sz="2200" lang="ja-JP">
                 <a:solidFill>
                   <a:srgbClr val="303437"/>
                 </a:solidFill>
@@ -13076,7 +13065,7 @@
               </a:rPr>
               <a:t>写真説明文に偏り、長文・専門文書を代表しない。</a:t>
             </a:r>
-            <a:endParaRPr sz="2100" lang="ja-JP">
+            <a:endParaRPr sz="2200" lang="ja-JP">
               <a:latin typeface="Noto Sans"/>
               <a:ea typeface="Noto Sans CJK JP"/>
               <a:cs typeface="Noto Sans"/>
@@ -13084,16 +13073,17 @@
           </a:p>
           <a:p>
             <a:pPr algn="l" lvl="0" marL="457200" indent="-355600">
-              <a:buSzPts val="2000"/>
+              <a:buSzPct val="60455"/>
+              <a:buFont typeface="Noto Sans CJK JP"/>
               <a:buChar char="●"/>
-              <a:defRPr sz="2100" lang="ja-JP">
+              <a:defRPr sz="2200" lang="ja-JP">
                 <a:latin typeface="Noto Sans"/>
                 <a:ea typeface="Noto Sans CJK JP"/>
                 <a:cs typeface="Noto Sans"/>
               </a:defRPr>
             </a:pPr>
             <a:r>
-              <a:rPr sz="2100" lang="ja-JP">
+              <a:rPr sz="2200" lang="ja-JP">
                 <a:solidFill>
                   <a:srgbClr val="303437"/>
                 </a:solidFill>
@@ -13104,7 +13094,7 @@
               <a:t>仮説文だけでもラベルを推測できる注釈の偏りがある </a:t>
             </a:r>
             <a:r>
-              <a:rPr sz="2100" lang="ja-JP">
+              <a:rPr sz="2200" lang="ja-JP">
                 <a:solidFill>
                   <a:srgbClr val="303437"/>
                 </a:solidFill>
@@ -13115,7 +13105,7 @@
               <a:t>[1]</a:t>
             </a:r>
             <a:r>
-              <a:rPr sz="2100" lang="ja-JP">
+              <a:rPr sz="2200" lang="ja-JP">
                 <a:solidFill>
                   <a:srgbClr val="303437"/>
                 </a:solidFill>
@@ -13125,7 +13115,7 @@
               </a:rPr>
               <a:t>。</a:t>
             </a:r>
-            <a:endParaRPr sz="2100" lang="ja-JP">
+            <a:endParaRPr sz="2200" lang="ja-JP">
               <a:latin typeface="Noto Sans"/>
               <a:ea typeface="Noto Sans CJK JP"/>
               <a:cs typeface="Noto Sans"/>
@@ -13133,16 +13123,17 @@
           </a:p>
           <a:p>
             <a:pPr algn="l" lvl="1" marL="914400" indent="-355600">
-              <a:buSzPts val="2000"/>
+              <a:buSzPct val="60455"/>
+              <a:buFont typeface="Noto Sans CJK JP"/>
               <a:buChar char="○"/>
-              <a:defRPr sz="2100" lang="ja-JP">
+              <a:defRPr sz="2200" lang="ja-JP">
                 <a:latin typeface="Noto Sans"/>
                 <a:ea typeface="Noto Sans CJK JP"/>
                 <a:cs typeface="Noto Sans"/>
               </a:defRPr>
             </a:pPr>
             <a:r>
-              <a:rPr sz="2100" lang="ja-JP">
+              <a:rPr sz="2200" lang="ja-JP">
                 <a:solidFill>
                   <a:srgbClr val="303437"/>
                 </a:solidFill>
@@ -13152,7 +13143,7 @@
               </a:rPr>
               <a:t>仮説だけを使う分類器で約67%という報告がある。</a:t>
             </a:r>
-            <a:endParaRPr sz="2100" lang="ja-JP">
+            <a:endParaRPr sz="2200" lang="ja-JP">
               <a:latin typeface="Noto Sans"/>
               <a:ea typeface="Noto Sans CJK JP"/>
               <a:cs typeface="Noto Sans"/>
@@ -13160,16 +13151,17 @@
           </a:p>
           <a:p>
             <a:pPr algn="l" lvl="0" marL="457200" indent="-355600">
-              <a:buSzPts val="2000"/>
+              <a:buSzPct val="60455"/>
+              <a:buFont typeface="Noto Sans CJK JP"/>
               <a:buChar char="●"/>
-              <a:defRPr sz="2100" lang="ja-JP">
+              <a:defRPr sz="2200" lang="ja-JP">
                 <a:latin typeface="Noto Sans"/>
                 <a:ea typeface="Noto Sans CJK JP"/>
                 <a:cs typeface="Noto Sans"/>
               </a:defRPr>
             </a:pPr>
             <a:r>
-              <a:rPr sz="2100" lang="ja-JP">
+              <a:rPr sz="2200" lang="ja-JP">
                 <a:solidFill>
                   <a:srgbClr val="303437"/>
                 </a:solidFill>
@@ -13179,7 +13171,7 @@
               </a:rPr>
               <a:t>中立と矛盾の境界には、場面の解釈が関わる。</a:t>
             </a:r>
-            <a:endParaRPr sz="2100" lang="ja-JP">
+            <a:endParaRPr sz="2200" lang="ja-JP">
               <a:latin typeface="Noto Sans"/>
               <a:ea typeface="Noto Sans CJK JP"/>
               <a:cs typeface="Noto Sans"/>
@@ -13187,16 +13179,17 @@
           </a:p>
           <a:p>
             <a:pPr algn="l" lvl="0" marL="457200" indent="-355600">
-              <a:buSzPts val="2000"/>
+              <a:buSzPct val="60455"/>
+              <a:buFont typeface="Noto Sans CJK JP"/>
               <a:buChar char="●"/>
-              <a:defRPr sz="2100" lang="ja-JP">
+              <a:defRPr sz="2200" lang="ja-JP">
                 <a:latin typeface="Noto Sans"/>
                 <a:ea typeface="Noto Sans CJK JP"/>
                 <a:cs typeface="Noto Sans"/>
               </a:defRPr>
             </a:pPr>
             <a:r>
-              <a:rPr sz="2100" lang="ja-JP">
+              <a:rPr sz="2200" lang="ja-JP">
                 <a:solidFill>
                   <a:srgbClr val="303437"/>
                 </a:solidFill>
@@ -13206,7 +13199,7 @@
               </a:rPr>
               <a:t>文対全体の性能と、推論の種類ごとの性能を分けて見る。</a:t>
             </a:r>
-            <a:endParaRPr sz="2100" lang="ja-JP">
+            <a:endParaRPr sz="2200" lang="ja-JP">
               <a:latin typeface="Noto Sans"/>
               <a:ea typeface="Noto Sans CJK JP"/>
               <a:cs typeface="Noto Sans"/>
@@ -13582,7 +13575,8 @@
           <a:lstStyle/>
           <a:p>
             <a:pPr algn="l" lvl="0" marL="457200" indent="-355600">
-              <a:buSzPts val="2000"/>
+              <a:buSzPct val="63333"/>
+              <a:buFont typeface="Noto Sans CJK JP"/>
               <a:buChar char="●"/>
               <a:defRPr sz="2100" b="0" lang="ja-JP">
                 <a:solidFill>
@@ -13634,7 +13628,8 @@
           </a:p>
           <a:p>
             <a:pPr algn="l" lvl="1" marL="914400" indent="-355600">
-              <a:buSzPts val="2000"/>
+              <a:buSzPct val="63333"/>
+              <a:buFont typeface="Noto Sans CJK JP"/>
               <a:buChar char="○"/>
               <a:defRPr sz="2100" lang="ja-JP">
                 <a:latin typeface="Noto Sans"/>
@@ -13661,7 +13656,8 @@
           </a:p>
           <a:p>
             <a:pPr algn="l" lvl="0" marL="457200" indent="-355600">
-              <a:buSzPts val="2000"/>
+              <a:buSzPct val="63333"/>
+              <a:buFont typeface="Noto Sans CJK JP"/>
               <a:buChar char="●"/>
               <a:defRPr sz="2100" lang="ja-JP">
                 <a:latin typeface="Noto Sans"/>
@@ -13688,7 +13684,8 @@
           </a:p>
           <a:p>
             <a:pPr algn="l" lvl="1" marL="914400" indent="-355600">
-              <a:buSzPts val="2000"/>
+              <a:buSzPct val="63333"/>
+              <a:buFont typeface="Noto Sans CJK JP"/>
               <a:buChar char="○"/>
               <a:defRPr sz="2100" lang="ja-JP">
                 <a:latin typeface="Noto Sans"/>
@@ -13715,7 +13712,8 @@
           </a:p>
           <a:p>
             <a:pPr algn="l" lvl="0" marL="457200" indent="-355600">
-              <a:buSzPts val="2000"/>
+              <a:buSzPct val="63333"/>
+              <a:buFont typeface="Noto Sans CJK JP"/>
               <a:buChar char="●"/>
               <a:defRPr sz="2100" lang="ja-JP">
                 <a:latin typeface="Noto Sans"/>
@@ -14017,9 +14015,10 @@
           <a:lstStyle/>
           <a:p>
             <a:pPr algn="l" lvl="0" marL="457200" indent="-355600">
-              <a:buSzPts val="2000"/>
+              <a:buSzPct val="57826"/>
+              <a:buFont typeface="Noto Sans CJK JP"/>
               <a:buChar char="●"/>
-              <a:defRPr sz="2100" b="0" lang="ja-JP">
+              <a:defRPr sz="2300" b="0" lang="ja-JP">
                 <a:solidFill>
                   <a:srgbClr val="303437"/>
                 </a:solidFill>
@@ -14029,7 +14028,7 @@
               </a:defRPr>
             </a:pPr>
             <a:r>
-              <a:rPr sz="2100" lang="ja-JP">
+              <a:rPr sz="2300" lang="ja-JP">
                 <a:solidFill>
                   <a:srgbClr val="303437"/>
                 </a:solidFill>
@@ -14040,7 +14039,7 @@
               <a:t>その後、多ジャンルの推論データMultiNLIが登場した </a:t>
             </a:r>
             <a:r>
-              <a:rPr sz="2100" lang="ja-JP">
+              <a:rPr sz="2300" lang="ja-JP">
                 <a:solidFill>
                   <a:srgbClr val="303437"/>
                 </a:solidFill>
@@ -14051,7 +14050,7 @@
               <a:t>[1]</a:t>
             </a:r>
             <a:r>
-              <a:rPr sz="2100" lang="ja-JP">
+              <a:rPr sz="2300" lang="ja-JP">
                 <a:solidFill>
                   <a:srgbClr val="303437"/>
                 </a:solidFill>
@@ -14061,7 +14060,7 @@
               </a:rPr>
               <a:t>。</a:t>
             </a:r>
-            <a:endParaRPr sz="2100" lang="ja-JP">
+            <a:endParaRPr sz="2300" lang="ja-JP">
               <a:latin typeface="Noto Sans"/>
               <a:ea typeface="Noto Sans CJK JP"/>
               <a:cs typeface="Noto Sans"/>
@@ -14069,16 +14068,17 @@
           </a:p>
           <a:p>
             <a:pPr algn="l" lvl="1" marL="914400" indent="-355600">
-              <a:buSzPts val="2000"/>
+              <a:buSzPct val="57826"/>
+              <a:buFont typeface="Noto Sans CJK JP"/>
               <a:buChar char="○"/>
-              <a:defRPr sz="2100" lang="ja-JP">
+              <a:defRPr sz="2300" lang="ja-JP">
                 <a:latin typeface="Noto Sans"/>
                 <a:ea typeface="Noto Sans CJK JP"/>
                 <a:cs typeface="Noto Sans"/>
               </a:defRPr>
             </a:pPr>
             <a:r>
-              <a:rPr sz="2100" lang="ja-JP">
+              <a:rPr sz="2300" lang="ja-JP">
                 <a:solidFill>
                   <a:srgbClr val="303437"/>
                 </a:solidFill>
@@ -14088,7 +14088,7 @@
               </a:rPr>
               <a:t>2018年の論文で発表された。</a:t>
             </a:r>
-            <a:endParaRPr sz="2100" lang="ja-JP">
+            <a:endParaRPr sz="2300" lang="ja-JP">
               <a:latin typeface="Noto Sans"/>
               <a:ea typeface="Noto Sans CJK JP"/>
               <a:cs typeface="Noto Sans"/>
@@ -14096,16 +14096,17 @@
           </a:p>
           <a:p>
             <a:pPr algn="l" lvl="0" marL="457200" indent="-355600">
-              <a:buSzPts val="2000"/>
+              <a:buSzPct val="57826"/>
+              <a:buFont typeface="Noto Sans CJK JP"/>
               <a:buChar char="●"/>
-              <a:defRPr sz="2100" lang="ja-JP">
+              <a:defRPr sz="2300" lang="ja-JP">
                 <a:latin typeface="Noto Sans"/>
                 <a:ea typeface="Noto Sans CJK JP"/>
                 <a:cs typeface="Noto Sans"/>
               </a:defRPr>
             </a:pPr>
             <a:r>
-              <a:rPr sz="2100" lang="ja-JP">
+              <a:rPr sz="2300" lang="ja-JP">
                 <a:solidFill>
                   <a:srgbClr val="303437"/>
                 </a:solidFill>
@@ -14116,7 +14117,7 @@
               <a:t>SNLIは写真説明を扱った。これに対し、会話・小説など10ジャンルへ広げた </a:t>
             </a:r>
             <a:r>
-              <a:rPr sz="2100" lang="ja-JP">
+              <a:rPr sz="2300" lang="ja-JP">
                 <a:solidFill>
                   <a:srgbClr val="303437"/>
                 </a:solidFill>
@@ -14127,7 +14128,7 @@
               <a:t>[2]</a:t>
             </a:r>
             <a:r>
-              <a:rPr sz="2100" lang="ja-JP">
+              <a:rPr sz="2300" lang="ja-JP">
                 <a:solidFill>
                   <a:srgbClr val="303437"/>
                 </a:solidFill>
@@ -14137,7 +14138,7 @@
               </a:rPr>
               <a:t>。</a:t>
             </a:r>
-            <a:endParaRPr sz="2100" lang="ja-JP">
+            <a:endParaRPr sz="2300" lang="ja-JP">
               <a:latin typeface="Noto Sans"/>
               <a:ea typeface="Noto Sans CJK JP"/>
               <a:cs typeface="Noto Sans"/>
@@ -14145,16 +14146,17 @@
           </a:p>
           <a:p>
             <a:pPr algn="l" lvl="0" marL="457200" indent="-355600">
-              <a:buSzPts val="2000"/>
+              <a:buSzPct val="57826"/>
+              <a:buFont typeface="Noto Sans CJK JP"/>
               <a:buChar char="●"/>
-              <a:defRPr sz="2100" lang="ja-JP">
+              <a:defRPr sz="2300" lang="ja-JP">
                 <a:latin typeface="Noto Sans"/>
                 <a:ea typeface="Noto Sans CJK JP"/>
                 <a:cs typeface="Noto Sans"/>
               </a:defRPr>
             </a:pPr>
             <a:r>
-              <a:rPr sz="2100" lang="ja-JP">
+              <a:rPr sz="2300" lang="ja-JP">
                 <a:solidFill>
                   <a:srgbClr val="303437"/>
                 </a:solidFill>
@@ -14164,7 +14166,7 @@
               </a:rPr>
               <a:t>さらに、未知のジャンルへの汎化も評価する。</a:t>
             </a:r>
-            <a:endParaRPr sz="2100" lang="ja-JP">
+            <a:endParaRPr sz="2300" lang="ja-JP">
               <a:latin typeface="Noto Sans"/>
               <a:ea typeface="Noto Sans CJK JP"/>
               <a:cs typeface="Noto Sans"/>
@@ -14447,9 +14449,10 @@
           <a:lstStyle/>
           <a:p>
             <a:pPr algn="l" lvl="0" marL="457200" indent="-355600">
-              <a:buSzPts val="2000"/>
+              <a:buSzPct val="63333"/>
+              <a:buFont typeface="Noto Sans CJK JP"/>
               <a:buChar char="●"/>
-              <a:defRPr sz="2000" b="0" lang="ja-JP">
+              <a:defRPr sz="2100" b="0" lang="ja-JP">
                 <a:solidFill>
                   <a:srgbClr val="303437"/>
                 </a:solidFill>
@@ -14459,7 +14462,7 @@
               </a:defRPr>
             </a:pPr>
             <a:r>
-              <a:rPr sz="2000" lang="ja-JP">
+              <a:rPr sz="2100" lang="ja-JP">
                 <a:solidFill>
                   <a:srgbClr val="303437"/>
                 </a:solidFill>
@@ -14470,7 +14473,7 @@
               <a:t>判断理由を付けた拡張データe-SNLIも作られた </a:t>
             </a:r>
             <a:r>
-              <a:rPr sz="2000" lang="ja-JP">
+              <a:rPr sz="2100" lang="ja-JP">
                 <a:solidFill>
                   <a:srgbClr val="303437"/>
                 </a:solidFill>
@@ -14481,7 +14484,7 @@
               <a:t>[1]</a:t>
             </a:r>
             <a:r>
-              <a:rPr sz="2000" lang="ja-JP">
+              <a:rPr sz="2100" lang="ja-JP">
                 <a:solidFill>
                   <a:srgbClr val="303437"/>
                 </a:solidFill>
@@ -14491,7 +14494,7 @@
               </a:rPr>
               <a:t>。</a:t>
             </a:r>
-            <a:endParaRPr sz="2000" lang="ja-JP">
+            <a:endParaRPr sz="2100" lang="ja-JP">
               <a:latin typeface="Noto Sans"/>
               <a:ea typeface="Noto Sans CJK JP"/>
               <a:cs typeface="Noto Sans"/>
@@ -14499,16 +14502,17 @@
           </a:p>
           <a:p>
             <a:pPr algn="l" lvl="1" marL="914400" indent="-355600">
-              <a:buSzPts val="2000"/>
+              <a:buSzPct val="63333"/>
+              <a:buFont typeface="Noto Sans CJK JP"/>
               <a:buChar char="○"/>
-              <a:defRPr sz="2000" lang="ja-JP">
+              <a:defRPr sz="2100" lang="ja-JP">
                 <a:latin typeface="Noto Sans"/>
                 <a:ea typeface="Noto Sans CJK JP"/>
                 <a:cs typeface="Noto Sans"/>
               </a:defRPr>
             </a:pPr>
             <a:r>
-              <a:rPr sz="2000" lang="ja-JP">
+              <a:rPr sz="2100" lang="ja-JP">
                 <a:solidFill>
                   <a:srgbClr val="303437"/>
                 </a:solidFill>
@@ -14518,7 +14522,7 @@
               </a:rPr>
               <a:t>SNLIの文対を使い、クラスに加えて自然言語の説明を学習する。</a:t>
             </a:r>
-            <a:endParaRPr sz="2000" lang="ja-JP">
+            <a:endParaRPr sz="2100" lang="ja-JP">
               <a:latin typeface="Noto Sans"/>
               <a:ea typeface="Noto Sans CJK JP"/>
               <a:cs typeface="Noto Sans"/>
@@ -14526,16 +14530,17 @@
           </a:p>
           <a:p>
             <a:pPr algn="l" lvl="0" marL="457200" indent="-355600">
-              <a:buSzPts val="2000"/>
+              <a:buSzPct val="63333"/>
+              <a:buFont typeface="Noto Sans CJK JP"/>
               <a:buChar char="●"/>
-              <a:defRPr sz="2000" lang="ja-JP">
+              <a:defRPr sz="2100" lang="ja-JP">
                 <a:latin typeface="Noto Sans"/>
                 <a:ea typeface="Noto Sans CJK JP"/>
                 <a:cs typeface="Noto Sans"/>
               </a:defRPr>
             </a:pPr>
             <a:r>
-              <a:rPr sz="2000" lang="ja-JP">
+              <a:rPr sz="2100" lang="ja-JP">
                 <a:solidFill>
                   <a:srgbClr val="303437"/>
                 </a:solidFill>
@@ -14546,7 +14551,7 @@
               <a:t>一方、人がモデルを誤らせる例を作るデータANLIもある </a:t>
             </a:r>
             <a:r>
-              <a:rPr sz="2000" lang="ja-JP">
+              <a:rPr sz="2100" lang="ja-JP">
                 <a:solidFill>
                   <a:srgbClr val="303437"/>
                 </a:solidFill>
@@ -14557,7 +14562,7 @@
               <a:t>[2]</a:t>
             </a:r>
             <a:r>
-              <a:rPr sz="2000" lang="ja-JP">
+              <a:rPr sz="2100" lang="ja-JP">
                 <a:solidFill>
                   <a:srgbClr val="303437"/>
                 </a:solidFill>
@@ -14567,7 +14572,7 @@
               </a:rPr>
               <a:t>。</a:t>
             </a:r>
-            <a:endParaRPr sz="2000" lang="ja-JP">
+            <a:endParaRPr sz="2100" lang="ja-JP">
               <a:latin typeface="Noto Sans"/>
               <a:ea typeface="Noto Sans CJK JP"/>
               <a:cs typeface="Noto Sans"/>
@@ -14575,16 +14580,17 @@
           </a:p>
           <a:p>
             <a:pPr algn="l" lvl="1" marL="914400" indent="-355600">
-              <a:buSzPts val="2000"/>
+              <a:buSzPct val="63333"/>
+              <a:buFont typeface="Noto Sans CJK JP"/>
               <a:buChar char="○"/>
-              <a:defRPr sz="2000" lang="ja-JP">
+              <a:defRPr sz="2100" lang="ja-JP">
                 <a:latin typeface="Noto Sans"/>
                 <a:ea typeface="Noto Sans CJK JP"/>
                 <a:cs typeface="Noto Sans"/>
               </a:defRPr>
             </a:pPr>
             <a:r>
-              <a:rPr sz="2000" lang="ja-JP">
+              <a:rPr sz="2100" lang="ja-JP">
                 <a:solidFill>
                   <a:srgbClr val="303437"/>
                 </a:solidFill>
@@ -14594,7 +14600,7 @@
               </a:rPr>
               <a:t>モデルと作業者を交互に用い、難しい推論例を増やす。</a:t>
             </a:r>
-            <a:endParaRPr sz="2000" lang="ja-JP">
+            <a:endParaRPr sz="2100" lang="ja-JP">
               <a:latin typeface="Noto Sans"/>
               <a:ea typeface="Noto Sans CJK JP"/>
               <a:cs typeface="Noto Sans"/>
@@ -14602,16 +14608,17 @@
           </a:p>
           <a:p>
             <a:pPr algn="l" lvl="0" marL="457200" indent="-355600">
-              <a:buSzPts val="2000"/>
+              <a:buSzPct val="63333"/>
+              <a:buFont typeface="Noto Sans CJK JP"/>
               <a:buChar char="●"/>
-              <a:defRPr sz="2000" lang="ja-JP">
+              <a:defRPr sz="2100" lang="ja-JP">
                 <a:latin typeface="Noto Sans"/>
                 <a:ea typeface="Noto Sans CJK JP"/>
                 <a:cs typeface="Noto Sans"/>
               </a:defRPr>
             </a:pPr>
             <a:r>
-              <a:rPr sz="2000" lang="ja-JP">
+              <a:rPr sz="2100" lang="ja-JP">
                 <a:solidFill>
                   <a:srgbClr val="303437"/>
                 </a:solidFill>
@@ -14621,7 +14628,7 @@
               </a:rPr>
               <a:t>いずれもSNLIの版の更新ではなく、別のデータである。</a:t>
             </a:r>
-            <a:endParaRPr sz="2000" lang="ja-JP">
+            <a:endParaRPr sz="2100" lang="ja-JP">
               <a:latin typeface="Noto Sans"/>
               <a:ea typeface="Noto Sans CJK JP"/>
               <a:cs typeface="Noto Sans"/>
@@ -14904,7 +14911,8 @@
           <a:lstStyle/>
           <a:p>
             <a:pPr algn="l" lvl="0" marL="457200" indent="-355600">
-              <a:buSzPts val="2000"/>
+              <a:buSzPct val="66500"/>
+              <a:buFont typeface="Noto Sans CJK JP"/>
               <a:buChar char="●"/>
               <a:defRPr sz="2000" b="0" lang="ja-JP">
                 <a:solidFill>
@@ -14934,7 +14942,8 @@
           </a:p>
           <a:p>
             <a:pPr algn="l" lvl="0" marL="457200" indent="-355600">
-              <a:buSzPts val="2000"/>
+              <a:buSzPct val="66500"/>
+              <a:buFont typeface="Noto Sans CJK JP"/>
               <a:buChar char="●"/>
               <a:defRPr sz="2000" lang="ja-JP">
                 <a:latin typeface="Noto Sans"/>
@@ -14983,7 +14992,8 @@
           </a:p>
           <a:p>
             <a:pPr algn="l" lvl="1" marL="914400" indent="-355600">
-              <a:buSzPts val="2000"/>
+              <a:buSzPct val="66500"/>
+              <a:buFont typeface="Noto Sans CJK JP"/>
               <a:buChar char="○"/>
               <a:defRPr sz="2000" lang="ja-JP">
                 <a:latin typeface="Noto Sans"/>
@@ -15010,7 +15020,8 @@
           </a:p>
           <a:p>
             <a:pPr algn="l" lvl="0" marL="457200" indent="-355600">
-              <a:buSzPts val="2000"/>
+              <a:buSzPct val="66500"/>
+              <a:buFont typeface="Noto Sans CJK JP"/>
               <a:buChar char="●"/>
               <a:defRPr sz="2000" lang="ja-JP">
                 <a:latin typeface="Noto Sans"/>
@@ -15059,7 +15070,8 @@
           </a:p>
           <a:p>
             <a:pPr algn="l" lvl="1" marL="914400" indent="-355600">
-              <a:buSzPts val="2000"/>
+              <a:buSzPct val="66500"/>
+              <a:buFont typeface="Noto Sans CJK JP"/>
               <a:buChar char="○"/>
               <a:defRPr sz="2000" lang="ja-JP">
                 <a:latin typeface="Noto Sans"/>
@@ -15086,7 +15098,8 @@
           </a:p>
           <a:p>
             <a:pPr algn="l" lvl="0" marL="457200" indent="-355600">
-              <a:buSzPts val="2000"/>
+              <a:buSzPct val="66500"/>
+              <a:buFont typeface="Noto Sans CJK JP"/>
               <a:buChar char="●"/>
               <a:defRPr sz="2000" lang="ja-JP">
                 <a:latin typeface="Noto Sans"/>
@@ -15784,7 +15797,7 @@
               </a:defRPr>
             </a:pPr>
             <a:r>
-              <a:rPr sz="1700" lang="ja-JP">
+              <a:rPr sz="2000" lang="ja-JP">
                 <a:solidFill>
                   <a:srgbClr val="303437"/>
                 </a:solidFill>
@@ -16031,7 +16044,8 @@
           <a:lstStyle/>
           <a:p>
             <a:pPr algn="l" lvl="0" marL="457200" indent="-355600">
-              <a:buSzPts val="2000"/>
+              <a:buSzPct val="53200"/>
+              <a:buFont typeface="Noto Sans CJK JP"/>
               <a:buChar char="●"/>
               <a:defRPr sz="2500" b="0" lang="ja-JP">
                 <a:solidFill>
@@ -16061,7 +16075,8 @@
           </a:p>
           <a:p>
             <a:pPr algn="l" lvl="0" marL="457200" indent="-355600">
-              <a:buSzPts val="2000"/>
+              <a:buSzPct val="53200"/>
+              <a:buFont typeface="Noto Sans CJK JP"/>
               <a:buChar char="●"/>
               <a:defRPr sz="2500" lang="ja-JP">
                 <a:latin typeface="Noto Sans"/>
@@ -16088,7 +16103,8 @@
           </a:p>
           <a:p>
             <a:pPr algn="l" lvl="0" marL="457200" indent="-355600">
-              <a:buSzPts val="2000"/>
+              <a:buSzPct val="53200"/>
+              <a:buFont typeface="Noto Sans CJK JP"/>
               <a:buChar char="●"/>
               <a:defRPr sz="2500" lang="ja-JP">
                 <a:latin typeface="Noto Sans"/>
@@ -16115,7 +16131,8 @@
           </a:p>
           <a:p>
             <a:pPr algn="l" lvl="0" marL="457200" indent="-355600">
-              <a:buSzPts val="2000"/>
+              <a:buSzPct val="53200"/>
+              <a:buFont typeface="Noto Sans CJK JP"/>
               <a:buChar char="●"/>
               <a:defRPr sz="2500" lang="ja-JP">
                 <a:latin typeface="Noto Sans"/>
@@ -16142,7 +16159,8 @@
           </a:p>
           <a:p>
             <a:pPr algn="l" lvl="0" marL="457200" indent="-355600">
-              <a:buSzPts val="2000"/>
+              <a:buSzPct val="53200"/>
+              <a:buFont typeface="Noto Sans CJK JP"/>
               <a:buChar char="●"/>
               <a:defRPr sz="2500" lang="ja-JP">
                 <a:latin typeface="Noto Sans"/>
@@ -16862,7 +16880,8 @@
           <a:lstStyle/>
           <a:p>
             <a:pPr algn="l" lvl="0" marL="457200" indent="-355600">
-              <a:buSzPts val="2000"/>
+              <a:buSzPct val="66500"/>
+              <a:buFont typeface="Noto Sans CJK JP"/>
               <a:buChar char="●"/>
               <a:defRPr sz="2000" b="0" lang="ja-JP">
                 <a:solidFill>
@@ -16914,7 +16933,8 @@
           </a:p>
           <a:p>
             <a:pPr algn="l" lvl="0" marL="457200" indent="-355600">
-              <a:buSzPts val="2000"/>
+              <a:buSzPct val="66500"/>
+              <a:buFont typeface="Noto Sans CJK JP"/>
               <a:buChar char="●"/>
               <a:defRPr sz="2000" lang="ja-JP">
                 <a:latin typeface="Noto Sans"/>
@@ -16941,7 +16961,8 @@
           </a:p>
           <a:p>
             <a:pPr algn="l" lvl="1" marL="914400" indent="-355600">
-              <a:buSzPts val="2000"/>
+              <a:buSzPct val="66500"/>
+              <a:buFont typeface="Noto Sans CJK JP"/>
               <a:buChar char="○"/>
               <a:defRPr sz="2000" lang="ja-JP">
                 <a:latin typeface="Noto Sans"/>
@@ -16990,7 +17011,8 @@
           </a:p>
           <a:p>
             <a:pPr algn="l" lvl="0" marL="457200" indent="-355600">
-              <a:buSzPts val="2000"/>
+              <a:buSzPct val="66500"/>
+              <a:buFont typeface="Noto Sans CJK JP"/>
               <a:buChar char="●"/>
               <a:defRPr sz="2000" lang="ja-JP">
                 <a:latin typeface="Noto Sans"/>
@@ -17017,7 +17039,8 @@
           </a:p>
           <a:p>
             <a:pPr algn="l" lvl="1" marL="914400" indent="-355600">
-              <a:buSzPts val="2000"/>
+              <a:buSzPct val="66500"/>
+              <a:buFont typeface="Noto Sans CJK JP"/>
               <a:buChar char="○"/>
               <a:defRPr sz="2000" lang="ja-JP">
                 <a:latin typeface="Noto Sans"/>
@@ -24164,9 +24187,10 @@
           <a:lstStyle/>
           <a:p>
             <a:pPr algn="l" lvl="0" marL="457200" indent="-355600">
-              <a:buSzPts val="2000"/>
+              <a:buSzPct val="60455"/>
+              <a:buFont typeface="Noto Sans CJK JP"/>
               <a:buChar char="●"/>
-              <a:defRPr sz="2000" b="0" lang="ja-JP">
+              <a:defRPr sz="2200" b="0" lang="ja-JP">
                 <a:solidFill>
                   <a:srgbClr val="303437"/>
                 </a:solidFill>
@@ -24176,7 +24200,7 @@
               </a:defRPr>
             </a:pPr>
             <a:r>
-              <a:rPr sz="2000" lang="ja-JP">
+              <a:rPr sz="2200" lang="ja-JP">
                 <a:solidFill>
                   <a:srgbClr val="303437"/>
                 </a:solidFill>
@@ -24187,7 +24211,7 @@
               <a:t>SNLI 1.0の公式データに含まれる文対を集計した </a:t>
             </a:r>
             <a:r>
-              <a:rPr sz="2000" lang="ja-JP">
+              <a:rPr sz="2200" lang="ja-JP">
                 <a:solidFill>
                   <a:srgbClr val="303437"/>
                 </a:solidFill>
@@ -24198,7 +24222,7 @@
               <a:t>[1]</a:t>
             </a:r>
             <a:r>
-              <a:rPr sz="2000" lang="ja-JP">
+              <a:rPr sz="2200" lang="ja-JP">
                 <a:solidFill>
                   <a:srgbClr val="303437"/>
                 </a:solidFill>
@@ -24208,7 +24232,7 @@
               </a:rPr>
               <a:t>。</a:t>
             </a:r>
-            <a:endParaRPr sz="2000" lang="ja-JP">
+            <a:endParaRPr sz="2200" lang="ja-JP">
               <a:latin typeface="Noto Sans"/>
               <a:ea typeface="Noto Sans CJK JP"/>
               <a:cs typeface="Noto Sans"/>
@@ -24216,16 +24240,17 @@
           </a:p>
           <a:p>
             <a:pPr algn="l" lvl="1" marL="914400" indent="-355600">
-              <a:buSzPts val="2000"/>
+              <a:buSzPct val="60455"/>
+              <a:buFont typeface="Noto Sans CJK JP"/>
               <a:buChar char="○"/>
-              <a:defRPr sz="2000" lang="ja-JP">
+              <a:defRPr sz="2200" lang="ja-JP">
                 <a:latin typeface="Noto Sans"/>
                 <a:ea typeface="Noto Sans CJK JP"/>
                 <a:cs typeface="Noto Sans"/>
               </a:defRPr>
             </a:pPr>
             <a:r>
-              <a:rPr sz="2000" lang="ja-JP">
+              <a:rPr sz="2200" lang="ja-JP">
                 <a:solidFill>
                   <a:srgbClr val="303437"/>
                 </a:solidFill>
@@ -24235,7 +24260,7 @@
               </a:rPr>
               <a:t>正解付き569,033組を使い、ラベルが「-」の組は除く。</a:t>
             </a:r>
-            <a:endParaRPr sz="2000" lang="ja-JP">
+            <a:endParaRPr sz="2200" lang="ja-JP">
               <a:latin typeface="Noto Sans"/>
               <a:ea typeface="Noto Sans CJK JP"/>
               <a:cs typeface="Noto Sans"/>
@@ -24243,16 +24268,17 @@
           </a:p>
           <a:p>
             <a:pPr algn="l" lvl="0" marL="457200" indent="-355600">
-              <a:buSzPts val="2000"/>
+              <a:buSzPct val="60455"/>
+              <a:buFont typeface="Noto Sans CJK JP"/>
               <a:buChar char="●"/>
-              <a:defRPr sz="2000" lang="ja-JP">
+              <a:defRPr sz="2200" lang="ja-JP">
                 <a:latin typeface="Noto Sans"/>
                 <a:ea typeface="Noto Sans CJK JP"/>
                 <a:cs typeface="Noto Sans"/>
               </a:defRPr>
             </a:pPr>
             <a:r>
-              <a:rPr sz="2000" lang="ja-JP">
+              <a:rPr sz="2200" lang="ja-JP">
                 <a:solidFill>
                   <a:srgbClr val="303437"/>
                 </a:solidFill>
@@ -24262,7 +24288,7 @@
               </a:rPr>
               <a:t>sentence1とsentence2を加工せずに数えた。</a:t>
             </a:r>
-            <a:endParaRPr sz="2000" lang="ja-JP">
+            <a:endParaRPr sz="2200" lang="ja-JP">
               <a:latin typeface="Noto Sans"/>
               <a:ea typeface="Noto Sans CJK JP"/>
               <a:cs typeface="Noto Sans"/>
@@ -24270,16 +24296,17 @@
           </a:p>
           <a:p>
             <a:pPr algn="l" lvl="1" marL="914400" indent="-355600">
-              <a:buSzPts val="2000"/>
+              <a:buSzPct val="60455"/>
+              <a:buFont typeface="Noto Sans CJK JP"/>
               <a:buChar char="○"/>
-              <a:defRPr sz="2000" lang="ja-JP">
+              <a:defRPr sz="2200" lang="ja-JP">
                 <a:latin typeface="Noto Sans"/>
                 <a:ea typeface="Noto Sans CJK JP"/>
                 <a:cs typeface="Noto Sans"/>
               </a:defRPr>
             </a:pPr>
             <a:r>
-              <a:rPr sz="2000" lang="ja-JP">
+              <a:rPr sz="2200" lang="ja-JP">
                 <a:solidFill>
                   <a:srgbClr val="303437"/>
                 </a:solidFill>
@@ -24289,7 +24316,7 @@
               </a:rPr>
               <a:t>Pythonのlen()で空白・句読点を含むUnicode文字を数える。</a:t>
             </a:r>
-            <a:endParaRPr sz="2000" lang="ja-JP">
+            <a:endParaRPr sz="2200" lang="ja-JP">
               <a:latin typeface="Noto Sans"/>
               <a:ea typeface="Noto Sans CJK JP"/>
               <a:cs typeface="Noto Sans"/>
@@ -24297,16 +24324,17 @@
           </a:p>
           <a:p>
             <a:pPr algn="l" lvl="1" marL="914400" indent="-355600">
-              <a:buSzPts val="2000"/>
+              <a:buSzPct val="60455"/>
+              <a:buFont typeface="Noto Sans CJK JP"/>
               <a:buChar char="○"/>
-              <a:defRPr sz="2000" lang="ja-JP">
+              <a:defRPr sz="2200" lang="ja-JP">
                 <a:latin typeface="Noto Sans"/>
                 <a:ea typeface="Noto Sans CJK JP"/>
                 <a:cs typeface="Noto Sans"/>
               </a:defRPr>
             </a:pPr>
             <a:r>
-              <a:rPr sz="2000" lang="ja-JP">
+              <a:rPr sz="2200" lang="ja-JP">
                 <a:solidFill>
                   <a:srgbClr val="303437"/>
                 </a:solidFill>
@@ -24316,7 +24344,7 @@
               </a:rPr>
               <a:t>str.split()で空白区切りの単語を数える。</a:t>
             </a:r>
-            <a:endParaRPr sz="2000" lang="ja-JP">
+            <a:endParaRPr sz="2200" lang="ja-JP">
               <a:latin typeface="Noto Sans"/>
               <a:ea typeface="Noto Sans CJK JP"/>
               <a:cs typeface="Noto Sans"/>
@@ -24324,16 +24352,17 @@
           </a:p>
           <a:p>
             <a:pPr algn="l" lvl="0" marL="457200" indent="-355600">
-              <a:buSzPts val="2000"/>
+              <a:buSzPct val="60455"/>
+              <a:buFont typeface="Noto Sans CJK JP"/>
               <a:buChar char="●"/>
-              <a:defRPr sz="2000" lang="ja-JP">
+              <a:defRPr sz="2200" lang="ja-JP">
                 <a:latin typeface="Noto Sans"/>
                 <a:ea typeface="Noto Sans CJK JP"/>
                 <a:cs typeface="Noto Sans"/>
               </a:defRPr>
             </a:pPr>
             <a:r>
-              <a:rPr sz="2000" lang="ja-JP">
+              <a:rPr sz="2200" lang="ja-JP">
                 <a:solidFill>
                   <a:srgbClr val="303437"/>
                 </a:solidFill>
@@ -24343,7 +24372,7 @@
               </a:rPr>
               <a:t>前提は文対ごとに繰り返し数える。</a:t>
             </a:r>
-            <a:endParaRPr sz="2000" lang="ja-JP">
+            <a:endParaRPr sz="2200" lang="ja-JP">
               <a:latin typeface="Noto Sans"/>
               <a:ea typeface="Noto Sans CJK JP"/>
               <a:cs typeface="Noto Sans"/>
@@ -25865,7 +25894,7 @@
               </a:defRPr>
             </a:pPr>
             <a:r>
-              <a:rPr sz="1700" lang="ja-JP">
+              <a:rPr sz="2000" lang="ja-JP">
                 <a:solidFill>
                   <a:srgbClr val="303437"/>
                 </a:solidFill>
@@ -26903,7 +26932,7 @@
               </a:defRPr>
             </a:pPr>
             <a:r>
-              <a:rPr sz="1700" lang="ja-JP">
+              <a:rPr sz="2000" lang="ja-JP">
                 <a:solidFill>
                   <a:srgbClr val="303437"/>
                 </a:solidFill>
@@ -28880,7 +28909,7 @@
               </a:defRPr>
             </a:pPr>
             <a:r>
-              <a:rPr sz="1700" b="0" lang="ja-JP">
+              <a:rPr sz="2000" b="0" lang="ja-JP">
                 <a:solidFill>
                   <a:srgbClr val="303437"/>
                 </a:solidFill>
@@ -28917,7 +28946,7 @@
               </a:defRPr>
             </a:pPr>
             <a:r>
-              <a:rPr sz="1700" b="0" lang="ja-JP">
+              <a:rPr sz="2000" b="0" lang="ja-JP">
                 <a:solidFill>
                   <a:srgbClr val="303437"/>
                 </a:solidFill>
@@ -30894,7 +30923,7 @@
               </a:defRPr>
             </a:pPr>
             <a:r>
-              <a:rPr sz="1700" b="0" lang="ja-JP">
+              <a:rPr sz="2000" b="0" lang="ja-JP">
                 <a:solidFill>
                   <a:srgbClr val="303437"/>
                 </a:solidFill>
@@ -30931,7 +30960,7 @@
               </a:defRPr>
             </a:pPr>
             <a:r>
-              <a:rPr sz="1700" b="0" lang="ja-JP">
+              <a:rPr sz="2000" b="0" lang="ja-JP">
                 <a:solidFill>
                   <a:srgbClr val="303437"/>
                 </a:solidFill>
@@ -31217,7 +31246,7 @@
               </a:defRPr>
             </a:pPr>
             <a:r>
-              <a:rPr sz="1700" lang="ja-JP">
+              <a:rPr sz="2000" lang="ja-JP">
                 <a:solidFill>
                   <a:srgbClr val="303437"/>
                 </a:solidFill>
@@ -32976,7 +33005,7 @@
               </a:defRPr>
             </a:pPr>
             <a:r>
-              <a:rPr sz="1700" lang="ja-JP">
+              <a:rPr sz="2000" lang="ja-JP">
                 <a:solidFill>
                   <a:srgbClr val="303437"/>
                 </a:solidFill>
@@ -33407,7 +33436,7 @@
               </a:defRPr>
             </a:pPr>
             <a:r>
-              <a:rPr sz="1700" lang="ja-JP">
+              <a:rPr sz="2000" lang="ja-JP">
                 <a:solidFill>
                   <a:srgbClr val="303437"/>
                 </a:solidFill>
@@ -33654,9 +33683,10 @@
           <a:lstStyle/>
           <a:p>
             <a:pPr algn="l" lvl="0" marL="457200" indent="-355600">
-              <a:buSzPts val="2000"/>
+              <a:buSzPct val="60455"/>
+              <a:buFont typeface="Noto Sans CJK JP"/>
               <a:buChar char="●"/>
-              <a:defRPr sz="2100" b="0" lang="ja-JP">
+              <a:defRPr sz="2200" b="0" lang="ja-JP">
                 <a:solidFill>
                   <a:srgbClr val="303437"/>
                 </a:solidFill>
@@ -33666,7 +33696,7 @@
               </a:defRPr>
             </a:pPr>
             <a:r>
-              <a:rPr sz="2100" lang="ja-JP">
+              <a:rPr sz="2200" lang="ja-JP">
                 <a:solidFill>
                   <a:srgbClr val="303437"/>
                 </a:solidFill>
@@ -33676,7 +33706,7 @@
               </a:rPr>
               <a:t>SNLIは自然言語推論（NLI）のデータセットである。</a:t>
             </a:r>
-            <a:endParaRPr sz="2100" lang="ja-JP">
+            <a:endParaRPr sz="2200" lang="ja-JP">
               <a:latin typeface="Noto Sans"/>
               <a:ea typeface="Noto Sans CJK JP"/>
               <a:cs typeface="Noto Sans"/>
@@ -33684,16 +33714,17 @@
           </a:p>
           <a:p>
             <a:pPr algn="l" lvl="0" marL="457200" indent="-355600">
-              <a:buSzPts val="2000"/>
+              <a:buSzPct val="60455"/>
+              <a:buFont typeface="Noto Sans CJK JP"/>
               <a:buChar char="●"/>
-              <a:defRPr sz="2100" lang="ja-JP">
+              <a:defRPr sz="2200" lang="ja-JP">
                 <a:latin typeface="Noto Sans"/>
                 <a:ea typeface="Noto Sans CJK JP"/>
                 <a:cs typeface="Noto Sans"/>
               </a:defRPr>
             </a:pPr>
             <a:r>
-              <a:rPr sz="2100" lang="ja-JP">
+              <a:rPr sz="2200" lang="ja-JP">
                 <a:solidFill>
                   <a:srgbClr val="303437"/>
                 </a:solidFill>
@@ -33703,7 +33734,7 @@
               </a:rPr>
               <a:t>入力には前提文と仮説文の2つのテキストを使う。</a:t>
             </a:r>
-            <a:endParaRPr sz="2100" lang="ja-JP">
+            <a:endParaRPr sz="2200" lang="ja-JP">
               <a:latin typeface="Noto Sans"/>
               <a:ea typeface="Noto Sans CJK JP"/>
               <a:cs typeface="Noto Sans"/>
@@ -33711,16 +33742,17 @@
           </a:p>
           <a:p>
             <a:pPr algn="l" lvl="1" marL="914400" indent="-355600">
-              <a:buSzPts val="2000"/>
+              <a:buSzPct val="60455"/>
+              <a:buFont typeface="Noto Sans CJK JP"/>
               <a:buChar char="○"/>
-              <a:defRPr sz="2100" lang="ja-JP">
+              <a:defRPr sz="2200" lang="ja-JP">
                 <a:latin typeface="Noto Sans"/>
                 <a:ea typeface="Noto Sans CJK JP"/>
                 <a:cs typeface="Noto Sans"/>
               </a:defRPr>
             </a:pPr>
             <a:r>
-              <a:rPr sz="2100" lang="ja-JP">
+              <a:rPr sz="2200" lang="ja-JP">
                 <a:solidFill>
                   <a:srgbClr val="303437"/>
                 </a:solidFill>
@@ -33730,7 +33762,7 @@
               </a:rPr>
               <a:t>仮説が前提から導けるかを含意・中立・矛盾で判断する。</a:t>
             </a:r>
-            <a:endParaRPr sz="2100" lang="ja-JP">
+            <a:endParaRPr sz="2200" lang="ja-JP">
               <a:latin typeface="Noto Sans"/>
               <a:ea typeface="Noto Sans CJK JP"/>
               <a:cs typeface="Noto Sans"/>
@@ -33738,16 +33770,17 @@
           </a:p>
           <a:p>
             <a:pPr algn="l" lvl="0" marL="457200" indent="-355600">
-              <a:buSzPts val="2000"/>
+              <a:buSzPct val="60455"/>
+              <a:buFont typeface="Noto Sans CJK JP"/>
               <a:buChar char="●"/>
-              <a:defRPr sz="2100" lang="ja-JP">
+              <a:defRPr sz="2200" lang="ja-JP">
                 <a:latin typeface="Noto Sans"/>
                 <a:ea typeface="Noto Sans CJK JP"/>
                 <a:cs typeface="Noto Sans"/>
               </a:defRPr>
             </a:pPr>
             <a:r>
-              <a:rPr sz="2100" lang="ja-JP">
+              <a:rPr sz="2200" lang="ja-JP">
                 <a:solidFill>
                   <a:srgbClr val="303437"/>
                 </a:solidFill>
@@ -33757,7 +33790,7 @@
               </a:rPr>
               <a:t>画像の説明文を利用するが、モデルの入力に画像は含まれない。</a:t>
             </a:r>
-            <a:endParaRPr sz="2100" lang="ja-JP">
+            <a:endParaRPr sz="2200" lang="ja-JP">
               <a:latin typeface="Noto Sans"/>
               <a:ea typeface="Noto Sans CJK JP"/>
               <a:cs typeface="Noto Sans"/>
@@ -33765,16 +33798,17 @@
           </a:p>
           <a:p>
             <a:pPr algn="l" lvl="0" marL="457200" indent="-355600">
-              <a:buSzPts val="2000"/>
+              <a:buSzPct val="60455"/>
+              <a:buFont typeface="Noto Sans CJK JP"/>
               <a:buChar char="●"/>
-              <a:defRPr sz="2100" lang="ja-JP">
+              <a:defRPr sz="2200" lang="ja-JP">
                 <a:latin typeface="Noto Sans"/>
                 <a:ea typeface="Noto Sans CJK JP"/>
                 <a:cs typeface="Noto Sans"/>
               </a:defRPr>
             </a:pPr>
             <a:r>
-              <a:rPr sz="2100" lang="ja-JP">
+              <a:rPr sz="2200" lang="ja-JP">
                 <a:solidFill>
                   <a:srgbClr val="303437"/>
                 </a:solidFill>
@@ -33785,7 +33819,7 @@
               <a:t>約57万組を収録し、2015年のEMNLPで発表された </a:t>
             </a:r>
             <a:r>
-              <a:rPr sz="2100" lang="ja-JP">
+              <a:rPr sz="2200" lang="ja-JP">
                 <a:solidFill>
                   <a:srgbClr val="303437"/>
                 </a:solidFill>
@@ -33796,7 +33830,7 @@
               <a:t>[1]</a:t>
             </a:r>
             <a:r>
-              <a:rPr sz="2100" lang="ja-JP">
+              <a:rPr sz="2200" lang="ja-JP">
                 <a:solidFill>
                   <a:srgbClr val="303437"/>
                 </a:solidFill>
@@ -33806,7 +33840,7 @@
               </a:rPr>
               <a:t>。</a:t>
             </a:r>
-            <a:endParaRPr sz="2100" lang="ja-JP">
+            <a:endParaRPr sz="2200" lang="ja-JP">
               <a:latin typeface="Noto Sans"/>
               <a:ea typeface="Noto Sans CJK JP"/>
               <a:cs typeface="Noto Sans"/>
@@ -34082,7 +34116,7 @@
               </a:defRPr>
             </a:pPr>
             <a:r>
-              <a:rPr sz="1700" lang="ja-JP">
+              <a:rPr sz="2000" lang="ja-JP">
                 <a:solidFill>
                   <a:srgbClr val="303437"/>
                 </a:solidFill>
@@ -35841,7 +35875,7 @@
               </a:defRPr>
             </a:pPr>
             <a:r>
-              <a:rPr sz="1700" lang="ja-JP">
+              <a:rPr sz="2000" lang="ja-JP">
                 <a:solidFill>
                   <a:srgbClr val="303437"/>
                 </a:solidFill>
@@ -36272,7 +36306,7 @@
               </a:defRPr>
             </a:pPr>
             <a:r>
-              <a:rPr sz="1700" lang="ja-JP">
+              <a:rPr sz="2000" lang="ja-JP">
                 <a:solidFill>
                   <a:srgbClr val="303437"/>
                 </a:solidFill>
@@ -36702,7 +36736,7 @@
               </a:defRPr>
             </a:pPr>
             <a:r>
-              <a:rPr sz="1700" lang="ja-JP">
+              <a:rPr sz="2000" lang="ja-JP">
                 <a:solidFill>
                   <a:srgbClr val="303437"/>
                 </a:solidFill>
@@ -37132,7 +37166,7 @@
               </a:defRPr>
             </a:pPr>
             <a:r>
-              <a:rPr sz="1700" lang="ja-JP">
+              <a:rPr sz="2000" lang="ja-JP">
                 <a:solidFill>
                   <a:srgbClr val="303437"/>
                 </a:solidFill>
@@ -37805,7 +37839,7 @@
               </a:defRPr>
             </a:pPr>
             <a:r>
-              <a:rPr sz="1700" b="0" lang="ja-JP">
+              <a:rPr sz="2000" b="0" lang="ja-JP">
                 <a:solidFill>
                   <a:srgbClr val="303437"/>
                 </a:solidFill>
@@ -37842,7 +37876,7 @@
               </a:defRPr>
             </a:pPr>
             <a:r>
-              <a:rPr sz="1700" b="0" lang="ja-JP">
+              <a:rPr sz="2000" b="0" lang="ja-JP">
                 <a:solidFill>
                   <a:srgbClr val="303437"/>
                 </a:solidFill>
@@ -38447,8 +38481,8 @@
         </p:nvSpPr>
         <p:spPr>
           <a:xfrm>
-            <a:off x="594360" y="4195572"/>
-            <a:ext cx="7955279" cy="685800"/>
+            <a:off x="594360" y="4017772"/>
+            <a:ext cx="7955279" cy="486156"/>
           </a:xfrm>
           <a:prstGeom prst="rect">
             <a:avLst/>
@@ -38482,7 +38516,7 @@
               </a:defRPr>
             </a:pPr>
             <a:r>
-              <a:rPr sz="1700" lang="ja-JP">
+              <a:rPr sz="2000" lang="ja-JP">
                 <a:solidFill>
                   <a:srgbClr val="303437"/>
                 </a:solidFill>
@@ -38729,9 +38763,10 @@
           <a:lstStyle/>
           <a:p>
             <a:pPr algn="l" lvl="0" marL="457200" indent="-355600">
-              <a:buSzPts val="2000"/>
+              <a:buSzPct val="63333"/>
+              <a:buFont typeface="Noto Sans CJK JP"/>
               <a:buChar char="●"/>
-              <a:defRPr sz="2000" b="0" lang="ja-JP">
+              <a:defRPr sz="2100" b="0" lang="ja-JP">
                 <a:solidFill>
                   <a:srgbClr val="303437"/>
                 </a:solidFill>
@@ -38741,7 +38776,7 @@
               </a:defRPr>
             </a:pPr>
             <a:r>
-              <a:rPr sz="2000" lang="ja-JP">
+              <a:rPr sz="2100" lang="ja-JP">
                 <a:solidFill>
                   <a:srgbClr val="303437"/>
                 </a:solidFill>
@@ -38751,7 +38786,7 @@
               </a:rPr>
               <a:t>作業者は前提の説明に合う同じ写真を想定して仮説を書く。</a:t>
             </a:r>
-            <a:endParaRPr sz="2000" lang="ja-JP">
+            <a:endParaRPr sz="2100" lang="ja-JP">
               <a:latin typeface="Noto Sans"/>
               <a:ea typeface="Noto Sans CJK JP"/>
               <a:cs typeface="Noto Sans"/>
@@ -38759,16 +38794,17 @@
           </a:p>
           <a:p>
             <a:pPr algn="l" lvl="1" marL="914400" indent="-355600">
-              <a:buSzPts val="2000"/>
+              <a:buSzPct val="63333"/>
+              <a:buFont typeface="Noto Sans CJK JP"/>
               <a:buChar char="○"/>
-              <a:defRPr sz="2000" lang="ja-JP">
+              <a:defRPr sz="2100" lang="ja-JP">
                 <a:latin typeface="Noto Sans"/>
                 <a:ea typeface="Noto Sans CJK JP"/>
                 <a:cs typeface="Noto Sans"/>
               </a:defRPr>
             </a:pPr>
             <a:r>
-              <a:rPr sz="2000" lang="ja-JP">
+              <a:rPr sz="2100" lang="ja-JP">
                 <a:solidFill>
                   <a:srgbClr val="303437"/>
                 </a:solidFill>
@@ -38779,7 +38815,7 @@
               <a:t>画像を見せず、3つの関係に対応する文を作る </a:t>
             </a:r>
             <a:r>
-              <a:rPr sz="2000" lang="ja-JP">
+              <a:rPr sz="2100" lang="ja-JP">
                 <a:solidFill>
                   <a:srgbClr val="303437"/>
                 </a:solidFill>
@@ -38790,7 +38826,7 @@
               <a:t>[1]</a:t>
             </a:r>
             <a:r>
-              <a:rPr sz="2000" lang="ja-JP">
+              <a:rPr sz="2100" lang="ja-JP">
                 <a:solidFill>
                   <a:srgbClr val="303437"/>
                 </a:solidFill>
@@ -38800,7 +38836,7 @@
               </a:rPr>
               <a:t>。</a:t>
             </a:r>
-            <a:endParaRPr sz="2000" lang="ja-JP">
+            <a:endParaRPr sz="2100" lang="ja-JP">
               <a:latin typeface="Noto Sans"/>
               <a:ea typeface="Noto Sans CJK JP"/>
               <a:cs typeface="Noto Sans"/>
@@ -38808,16 +38844,17 @@
           </a:p>
           <a:p>
             <a:pPr algn="l" lvl="0" marL="457200" indent="-355600">
-              <a:buSzPts val="2000"/>
+              <a:buSzPct val="63333"/>
+              <a:buFont typeface="Noto Sans CJK JP"/>
               <a:buChar char="●"/>
-              <a:defRPr sz="2000" lang="ja-JP">
+              <a:defRPr sz="2100" lang="ja-JP">
                 <a:latin typeface="Noto Sans"/>
                 <a:ea typeface="Noto Sans CJK JP"/>
                 <a:cs typeface="Noto Sans"/>
               </a:defRPr>
             </a:pPr>
             <a:r>
-              <a:rPr sz="2000" lang="ja-JP">
+              <a:rPr sz="2100" lang="ja-JP">
                 <a:solidFill>
                   <a:srgbClr val="303437"/>
                 </a:solidFill>
@@ -38827,7 +38864,7 @@
               </a:rPr>
               <a:t>規約を守らない作業者を外し、自動の大量投稿を拒否した。</a:t>
             </a:r>
-            <a:endParaRPr sz="2000" lang="ja-JP">
+            <a:endParaRPr sz="2100" lang="ja-JP">
               <a:latin typeface="Noto Sans"/>
               <a:ea typeface="Noto Sans CJK JP"/>
               <a:cs typeface="Noto Sans"/>
@@ -38835,16 +38872,17 @@
           </a:p>
           <a:p>
             <a:pPr algn="l" lvl="0" marL="457200" indent="-355600">
-              <a:buSzPts val="2000"/>
+              <a:buSzPct val="63333"/>
+              <a:buFont typeface="Noto Sans CJK JP"/>
               <a:buChar char="●"/>
-              <a:defRPr sz="2000" lang="ja-JP">
+              <a:defRPr sz="2100" lang="ja-JP">
                 <a:latin typeface="Noto Sans"/>
                 <a:ea typeface="Noto Sans CJK JP"/>
                 <a:cs typeface="Noto Sans"/>
               </a:defRPr>
             </a:pPr>
             <a:r>
-              <a:rPr sz="2000" lang="ja-JP">
+              <a:rPr sz="2100" lang="ja-JP">
                 <a:solidFill>
                   <a:srgbClr val="303437"/>
                 </a:solidFill>
@@ -38854,7 +38892,7 @@
               </a:rPr>
               <a:t>追加検証の多数決と、作成者のラベルを区別する。</a:t>
             </a:r>
-            <a:endParaRPr sz="2000" lang="ja-JP">
+            <a:endParaRPr sz="2100" lang="ja-JP">
               <a:latin typeface="Noto Sans"/>
               <a:ea typeface="Noto Sans CJK JP"/>
               <a:cs typeface="Noto Sans"/>
@@ -38862,16 +38900,17 @@
           </a:p>
           <a:p>
             <a:pPr algn="l" lvl="1" marL="914400" indent="-355600">
-              <a:buSzPts val="2000"/>
+              <a:buSzPct val="63333"/>
+              <a:buFont typeface="Noto Sans CJK JP"/>
               <a:buChar char="○"/>
-              <a:defRPr sz="2000" lang="ja-JP">
+              <a:defRPr sz="2100" lang="ja-JP">
                 <a:latin typeface="Noto Sans"/>
                 <a:ea typeface="Noto Sans CJK JP"/>
                 <a:cs typeface="Noto Sans"/>
               </a:defRPr>
             </a:pPr>
             <a:r>
-              <a:rPr sz="2000" lang="ja-JP">
+              <a:rPr sz="2100" lang="ja-JP">
                 <a:solidFill>
                   <a:srgbClr val="303437"/>
                 </a:solidFill>
@@ -38881,7 +38920,7 @@
               </a:rPr>
               <a:t>開発用とテスト用には複数の判定が付いた文対を使う。</a:t>
             </a:r>
-            <a:endParaRPr sz="2000" lang="ja-JP">
+            <a:endParaRPr sz="2100" lang="ja-JP">
               <a:latin typeface="Noto Sans"/>
               <a:ea typeface="Noto Sans CJK JP"/>
               <a:cs typeface="Noto Sans"/>
@@ -38889,16 +38928,17 @@
           </a:p>
           <a:p>
             <a:pPr algn="l" lvl="0" marL="457200" indent="-355600">
-              <a:buSzPts val="2000"/>
+              <a:buSzPct val="63333"/>
+              <a:buFont typeface="Noto Sans CJK JP"/>
               <a:buChar char="●"/>
-              <a:defRPr sz="2000" lang="ja-JP">
+              <a:defRPr sz="2100" lang="ja-JP">
                 <a:latin typeface="Noto Sans"/>
                 <a:ea typeface="Noto Sans CJK JP"/>
                 <a:cs typeface="Noto Sans"/>
               </a:defRPr>
             </a:pPr>
             <a:r>
-              <a:rPr sz="2000" lang="ja-JP">
+              <a:rPr sz="2100" lang="ja-JP">
                 <a:solidFill>
                   <a:srgbClr val="303437"/>
                 </a:solidFill>
@@ -38908,7 +38948,7 @@
               </a:rPr>
               <a:t>自然な場面の読みと形式的な論理関係は必ずしも一致しない。</a:t>
             </a:r>
-            <a:endParaRPr sz="2000" lang="ja-JP">
+            <a:endParaRPr sz="2100" lang="ja-JP">
               <a:latin typeface="Noto Sans"/>
               <a:ea typeface="Noto Sans CJK JP"/>
               <a:cs typeface="Noto Sans"/>
@@ -39023,42 +39063,10 @@
           <a:bodyPr wrap="square" lIns="0" rIns="0" tIns="0" bIns="0" anchor="t"/>
           <a:lstStyle/>
           <a:p>
-            <a:pPr algn="l" marL="0" indent="0">
-              <a:lnSpc>
-                <a:spcPct val="110000"/>
-              </a:lnSpc>
-              <a:spcBef>
-                <a:spcPts val="0"/>
-              </a:spcBef>
-              <a:spcAft>
-                <a:spcPts val="600"/>
-              </a:spcAft>
-              <a:buNone/>
-              <a:defRPr sz="2800" b="1" lang="ja-JP">
-                <a:solidFill>
-                  <a:srgbClr val="303437"/>
-                </a:solidFill>
-                <a:latin typeface="Noto Sans"/>
-                <a:ea typeface="Noto Sans CJK JP"/>
-                <a:cs typeface="Noto Sans"/>
-              </a:defRPr>
-            </a:pPr>
-            <a:r>
-              <a:rPr sz="2800" lang="ja-JP" b="1">
-                <a:solidFill>
-                  <a:srgbClr val="303437"/>
-                </a:solidFill>
-                <a:latin typeface="Noto Sans"/>
-                <a:ea typeface="Noto Sans CJK JP"/>
-                <a:cs typeface="Noto Sans"/>
-              </a:rPr>
-              <a:t>参考文献と参照した内容</a:t>
-            </a:r>
-            <a:endParaRPr sz="2800" lang="ja-JP">
-              <a:latin typeface="Noto Sans"/>
-              <a:ea typeface="Noto Sans CJK JP"/>
-              <a:cs typeface="Noto Sans"/>
-            </a:endParaRPr>
+            <a:r>
+              <a:rPr sz="2800"/>
+              <a:t>読後の学習・研究に向けて</a:t>
+            </a:r>
           </a:p>
         </p:txBody>
       </p:sp>
@@ -39082,42 +39090,10 @@
           <a:bodyPr wrap="square" lIns="0" rIns="0" tIns="0" bIns="0" anchor="ctr"/>
           <a:lstStyle/>
           <a:p>
-            <a:pPr algn="l" marL="0" indent="0">
-              <a:lnSpc>
-                <a:spcPct val="110000"/>
-              </a:lnSpc>
-              <a:spcBef>
-                <a:spcPts val="0"/>
-              </a:spcBef>
-              <a:spcAft>
-                <a:spcPts val="0"/>
-              </a:spcAft>
-              <a:buNone/>
-              <a:defRPr sz="1400" b="1" lang="ja-JP">
-                <a:solidFill>
-                  <a:srgbClr val="FFFEF8"/>
-                </a:solidFill>
-                <a:latin typeface="Noto Sans"/>
-                <a:ea typeface="Noto Sans CJK JP"/>
-                <a:cs typeface="Noto Sans"/>
-              </a:defRPr>
-            </a:pPr>
-            <a:r>
-              <a:rPr sz="1400" lang="ja-JP" b="1">
-                <a:solidFill>
-                  <a:srgbClr val="FFFEF8"/>
-                </a:solidFill>
-                <a:latin typeface="Noto Sans"/>
-                <a:ea typeface="Noto Sans CJK JP"/>
-                <a:cs typeface="Noto Sans"/>
-              </a:rPr>
-              <a:t>Appendix: 5 参考文献</a:t>
-            </a:r>
-            <a:endParaRPr sz="1400" lang="ja-JP">
-              <a:latin typeface="Noto Sans"/>
-              <a:ea typeface="Noto Sans CJK JP"/>
-              <a:cs typeface="Noto Sans"/>
-            </a:endParaRPr>
+            <a:r>
+              <a:rPr sz="1400"/>
+              <a:t>Appendix: 5 参考文献・基礎を学ぶ</a:t>
+            </a:r>
           </a:p>
         </p:txBody>
       </p:sp>
@@ -39129,8 +39105,8 @@
         </p:nvSpPr>
         <p:spPr>
           <a:xfrm>
-            <a:off x="594360" y="1280160"/>
-            <a:ext cx="7955279" cy="320040"/>
+            <a:off x="594360" y="1353312"/>
+            <a:ext cx="7955279" cy="365760"/>
           </a:xfrm>
           <a:prstGeom prst="rect">
             <a:avLst/>
@@ -39138,36 +39114,29 @@
           <a:noFill/>
         </p:spPr>
         <p:txBody>
-          <a:bodyPr wrap="square" lIns="0" rIns="0" tIns="0" bIns="0" anchor="t">
+          <a:bodyPr wrap="square" lIns="0" rIns="0" tIns="0" bIns="0">
             <a:spAutoFit/>
           </a:bodyPr>
           <a:lstStyle/>
           <a:p>
-            <a:pPr algn="l" marL="0" indent="0">
+            <a:pPr>
               <a:lnSpc>
-                <a:spcPct val="110000"/>
+                <a:spcPct val="108000"/>
               </a:lnSpc>
               <a:spcBef>
                 <a:spcPts val="0"/>
               </a:spcBef>
               <a:spcAft>
-                <a:spcPts val="600"/>
-              </a:spcAft>
-              <a:buNone/>
-              <a:defRPr sz="1900" lang="ja-JP">
-                <a:latin typeface="Noto Sans"/>
-                <a:ea typeface="Noto Sans CJK JP"/>
-                <a:cs typeface="Noto Sans"/>
-              </a:defRPr>
+                <a:spcPts val="0"/>
+              </a:spcAft>
             </a:pPr>
             <a:r>
-              <a:rPr sz="1900" lang="ja-JP">
-                <a:solidFill>
-                  <a:srgbClr val="303437"/>
-                </a:solidFill>
-                <a:latin typeface="Noto Sans"/>
-                <a:ea typeface="Noto Sans CJK JP"/>
-                <a:cs typeface="Noto Sans"/>
+              <a:rPr sz="2100" b="1" lang="ja-JP">
+                <a:solidFill>
+                  <a:srgbClr val="303437"/>
+                </a:solidFill>
+                <a:latin typeface="Noto Sans"/>
+                <a:ea typeface="Noto Sans CJK JP"/>
               </a:rPr>
               <a:t>Bowman et al. (2015). SNLI. EMNLP.</a:t>
             </a:r>
@@ -39182,8 +39151,8 @@
         </p:nvSpPr>
         <p:spPr>
           <a:xfrm>
-            <a:off x="594360" y="1600200"/>
-            <a:ext cx="7955279" cy="292608"/>
+            <a:off x="594360" y="1746504"/>
+            <a:ext cx="7955279" cy="438912"/>
           </a:xfrm>
           <a:prstGeom prst="rect">
             <a:avLst/>
@@ -39191,38 +39160,31 @@
           <a:noFill/>
         </p:spPr>
         <p:txBody>
-          <a:bodyPr wrap="square" lIns="0" rIns="0" tIns="0" bIns="0" anchor="t">
+          <a:bodyPr wrap="square" lIns="0" rIns="0" tIns="0" bIns="0">
             <a:spAutoFit/>
           </a:bodyPr>
           <a:lstStyle/>
           <a:p>
-            <a:pPr algn="l" marL="0" indent="0">
+            <a:pPr>
               <a:lnSpc>
-                <a:spcPct val="110000"/>
+                <a:spcPct val="108000"/>
               </a:lnSpc>
               <a:spcBef>
                 <a:spcPts val="0"/>
               </a:spcBef>
               <a:spcAft>
-                <a:spcPts val="600"/>
-              </a:spcAft>
-              <a:buNone/>
-              <a:defRPr sz="1700" lang="ja-JP">
-                <a:latin typeface="Noto Sans"/>
-                <a:ea typeface="Noto Sans CJK JP"/>
-                <a:cs typeface="Noto Sans"/>
-              </a:defRPr>
+                <a:spcPts val="0"/>
+              </a:spcAft>
             </a:pPr>
             <a:r>
-              <a:rPr sz="1700" lang="ja-JP">
-                <a:solidFill>
-                  <a:srgbClr val="626669"/>
-                </a:solidFill>
-                <a:latin typeface="Noto Sans"/>
-                <a:ea typeface="Noto Sans CJK JP"/>
-                <a:cs typeface="Noto Sans"/>
-              </a:rPr>
-              <a:t>構築目的、作成・検証方法、初期モデルの評価を示す原著。</a:t>
+              <a:rPr sz="2000" b="0" lang="ja-JP">
+                <a:solidFill>
+                  <a:srgbClr val="303437"/>
+                </a:solidFill>
+                <a:latin typeface="Noto Sans"/>
+                <a:ea typeface="Noto Sans CJK JP"/>
+              </a:rPr>
+              <a:t>まず、3分類の定義と、文の作成・ラベル検証の設計を学ぶ。</a:t>
             </a:r>
           </a:p>
         </p:txBody>
@@ -39235,8 +39197,8 @@
         </p:nvSpPr>
         <p:spPr>
           <a:xfrm>
-            <a:off x="594360" y="2011680"/>
-            <a:ext cx="7955279" cy="256032"/>
+            <a:off x="594360" y="2221991"/>
+            <a:ext cx="7955279" cy="228600"/>
           </a:xfrm>
           <a:prstGeom prst="rect">
             <a:avLst/>
@@ -39244,14 +39206,14 @@
           <a:noFill/>
         </p:spPr>
         <p:txBody>
-          <a:bodyPr wrap="square" lIns="0" rIns="0" tIns="0" bIns="0" anchor="t">
+          <a:bodyPr wrap="square" lIns="0" rIns="0" tIns="0" bIns="0">
             <a:spAutoFit/>
           </a:bodyPr>
           <a:lstStyle/>
           <a:p>
-            <a:pPr algn="l" marL="0" indent="0">
+            <a:pPr>
               <a:lnSpc>
-                <a:spcPct val="110000"/>
+                <a:spcPct val="108000"/>
               </a:lnSpc>
               <a:spcBef>
                 <a:spcPts val="0"/>
@@ -39259,21 +39221,15 @@
               <a:spcAft>
                 <a:spcPts val="0"/>
               </a:spcAft>
-              <a:buNone/>
-              <a:defRPr sz="850" lang="ja-JP">
-                <a:latin typeface="Noto Sans"/>
-                <a:ea typeface="Noto Sans CJK JP"/>
-                <a:cs typeface="Noto Sans"/>
-              </a:defRPr>
             </a:pPr>
             <a:r>
-              <a:rPr sz="850" lang="ja-JP">
+              <a:rPr sz="1050" b="0" lang="ja-JP">
                 <a:solidFill>
                   <a:srgbClr val="626669"/>
                 </a:solidFill>
                 <a:latin typeface="Noto Sans"/>
                 <a:ea typeface="Noto Sans CJK JP"/>
-                <a:cs typeface="Noto Sans"/>
+                <a:hlinkClick r:id="rId2"/>
               </a:rPr>
               <a:t>https://aclanthology.org/D15-1075/</a:t>
             </a:r>
@@ -39288,8 +39244,8 @@
         </p:nvSpPr>
         <p:spPr>
           <a:xfrm>
-            <a:off x="594360" y="2194560"/>
-            <a:ext cx="7955279" cy="320040"/>
+            <a:off x="594360" y="2487168"/>
+            <a:ext cx="7955279" cy="365760"/>
           </a:xfrm>
           <a:prstGeom prst="rect">
             <a:avLst/>
@@ -39297,36 +39253,29 @@
           <a:noFill/>
         </p:spPr>
         <p:txBody>
-          <a:bodyPr wrap="square" lIns="0" rIns="0" tIns="0" bIns="0" anchor="t">
+          <a:bodyPr wrap="square" lIns="0" rIns="0" tIns="0" bIns="0">
             <a:spAutoFit/>
           </a:bodyPr>
           <a:lstStyle/>
           <a:p>
-            <a:pPr algn="l" marL="0" indent="0">
+            <a:pPr>
               <a:lnSpc>
-                <a:spcPct val="110000"/>
+                <a:spcPct val="108000"/>
               </a:lnSpc>
               <a:spcBef>
                 <a:spcPts val="0"/>
               </a:spcBef>
               <a:spcAft>
-                <a:spcPts val="600"/>
-              </a:spcAft>
-              <a:buNone/>
-              <a:defRPr sz="1900" lang="ja-JP">
-                <a:latin typeface="Noto Sans"/>
-                <a:ea typeface="Noto Sans CJK JP"/>
-                <a:cs typeface="Noto Sans"/>
-              </a:defRPr>
+                <a:spcPts val="0"/>
+              </a:spcAft>
             </a:pPr>
             <a:r>
-              <a:rPr sz="1900" lang="ja-JP">
-                <a:solidFill>
-                  <a:srgbClr val="303437"/>
-                </a:solidFill>
-                <a:latin typeface="Noto Sans"/>
-                <a:ea typeface="Noto Sans CJK JP"/>
-                <a:cs typeface="Noto Sans"/>
+              <a:rPr sz="2100" b="1" lang="ja-JP">
+                <a:solidFill>
+                  <a:srgbClr val="303437"/>
+                </a:solidFill>
+                <a:latin typeface="Noto Sans"/>
+                <a:ea typeface="Noto Sans CJK JP"/>
               </a:rPr>
               <a:t>Williams et al. (2018). MultiNLI. NAACL.</a:t>
             </a:r>
@@ -39341,8 +39290,8 @@
         </p:nvSpPr>
         <p:spPr>
           <a:xfrm>
-            <a:off x="594360" y="2514600"/>
-            <a:ext cx="7955279" cy="292608"/>
+            <a:off x="594360" y="2880360"/>
+            <a:ext cx="7955279" cy="438912"/>
           </a:xfrm>
           <a:prstGeom prst="rect">
             <a:avLst/>
@@ -39350,38 +39299,31 @@
           <a:noFill/>
         </p:spPr>
         <p:txBody>
-          <a:bodyPr wrap="square" lIns="0" rIns="0" tIns="0" bIns="0" anchor="t">
+          <a:bodyPr wrap="square" lIns="0" rIns="0" tIns="0" bIns="0">
             <a:spAutoFit/>
           </a:bodyPr>
           <a:lstStyle/>
           <a:p>
-            <a:pPr algn="l" marL="0" indent="0">
+            <a:pPr>
               <a:lnSpc>
-                <a:spcPct val="110000"/>
+                <a:spcPct val="108000"/>
               </a:lnSpc>
               <a:spcBef>
                 <a:spcPts val="0"/>
               </a:spcBef>
               <a:spcAft>
-                <a:spcPts val="600"/>
-              </a:spcAft>
-              <a:buNone/>
-              <a:defRPr sz="1700" lang="ja-JP">
-                <a:latin typeface="Noto Sans"/>
-                <a:ea typeface="Noto Sans CJK JP"/>
-                <a:cs typeface="Noto Sans"/>
-              </a:defRPr>
+                <a:spcPts val="0"/>
+              </a:spcAft>
             </a:pPr>
             <a:r>
-              <a:rPr sz="1700" lang="ja-JP">
-                <a:solidFill>
-                  <a:srgbClr val="626669"/>
-                </a:solidFill>
-                <a:latin typeface="Noto Sans"/>
-                <a:ea typeface="Noto Sans CJK JP"/>
-                <a:cs typeface="Noto Sans"/>
-              </a:rPr>
-              <a:t>写真説明から10ジャンルへ対象を広げた後続データの原著。</a:t>
+              <a:rPr sz="2000" b="0" lang="ja-JP">
+                <a:solidFill>
+                  <a:srgbClr val="303437"/>
+                </a:solidFill>
+                <a:latin typeface="Noto Sans"/>
+                <a:ea typeface="Noto Sans CJK JP"/>
+              </a:rPr>
+              <a:t>10ジャンルへ対象を広げ、分野をまたぐ汎化の評価を考える。</a:t>
             </a:r>
           </a:p>
         </p:txBody>
@@ -39394,8 +39336,8 @@
         </p:nvSpPr>
         <p:spPr>
           <a:xfrm>
-            <a:off x="594360" y="2926080"/>
-            <a:ext cx="7955279" cy="256032"/>
+            <a:off x="594360" y="3355848"/>
+            <a:ext cx="7955279" cy="228600"/>
           </a:xfrm>
           <a:prstGeom prst="rect">
             <a:avLst/>
@@ -39403,14 +39345,14 @@
           <a:noFill/>
         </p:spPr>
         <p:txBody>
-          <a:bodyPr wrap="square" lIns="0" rIns="0" tIns="0" bIns="0" anchor="t">
+          <a:bodyPr wrap="square" lIns="0" rIns="0" tIns="0" bIns="0">
             <a:spAutoFit/>
           </a:bodyPr>
           <a:lstStyle/>
           <a:p>
-            <a:pPr algn="l" marL="0" indent="0">
+            <a:pPr>
               <a:lnSpc>
-                <a:spcPct val="110000"/>
+                <a:spcPct val="108000"/>
               </a:lnSpc>
               <a:spcBef>
                 <a:spcPts val="0"/>
@@ -39418,21 +39360,15 @@
               <a:spcAft>
                 <a:spcPts val="0"/>
               </a:spcAft>
-              <a:buNone/>
-              <a:defRPr sz="850" lang="ja-JP">
-                <a:latin typeface="Noto Sans"/>
-                <a:ea typeface="Noto Sans CJK JP"/>
-                <a:cs typeface="Noto Sans"/>
-              </a:defRPr>
             </a:pPr>
             <a:r>
-              <a:rPr sz="850" lang="ja-JP">
+              <a:rPr sz="1050" b="0" lang="ja-JP">
                 <a:solidFill>
                   <a:srgbClr val="626669"/>
                 </a:solidFill>
                 <a:latin typeface="Noto Sans"/>
                 <a:ea typeface="Noto Sans CJK JP"/>
-                <a:cs typeface="Noto Sans"/>
+                <a:hlinkClick r:id="rId3"/>
               </a:rPr>
               <a:t>https://aclanthology.org/N18-1101/</a:t>
             </a:r>
@@ -39447,8 +39383,8 @@
         </p:nvSpPr>
         <p:spPr>
           <a:xfrm>
-            <a:off x="594360" y="3108960"/>
-            <a:ext cx="7955279" cy="320040"/>
+            <a:off x="594360" y="3621024"/>
+            <a:ext cx="7955279" cy="365760"/>
           </a:xfrm>
           <a:prstGeom prst="rect">
             <a:avLst/>
@@ -39456,38 +39392,31 @@
           <a:noFill/>
         </p:spPr>
         <p:txBody>
-          <a:bodyPr wrap="square" lIns="0" rIns="0" tIns="0" bIns="0" anchor="t">
+          <a:bodyPr wrap="square" lIns="0" rIns="0" tIns="0" bIns="0">
             <a:spAutoFit/>
           </a:bodyPr>
           <a:lstStyle/>
           <a:p>
-            <a:pPr algn="l" marL="0" indent="0">
+            <a:pPr>
               <a:lnSpc>
-                <a:spcPct val="110000"/>
+                <a:spcPct val="108000"/>
               </a:lnSpc>
               <a:spcBef>
                 <a:spcPts val="0"/>
               </a:spcBef>
               <a:spcAft>
-                <a:spcPts val="600"/>
-              </a:spcAft>
-              <a:buNone/>
-              <a:defRPr sz="1900" lang="ja-JP">
-                <a:latin typeface="Noto Sans"/>
-                <a:ea typeface="Noto Sans CJK JP"/>
-                <a:cs typeface="Noto Sans"/>
-              </a:defRPr>
+                <a:spcPts val="0"/>
+              </a:spcAft>
             </a:pPr>
             <a:r>
-              <a:rPr sz="1900" lang="ja-JP">
-                <a:solidFill>
-                  <a:srgbClr val="303437"/>
-                </a:solidFill>
-                <a:latin typeface="Noto Sans"/>
-                <a:ea typeface="Noto Sans CJK JP"/>
-                <a:cs typeface="Noto Sans"/>
-              </a:rPr>
-              <a:t>Camburu et al. (2018). e-SNLI. NeurIPS.</a:t>
+              <a:rPr sz="2100" b="1" lang="ja-JP">
+                <a:solidFill>
+                  <a:srgbClr val="303437"/>
+                </a:solidFill>
+                <a:latin typeface="Noto Sans"/>
+                <a:ea typeface="Noto Sans CJK JP"/>
+              </a:rPr>
+              <a:t>Gururangan et al. (2018). Annotation Artifacts. NAACL.</a:t>
             </a:r>
           </a:p>
         </p:txBody>
@@ -39500,8 +39429,8 @@
         </p:nvSpPr>
         <p:spPr>
           <a:xfrm>
-            <a:off x="594360" y="3429000"/>
-            <a:ext cx="7955279" cy="292608"/>
+            <a:off x="594360" y="4014215"/>
+            <a:ext cx="7955279" cy="438912"/>
           </a:xfrm>
           <a:prstGeom prst="rect">
             <a:avLst/>
@@ -39509,38 +39438,31 @@
           <a:noFill/>
         </p:spPr>
         <p:txBody>
-          <a:bodyPr wrap="square" lIns="0" rIns="0" tIns="0" bIns="0" anchor="t">
+          <a:bodyPr wrap="square" lIns="0" rIns="0" tIns="0" bIns="0">
             <a:spAutoFit/>
           </a:bodyPr>
           <a:lstStyle/>
           <a:p>
-            <a:pPr algn="l" marL="0" indent="0">
+            <a:pPr>
               <a:lnSpc>
-                <a:spcPct val="110000"/>
+                <a:spcPct val="108000"/>
               </a:lnSpc>
               <a:spcBef>
                 <a:spcPts val="0"/>
               </a:spcBef>
               <a:spcAft>
-                <a:spcPts val="600"/>
-              </a:spcAft>
-              <a:buNone/>
-              <a:defRPr sz="1700" lang="ja-JP">
-                <a:latin typeface="Noto Sans"/>
-                <a:ea typeface="Noto Sans CJK JP"/>
-                <a:cs typeface="Noto Sans"/>
-              </a:defRPr>
+                <a:spcPts val="0"/>
+              </a:spcAft>
             </a:pPr>
             <a:r>
-              <a:rPr sz="1700" lang="ja-JP">
-                <a:solidFill>
-                  <a:srgbClr val="626669"/>
-                </a:solidFill>
-                <a:latin typeface="Noto Sans"/>
-                <a:ea typeface="Noto Sans CJK JP"/>
-                <a:cs typeface="Noto Sans"/>
-              </a:rPr>
-              <a:t>SNLIの判断に自然言語の説明を加えた拡張の根拠。</a:t>
+              <a:rPr sz="2000" b="0" lang="ja-JP">
+                <a:solidFill>
+                  <a:srgbClr val="303437"/>
+                </a:solidFill>
+                <a:latin typeface="Noto Sans"/>
+                <a:ea typeface="Noto Sans CJK JP"/>
+              </a:rPr>
+              <a:t>仮説文だけで予測できる偏りを読み、データの近道を調べる。</a:t>
             </a:r>
           </a:p>
         </p:txBody>
@@ -39553,8 +39475,8 @@
         </p:nvSpPr>
         <p:spPr>
           <a:xfrm>
-            <a:off x="594360" y="3840480"/>
-            <a:ext cx="7955279" cy="256032"/>
+            <a:off x="594360" y="4489704"/>
+            <a:ext cx="7955279" cy="228600"/>
           </a:xfrm>
           <a:prstGeom prst="rect">
             <a:avLst/>
@@ -39562,14 +39484,14 @@
           <a:noFill/>
         </p:spPr>
         <p:txBody>
-          <a:bodyPr wrap="square" lIns="0" rIns="0" tIns="0" bIns="0" anchor="t">
+          <a:bodyPr wrap="square" lIns="0" rIns="0" tIns="0" bIns="0">
             <a:spAutoFit/>
           </a:bodyPr>
           <a:lstStyle/>
           <a:p>
-            <a:pPr algn="l" marL="0" indent="0">
+            <a:pPr>
               <a:lnSpc>
-                <a:spcPct val="110000"/>
+                <a:spcPct val="108000"/>
               </a:lnSpc>
               <a:spcBef>
                 <a:spcPts val="0"/>
@@ -39577,182 +39499,17 @@
               <a:spcAft>
                 <a:spcPts val="0"/>
               </a:spcAft>
-              <a:buNone/>
-              <a:defRPr sz="850" lang="ja-JP">
-                <a:latin typeface="Noto Sans"/>
-                <a:ea typeface="Noto Sans CJK JP"/>
-                <a:cs typeface="Noto Sans"/>
-              </a:defRPr>
             </a:pPr>
             <a:r>
-              <a:rPr sz="850" lang="ja-JP">
+              <a:rPr sz="1050" b="0" lang="ja-JP">
                 <a:solidFill>
                   <a:srgbClr val="626669"/>
                 </a:solidFill>
                 <a:latin typeface="Noto Sans"/>
                 <a:ea typeface="Noto Sans CJK JP"/>
-                <a:cs typeface="Noto Sans"/>
-              </a:rPr>
-              <a:t>https://github.com/OanaMariaCamburu/e-SNLI</a:t>
-            </a:r>
-          </a:p>
-        </p:txBody>
-      </p:sp>
-      <p:sp>
-        <p:nvSpPr>
-          <p:cNvPr id="13" name="TextBox 12"/>
-          <p:cNvSpPr txBox="1"/>
-          <p:nvPr/>
-        </p:nvSpPr>
-        <p:spPr>
-          <a:xfrm>
-            <a:off x="594360" y="4023360"/>
-            <a:ext cx="7955279" cy="320040"/>
-          </a:xfrm>
-          <a:prstGeom prst="rect">
-            <a:avLst/>
-          </a:prstGeom>
-          <a:noFill/>
-        </p:spPr>
-        <p:txBody>
-          <a:bodyPr wrap="square" lIns="0" rIns="0" tIns="0" bIns="0" anchor="t">
-            <a:spAutoFit/>
-          </a:bodyPr>
-          <a:lstStyle/>
-          <a:p>
-            <a:pPr algn="l" marL="0" indent="0">
-              <a:lnSpc>
-                <a:spcPct val="110000"/>
-              </a:lnSpc>
-              <a:spcBef>
-                <a:spcPts val="0"/>
-              </a:spcBef>
-              <a:spcAft>
-                <a:spcPts val="600"/>
-              </a:spcAft>
-              <a:buNone/>
-              <a:defRPr sz="1900" lang="ja-JP">
-                <a:latin typeface="Noto Sans"/>
-                <a:ea typeface="Noto Sans CJK JP"/>
-                <a:cs typeface="Noto Sans"/>
-              </a:defRPr>
-            </a:pPr>
-            <a:r>
-              <a:rPr sz="1900" lang="ja-JP">
-                <a:solidFill>
-                  <a:srgbClr val="303437"/>
-                </a:solidFill>
-                <a:latin typeface="Noto Sans"/>
-                <a:ea typeface="Noto Sans CJK JP"/>
-                <a:cs typeface="Noto Sans"/>
-              </a:rPr>
-              <a:t>Nie et al. (2020). ANLI. ACL.</a:t>
-            </a:r>
-          </a:p>
-        </p:txBody>
-      </p:sp>
-      <p:sp>
-        <p:nvSpPr>
-          <p:cNvPr id="14" name="TextBox 13"/>
-          <p:cNvSpPr txBox="1"/>
-          <p:nvPr/>
-        </p:nvSpPr>
-        <p:spPr>
-          <a:xfrm>
-            <a:off x="594360" y="4343400"/>
-            <a:ext cx="7955279" cy="292608"/>
-          </a:xfrm>
-          <a:prstGeom prst="rect">
-            <a:avLst/>
-          </a:prstGeom>
-          <a:noFill/>
-        </p:spPr>
-        <p:txBody>
-          <a:bodyPr wrap="square" lIns="0" rIns="0" tIns="0" bIns="0" anchor="t">
-            <a:spAutoFit/>
-          </a:bodyPr>
-          <a:lstStyle/>
-          <a:p>
-            <a:pPr algn="l" marL="0" indent="0">
-              <a:lnSpc>
-                <a:spcPct val="110000"/>
-              </a:lnSpc>
-              <a:spcBef>
-                <a:spcPts val="0"/>
-              </a:spcBef>
-              <a:spcAft>
-                <a:spcPts val="600"/>
-              </a:spcAft>
-              <a:buNone/>
-              <a:defRPr sz="1700" lang="ja-JP">
-                <a:latin typeface="Noto Sans"/>
-                <a:ea typeface="Noto Sans CJK JP"/>
-                <a:cs typeface="Noto Sans"/>
-              </a:defRPr>
-            </a:pPr>
-            <a:r>
-              <a:rPr sz="1700" lang="ja-JP">
-                <a:solidFill>
-                  <a:srgbClr val="626669"/>
-                </a:solidFill>
-                <a:latin typeface="Noto Sans"/>
-                <a:ea typeface="Noto Sans CJK JP"/>
-                <a:cs typeface="Noto Sans"/>
-              </a:rPr>
-              <a:t>モデルが誤る例を人が作る後続データの構築方法。</a:t>
-            </a:r>
-          </a:p>
-        </p:txBody>
-      </p:sp>
-      <p:sp>
-        <p:nvSpPr>
-          <p:cNvPr id="15" name="TextBox 14"/>
-          <p:cNvSpPr txBox="1"/>
-          <p:nvPr/>
-        </p:nvSpPr>
-        <p:spPr>
-          <a:xfrm>
-            <a:off x="594360" y="4754880"/>
-            <a:ext cx="7955279" cy="256032"/>
-          </a:xfrm>
-          <a:prstGeom prst="rect">
-            <a:avLst/>
-          </a:prstGeom>
-          <a:noFill/>
-        </p:spPr>
-        <p:txBody>
-          <a:bodyPr wrap="square" lIns="0" rIns="0" tIns="0" bIns="0" anchor="t">
-            <a:spAutoFit/>
-          </a:bodyPr>
-          <a:lstStyle/>
-          <a:p>
-            <a:pPr algn="l" marL="0" indent="0">
-              <a:lnSpc>
-                <a:spcPct val="110000"/>
-              </a:lnSpc>
-              <a:spcBef>
-                <a:spcPts val="0"/>
-              </a:spcBef>
-              <a:spcAft>
-                <a:spcPts val="0"/>
-              </a:spcAft>
-              <a:buNone/>
-              <a:defRPr sz="850" lang="ja-JP">
-                <a:latin typeface="Noto Sans"/>
-                <a:ea typeface="Noto Sans CJK JP"/>
-                <a:cs typeface="Noto Sans"/>
-              </a:defRPr>
-            </a:pPr>
-            <a:r>
-              <a:rPr sz="850" lang="ja-JP">
-                <a:solidFill>
-                  <a:srgbClr val="626669"/>
-                </a:solidFill>
-                <a:latin typeface="Noto Sans"/>
-                <a:ea typeface="Noto Sans CJK JP"/>
-                <a:cs typeface="Noto Sans"/>
-              </a:rPr>
-              <a:t>https://github.com/facebookresearch/anli</a:t>
+                <a:hlinkClick r:id="rId6"/>
+              </a:rPr>
+              <a:t>https://aclanthology.org/N18-2017/</a:t>
             </a:r>
           </a:p>
         </p:txBody>
@@ -39795,42 +39552,10 @@
           <a:bodyPr wrap="square" lIns="0" rIns="0" tIns="0" bIns="0" anchor="t"/>
           <a:lstStyle/>
           <a:p>
-            <a:pPr algn="l" marL="0" indent="0">
-              <a:lnSpc>
-                <a:spcPct val="110000"/>
-              </a:lnSpc>
-              <a:spcBef>
-                <a:spcPts val="0"/>
-              </a:spcBef>
-              <a:spcAft>
-                <a:spcPts val="600"/>
-              </a:spcAft>
-              <a:buNone/>
-              <a:defRPr sz="2800" b="1" lang="ja-JP">
-                <a:solidFill>
-                  <a:srgbClr val="303437"/>
-                </a:solidFill>
-                <a:latin typeface="Noto Sans"/>
-                <a:ea typeface="Noto Sans CJK JP"/>
-                <a:cs typeface="Noto Sans"/>
-              </a:defRPr>
-            </a:pPr>
-            <a:r>
-              <a:rPr sz="2800" lang="ja-JP" b="1">
-                <a:solidFill>
-                  <a:srgbClr val="303437"/>
-                </a:solidFill>
-                <a:latin typeface="Noto Sans"/>
-                <a:ea typeface="Noto Sans CJK JP"/>
-                <a:cs typeface="Noto Sans"/>
-              </a:rPr>
-              <a:t>参考文献と参照した内容</a:t>
-            </a:r>
-            <a:endParaRPr sz="2800" lang="ja-JP">
-              <a:latin typeface="Noto Sans"/>
-              <a:ea typeface="Noto Sans CJK JP"/>
-              <a:cs typeface="Noto Sans"/>
-            </a:endParaRPr>
+            <a:r>
+              <a:rPr sz="2800"/>
+              <a:t>読後の学習・研究に向けて</a:t>
+            </a:r>
           </a:p>
         </p:txBody>
       </p:sp>
@@ -39854,42 +39579,10 @@
           <a:bodyPr wrap="square" lIns="0" rIns="0" tIns="0" bIns="0" anchor="ctr"/>
           <a:lstStyle/>
           <a:p>
-            <a:pPr algn="l" marL="0" indent="0">
-              <a:lnSpc>
-                <a:spcPct val="110000"/>
-              </a:lnSpc>
-              <a:spcBef>
-                <a:spcPts val="0"/>
-              </a:spcBef>
-              <a:spcAft>
-                <a:spcPts val="0"/>
-              </a:spcAft>
-              <a:buNone/>
-              <a:defRPr sz="1400" b="1" lang="ja-JP">
-                <a:solidFill>
-                  <a:srgbClr val="FFFEF8"/>
-                </a:solidFill>
-                <a:latin typeface="Noto Sans"/>
-                <a:ea typeface="Noto Sans CJK JP"/>
-                <a:cs typeface="Noto Sans"/>
-              </a:defRPr>
-            </a:pPr>
-            <a:r>
-              <a:rPr sz="1400" lang="ja-JP" b="1">
-                <a:solidFill>
-                  <a:srgbClr val="FFFEF8"/>
-                </a:solidFill>
-                <a:latin typeface="Noto Sans"/>
-                <a:ea typeface="Noto Sans CJK JP"/>
-                <a:cs typeface="Noto Sans"/>
-              </a:rPr>
-              <a:t>Appendix: 5 参考文献</a:t>
-            </a:r>
-            <a:endParaRPr sz="1400" lang="ja-JP">
-              <a:latin typeface="Noto Sans"/>
-              <a:ea typeface="Noto Sans CJK JP"/>
-              <a:cs typeface="Noto Sans"/>
-            </a:endParaRPr>
+            <a:r>
+              <a:rPr sz="1400"/>
+              <a:t>Appendix: 5 参考文献・実装を試す</a:t>
+            </a:r>
           </a:p>
         </p:txBody>
       </p:sp>
@@ -39901,8 +39594,8 @@
         </p:nvSpPr>
         <p:spPr>
           <a:xfrm>
-            <a:off x="594360" y="1280160"/>
-            <a:ext cx="7955279" cy="320040"/>
+            <a:off x="594360" y="1353312"/>
+            <a:ext cx="7955279" cy="365760"/>
           </a:xfrm>
           <a:prstGeom prst="rect">
             <a:avLst/>
@@ -39910,38 +39603,31 @@
           <a:noFill/>
         </p:spPr>
         <p:txBody>
-          <a:bodyPr wrap="square" lIns="0" rIns="0" tIns="0" bIns="0" anchor="t">
+          <a:bodyPr wrap="square" lIns="0" rIns="0" tIns="0" bIns="0">
             <a:spAutoFit/>
           </a:bodyPr>
           <a:lstStyle/>
           <a:p>
-            <a:pPr algn="l" marL="0" indent="0">
+            <a:pPr>
               <a:lnSpc>
-                <a:spcPct val="110000"/>
+                <a:spcPct val="108000"/>
               </a:lnSpc>
               <a:spcBef>
                 <a:spcPts val="0"/>
               </a:spcBef>
               <a:spcAft>
-                <a:spcPts val="600"/>
-              </a:spcAft>
-              <a:buNone/>
-              <a:defRPr sz="1900" lang="ja-JP">
-                <a:latin typeface="Noto Sans"/>
-                <a:ea typeface="Noto Sans CJK JP"/>
-                <a:cs typeface="Noto Sans"/>
-              </a:defRPr>
+                <a:spcPts val="0"/>
+              </a:spcAft>
             </a:pPr>
             <a:r>
-              <a:rPr sz="1900" lang="ja-JP">
-                <a:solidFill>
-                  <a:srgbClr val="303437"/>
-                </a:solidFill>
-                <a:latin typeface="Noto Sans"/>
-                <a:ea typeface="Noto Sans CJK JP"/>
-                <a:cs typeface="Noto Sans"/>
-              </a:rPr>
-              <a:t>Gururangan et al. (2018). Annotation Artifacts. NAACL.</a:t>
+              <a:rPr sz="2100" b="1" lang="ja-JP">
+                <a:solidFill>
+                  <a:srgbClr val="303437"/>
+                </a:solidFill>
+                <a:latin typeface="Noto Sans"/>
+                <a:ea typeface="Noto Sans CJK JP"/>
+              </a:rPr>
+              <a:t>Sentence Transformers公式・NLI学習例</a:t>
             </a:r>
           </a:p>
         </p:txBody>
@@ -39954,8 +39640,8 @@
         </p:nvSpPr>
         <p:spPr>
           <a:xfrm>
-            <a:off x="594360" y="1600200"/>
-            <a:ext cx="7955279" cy="292608"/>
+            <a:off x="594360" y="1746504"/>
+            <a:ext cx="7955279" cy="438912"/>
           </a:xfrm>
           <a:prstGeom prst="rect">
             <a:avLst/>
@@ -39963,38 +39649,31 @@
           <a:noFill/>
         </p:spPr>
         <p:txBody>
-          <a:bodyPr wrap="square" lIns="0" rIns="0" tIns="0" bIns="0" anchor="t">
+          <a:bodyPr wrap="square" lIns="0" rIns="0" tIns="0" bIns="0">
             <a:spAutoFit/>
           </a:bodyPr>
           <a:lstStyle/>
           <a:p>
-            <a:pPr algn="l" marL="0" indent="0">
+            <a:pPr>
               <a:lnSpc>
-                <a:spcPct val="110000"/>
+                <a:spcPct val="108000"/>
               </a:lnSpc>
               <a:spcBef>
                 <a:spcPts val="0"/>
               </a:spcBef>
               <a:spcAft>
-                <a:spcPts val="600"/>
-              </a:spcAft>
-              <a:buNone/>
-              <a:defRPr sz="1700" lang="ja-JP">
-                <a:latin typeface="Noto Sans"/>
-                <a:ea typeface="Noto Sans CJK JP"/>
-                <a:cs typeface="Noto Sans"/>
-              </a:defRPr>
+                <a:spcPts val="0"/>
+              </a:spcAft>
             </a:pPr>
             <a:r>
-              <a:rPr sz="1700" lang="ja-JP">
-                <a:solidFill>
-                  <a:srgbClr val="626669"/>
-                </a:solidFill>
-                <a:latin typeface="Noto Sans"/>
-                <a:ea typeface="Noto Sans CJK JP"/>
-                <a:cs typeface="Noto Sans"/>
-              </a:rPr>
-              <a:t>仮説文だけでも予測できる注釈の偏りを示した研究。</a:t>
+              <a:rPr sz="2000" b="0" lang="ja-JP">
+                <a:solidFill>
+                  <a:srgbClr val="303437"/>
+                </a:solidFill>
+                <a:latin typeface="Noto Sans"/>
+                <a:ea typeface="Noto Sans CJK JP"/>
+              </a:rPr>
+              <a:t>含意ペアと矛盾ペアから、文埋め込みを学習する手順を試す。</a:t>
             </a:r>
           </a:p>
         </p:txBody>
@@ -40007,8 +39686,8 @@
         </p:nvSpPr>
         <p:spPr>
           <a:xfrm>
-            <a:off x="594360" y="2011680"/>
-            <a:ext cx="7955279" cy="256032"/>
+            <a:off x="594360" y="2221991"/>
+            <a:ext cx="7955279" cy="228600"/>
           </a:xfrm>
           <a:prstGeom prst="rect">
             <a:avLst/>
@@ -40016,14 +39695,14 @@
           <a:noFill/>
         </p:spPr>
         <p:txBody>
-          <a:bodyPr wrap="square" lIns="0" rIns="0" tIns="0" bIns="0" anchor="t">
+          <a:bodyPr wrap="square" lIns="0" rIns="0" tIns="0" bIns="0">
             <a:spAutoFit/>
           </a:bodyPr>
           <a:lstStyle/>
           <a:p>
-            <a:pPr algn="l" marL="0" indent="0">
+            <a:pPr>
               <a:lnSpc>
-                <a:spcPct val="110000"/>
+                <a:spcPct val="108000"/>
               </a:lnSpc>
               <a:spcBef>
                 <a:spcPts val="0"/>
@@ -40031,23 +39710,17 @@
               <a:spcAft>
                 <a:spcPts val="0"/>
               </a:spcAft>
-              <a:buNone/>
-              <a:defRPr sz="850" lang="ja-JP">
-                <a:latin typeface="Noto Sans"/>
-                <a:ea typeface="Noto Sans CJK JP"/>
-                <a:cs typeface="Noto Sans"/>
-              </a:defRPr>
             </a:pPr>
             <a:r>
-              <a:rPr sz="850" lang="ja-JP">
+              <a:rPr sz="1050" b="0" lang="ja-JP">
                 <a:solidFill>
                   <a:srgbClr val="626669"/>
                 </a:solidFill>
                 <a:latin typeface="Noto Sans"/>
                 <a:ea typeface="Noto Sans CJK JP"/>
-                <a:cs typeface="Noto Sans"/>
-              </a:rPr>
-              <a:t>https://aclanthology.org/N18-2017/</a:t>
+                <a:hlinkClick r:id="rId6"/>
+              </a:rPr>
+              <a:t>https://github.com/UKPLab/sentence-transformers/tree/master/examples/sentence_transformer/training/nli</a:t>
             </a:r>
           </a:p>
         </p:txBody>
@@ -40060,8 +39733,8 @@
         </p:nvSpPr>
         <p:spPr>
           <a:xfrm>
-            <a:off x="594360" y="2194560"/>
-            <a:ext cx="7955279" cy="320040"/>
+            <a:off x="594360" y="2487168"/>
+            <a:ext cx="7955279" cy="365760"/>
           </a:xfrm>
           <a:prstGeom prst="rect">
             <a:avLst/>
@@ -40069,38 +39742,31 @@
           <a:noFill/>
         </p:spPr>
         <p:txBody>
-          <a:bodyPr wrap="square" lIns="0" rIns="0" tIns="0" bIns="0" anchor="t">
+          <a:bodyPr wrap="square" lIns="0" rIns="0" tIns="0" bIns="0">
             <a:spAutoFit/>
           </a:bodyPr>
           <a:lstStyle/>
           <a:p>
-            <a:pPr algn="l" marL="0" indent="0">
+            <a:pPr>
               <a:lnSpc>
-                <a:spcPct val="110000"/>
+                <a:spcPct val="108000"/>
               </a:lnSpc>
               <a:spcBef>
                 <a:spcPts val="0"/>
               </a:spcBef>
               <a:spcAft>
-                <a:spcPts val="600"/>
-              </a:spcAft>
-              <a:buNone/>
-              <a:defRPr sz="1900" lang="ja-JP">
-                <a:latin typeface="Noto Sans"/>
-                <a:ea typeface="Noto Sans CJK JP"/>
-                <a:cs typeface="Noto Sans"/>
-              </a:defRPr>
+                <a:spcPts val="0"/>
+              </a:spcAft>
             </a:pPr>
             <a:r>
-              <a:rPr sz="1900" lang="ja-JP">
-                <a:solidFill>
-                  <a:srgbClr val="303437"/>
-                </a:solidFill>
-                <a:latin typeface="Noto Sans"/>
-                <a:ea typeface="Noto Sans CJK JP"/>
-                <a:cs typeface="Noto Sans"/>
-              </a:rPr>
-              <a:t>Giampiccolo et al. (2007). RTE第3回.</a:t>
+              <a:rPr sz="2100" b="1" lang="ja-JP">
+                <a:solidFill>
+                  <a:srgbClr val="303437"/>
+                </a:solidFill>
+                <a:latin typeface="Noto Sans"/>
+                <a:ea typeface="Noto Sans CJK JP"/>
+              </a:rPr>
+              <a:t>Reimers &amp; Gurevych (2019). Sentence-BERT. EMNLP.</a:t>
             </a:r>
           </a:p>
         </p:txBody>
@@ -40113,8 +39779,8 @@
         </p:nvSpPr>
         <p:spPr>
           <a:xfrm>
-            <a:off x="594360" y="2514600"/>
-            <a:ext cx="7955279" cy="292608"/>
+            <a:off x="594360" y="2880360"/>
+            <a:ext cx="7955279" cy="438912"/>
           </a:xfrm>
           <a:prstGeom prst="rect">
             <a:avLst/>
@@ -40122,38 +39788,31 @@
           <a:noFill/>
         </p:spPr>
         <p:txBody>
-          <a:bodyPr wrap="square" lIns="0" rIns="0" tIns="0" bIns="0" anchor="t">
+          <a:bodyPr wrap="square" lIns="0" rIns="0" tIns="0" bIns="0">
             <a:spAutoFit/>
           </a:bodyPr>
           <a:lstStyle/>
           <a:p>
-            <a:pPr algn="l" marL="0" indent="0">
+            <a:pPr>
               <a:lnSpc>
-                <a:spcPct val="110000"/>
+                <a:spcPct val="108000"/>
               </a:lnSpc>
               <a:spcBef>
                 <a:spcPts val="0"/>
               </a:spcBef>
               <a:spcAft>
-                <a:spcPts val="600"/>
-              </a:spcAft>
-              <a:buNone/>
-              <a:defRPr sz="1700" lang="ja-JP">
-                <a:latin typeface="Noto Sans"/>
-                <a:ea typeface="Noto Sans CJK JP"/>
-                <a:cs typeface="Noto Sans"/>
-              </a:defRPr>
+                <a:spcPts val="0"/>
+              </a:spcAft>
             </a:pPr>
             <a:r>
-              <a:rPr sz="1700" lang="ja-JP">
-                <a:solidFill>
-                  <a:srgbClr val="626669"/>
-                </a:solidFill>
-                <a:latin typeface="Noto Sans"/>
-                <a:ea typeface="Noto Sans CJK JP"/>
-                <a:cs typeface="Noto Sans"/>
-              </a:rPr>
-              <a:t>SNLI以前の含意認識ベンチマークと規模の比較。</a:t>
+              <a:rPr sz="2000" b="0" lang="ja-JP">
+                <a:solidFill>
+                  <a:srgbClr val="303437"/>
+                </a:solidFill>
+                <a:latin typeface="Noto Sans"/>
+                <a:ea typeface="Noto Sans CJK JP"/>
+              </a:rPr>
+              <a:t>NLIで学んだ文表現を、類似度計算へ転用する方法を学ぶ。</a:t>
             </a:r>
           </a:p>
         </p:txBody>
@@ -40166,8 +39825,8 @@
         </p:nvSpPr>
         <p:spPr>
           <a:xfrm>
-            <a:off x="594360" y="2926080"/>
-            <a:ext cx="7955279" cy="256032"/>
+            <a:off x="594360" y="3355848"/>
+            <a:ext cx="7955279" cy="228600"/>
           </a:xfrm>
           <a:prstGeom prst="rect">
             <a:avLst/>
@@ -40175,14 +39834,14 @@
           <a:noFill/>
         </p:spPr>
         <p:txBody>
-          <a:bodyPr wrap="square" lIns="0" rIns="0" tIns="0" bIns="0" anchor="t">
+          <a:bodyPr wrap="square" lIns="0" rIns="0" tIns="0" bIns="0">
             <a:spAutoFit/>
           </a:bodyPr>
           <a:lstStyle/>
           <a:p>
-            <a:pPr algn="l" marL="0" indent="0">
+            <a:pPr>
               <a:lnSpc>
-                <a:spcPct val="110000"/>
+                <a:spcPct val="108000"/>
               </a:lnSpc>
               <a:spcBef>
                 <a:spcPts val="0"/>
@@ -40190,23 +39849,17 @@
               <a:spcAft>
                 <a:spcPts val="0"/>
               </a:spcAft>
-              <a:buNone/>
-              <a:defRPr sz="850" lang="ja-JP">
-                <a:latin typeface="Noto Sans"/>
-                <a:ea typeface="Noto Sans CJK JP"/>
-                <a:cs typeface="Noto Sans"/>
-              </a:defRPr>
             </a:pPr>
             <a:r>
-              <a:rPr sz="850" lang="ja-JP">
+              <a:rPr sz="1050" b="0" lang="ja-JP">
                 <a:solidFill>
                   <a:srgbClr val="626669"/>
                 </a:solidFill>
                 <a:latin typeface="Noto Sans"/>
                 <a:ea typeface="Noto Sans CJK JP"/>
-                <a:cs typeface="Noto Sans"/>
-              </a:rPr>
-              <a:t>https://aclanthology.org/W07-1401/</a:t>
+                <a:hlinkClick r:id="rId8"/>
+              </a:rPr>
+              <a:t>https://aclanthology.org/D19-1410/</a:t>
             </a:r>
           </a:p>
         </p:txBody>
@@ -40219,8 +39872,8 @@
         </p:nvSpPr>
         <p:spPr>
           <a:xfrm>
-            <a:off x="594360" y="3108960"/>
-            <a:ext cx="7955279" cy="320040"/>
+            <a:off x="594360" y="3621024"/>
+            <a:ext cx="7955279" cy="365760"/>
           </a:xfrm>
           <a:prstGeom prst="rect">
             <a:avLst/>
@@ -40228,38 +39881,31 @@
           <a:noFill/>
         </p:spPr>
         <p:txBody>
-          <a:bodyPr wrap="square" lIns="0" rIns="0" tIns="0" bIns="0" anchor="t">
+          <a:bodyPr wrap="square" lIns="0" rIns="0" tIns="0" bIns="0">
             <a:spAutoFit/>
           </a:bodyPr>
           <a:lstStyle/>
           <a:p>
-            <a:pPr algn="l" marL="0" indent="0">
+            <a:pPr>
               <a:lnSpc>
-                <a:spcPct val="110000"/>
+                <a:spcPct val="108000"/>
               </a:lnSpc>
               <a:spcBef>
                 <a:spcPts val="0"/>
               </a:spcBef>
               <a:spcAft>
-                <a:spcPts val="600"/>
-              </a:spcAft>
-              <a:buNone/>
-              <a:defRPr sz="1900" lang="ja-JP">
-                <a:latin typeface="Noto Sans"/>
-                <a:ea typeface="Noto Sans CJK JP"/>
-                <a:cs typeface="Noto Sans"/>
-              </a:defRPr>
+                <a:spcPts val="0"/>
+              </a:spcAft>
             </a:pPr>
             <a:r>
-              <a:rPr sz="1900" lang="ja-JP">
-                <a:solidFill>
-                  <a:srgbClr val="303437"/>
-                </a:solidFill>
-                <a:latin typeface="Noto Sans"/>
-                <a:ea typeface="Noto Sans CJK JP"/>
-                <a:cs typeface="Noto Sans"/>
-              </a:rPr>
-              <a:t>ESIM公開実装とSNLIの評価結果</a:t>
+              <a:rPr sz="2100" b="1" lang="ja-JP">
+                <a:solidFill>
+                  <a:srgbClr val="303437"/>
+                </a:solidFill>
+                <a:latin typeface="Noto Sans"/>
+                <a:ea typeface="Noto Sans CJK JP"/>
+              </a:rPr>
+              <a:t>Gao et al. (2021). SimCSE. EMNLP.</a:t>
             </a:r>
           </a:p>
         </p:txBody>
@@ -40272,8 +39918,8 @@
         </p:nvSpPr>
         <p:spPr>
           <a:xfrm>
-            <a:off x="594360" y="3429000"/>
-            <a:ext cx="7955279" cy="292608"/>
+            <a:off x="594360" y="4014215"/>
+            <a:ext cx="7955279" cy="438912"/>
           </a:xfrm>
           <a:prstGeom prst="rect">
             <a:avLst/>
@@ -40281,38 +39927,31 @@
           <a:noFill/>
         </p:spPr>
         <p:txBody>
-          <a:bodyPr wrap="square" lIns="0" rIns="0" tIns="0" bIns="0" anchor="t">
+          <a:bodyPr wrap="square" lIns="0" rIns="0" tIns="0" bIns="0">
             <a:spAutoFit/>
           </a:bodyPr>
           <a:lstStyle/>
           <a:p>
-            <a:pPr algn="l" marL="0" indent="0">
+            <a:pPr>
               <a:lnSpc>
-                <a:spcPct val="110000"/>
+                <a:spcPct val="108000"/>
               </a:lnSpc>
               <a:spcBef>
                 <a:spcPts val="0"/>
               </a:spcBef>
               <a:spcAft>
-                <a:spcPts val="600"/>
-              </a:spcAft>
-              <a:buNone/>
-              <a:defRPr sz="1700" lang="ja-JP">
-                <a:latin typeface="Noto Sans"/>
-                <a:ea typeface="Noto Sans CJK JP"/>
-                <a:cs typeface="Noto Sans"/>
-              </a:defRPr>
+                <a:spcPts val="0"/>
+              </a:spcAft>
             </a:pPr>
             <a:r>
-              <a:rPr sz="1700" lang="ja-JP">
-                <a:solidFill>
-                  <a:srgbClr val="626669"/>
-                </a:solidFill>
-                <a:latin typeface="Noto Sans"/>
-                <a:ea typeface="Noto Sans CJK JP"/>
-                <a:cs typeface="Noto Sans"/>
-              </a:rPr>
-              <a:t>SNLI上の分類性能を比較するためのモデル実装と報告値。</a:t>
+              <a:rPr sz="2000" b="0" lang="ja-JP">
+                <a:solidFill>
+                  <a:srgbClr val="303437"/>
+                </a:solidFill>
+                <a:latin typeface="Noto Sans"/>
+                <a:ea typeface="Noto Sans CJK JP"/>
+              </a:rPr>
+              <a:t>正例・負例の作り方を通じ、対照学習による文表現を比較する。</a:t>
             </a:r>
           </a:p>
         </p:txBody>
@@ -40325,8 +39964,8 @@
         </p:nvSpPr>
         <p:spPr>
           <a:xfrm>
-            <a:off x="594360" y="3840480"/>
-            <a:ext cx="7955279" cy="256032"/>
+            <a:off x="594360" y="4489704"/>
+            <a:ext cx="7955279" cy="228600"/>
           </a:xfrm>
           <a:prstGeom prst="rect">
             <a:avLst/>
@@ -40334,14 +39973,14 @@
           <a:noFill/>
         </p:spPr>
         <p:txBody>
-          <a:bodyPr wrap="square" lIns="0" rIns="0" tIns="0" bIns="0" anchor="t">
+          <a:bodyPr wrap="square" lIns="0" rIns="0" tIns="0" bIns="0">
             <a:spAutoFit/>
           </a:bodyPr>
           <a:lstStyle/>
           <a:p>
-            <a:pPr algn="l" marL="0" indent="0">
+            <a:pPr>
               <a:lnSpc>
-                <a:spcPct val="110000"/>
+                <a:spcPct val="108000"/>
               </a:lnSpc>
               <a:spcBef>
                 <a:spcPts val="0"/>
@@ -40349,182 +39988,17 @@
               <a:spcAft>
                 <a:spcPts val="0"/>
               </a:spcAft>
-              <a:buNone/>
-              <a:defRPr sz="850" lang="ja-JP">
-                <a:latin typeface="Noto Sans"/>
-                <a:ea typeface="Noto Sans CJK JP"/>
-                <a:cs typeface="Noto Sans"/>
-              </a:defRPr>
             </a:pPr>
             <a:r>
-              <a:rPr sz="850" lang="ja-JP">
+              <a:rPr sz="1050" b="0" lang="ja-JP">
                 <a:solidFill>
                   <a:srgbClr val="626669"/>
                 </a:solidFill>
                 <a:latin typeface="Noto Sans"/>
                 <a:ea typeface="Noto Sans CJK JP"/>
-                <a:cs typeface="Noto Sans"/>
-              </a:rPr>
-              <a:t>https://github.com/coetaur0/ESIM</a:t>
-            </a:r>
-          </a:p>
-        </p:txBody>
-      </p:sp>
-      <p:sp>
-        <p:nvSpPr>
-          <p:cNvPr id="13" name="TextBox 12"/>
-          <p:cNvSpPr txBox="1"/>
-          <p:nvPr/>
-        </p:nvSpPr>
-        <p:spPr>
-          <a:xfrm>
-            <a:off x="594360" y="4023360"/>
-            <a:ext cx="7955279" cy="320040"/>
-          </a:xfrm>
-          <a:prstGeom prst="rect">
-            <a:avLst/>
-          </a:prstGeom>
-          <a:noFill/>
-        </p:spPr>
-        <p:txBody>
-          <a:bodyPr wrap="square" lIns="0" rIns="0" tIns="0" bIns="0" anchor="t">
-            <a:spAutoFit/>
-          </a:bodyPr>
-          <a:lstStyle/>
-          <a:p>
-            <a:pPr algn="l" marL="0" indent="0">
-              <a:lnSpc>
-                <a:spcPct val="110000"/>
-              </a:lnSpc>
-              <a:spcBef>
-                <a:spcPts val="0"/>
-              </a:spcBef>
-              <a:spcAft>
-                <a:spcPts val="600"/>
-              </a:spcAft>
-              <a:buNone/>
-              <a:defRPr sz="1900" lang="ja-JP">
-                <a:latin typeface="Noto Sans"/>
-                <a:ea typeface="Noto Sans CJK JP"/>
-                <a:cs typeface="Noto Sans"/>
-              </a:defRPr>
-            </a:pPr>
-            <a:r>
-              <a:rPr sz="1900" lang="ja-JP">
-                <a:solidFill>
-                  <a:srgbClr val="303437"/>
-                </a:solidFill>
-                <a:latin typeface="Noto Sans"/>
-                <a:ea typeface="Noto Sans CJK JP"/>
-                <a:cs typeface="Noto Sans"/>
-              </a:rPr>
-              <a:t>Zhang et al. (2020). SemBERT. AAAI.</a:t>
-            </a:r>
-          </a:p>
-        </p:txBody>
-      </p:sp>
-      <p:sp>
-        <p:nvSpPr>
-          <p:cNvPr id="14" name="TextBox 13"/>
-          <p:cNvSpPr txBox="1"/>
-          <p:nvPr/>
-        </p:nvSpPr>
-        <p:spPr>
-          <a:xfrm>
-            <a:off x="594360" y="4343400"/>
-            <a:ext cx="7955279" cy="292608"/>
-          </a:xfrm>
-          <a:prstGeom prst="rect">
-            <a:avLst/>
-          </a:prstGeom>
-          <a:noFill/>
-        </p:spPr>
-        <p:txBody>
-          <a:bodyPr wrap="square" lIns="0" rIns="0" tIns="0" bIns="0" anchor="t">
-            <a:spAutoFit/>
-          </a:bodyPr>
-          <a:lstStyle/>
-          <a:p>
-            <a:pPr algn="l" marL="0" indent="0">
-              <a:lnSpc>
-                <a:spcPct val="110000"/>
-              </a:lnSpc>
-              <a:spcBef>
-                <a:spcPts val="0"/>
-              </a:spcBef>
-              <a:spcAft>
-                <a:spcPts val="600"/>
-              </a:spcAft>
-              <a:buNone/>
-              <a:defRPr sz="1700" lang="ja-JP">
-                <a:latin typeface="Noto Sans"/>
-                <a:ea typeface="Noto Sans CJK JP"/>
-                <a:cs typeface="Noto Sans"/>
-              </a:defRPr>
-            </a:pPr>
-            <a:r>
-              <a:rPr sz="1700" lang="ja-JP">
-                <a:solidFill>
-                  <a:srgbClr val="626669"/>
-                </a:solidFill>
-                <a:latin typeface="Noto Sans"/>
-                <a:ea typeface="Noto Sans CJK JP"/>
-                <a:cs typeface="Noto Sans"/>
-              </a:rPr>
-              <a:t>意味役割を加えたモデルのSNLI評価結果。</a:t>
-            </a:r>
-          </a:p>
-        </p:txBody>
-      </p:sp>
-      <p:sp>
-        <p:nvSpPr>
-          <p:cNvPr id="15" name="TextBox 14"/>
-          <p:cNvSpPr txBox="1"/>
-          <p:nvPr/>
-        </p:nvSpPr>
-        <p:spPr>
-          <a:xfrm>
-            <a:off x="594360" y="4754880"/>
-            <a:ext cx="7955279" cy="256032"/>
-          </a:xfrm>
-          <a:prstGeom prst="rect">
-            <a:avLst/>
-          </a:prstGeom>
-          <a:noFill/>
-        </p:spPr>
-        <p:txBody>
-          <a:bodyPr wrap="square" lIns="0" rIns="0" tIns="0" bIns="0" anchor="t">
-            <a:spAutoFit/>
-          </a:bodyPr>
-          <a:lstStyle/>
-          <a:p>
-            <a:pPr algn="l" marL="0" indent="0">
-              <a:lnSpc>
-                <a:spcPct val="110000"/>
-              </a:lnSpc>
-              <a:spcBef>
-                <a:spcPts val="0"/>
-              </a:spcBef>
-              <a:spcAft>
-                <a:spcPts val="0"/>
-              </a:spcAft>
-              <a:buNone/>
-              <a:defRPr sz="850" lang="ja-JP">
-                <a:latin typeface="Noto Sans"/>
-                <a:ea typeface="Noto Sans CJK JP"/>
-                <a:cs typeface="Noto Sans"/>
-              </a:defRPr>
-            </a:pPr>
-            <a:r>
-              <a:rPr sz="850" lang="ja-JP">
-                <a:solidFill>
-                  <a:srgbClr val="626669"/>
-                </a:solidFill>
-                <a:latin typeface="Noto Sans"/>
-                <a:ea typeface="Noto Sans CJK JP"/>
-                <a:cs typeface="Noto Sans"/>
-              </a:rPr>
-              <a:t>https://github.com/cooelf/SemBERT</a:t>
+                <a:hlinkClick r:id="rId9"/>
+              </a:rPr>
+              <a:t>https://aclanthology.org/2021.emnlp-main.552/</a:t>
             </a:r>
           </a:p>
         </p:txBody>
@@ -41217,33 +40691,9 @@
           <a:bodyPr wrap="square" lIns="0" rIns="0" tIns="0" bIns="0" anchor="t"/>
           <a:lstStyle/>
           <a:p>
-            <a:pPr algn="l" marL="0" indent="0">
-              <a:lnSpc>
-                <a:spcPct val="110000"/>
-              </a:lnSpc>
-              <a:spcBef>
-                <a:spcPts val="0"/>
-              </a:spcBef>
-              <a:spcAft>
-                <a:spcPts val="600"/>
-              </a:spcAft>
-              <a:buNone/>
-              <a:defRPr sz="2800" lang="ja-JP">
-                <a:latin typeface="Noto Sans"/>
-                <a:ea typeface="Noto Sans CJK JP"/>
-                <a:cs typeface="Noto Sans"/>
-              </a:defRPr>
-            </a:pPr>
-            <a:r>
-              <a:rPr sz="2800" lang="ja-JP" b="1">
-                <a:solidFill>
-                  <a:srgbClr val="303437"/>
-                </a:solidFill>
-                <a:latin typeface="Noto Sans"/>
-                <a:ea typeface="Noto Sans CJK JP"/>
-                <a:cs typeface="Noto Sans"/>
-              </a:rPr>
-              <a:t>参考文献と参照した内容</a:t>
+            <a:r>
+              <a:rPr sz="2800"/>
+              <a:t>読後の学習・研究に向けて</a:t>
             </a:r>
           </a:p>
         </p:txBody>
@@ -41263,33 +40713,9 @@
           <a:bodyPr wrap="square" lIns="0" rIns="0" tIns="0" bIns="0" anchor="ctr"/>
           <a:lstStyle/>
           <a:p>
-            <a:pPr algn="l" marL="0" indent="0">
-              <a:lnSpc>
-                <a:spcPct val="110000"/>
-              </a:lnSpc>
-              <a:spcBef>
-                <a:spcPts val="0"/>
-              </a:spcBef>
-              <a:spcAft>
-                <a:spcPts val="0"/>
-              </a:spcAft>
-              <a:buNone/>
-              <a:defRPr sz="1400" lang="ja-JP">
-                <a:latin typeface="Noto Sans"/>
-                <a:ea typeface="Noto Sans CJK JP"/>
-                <a:cs typeface="Noto Sans"/>
-              </a:defRPr>
-            </a:pPr>
-            <a:r>
-              <a:rPr sz="1400" lang="ja-JP" b="1">
-                <a:solidFill>
-                  <a:srgbClr val="FFFEF8"/>
-                </a:solidFill>
-                <a:latin typeface="Noto Sans"/>
-                <a:ea typeface="Noto Sans CJK JP"/>
-                <a:cs typeface="Noto Sans"/>
-              </a:rPr>
-              <a:t>Appendix: 5 参考文献</a:t>
+            <a:r>
+              <a:rPr sz="1400"/>
+              <a:t>Appendix: 5 参考文献・評価と限界を調べる</a:t>
             </a:r>
           </a:p>
         </p:txBody>
@@ -41302,8 +40728,8 @@
         </p:nvSpPr>
         <p:spPr>
           <a:xfrm>
-            <a:off x="594360" y="1280160"/>
-            <a:ext cx="7955279" cy="320040"/>
+            <a:off x="594360" y="1353312"/>
+            <a:ext cx="7955279" cy="365760"/>
           </a:xfrm>
           <a:prstGeom prst="rect">
             <a:avLst/>
@@ -41311,38 +40737,31 @@
           <a:noFill/>
         </p:spPr>
         <p:txBody>
-          <a:bodyPr wrap="square" lIns="0" rIns="0" tIns="0" bIns="0" anchor="t">
+          <a:bodyPr wrap="square" lIns="0" rIns="0" tIns="0" bIns="0">
             <a:spAutoFit/>
           </a:bodyPr>
           <a:lstStyle/>
           <a:p>
-            <a:pPr algn="l" marL="0" indent="0">
+            <a:pPr>
               <a:lnSpc>
-                <a:spcPct val="110000"/>
+                <a:spcPct val="108000"/>
               </a:lnSpc>
               <a:spcBef>
                 <a:spcPts val="0"/>
               </a:spcBef>
               <a:spcAft>
-                <a:spcPts val="600"/>
-              </a:spcAft>
-              <a:buNone/>
-              <a:defRPr sz="1900" lang="ja-JP">
-                <a:latin typeface="Noto Sans"/>
-                <a:ea typeface="Noto Sans CJK JP"/>
-                <a:cs typeface="Noto Sans"/>
-              </a:defRPr>
+                <a:spcPts val="0"/>
+              </a:spcAft>
             </a:pPr>
             <a:r>
-              <a:rPr sz="1900" lang="ja-JP">
-                <a:solidFill>
-                  <a:srgbClr val="303437"/>
-                </a:solidFill>
-                <a:latin typeface="Noto Sans"/>
-                <a:ea typeface="Noto Sans CJK JP"/>
-                <a:cs typeface="Noto Sans"/>
-              </a:rPr>
-              <a:t>Yang et al. (2019). RE2. ACL.</a:t>
+              <a:rPr sz="2100" b="1" lang="ja-JP">
+                <a:solidFill>
+                  <a:srgbClr val="303437"/>
+                </a:solidFill>
+                <a:latin typeface="Noto Sans"/>
+                <a:ea typeface="Noto Sans CJK JP"/>
+              </a:rPr>
+              <a:t>McCoy et al. (2019). HANS. ACL.</a:t>
             </a:r>
           </a:p>
         </p:txBody>
@@ -41355,8 +40774,8 @@
         </p:nvSpPr>
         <p:spPr>
           <a:xfrm>
-            <a:off x="594360" y="1600200"/>
-            <a:ext cx="7955279" cy="292608"/>
+            <a:off x="594360" y="1746504"/>
+            <a:ext cx="7955279" cy="438912"/>
           </a:xfrm>
           <a:prstGeom prst="rect">
             <a:avLst/>
@@ -41364,38 +40783,31 @@
           <a:noFill/>
         </p:spPr>
         <p:txBody>
-          <a:bodyPr wrap="square" lIns="0" rIns="0" tIns="0" bIns="0" anchor="t">
+          <a:bodyPr wrap="square" lIns="0" rIns="0" tIns="0" bIns="0">
             <a:spAutoFit/>
           </a:bodyPr>
           <a:lstStyle/>
           <a:p>
-            <a:pPr algn="l" marL="0" indent="0">
+            <a:pPr>
               <a:lnSpc>
-                <a:spcPct val="110000"/>
+                <a:spcPct val="108000"/>
               </a:lnSpc>
               <a:spcBef>
                 <a:spcPts val="0"/>
               </a:spcBef>
               <a:spcAft>
-                <a:spcPts val="600"/>
-              </a:spcAft>
-              <a:buNone/>
-              <a:defRPr sz="1700" lang="ja-JP">
-                <a:latin typeface="Noto Sans"/>
-                <a:ea typeface="Noto Sans CJK JP"/>
-                <a:cs typeface="Noto Sans"/>
-              </a:defRPr>
+                <a:spcPts val="0"/>
+              </a:spcAft>
             </a:pPr>
             <a:r>
-              <a:rPr sz="1700" lang="ja-JP">
-                <a:solidFill>
-                  <a:srgbClr val="626669"/>
-                </a:solidFill>
-                <a:latin typeface="Noto Sans"/>
-                <a:ea typeface="Noto Sans CJK JP"/>
-                <a:cs typeface="Noto Sans"/>
-              </a:rPr>
-              <a:t>単語間の対応を利用したモデルの反復評価結果。</a:t>
+              <a:rPr sz="2000" b="0" lang="ja-JP">
+                <a:solidFill>
+                  <a:srgbClr val="303437"/>
+                </a:solidFill>
+                <a:latin typeface="Noto Sans"/>
+                <a:ea typeface="Noto Sans CJK JP"/>
+              </a:rPr>
+              <a:t>語の重なりなどの近道を、統語構造を変えた例で検査する。</a:t>
             </a:r>
           </a:p>
         </p:txBody>
@@ -41408,8 +40820,8 @@
         </p:nvSpPr>
         <p:spPr>
           <a:xfrm>
-            <a:off x="594360" y="2011680"/>
-            <a:ext cx="7955279" cy="256032"/>
+            <a:off x="594360" y="2221991"/>
+            <a:ext cx="7955279" cy="228600"/>
           </a:xfrm>
           <a:prstGeom prst="rect">
             <a:avLst/>
@@ -41417,14 +40829,14 @@
           <a:noFill/>
         </p:spPr>
         <p:txBody>
-          <a:bodyPr wrap="square" lIns="0" rIns="0" tIns="0" bIns="0" anchor="t">
+          <a:bodyPr wrap="square" lIns="0" rIns="0" tIns="0" bIns="0">
             <a:spAutoFit/>
           </a:bodyPr>
           <a:lstStyle/>
           <a:p>
-            <a:pPr algn="l" marL="0" indent="0">
+            <a:pPr>
               <a:lnSpc>
-                <a:spcPct val="110000"/>
+                <a:spcPct val="108000"/>
               </a:lnSpc>
               <a:spcBef>
                 <a:spcPts val="0"/>
@@ -41432,23 +40844,17 @@
               <a:spcAft>
                 <a:spcPts val="0"/>
               </a:spcAft>
-              <a:buNone/>
-              <a:defRPr sz="850" lang="ja-JP">
-                <a:latin typeface="Noto Sans"/>
-                <a:ea typeface="Noto Sans CJK JP"/>
-                <a:cs typeface="Noto Sans"/>
-              </a:defRPr>
             </a:pPr>
             <a:r>
-              <a:rPr sz="850" lang="ja-JP">
+              <a:rPr sz="1050" b="0" lang="ja-JP">
                 <a:solidFill>
                   <a:srgbClr val="626669"/>
                 </a:solidFill>
                 <a:latin typeface="Noto Sans"/>
                 <a:ea typeface="Noto Sans CJK JP"/>
-                <a:cs typeface="Noto Sans"/>
-              </a:rPr>
-              <a:t>https://github.com/alibaba-edu/simple-effective-text-matching</a:t>
+                <a:hlinkClick r:id="rId2"/>
+              </a:rPr>
+              <a:t>https://aclanthology.org/P19-1334/</a:t>
             </a:r>
           </a:p>
         </p:txBody>
@@ -41461,8 +40867,8 @@
         </p:nvSpPr>
         <p:spPr>
           <a:xfrm>
-            <a:off x="594360" y="2194560"/>
-            <a:ext cx="7955279" cy="320040"/>
+            <a:off x="594360" y="2487168"/>
+            <a:ext cx="7955279" cy="365760"/>
           </a:xfrm>
           <a:prstGeom prst="rect">
             <a:avLst/>
@@ -41470,38 +40876,31 @@
           <a:noFill/>
         </p:spPr>
         <p:txBody>
-          <a:bodyPr wrap="square" lIns="0" rIns="0" tIns="0" bIns="0" anchor="t">
+          <a:bodyPr wrap="square" lIns="0" rIns="0" tIns="0" bIns="0">
             <a:spAutoFit/>
           </a:bodyPr>
           <a:lstStyle/>
           <a:p>
-            <a:pPr algn="l" marL="0" indent="0">
+            <a:pPr>
               <a:lnSpc>
-                <a:spcPct val="110000"/>
+                <a:spcPct val="108000"/>
               </a:lnSpc>
               <a:spcBef>
                 <a:spcPts val="0"/>
               </a:spcBef>
               <a:spcAft>
-                <a:spcPts val="600"/>
-              </a:spcAft>
-              <a:buNone/>
-              <a:defRPr sz="1900" lang="ja-JP">
-                <a:latin typeface="Noto Sans"/>
-                <a:ea typeface="Noto Sans CJK JP"/>
-                <a:cs typeface="Noto Sans"/>
-              </a:defRPr>
+                <a:spcPts val="0"/>
+              </a:spcAft>
             </a:pPr>
             <a:r>
-              <a:rPr sz="1900" lang="ja-JP">
-                <a:solidFill>
-                  <a:srgbClr val="303437"/>
-                </a:solidFill>
-                <a:latin typeface="Noto Sans"/>
-                <a:ea typeface="Noto Sans CJK JP"/>
-                <a:cs typeface="Noto Sans"/>
-              </a:rPr>
-              <a:t>Gao et al. (2021). SimCSE. EMNLP.</a:t>
+              <a:rPr sz="2100" b="1" lang="ja-JP">
+                <a:solidFill>
+                  <a:srgbClr val="303437"/>
+                </a:solidFill>
+                <a:latin typeface="Noto Sans"/>
+                <a:ea typeface="Noto Sans CJK JP"/>
+              </a:rPr>
+              <a:t>Nie et al. (2020). Adversarial NLI. ACL.</a:t>
             </a:r>
           </a:p>
         </p:txBody>
@@ -41514,8 +40913,8 @@
         </p:nvSpPr>
         <p:spPr>
           <a:xfrm>
-            <a:off x="594360" y="2514600"/>
-            <a:ext cx="7955279" cy="292608"/>
+            <a:off x="594360" y="2880360"/>
+            <a:ext cx="7955279" cy="438912"/>
           </a:xfrm>
           <a:prstGeom prst="rect">
             <a:avLst/>
@@ -41523,38 +40922,31 @@
           <a:noFill/>
         </p:spPr>
         <p:txBody>
-          <a:bodyPr wrap="square" lIns="0" rIns="0" tIns="0" bIns="0" anchor="t">
+          <a:bodyPr wrap="square" lIns="0" rIns="0" tIns="0" bIns="0">
             <a:spAutoFit/>
           </a:bodyPr>
           <a:lstStyle/>
           <a:p>
-            <a:pPr algn="l" marL="0" indent="0">
+            <a:pPr>
               <a:lnSpc>
-                <a:spcPct val="110000"/>
+                <a:spcPct val="108000"/>
               </a:lnSpc>
               <a:spcBef>
                 <a:spcPts val="0"/>
               </a:spcBef>
               <a:spcAft>
-                <a:spcPts val="600"/>
-              </a:spcAft>
-              <a:buNone/>
-              <a:defRPr sz="1700" lang="ja-JP">
-                <a:latin typeface="Noto Sans"/>
-                <a:ea typeface="Noto Sans CJK JP"/>
-                <a:cs typeface="Noto Sans"/>
-              </a:defRPr>
+                <a:spcPts val="0"/>
+              </a:spcAft>
             </a:pPr>
             <a:r>
-              <a:rPr sz="1700" lang="ja-JP">
-                <a:solidFill>
-                  <a:srgbClr val="626669"/>
-                </a:solidFill>
-                <a:latin typeface="Noto Sans"/>
-                <a:ea typeface="Noto Sans CJK JP"/>
-                <a:cs typeface="Noto Sans"/>
-              </a:rPr>
-              <a:t>SNLIを文埋め込みの教師データに使う利用例。</a:t>
+              <a:rPr sz="2000" b="0" lang="ja-JP">
+                <a:solidFill>
+                  <a:srgbClr val="303437"/>
+                </a:solidFill>
+                <a:latin typeface="Noto Sans"/>
+                <a:ea typeface="Noto Sans CJK JP"/>
+              </a:rPr>
+              <a:t>モデルが誤る文対を人が作る方法から、頑健性の評価を学ぶ。</a:t>
             </a:r>
           </a:p>
         </p:txBody>
@@ -41567,8 +40959,8 @@
         </p:nvSpPr>
         <p:spPr>
           <a:xfrm>
-            <a:off x="594360" y="2926080"/>
-            <a:ext cx="7955279" cy="256032"/>
+            <a:off x="594360" y="3355848"/>
+            <a:ext cx="7955279" cy="228600"/>
           </a:xfrm>
           <a:prstGeom prst="rect">
             <a:avLst/>
@@ -41576,14 +40968,14 @@
           <a:noFill/>
         </p:spPr>
         <p:txBody>
-          <a:bodyPr wrap="square" lIns="0" rIns="0" tIns="0" bIns="0" anchor="t">
+          <a:bodyPr wrap="square" lIns="0" rIns="0" tIns="0" bIns="0">
             <a:spAutoFit/>
           </a:bodyPr>
           <a:lstStyle/>
           <a:p>
-            <a:pPr algn="l" marL="0" indent="0">
+            <a:pPr>
               <a:lnSpc>
-                <a:spcPct val="110000"/>
+                <a:spcPct val="108000"/>
               </a:lnSpc>
               <a:spcBef>
                 <a:spcPts val="0"/>
@@ -41591,23 +40983,17 @@
               <a:spcAft>
                 <a:spcPts val="0"/>
               </a:spcAft>
-              <a:buNone/>
-              <a:defRPr sz="850" lang="ja-JP">
-                <a:latin typeface="Noto Sans"/>
-                <a:ea typeface="Noto Sans CJK JP"/>
-                <a:cs typeface="Noto Sans"/>
-              </a:defRPr>
             </a:pPr>
             <a:r>
-              <a:rPr sz="850" lang="ja-JP">
+              <a:rPr sz="1050" b="0" lang="ja-JP">
                 <a:solidFill>
                   <a:srgbClr val="626669"/>
                 </a:solidFill>
                 <a:latin typeface="Noto Sans"/>
                 <a:ea typeface="Noto Sans CJK JP"/>
-                <a:cs typeface="Noto Sans"/>
-              </a:rPr>
-              <a:t>https://github.com/princeton-nlp/SimCSE</a:t>
+                <a:hlinkClick r:id="rId3"/>
+              </a:rPr>
+              <a:t>https://aclanthology.org/2020.acl-main.441/</a:t>
             </a:r>
           </a:p>
         </p:txBody>
@@ -41620,8 +41006,8 @@
         </p:nvSpPr>
         <p:spPr>
           <a:xfrm>
-            <a:off x="594360" y="3108960"/>
-            <a:ext cx="7955279" cy="320040"/>
+            <a:off x="594360" y="3621024"/>
+            <a:ext cx="7955279" cy="365760"/>
           </a:xfrm>
           <a:prstGeom prst="rect">
             <a:avLst/>
@@ -41629,38 +41015,31 @@
           <a:noFill/>
         </p:spPr>
         <p:txBody>
-          <a:bodyPr wrap="square" lIns="0" rIns="0" tIns="0" bIns="0" anchor="t">
+          <a:bodyPr wrap="square" lIns="0" rIns="0" tIns="0" bIns="0">
             <a:spAutoFit/>
           </a:bodyPr>
           <a:lstStyle/>
           <a:p>
-            <a:pPr algn="l" marL="0" indent="0">
+            <a:pPr>
               <a:lnSpc>
-                <a:spcPct val="110000"/>
+                <a:spcPct val="108000"/>
               </a:lnSpc>
               <a:spcBef>
                 <a:spcPts val="0"/>
               </a:spcBef>
               <a:spcAft>
-                <a:spcPts val="600"/>
-              </a:spcAft>
-              <a:buNone/>
-              <a:defRPr sz="1900" lang="ja-JP">
-                <a:latin typeface="Noto Sans"/>
-                <a:ea typeface="Noto Sans CJK JP"/>
-                <a:cs typeface="Noto Sans"/>
-              </a:defRPr>
+                <a:spcPts val="0"/>
+              </a:spcAft>
             </a:pPr>
             <a:r>
-              <a:rPr sz="1900" lang="ja-JP">
-                <a:solidFill>
-                  <a:srgbClr val="303437"/>
-                </a:solidFill>
-                <a:latin typeface="Noto Sans"/>
-                <a:ea typeface="Noto Sans CJK JP"/>
-                <a:cs typeface="Noto Sans"/>
-              </a:rPr>
-              <a:t>Sentence TransformersのAllNLI学習例</a:t>
+              <a:rPr sz="2100" b="1" lang="ja-JP">
+                <a:solidFill>
+                  <a:srgbClr val="303437"/>
+                </a:solidFill>
+                <a:latin typeface="Noto Sans"/>
+                <a:ea typeface="Noto Sans CJK JP"/>
+              </a:rPr>
+              <a:t>Camburu et al. (2018). e-SNLI. NeurIPS.</a:t>
             </a:r>
           </a:p>
         </p:txBody>
@@ -41673,8 +41052,8 @@
         </p:nvSpPr>
         <p:spPr>
           <a:xfrm>
-            <a:off x="594360" y="3429000"/>
-            <a:ext cx="7955279" cy="292608"/>
+            <a:off x="594360" y="4014215"/>
+            <a:ext cx="7955279" cy="438912"/>
           </a:xfrm>
           <a:prstGeom prst="rect">
             <a:avLst/>
@@ -41682,38 +41061,31 @@
           <a:noFill/>
         </p:spPr>
         <p:txBody>
-          <a:bodyPr wrap="square" lIns="0" rIns="0" tIns="0" bIns="0" anchor="t">
+          <a:bodyPr wrap="square" lIns="0" rIns="0" tIns="0" bIns="0">
             <a:spAutoFit/>
           </a:bodyPr>
           <a:lstStyle/>
           <a:p>
-            <a:pPr algn="l" marL="0" indent="0">
+            <a:pPr>
               <a:lnSpc>
-                <a:spcPct val="110000"/>
+                <a:spcPct val="108000"/>
               </a:lnSpc>
               <a:spcBef>
                 <a:spcPts val="0"/>
               </a:spcBef>
               <a:spcAft>
-                <a:spcPts val="600"/>
-              </a:spcAft>
-              <a:buNone/>
-              <a:defRPr sz="1700" lang="ja-JP">
-                <a:latin typeface="Noto Sans"/>
-                <a:ea typeface="Noto Sans CJK JP"/>
-                <a:cs typeface="Noto Sans"/>
-              </a:defRPr>
+                <a:spcPts val="0"/>
+              </a:spcAft>
             </a:pPr>
             <a:r>
-              <a:rPr sz="1700" lang="ja-JP">
-                <a:solidFill>
-                  <a:srgbClr val="626669"/>
-                </a:solidFill>
-                <a:latin typeface="Noto Sans"/>
-                <a:ea typeface="Noto Sans CJK JP"/>
-                <a:cs typeface="Noto Sans"/>
-              </a:rPr>
-              <a:t>SNLIを含む学習手順が現在も公開されている根拠。</a:t>
+              <a:rPr sz="2000" b="0" lang="ja-JP">
+                <a:solidFill>
+                  <a:srgbClr val="303437"/>
+                </a:solidFill>
+                <a:latin typeface="Noto Sans"/>
+                <a:ea typeface="Noto Sans CJK JP"/>
+              </a:rPr>
+              <a:t>判断理由の自然言語説明を使い、正解率以外の検証を考える。</a:t>
             </a:r>
           </a:p>
         </p:txBody>
@@ -41726,8 +41098,8 @@
         </p:nvSpPr>
         <p:spPr>
           <a:xfrm>
-            <a:off x="594360" y="3840480"/>
-            <a:ext cx="7955279" cy="256032"/>
+            <a:off x="594360" y="4489704"/>
+            <a:ext cx="7955279" cy="228600"/>
           </a:xfrm>
           <a:prstGeom prst="rect">
             <a:avLst/>
@@ -41735,14 +41107,14 @@
           <a:noFill/>
         </p:spPr>
         <p:txBody>
-          <a:bodyPr wrap="square" lIns="0" rIns="0" tIns="0" bIns="0" anchor="t">
+          <a:bodyPr wrap="square" lIns="0" rIns="0" tIns="0" bIns="0">
             <a:spAutoFit/>
           </a:bodyPr>
           <a:lstStyle/>
           <a:p>
-            <a:pPr algn="l" marL="0" indent="0">
+            <a:pPr>
               <a:lnSpc>
-                <a:spcPct val="110000"/>
+                <a:spcPct val="108000"/>
               </a:lnSpc>
               <a:spcBef>
                 <a:spcPts val="0"/>
@@ -41750,182 +41122,17 @@
               <a:spcAft>
                 <a:spcPts val="0"/>
               </a:spcAft>
-              <a:buNone/>
-              <a:defRPr sz="850" lang="ja-JP">
-                <a:latin typeface="Noto Sans"/>
-                <a:ea typeface="Noto Sans CJK JP"/>
-                <a:cs typeface="Noto Sans"/>
-              </a:defRPr>
             </a:pPr>
             <a:r>
-              <a:rPr sz="850" lang="ja-JP">
+              <a:rPr sz="1050" b="0" lang="ja-JP">
                 <a:solidFill>
                   <a:srgbClr val="626669"/>
                 </a:solidFill>
                 <a:latin typeface="Noto Sans"/>
                 <a:ea typeface="Noto Sans CJK JP"/>
-                <a:cs typeface="Noto Sans"/>
-              </a:rPr>
-              <a:t>https://github.com/UKPLab/sentence-transformers/tree/master/examples/sentence_transformer/training/nli</a:t>
-            </a:r>
-          </a:p>
-        </p:txBody>
-      </p:sp>
-      <p:sp>
-        <p:nvSpPr>
-          <p:cNvPr id="13" name="TextBox 12"/>
-          <p:cNvSpPr txBox="1"/>
-          <p:nvPr/>
-        </p:nvSpPr>
-        <p:spPr>
-          <a:xfrm>
-            <a:off x="594360" y="4023360"/>
-            <a:ext cx="7955279" cy="320040"/>
-          </a:xfrm>
-          <a:prstGeom prst="rect">
-            <a:avLst/>
-          </a:prstGeom>
-          <a:noFill/>
-        </p:spPr>
-        <p:txBody>
-          <a:bodyPr wrap="square" lIns="0" rIns="0" tIns="0" bIns="0" anchor="t">
-            <a:spAutoFit/>
-          </a:bodyPr>
-          <a:lstStyle/>
-          <a:p>
-            <a:pPr algn="l" marL="0" indent="0">
-              <a:lnSpc>
-                <a:spcPct val="110000"/>
-              </a:lnSpc>
-              <a:spcBef>
-                <a:spcPts val="0"/>
-              </a:spcBef>
-              <a:spcAft>
-                <a:spcPts val="600"/>
-              </a:spcAft>
-              <a:buNone/>
-              <a:defRPr sz="1900" lang="ja-JP">
-                <a:latin typeface="Noto Sans"/>
-                <a:ea typeface="Noto Sans CJK JP"/>
-                <a:cs typeface="Noto Sans"/>
-              </a:defRPr>
-            </a:pPr>
-            <a:r>
-              <a:rPr sz="1900" lang="ja-JP">
-                <a:solidFill>
-                  <a:srgbClr val="303437"/>
-                </a:solidFill>
-                <a:latin typeface="Noto Sans"/>
-                <a:ea typeface="Noto Sans CJK JP"/>
-                <a:cs typeface="Noto Sans"/>
-              </a:rPr>
-              <a:t>Solatorio (2024). GISTEmbed.</a:t>
-            </a:r>
-          </a:p>
-        </p:txBody>
-      </p:sp>
-      <p:sp>
-        <p:nvSpPr>
-          <p:cNvPr id="14" name="TextBox 13"/>
-          <p:cNvSpPr txBox="1"/>
-          <p:nvPr/>
-        </p:nvSpPr>
-        <p:spPr>
-          <a:xfrm>
-            <a:off x="594360" y="4343400"/>
-            <a:ext cx="7955279" cy="292608"/>
-          </a:xfrm>
-          <a:prstGeom prst="rect">
-            <a:avLst/>
-          </a:prstGeom>
-          <a:noFill/>
-        </p:spPr>
-        <p:txBody>
-          <a:bodyPr wrap="square" lIns="0" rIns="0" tIns="0" bIns="0" anchor="t">
-            <a:spAutoFit/>
-          </a:bodyPr>
-          <a:lstStyle/>
-          <a:p>
-            <a:pPr algn="l" marL="0" indent="0">
-              <a:lnSpc>
-                <a:spcPct val="110000"/>
-              </a:lnSpc>
-              <a:spcBef>
-                <a:spcPts val="0"/>
-              </a:spcBef>
-              <a:spcAft>
-                <a:spcPts val="600"/>
-              </a:spcAft>
-              <a:buNone/>
-              <a:defRPr sz="1700" lang="ja-JP">
-                <a:latin typeface="Noto Sans"/>
-                <a:ea typeface="Noto Sans CJK JP"/>
-                <a:cs typeface="Noto Sans"/>
-              </a:defRPr>
-            </a:pPr>
-            <a:r>
-              <a:rPr sz="1700" lang="ja-JP">
-                <a:solidFill>
-                  <a:srgbClr val="626669"/>
-                </a:solidFill>
-                <a:latin typeface="Noto Sans"/>
-                <a:ea typeface="Noto Sans CJK JP"/>
-                <a:cs typeface="Noto Sans"/>
-              </a:rPr>
-              <a:t>文埋め込みの負例を選ぶために含意データを用いる利用例。</a:t>
-            </a:r>
-          </a:p>
-        </p:txBody>
-      </p:sp>
-      <p:sp>
-        <p:nvSpPr>
-          <p:cNvPr id="15" name="TextBox 14"/>
-          <p:cNvSpPr txBox="1"/>
-          <p:nvPr/>
-        </p:nvSpPr>
-        <p:spPr>
-          <a:xfrm>
-            <a:off x="594360" y="4754880"/>
-            <a:ext cx="7955279" cy="256032"/>
-          </a:xfrm>
-          <a:prstGeom prst="rect">
-            <a:avLst/>
-          </a:prstGeom>
-          <a:noFill/>
-        </p:spPr>
-        <p:txBody>
-          <a:bodyPr wrap="square" lIns="0" rIns="0" tIns="0" bIns="0" anchor="t">
-            <a:spAutoFit/>
-          </a:bodyPr>
-          <a:lstStyle/>
-          <a:p>
-            <a:pPr algn="l" marL="0" indent="0">
-              <a:lnSpc>
-                <a:spcPct val="110000"/>
-              </a:lnSpc>
-              <a:spcBef>
-                <a:spcPts val="0"/>
-              </a:spcBef>
-              <a:spcAft>
-                <a:spcPts val="0"/>
-              </a:spcAft>
-              <a:buNone/>
-              <a:defRPr sz="850" lang="ja-JP">
-                <a:latin typeface="Noto Sans"/>
-                <a:ea typeface="Noto Sans CJK JP"/>
-                <a:cs typeface="Noto Sans"/>
-              </a:defRPr>
-            </a:pPr>
-            <a:r>
-              <a:rPr sz="850" lang="ja-JP">
-                <a:solidFill>
-                  <a:srgbClr val="626669"/>
-                </a:solidFill>
-                <a:latin typeface="Noto Sans"/>
-                <a:ea typeface="Noto Sans CJK JP"/>
-                <a:cs typeface="Noto Sans"/>
-              </a:rPr>
-              <a:t>https://arxiv.org/abs/2402.16829</a:t>
+                <a:hlinkClick r:id="rId4"/>
+              </a:rPr>
+              <a:t>https://github.com/OanaMariaCamburu/e-SNLI</a:t>
             </a:r>
           </a:p>
         </p:txBody>

--- a/slides/datasets-in-10-minutes-snli.pptx
+++ b/slides/datasets-in-10-minutes-snli.pptx
@@ -62,9 +62,13 @@
     <p:sldId id="302" r:id="rId53"/>
     <p:sldId id="303" r:id="rId54"/>
     <p:sldId id="304" r:id="rId55"/>
-    <p:sldId id="305" r:id="rId56"/>
-    <p:sldId id="306" r:id="rId57"/>
-    <p:sldId id="315" r:id="rId65"/>
+    <p:sldId id="315" r:id="rId57"/>
+    <p:sldId id="316" r:id="rId56"/>
+    <p:sldId id="317" r:id="rId65"/>
+    <p:sldId id="318" r:id="rId66"/>
+    <p:sldId id="319" r:id="rId67"/>
+    <p:sldId id="320" r:id="rId68"/>
+    <p:sldId id="321" r:id="rId69"/>
   </p:sldIdLst>
   <p:sldSz cx="9144000" cy="5143500" type="screen16x9"/>
   <p:notesSz cx="6858000" cy="9144000"/>
@@ -39053,19 +39057,16 @@
             <p:ph type="title"/>
           </p:nvPr>
         </p:nvSpPr>
-        <p:spPr>
-          <a:xfrm>
-            <a:off x="468172" y="650138"/>
-            <a:ext cx="8206740" cy="616305"/>
-          </a:xfrm>
-        </p:spPr>
+        <p:spPr/>
         <p:txBody>
-          <a:bodyPr wrap="square" lIns="0" rIns="0" tIns="0" bIns="0" anchor="t"/>
+          <a:bodyPr/>
           <a:lstStyle/>
           <a:p>
             <a:r>
-              <a:rPr sz="2800"/>
-              <a:t>読後の学習・研究に向けて</a:t>
+              <a:rPr sz="2800">
+                <a:latin typeface="Noto Sans"/>
+              </a:rPr>
+              <a:t>参考文献</a:t>
             </a:r>
           </a:p>
         </p:txBody>
@@ -39080,19 +39081,20 @@
             <p:ph type="title" idx="2"/>
           </p:nvPr>
         </p:nvSpPr>
-        <p:spPr>
-          <a:xfrm>
-            <a:off x="75895" y="0"/>
-            <a:ext cx="8115300" cy="480060"/>
-          </a:xfrm>
-        </p:spPr>
+        <p:spPr/>
         <p:txBody>
-          <a:bodyPr wrap="square" lIns="0" rIns="0" tIns="0" bIns="0" anchor="ctr"/>
+          <a:bodyPr/>
           <a:lstStyle/>
           <a:p>
             <a:r>
-              <a:rPr sz="1400"/>
-              <a:t>Appendix: 5 参考文献・基礎を学ぶ</a:t>
+              <a:rPr sz="1400" b="1">
+                <a:solidFill>
+                  <a:srgbClr val="FFFEF8"/>
+                </a:solidFill>
+                <a:latin typeface="Noto Sans"/>
+                <a:ea typeface="Noto Sans CJK JP"/>
+              </a:rPr>
+              <a:t>Appendix: 5 参考文献</a:t>
             </a:r>
           </a:p>
         </p:txBody>
@@ -39105,8 +39107,8 @@
         </p:nvSpPr>
         <p:spPr>
           <a:xfrm>
-            <a:off x="594360" y="1353312"/>
-            <a:ext cx="7955279" cy="365760"/>
+            <a:off x="594360" y="1325058"/>
+            <a:ext cx="7955279" cy="455512"/>
           </a:xfrm>
           <a:prstGeom prst="rect">
             <a:avLst/>
@@ -39114,14 +39116,14 @@
           <a:noFill/>
         </p:spPr>
         <p:txBody>
-          <a:bodyPr wrap="square" lIns="0" rIns="0" tIns="0" bIns="0">
+          <a:bodyPr wrap="square" anchor="t" lIns="0" rIns="0" tIns="0" bIns="0">
             <a:spAutoFit/>
           </a:bodyPr>
           <a:lstStyle/>
           <a:p>
             <a:pPr>
               <a:lnSpc>
-                <a:spcPct val="108000"/>
+                <a:spcPct val="100000"/>
               </a:lnSpc>
               <a:spcBef>
                 <a:spcPts val="0"/>
@@ -39129,16 +39131,17 @@
               <a:spcAft>
                 <a:spcPts val="0"/>
               </a:spcAft>
-            </a:pPr>
-            <a:r>
-              <a:rPr sz="2100" b="1" lang="ja-JP">
-                <a:solidFill>
-                  <a:srgbClr val="303437"/>
-                </a:solidFill>
-                <a:latin typeface="Noto Sans"/>
-                <a:ea typeface="Noto Sans CJK JP"/>
-              </a:rPr>
-              <a:t>Bowman et al. (2015). SNLI. EMNLP.</a:t>
+              <a:buNone/>
+            </a:pPr>
+            <a:r>
+              <a:rPr sz="1900" b="1" lang="ja-JP">
+                <a:solidFill>
+                  <a:srgbClr val="303437"/>
+                </a:solidFill>
+                <a:latin typeface="Noto Sans"/>
+                <a:ea typeface="Noto Sans CJK JP"/>
+              </a:rPr>
+              <a:t>A large annotated corpus for learning natural language inference</a:t>
             </a:r>
           </a:p>
         </p:txBody>
@@ -39151,8 +39154,8 @@
         </p:nvSpPr>
         <p:spPr>
           <a:xfrm>
-            <a:off x="594360" y="1746504"/>
-            <a:ext cx="7955279" cy="438912"/>
+            <a:off x="594360" y="1711857"/>
+            <a:ext cx="7955279" cy="360393"/>
           </a:xfrm>
           <a:prstGeom prst="rect">
             <a:avLst/>
@@ -39160,14 +39163,14 @@
           <a:noFill/>
         </p:spPr>
         <p:txBody>
-          <a:bodyPr wrap="square" lIns="0" rIns="0" tIns="0" bIns="0">
+          <a:bodyPr wrap="square" anchor="t" lIns="0" rIns="0" tIns="0" bIns="0">
             <a:spAutoFit/>
           </a:bodyPr>
           <a:lstStyle/>
           <a:p>
             <a:pPr>
               <a:lnSpc>
-                <a:spcPct val="108000"/>
+                <a:spcPct val="100000"/>
               </a:lnSpc>
               <a:spcBef>
                 <a:spcPts val="0"/>
@@ -39175,16 +39178,17 @@
               <a:spcAft>
                 <a:spcPts val="0"/>
               </a:spcAft>
-            </a:pPr>
-            <a:r>
-              <a:rPr sz="2000" b="0" lang="ja-JP">
-                <a:solidFill>
-                  <a:srgbClr val="303437"/>
-                </a:solidFill>
-                <a:latin typeface="Noto Sans"/>
-                <a:ea typeface="Noto Sans CJK JP"/>
-              </a:rPr>
-              <a:t>まず、3分類の定義と、文の作成・ラベル検証の設計を学ぶ。</a:t>
+              <a:buNone/>
+            </a:pPr>
+            <a:r>
+              <a:rPr sz="1350" b="0" lang="ja-JP">
+                <a:solidFill>
+                  <a:srgbClr val="303437"/>
+                </a:solidFill>
+                <a:latin typeface="Noto Sans"/>
+                <a:ea typeface="Noto Sans CJK JP"/>
+              </a:rPr>
+              <a:t>Bowman, S. R., Angeli, G., Potts, C., &amp; Manning, C. D. (2015). EMNLP, pp. 632–642.</a:t>
             </a:r>
           </a:p>
         </p:txBody>
@@ -39197,8 +39201,8 @@
         </p:nvSpPr>
         <p:spPr>
           <a:xfrm>
-            <a:off x="594360" y="2221991"/>
-            <a:ext cx="7955279" cy="228600"/>
+            <a:off x="594360" y="2059475"/>
+            <a:ext cx="7955279" cy="732332"/>
           </a:xfrm>
           <a:prstGeom prst="rect">
             <a:avLst/>
@@ -39206,14 +39210,14 @@
           <a:noFill/>
         </p:spPr>
         <p:txBody>
-          <a:bodyPr wrap="square" lIns="0" rIns="0" tIns="0" bIns="0">
+          <a:bodyPr wrap="square" anchor="t" lIns="0" rIns="0" tIns="0" bIns="0">
             <a:spAutoFit/>
           </a:bodyPr>
           <a:lstStyle/>
           <a:p>
             <a:pPr>
               <a:lnSpc>
-                <a:spcPct val="108000"/>
+                <a:spcPct val="100000"/>
               </a:lnSpc>
               <a:spcBef>
                 <a:spcPts val="0"/>
@@ -39221,17 +39225,17 @@
               <a:spcAft>
                 <a:spcPts val="0"/>
               </a:spcAft>
-            </a:pPr>
-            <a:r>
-              <a:rPr sz="1050" b="0" lang="ja-JP">
-                <a:solidFill>
-                  <a:srgbClr val="626669"/>
-                </a:solidFill>
-                <a:latin typeface="Noto Sans"/>
-                <a:ea typeface="Noto Sans CJK JP"/>
-                <a:hlinkClick r:id="rId2"/>
-              </a:rPr>
-              <a:t>https://aclanthology.org/D15-1075/</a:t>
+              <a:buNone/>
+            </a:pPr>
+            <a:r>
+              <a:rPr sz="1800" b="0" lang="ja-JP">
+                <a:solidFill>
+                  <a:srgbClr val="303437"/>
+                </a:solidFill>
+                <a:latin typeface="Noto Sans"/>
+                <a:ea typeface="Noto Sans CJK JP"/>
+              </a:rPr>
+              <a:t>SNLIの原著論文。文対の収集、3種類の関係の注釈と検証、初期モデルの評価を報告する。</a:t>
             </a:r>
           </a:p>
         </p:txBody>
@@ -39244,8 +39248,8 @@
         </p:nvSpPr>
         <p:spPr>
           <a:xfrm>
-            <a:off x="594360" y="2487168"/>
-            <a:ext cx="7955279" cy="365760"/>
+            <a:off x="594360" y="2700922"/>
+            <a:ext cx="7955279" cy="308415"/>
           </a:xfrm>
           <a:prstGeom prst="rect">
             <a:avLst/>
@@ -39253,14 +39257,14 @@
           <a:noFill/>
         </p:spPr>
         <p:txBody>
-          <a:bodyPr wrap="square" lIns="0" rIns="0" tIns="0" bIns="0">
+          <a:bodyPr wrap="square" anchor="t" lIns="0" rIns="0" tIns="0" bIns="0">
             <a:spAutoFit/>
           </a:bodyPr>
           <a:lstStyle/>
           <a:p>
             <a:pPr>
               <a:lnSpc>
-                <a:spcPct val="108000"/>
+                <a:spcPct val="100000"/>
               </a:lnSpc>
               <a:spcBef>
                 <a:spcPts val="0"/>
@@ -39268,16 +39272,18 @@
               <a:spcAft>
                 <a:spcPts val="0"/>
               </a:spcAft>
-            </a:pPr>
-            <a:r>
-              <a:rPr sz="2100" b="1" lang="ja-JP">
-                <a:solidFill>
-                  <a:srgbClr val="303437"/>
-                </a:solidFill>
-                <a:latin typeface="Noto Sans"/>
-                <a:ea typeface="Noto Sans CJK JP"/>
-              </a:rPr>
-              <a:t>Williams et al. (2018). MultiNLI. NAACL.</a:t>
+              <a:buNone/>
+            </a:pPr>
+            <a:r>
+              <a:rPr sz="1050" b="0" lang="ja-JP">
+                <a:solidFill>
+                  <a:srgbClr val="626669"/>
+                </a:solidFill>
+                <a:latin typeface="Noto Sans"/>
+                <a:ea typeface="Noto Sans CJK JP"/>
+                <a:hlinkClick r:id="rId2"/>
+              </a:rPr>
+              <a:t>https://aclanthology.org/D15-1075/</a:t>
             </a:r>
           </a:p>
         </p:txBody>
@@ -39290,8 +39296,8 @@
         </p:nvSpPr>
         <p:spPr>
           <a:xfrm>
-            <a:off x="594360" y="2880360"/>
-            <a:ext cx="7955279" cy="438912"/>
+            <a:off x="594360" y="3118211"/>
+            <a:ext cx="7955279" cy="744945"/>
           </a:xfrm>
           <a:prstGeom prst="rect">
             <a:avLst/>
@@ -39299,14 +39305,14 @@
           <a:noFill/>
         </p:spPr>
         <p:txBody>
-          <a:bodyPr wrap="square" lIns="0" rIns="0" tIns="0" bIns="0">
+          <a:bodyPr wrap="square" anchor="t" lIns="0" rIns="0" tIns="0" bIns="0">
             <a:spAutoFit/>
           </a:bodyPr>
           <a:lstStyle/>
           <a:p>
             <a:pPr>
               <a:lnSpc>
-                <a:spcPct val="108000"/>
+                <a:spcPct val="100000"/>
               </a:lnSpc>
               <a:spcBef>
                 <a:spcPts val="0"/>
@@ -39314,16 +39320,17 @@
               <a:spcAft>
                 <a:spcPts val="0"/>
               </a:spcAft>
-            </a:pPr>
-            <a:r>
-              <a:rPr sz="2000" b="0" lang="ja-JP">
-                <a:solidFill>
-                  <a:srgbClr val="303437"/>
-                </a:solidFill>
-                <a:latin typeface="Noto Sans"/>
-                <a:ea typeface="Noto Sans CJK JP"/>
-              </a:rPr>
-              <a:t>10ジャンルへ対象を広げ、分野をまたぐ汎化の評価を考える。</a:t>
+              <a:buNone/>
+            </a:pPr>
+            <a:r>
+              <a:rPr sz="1900" b="1" lang="ja-JP">
+                <a:solidFill>
+                  <a:srgbClr val="303437"/>
+                </a:solidFill>
+                <a:latin typeface="Noto Sans"/>
+                <a:ea typeface="Noto Sans CJK JP"/>
+              </a:rPr>
+              <a:t>A Broad-Coverage Challenge Corpus for Sentence Understanding through Inference</a:t>
             </a:r>
           </a:p>
         </p:txBody>
@@ -39336,8 +39343,8 @@
         </p:nvSpPr>
         <p:spPr>
           <a:xfrm>
-            <a:off x="594360" y="3355848"/>
-            <a:ext cx="7955279" cy="228600"/>
+            <a:off x="594360" y="3794444"/>
+            <a:ext cx="7955279" cy="360393"/>
           </a:xfrm>
           <a:prstGeom prst="rect">
             <a:avLst/>
@@ -39345,14 +39352,14 @@
           <a:noFill/>
         </p:spPr>
         <p:txBody>
-          <a:bodyPr wrap="square" lIns="0" rIns="0" tIns="0" bIns="0">
+          <a:bodyPr wrap="square" anchor="t" lIns="0" rIns="0" tIns="0" bIns="0">
             <a:spAutoFit/>
           </a:bodyPr>
           <a:lstStyle/>
           <a:p>
             <a:pPr>
               <a:lnSpc>
-                <a:spcPct val="108000"/>
+                <a:spcPct val="100000"/>
               </a:lnSpc>
               <a:spcBef>
                 <a:spcPts val="0"/>
@@ -39360,17 +39367,17 @@
               <a:spcAft>
                 <a:spcPts val="0"/>
               </a:spcAft>
-            </a:pPr>
-            <a:r>
-              <a:rPr sz="1050" b="0" lang="ja-JP">
-                <a:solidFill>
-                  <a:srgbClr val="626669"/>
-                </a:solidFill>
-                <a:latin typeface="Noto Sans"/>
-                <a:ea typeface="Noto Sans CJK JP"/>
-                <a:hlinkClick r:id="rId3"/>
-              </a:rPr>
-              <a:t>https://aclanthology.org/N18-1101/</a:t>
+              <a:buNone/>
+            </a:pPr>
+            <a:r>
+              <a:rPr sz="1350" b="0" lang="ja-JP">
+                <a:solidFill>
+                  <a:srgbClr val="303437"/>
+                </a:solidFill>
+                <a:latin typeface="Noto Sans"/>
+                <a:ea typeface="Noto Sans CJK JP"/>
+              </a:rPr>
+              <a:t>Williams, A., Nangia, N., &amp; Bowman, S. R. (2018). NAACL-HLT, pp. 1112–1122.</a:t>
             </a:r>
           </a:p>
         </p:txBody>
@@ -39383,8 +39390,8 @@
         </p:nvSpPr>
         <p:spPr>
           <a:xfrm>
-            <a:off x="594360" y="3621024"/>
-            <a:ext cx="7955279" cy="365760"/>
+            <a:off x="594360" y="4142062"/>
+            <a:ext cx="7955279" cy="732332"/>
           </a:xfrm>
           <a:prstGeom prst="rect">
             <a:avLst/>
@@ -39392,14 +39399,14 @@
           <a:noFill/>
         </p:spPr>
         <p:txBody>
-          <a:bodyPr wrap="square" lIns="0" rIns="0" tIns="0" bIns="0">
+          <a:bodyPr wrap="square" anchor="t" lIns="0" rIns="0" tIns="0" bIns="0">
             <a:spAutoFit/>
           </a:bodyPr>
           <a:lstStyle/>
           <a:p>
             <a:pPr>
               <a:lnSpc>
-                <a:spcPct val="108000"/>
+                <a:spcPct val="100000"/>
               </a:lnSpc>
               <a:spcBef>
                 <a:spcPts val="0"/>
@@ -39407,16 +39414,17 @@
               <a:spcAft>
                 <a:spcPts val="0"/>
               </a:spcAft>
-            </a:pPr>
-            <a:r>
-              <a:rPr sz="2100" b="1" lang="ja-JP">
-                <a:solidFill>
-                  <a:srgbClr val="303437"/>
-                </a:solidFill>
-                <a:latin typeface="Noto Sans"/>
-                <a:ea typeface="Noto Sans CJK JP"/>
-              </a:rPr>
-              <a:t>Gururangan et al. (2018). Annotation Artifacts. NAACL.</a:t>
+              <a:buNone/>
+            </a:pPr>
+            <a:r>
+              <a:rPr sz="1800" b="0" lang="ja-JP">
+                <a:solidFill>
+                  <a:srgbClr val="303437"/>
+                </a:solidFill>
+                <a:latin typeface="Noto Sans"/>
+                <a:ea typeface="Noto Sans CJK JP"/>
+              </a:rPr>
+              <a:t>MultiNLIの原著論文。10ジャンルの文対を収集し、分野内・分野間の汎化を評価する。</a:t>
             </a:r>
           </a:p>
         </p:txBody>
@@ -39429,8 +39437,8 @@
         </p:nvSpPr>
         <p:spPr>
           <a:xfrm>
-            <a:off x="594360" y="4014215"/>
-            <a:ext cx="7955279" cy="438912"/>
+            <a:off x="594360" y="4783509"/>
+            <a:ext cx="7955279" cy="308415"/>
           </a:xfrm>
           <a:prstGeom prst="rect">
             <a:avLst/>
@@ -39438,14 +39446,14 @@
           <a:noFill/>
         </p:spPr>
         <p:txBody>
-          <a:bodyPr wrap="square" lIns="0" rIns="0" tIns="0" bIns="0">
+          <a:bodyPr wrap="square" anchor="t" lIns="0" rIns="0" tIns="0" bIns="0">
             <a:spAutoFit/>
           </a:bodyPr>
           <a:lstStyle/>
           <a:p>
             <a:pPr>
               <a:lnSpc>
-                <a:spcPct val="108000"/>
+                <a:spcPct val="100000"/>
               </a:lnSpc>
               <a:spcBef>
                 <a:spcPts val="0"/>
@@ -39453,52 +39461,7 @@
               <a:spcAft>
                 <a:spcPts val="0"/>
               </a:spcAft>
-            </a:pPr>
-            <a:r>
-              <a:rPr sz="2000" b="0" lang="ja-JP">
-                <a:solidFill>
-                  <a:srgbClr val="303437"/>
-                </a:solidFill>
-                <a:latin typeface="Noto Sans"/>
-                <a:ea typeface="Noto Sans CJK JP"/>
-              </a:rPr>
-              <a:t>仮説文だけで予測できる偏りを読み、データの近道を調べる。</a:t>
-            </a:r>
-          </a:p>
-        </p:txBody>
-      </p:sp>
-      <p:sp>
-        <p:nvSpPr>
-          <p:cNvPr id="12" name="TextBox 11"/>
-          <p:cNvSpPr txBox="1"/>
-          <p:nvPr/>
-        </p:nvSpPr>
-        <p:spPr>
-          <a:xfrm>
-            <a:off x="594360" y="4489704"/>
-            <a:ext cx="7955279" cy="228600"/>
-          </a:xfrm>
-          <a:prstGeom prst="rect">
-            <a:avLst/>
-          </a:prstGeom>
-          <a:noFill/>
-        </p:spPr>
-        <p:txBody>
-          <a:bodyPr wrap="square" lIns="0" rIns="0" tIns="0" bIns="0">
-            <a:spAutoFit/>
-          </a:bodyPr>
-          <a:lstStyle/>
-          <a:p>
-            <a:pPr>
-              <a:lnSpc>
-                <a:spcPct val="108000"/>
-              </a:lnSpc>
-              <a:spcBef>
-                <a:spcPts val="0"/>
-              </a:spcBef>
-              <a:spcAft>
-                <a:spcPts val="0"/>
-              </a:spcAft>
+              <a:buNone/>
             </a:pPr>
             <a:r>
               <a:rPr sz="1050" b="0" lang="ja-JP">
@@ -39507,9 +39470,9 @@
                 </a:solidFill>
                 <a:latin typeface="Noto Sans"/>
                 <a:ea typeface="Noto Sans CJK JP"/>
-                <a:hlinkClick r:id="rId6"/>
-              </a:rPr>
-              <a:t>https://aclanthology.org/N18-2017/</a:t>
+                <a:hlinkClick r:id="rId3"/>
+              </a:rPr>
+              <a:t>https://aclanthology.org/N18-1101/</a:t>
             </a:r>
           </a:p>
         </p:txBody>
@@ -39542,19 +39505,16 @@
             <p:ph type="title"/>
           </p:nvPr>
         </p:nvSpPr>
-        <p:spPr>
-          <a:xfrm>
-            <a:off x="468172" y="650138"/>
-            <a:ext cx="8206740" cy="616305"/>
-          </a:xfrm>
-        </p:spPr>
+        <p:spPr/>
         <p:txBody>
-          <a:bodyPr wrap="square" lIns="0" rIns="0" tIns="0" bIns="0" anchor="t"/>
+          <a:bodyPr/>
           <a:lstStyle/>
           <a:p>
             <a:r>
-              <a:rPr sz="2800"/>
-              <a:t>読後の学習・研究に向けて</a:t>
+              <a:rPr sz="2800">
+                <a:latin typeface="Noto Sans"/>
+              </a:rPr>
+              <a:t>参考文献</a:t>
             </a:r>
           </a:p>
         </p:txBody>
@@ -39569,19 +39529,20 @@
             <p:ph type="title" idx="2"/>
           </p:nvPr>
         </p:nvSpPr>
-        <p:spPr>
-          <a:xfrm>
-            <a:off x="75895" y="0"/>
-            <a:ext cx="8115300" cy="480060"/>
-          </a:xfrm>
-        </p:spPr>
+        <p:spPr/>
         <p:txBody>
-          <a:bodyPr wrap="square" lIns="0" rIns="0" tIns="0" bIns="0" anchor="ctr"/>
+          <a:bodyPr/>
           <a:lstStyle/>
           <a:p>
             <a:r>
-              <a:rPr sz="1400"/>
-              <a:t>Appendix: 5 参考文献・実装を試す</a:t>
+              <a:rPr sz="1400" b="1">
+                <a:solidFill>
+                  <a:srgbClr val="FFFEF8"/>
+                </a:solidFill>
+                <a:latin typeface="Noto Sans"/>
+                <a:ea typeface="Noto Sans CJK JP"/>
+              </a:rPr>
+              <a:t>Appendix: 5 参考文献</a:t>
             </a:r>
           </a:p>
         </p:txBody>
@@ -39594,8 +39555,8 @@
         </p:nvSpPr>
         <p:spPr>
           <a:xfrm>
-            <a:off x="594360" y="1353312"/>
-            <a:ext cx="7955279" cy="365760"/>
+            <a:off x="594360" y="1327691"/>
+            <a:ext cx="7955279" cy="507490"/>
           </a:xfrm>
           <a:prstGeom prst="rect">
             <a:avLst/>
@@ -39603,14 +39564,14 @@
           <a:noFill/>
         </p:spPr>
         <p:txBody>
-          <a:bodyPr wrap="square" lIns="0" rIns="0" tIns="0" bIns="0">
+          <a:bodyPr wrap="square" anchor="t" lIns="0" rIns="0" tIns="0" bIns="0">
             <a:spAutoFit/>
           </a:bodyPr>
           <a:lstStyle/>
           <a:p>
             <a:pPr>
               <a:lnSpc>
-                <a:spcPct val="108000"/>
+                <a:spcPct val="100000"/>
               </a:lnSpc>
               <a:spcBef>
                 <a:spcPts val="0"/>
@@ -39618,16 +39579,17 @@
               <a:spcAft>
                 <a:spcPts val="0"/>
               </a:spcAft>
-            </a:pPr>
-            <a:r>
-              <a:rPr sz="2100" b="1" lang="ja-JP">
-                <a:solidFill>
-                  <a:srgbClr val="303437"/>
-                </a:solidFill>
-                <a:latin typeface="Noto Sans"/>
-                <a:ea typeface="Noto Sans CJK JP"/>
-              </a:rPr>
-              <a:t>Sentence Transformers公式・NLI学習例</a:t>
+              <a:buNone/>
+            </a:pPr>
+            <a:r>
+              <a:rPr sz="2200" b="1" lang="ja-JP">
+                <a:solidFill>
+                  <a:srgbClr val="303437"/>
+                </a:solidFill>
+                <a:latin typeface="Noto Sans"/>
+                <a:ea typeface="Noto Sans CJK JP"/>
+              </a:rPr>
+              <a:t>Annotation Artifacts in Natural Language Inference Data</a:t>
             </a:r>
           </a:p>
         </p:txBody>
@@ -39640,8 +39602,8 @@
         </p:nvSpPr>
         <p:spPr>
           <a:xfrm>
-            <a:off x="594360" y="1746504"/>
-            <a:ext cx="7955279" cy="438912"/>
+            <a:off x="594360" y="1765600"/>
+            <a:ext cx="7955279" cy="631369"/>
           </a:xfrm>
           <a:prstGeom prst="rect">
             <a:avLst/>
@@ -39649,14 +39611,14 @@
           <a:noFill/>
         </p:spPr>
         <p:txBody>
-          <a:bodyPr wrap="square" lIns="0" rIns="0" tIns="0" bIns="0">
+          <a:bodyPr wrap="square" anchor="t" lIns="0" rIns="0" tIns="0" bIns="0">
             <a:spAutoFit/>
           </a:bodyPr>
           <a:lstStyle/>
           <a:p>
             <a:pPr>
               <a:lnSpc>
-                <a:spcPct val="108000"/>
+                <a:spcPct val="100000"/>
               </a:lnSpc>
               <a:spcBef>
                 <a:spcPts val="0"/>
@@ -39664,16 +39626,17 @@
               <a:spcAft>
                 <a:spcPts val="0"/>
               </a:spcAft>
-            </a:pPr>
-            <a:r>
-              <a:rPr sz="2000" b="0" lang="ja-JP">
-                <a:solidFill>
-                  <a:srgbClr val="303437"/>
-                </a:solidFill>
-                <a:latin typeface="Noto Sans"/>
-                <a:ea typeface="Noto Sans CJK JP"/>
-              </a:rPr>
-              <a:t>含意ペアと矛盾ペアから、文埋め込みを学習する手順を試す。</a:t>
+              <a:buNone/>
+            </a:pPr>
+            <a:r>
+              <a:rPr sz="1550" b="0" lang="ja-JP">
+                <a:solidFill>
+                  <a:srgbClr val="303437"/>
+                </a:solidFill>
+                <a:latin typeface="Noto Sans"/>
+                <a:ea typeface="Noto Sans CJK JP"/>
+              </a:rPr>
+              <a:t>Gururangan, S., Swayamdipta, S., Levy, O., Schwartz, R., Bowman, S. R., &amp; Smith, N. A. (2018). NAACL-HLT, pp. 107–112.</a:t>
             </a:r>
           </a:p>
         </p:txBody>
@@ -39686,8 +39649,8 @@
         </p:nvSpPr>
         <p:spPr>
           <a:xfrm>
-            <a:off x="594360" y="2221991"/>
-            <a:ext cx="7955279" cy="228600"/>
+            <a:off x="594360" y="2386533"/>
+            <a:ext cx="7955279" cy="799958"/>
           </a:xfrm>
           <a:prstGeom prst="rect">
             <a:avLst/>
@@ -39695,14 +39658,14 @@
           <a:noFill/>
         </p:spPr>
         <p:txBody>
-          <a:bodyPr wrap="square" lIns="0" rIns="0" tIns="0" bIns="0">
+          <a:bodyPr wrap="square" anchor="t" lIns="0" rIns="0" tIns="0" bIns="0">
             <a:spAutoFit/>
           </a:bodyPr>
           <a:lstStyle/>
           <a:p>
             <a:pPr>
               <a:lnSpc>
-                <a:spcPct val="108000"/>
+                <a:spcPct val="100000"/>
               </a:lnSpc>
               <a:spcBef>
                 <a:spcPts val="0"/>
@@ -39710,17 +39673,17 @@
               <a:spcAft>
                 <a:spcPts val="0"/>
               </a:spcAft>
-            </a:pPr>
-            <a:r>
-              <a:rPr sz="1050" b="0" lang="ja-JP">
-                <a:solidFill>
-                  <a:srgbClr val="626669"/>
-                </a:solidFill>
-                <a:latin typeface="Noto Sans"/>
-                <a:ea typeface="Noto Sans CJK JP"/>
-                <a:hlinkClick r:id="rId6"/>
-              </a:rPr>
-              <a:t>https://github.com/UKPLab/sentence-transformers/tree/master/examples/sentence_transformer/training/nli</a:t>
+              <a:buNone/>
+            </a:pPr>
+            <a:r>
+              <a:rPr sz="2000" b="0" lang="ja-JP">
+                <a:solidFill>
+                  <a:srgbClr val="303437"/>
+                </a:solidFill>
+                <a:latin typeface="Noto Sans"/>
+                <a:ea typeface="Noto Sans CJK JP"/>
+              </a:rPr>
+              <a:t>NLIの注釈に伴う偏りを分析した研究。仮説文だけでもラベルを予測できることを示す。</a:t>
             </a:r>
           </a:p>
         </p:txBody>
@@ -39733,8 +39696,8 @@
         </p:nvSpPr>
         <p:spPr>
           <a:xfrm>
-            <a:off x="594360" y="2487168"/>
-            <a:ext cx="7955279" cy="365760"/>
+            <a:off x="594360" y="3091949"/>
+            <a:ext cx="7955279" cy="317236"/>
           </a:xfrm>
           <a:prstGeom prst="rect">
             <a:avLst/>
@@ -39742,14 +39705,14 @@
           <a:noFill/>
         </p:spPr>
         <p:txBody>
-          <a:bodyPr wrap="square" lIns="0" rIns="0" tIns="0" bIns="0">
+          <a:bodyPr wrap="square" anchor="t" lIns="0" rIns="0" tIns="0" bIns="0">
             <a:spAutoFit/>
           </a:bodyPr>
           <a:lstStyle/>
           <a:p>
             <a:pPr>
               <a:lnSpc>
-                <a:spcPct val="108000"/>
+                <a:spcPct val="100000"/>
               </a:lnSpc>
               <a:spcBef>
                 <a:spcPts val="0"/>
@@ -39757,248 +39720,18 @@
               <a:spcAft>
                 <a:spcPts val="0"/>
               </a:spcAft>
-            </a:pPr>
-            <a:r>
-              <a:rPr sz="2100" b="1" lang="ja-JP">
-                <a:solidFill>
-                  <a:srgbClr val="303437"/>
-                </a:solidFill>
-                <a:latin typeface="Noto Sans"/>
-                <a:ea typeface="Noto Sans CJK JP"/>
-              </a:rPr>
-              <a:t>Reimers &amp; Gurevych (2019). Sentence-BERT. EMNLP.</a:t>
-            </a:r>
-          </a:p>
-        </p:txBody>
-      </p:sp>
-      <p:sp>
-        <p:nvSpPr>
-          <p:cNvPr id="8" name="TextBox 7"/>
-          <p:cNvSpPr txBox="1"/>
-          <p:nvPr/>
-        </p:nvSpPr>
-        <p:spPr>
-          <a:xfrm>
-            <a:off x="594360" y="2880360"/>
-            <a:ext cx="7955279" cy="438912"/>
-          </a:xfrm>
-          <a:prstGeom prst="rect">
-            <a:avLst/>
-          </a:prstGeom>
-          <a:noFill/>
-        </p:spPr>
-        <p:txBody>
-          <a:bodyPr wrap="square" lIns="0" rIns="0" tIns="0" bIns="0">
-            <a:spAutoFit/>
-          </a:bodyPr>
-          <a:lstStyle/>
-          <a:p>
-            <a:pPr>
-              <a:lnSpc>
-                <a:spcPct val="108000"/>
-              </a:lnSpc>
-              <a:spcBef>
-                <a:spcPts val="0"/>
-              </a:spcBef>
-              <a:spcAft>
-                <a:spcPts val="0"/>
-              </a:spcAft>
-            </a:pPr>
-            <a:r>
-              <a:rPr sz="2000" b="0" lang="ja-JP">
-                <a:solidFill>
-                  <a:srgbClr val="303437"/>
-                </a:solidFill>
-                <a:latin typeface="Noto Sans"/>
-                <a:ea typeface="Noto Sans CJK JP"/>
-              </a:rPr>
-              <a:t>NLIで学んだ文表現を、類似度計算へ転用する方法を学ぶ。</a:t>
-            </a:r>
-          </a:p>
-        </p:txBody>
-      </p:sp>
-      <p:sp>
-        <p:nvSpPr>
-          <p:cNvPr id="9" name="TextBox 8"/>
-          <p:cNvSpPr txBox="1"/>
-          <p:nvPr/>
-        </p:nvSpPr>
-        <p:spPr>
-          <a:xfrm>
-            <a:off x="594360" y="3355848"/>
-            <a:ext cx="7955279" cy="228600"/>
-          </a:xfrm>
-          <a:prstGeom prst="rect">
-            <a:avLst/>
-          </a:prstGeom>
-          <a:noFill/>
-        </p:spPr>
-        <p:txBody>
-          <a:bodyPr wrap="square" lIns="0" rIns="0" tIns="0" bIns="0">
-            <a:spAutoFit/>
-          </a:bodyPr>
-          <a:lstStyle/>
-          <a:p>
-            <a:pPr>
-              <a:lnSpc>
-                <a:spcPct val="108000"/>
-              </a:lnSpc>
-              <a:spcBef>
-                <a:spcPts val="0"/>
-              </a:spcBef>
-              <a:spcAft>
-                <a:spcPts val="0"/>
-              </a:spcAft>
-            </a:pPr>
-            <a:r>
-              <a:rPr sz="1050" b="0" lang="ja-JP">
+              <a:buNone/>
+            </a:pPr>
+            <a:r>
+              <a:rPr sz="1100" b="0" lang="ja-JP">
                 <a:solidFill>
                   <a:srgbClr val="626669"/>
                 </a:solidFill>
                 <a:latin typeface="Noto Sans"/>
                 <a:ea typeface="Noto Sans CJK JP"/>
-                <a:hlinkClick r:id="rId8"/>
-              </a:rPr>
-              <a:t>https://aclanthology.org/D19-1410/</a:t>
-            </a:r>
-          </a:p>
-        </p:txBody>
-      </p:sp>
-      <p:sp>
-        <p:nvSpPr>
-          <p:cNvPr id="10" name="TextBox 9"/>
-          <p:cNvSpPr txBox="1"/>
-          <p:nvPr/>
-        </p:nvSpPr>
-        <p:spPr>
-          <a:xfrm>
-            <a:off x="594360" y="3621024"/>
-            <a:ext cx="7955279" cy="365760"/>
-          </a:xfrm>
-          <a:prstGeom prst="rect">
-            <a:avLst/>
-          </a:prstGeom>
-          <a:noFill/>
-        </p:spPr>
-        <p:txBody>
-          <a:bodyPr wrap="square" lIns="0" rIns="0" tIns="0" bIns="0">
-            <a:spAutoFit/>
-          </a:bodyPr>
-          <a:lstStyle/>
-          <a:p>
-            <a:pPr>
-              <a:lnSpc>
-                <a:spcPct val="108000"/>
-              </a:lnSpc>
-              <a:spcBef>
-                <a:spcPts val="0"/>
-              </a:spcBef>
-              <a:spcAft>
-                <a:spcPts val="0"/>
-              </a:spcAft>
-            </a:pPr>
-            <a:r>
-              <a:rPr sz="2100" b="1" lang="ja-JP">
-                <a:solidFill>
-                  <a:srgbClr val="303437"/>
-                </a:solidFill>
-                <a:latin typeface="Noto Sans"/>
-                <a:ea typeface="Noto Sans CJK JP"/>
-              </a:rPr>
-              <a:t>Gao et al. (2021). SimCSE. EMNLP.</a:t>
-            </a:r>
-          </a:p>
-        </p:txBody>
-      </p:sp>
-      <p:sp>
-        <p:nvSpPr>
-          <p:cNvPr id="11" name="TextBox 10"/>
-          <p:cNvSpPr txBox="1"/>
-          <p:nvPr/>
-        </p:nvSpPr>
-        <p:spPr>
-          <a:xfrm>
-            <a:off x="594360" y="4014215"/>
-            <a:ext cx="7955279" cy="438912"/>
-          </a:xfrm>
-          <a:prstGeom prst="rect">
-            <a:avLst/>
-          </a:prstGeom>
-          <a:noFill/>
-        </p:spPr>
-        <p:txBody>
-          <a:bodyPr wrap="square" lIns="0" rIns="0" tIns="0" bIns="0">
-            <a:spAutoFit/>
-          </a:bodyPr>
-          <a:lstStyle/>
-          <a:p>
-            <a:pPr>
-              <a:lnSpc>
-                <a:spcPct val="108000"/>
-              </a:lnSpc>
-              <a:spcBef>
-                <a:spcPts val="0"/>
-              </a:spcBef>
-              <a:spcAft>
-                <a:spcPts val="0"/>
-              </a:spcAft>
-            </a:pPr>
-            <a:r>
-              <a:rPr sz="2000" b="0" lang="ja-JP">
-                <a:solidFill>
-                  <a:srgbClr val="303437"/>
-                </a:solidFill>
-                <a:latin typeface="Noto Sans"/>
-                <a:ea typeface="Noto Sans CJK JP"/>
-              </a:rPr>
-              <a:t>正例・負例の作り方を通じ、対照学習による文表現を比較する。</a:t>
-            </a:r>
-          </a:p>
-        </p:txBody>
-      </p:sp>
-      <p:sp>
-        <p:nvSpPr>
-          <p:cNvPr id="12" name="TextBox 11"/>
-          <p:cNvSpPr txBox="1"/>
-          <p:nvPr/>
-        </p:nvSpPr>
-        <p:spPr>
-          <a:xfrm>
-            <a:off x="594360" y="4489704"/>
-            <a:ext cx="7955279" cy="228600"/>
-          </a:xfrm>
-          <a:prstGeom prst="rect">
-            <a:avLst/>
-          </a:prstGeom>
-          <a:noFill/>
-        </p:spPr>
-        <p:txBody>
-          <a:bodyPr wrap="square" lIns="0" rIns="0" tIns="0" bIns="0">
-            <a:spAutoFit/>
-          </a:bodyPr>
-          <a:lstStyle/>
-          <a:p>
-            <a:pPr>
-              <a:lnSpc>
-                <a:spcPct val="108000"/>
-              </a:lnSpc>
-              <a:spcBef>
-                <a:spcPts val="0"/>
-              </a:spcBef>
-              <a:spcAft>
-                <a:spcPts val="0"/>
-              </a:spcAft>
-            </a:pPr>
-            <a:r>
-              <a:rPr sz="1050" b="0" lang="ja-JP">
-                <a:solidFill>
-                  <a:srgbClr val="626669"/>
-                </a:solidFill>
-                <a:latin typeface="Noto Sans"/>
-                <a:ea typeface="Noto Sans CJK JP"/>
-                <a:hlinkClick r:id="rId9"/>
-              </a:rPr>
-              <a:t>https://aclanthology.org/2021.emnlp-main.552/</a:t>
+                <a:hlinkClick r:id="rId2"/>
+              </a:rPr>
+              <a:t>https://aclanthology.org/N18-2017/</a:t>
             </a:r>
           </a:p>
         </p:txBody>
@@ -40688,12 +40421,14 @@
         </p:nvSpPr>
         <p:spPr/>
         <p:txBody>
-          <a:bodyPr wrap="square" lIns="0" rIns="0" tIns="0" bIns="0" anchor="t"/>
+          <a:bodyPr/>
           <a:lstStyle/>
           <a:p>
             <a:r>
-              <a:rPr sz="2800"/>
-              <a:t>読後の学習・研究に向けて</a:t>
+              <a:rPr sz="2800">
+                <a:latin typeface="Noto Sans"/>
+              </a:rPr>
+              <a:t>参考文献</a:t>
             </a:r>
           </a:p>
         </p:txBody>
@@ -40710,12 +40445,18 @@
         </p:nvSpPr>
         <p:spPr/>
         <p:txBody>
-          <a:bodyPr wrap="square" lIns="0" rIns="0" tIns="0" bIns="0" anchor="ctr"/>
+          <a:bodyPr/>
           <a:lstStyle/>
           <a:p>
             <a:r>
-              <a:rPr sz="1400"/>
-              <a:t>Appendix: 5 参考文献・評価と限界を調べる</a:t>
+              <a:rPr sz="1400" b="1">
+                <a:solidFill>
+                  <a:srgbClr val="FFFEF8"/>
+                </a:solidFill>
+                <a:latin typeface="Noto Sans"/>
+                <a:ea typeface="Noto Sans CJK JP"/>
+              </a:rPr>
+              <a:t>Appendix: 5 参考文献</a:t>
             </a:r>
           </a:p>
         </p:txBody>
@@ -40728,8 +40469,8 @@
         </p:nvSpPr>
         <p:spPr>
           <a:xfrm>
-            <a:off x="594360" y="1353312"/>
-            <a:ext cx="7955279" cy="365760"/>
+            <a:off x="594360" y="1327691"/>
+            <a:ext cx="7955279" cy="507490"/>
           </a:xfrm>
           <a:prstGeom prst="rect">
             <a:avLst/>
@@ -40737,14 +40478,14 @@
           <a:noFill/>
         </p:spPr>
         <p:txBody>
-          <a:bodyPr wrap="square" lIns="0" rIns="0" tIns="0" bIns="0">
+          <a:bodyPr wrap="square" anchor="t" lIns="0" rIns="0" tIns="0" bIns="0">
             <a:spAutoFit/>
           </a:bodyPr>
           <a:lstStyle/>
           <a:p>
             <a:pPr>
               <a:lnSpc>
-                <a:spcPct val="108000"/>
+                <a:spcPct val="100000"/>
               </a:lnSpc>
               <a:spcBef>
                 <a:spcPts val="0"/>
@@ -40752,16 +40493,17 @@
               <a:spcAft>
                 <a:spcPts val="0"/>
               </a:spcAft>
-            </a:pPr>
-            <a:r>
-              <a:rPr sz="2100" b="1" lang="ja-JP">
-                <a:solidFill>
-                  <a:srgbClr val="303437"/>
-                </a:solidFill>
-                <a:latin typeface="Noto Sans"/>
-                <a:ea typeface="Noto Sans CJK JP"/>
-              </a:rPr>
-              <a:t>McCoy et al. (2019). HANS. ACL.</a:t>
+              <a:buNone/>
+            </a:pPr>
+            <a:r>
+              <a:rPr sz="2200" b="1" lang="ja-JP">
+                <a:solidFill>
+                  <a:srgbClr val="303437"/>
+                </a:solidFill>
+                <a:latin typeface="Noto Sans"/>
+                <a:ea typeface="Noto Sans CJK JP"/>
+              </a:rPr>
+              <a:t>Natural Language Inference</a:t>
             </a:r>
           </a:p>
         </p:txBody>
@@ -40774,8 +40516,8 @@
         </p:nvSpPr>
         <p:spPr>
           <a:xfrm>
-            <a:off x="594360" y="1746504"/>
-            <a:ext cx="7955279" cy="438912"/>
+            <a:off x="594360" y="1783520"/>
+            <a:ext cx="7955279" cy="649290"/>
           </a:xfrm>
           <a:prstGeom prst="rect">
             <a:avLst/>
@@ -40783,14 +40525,14 @@
           <a:noFill/>
         </p:spPr>
         <p:txBody>
-          <a:bodyPr wrap="square" lIns="0" rIns="0" tIns="0" bIns="0">
+          <a:bodyPr wrap="square" anchor="t" lIns="0" rIns="0" tIns="0" bIns="0">
             <a:spAutoFit/>
           </a:bodyPr>
           <a:lstStyle/>
           <a:p>
             <a:pPr>
               <a:lnSpc>
-                <a:spcPct val="108000"/>
+                <a:spcPct val="100000"/>
               </a:lnSpc>
               <a:spcBef>
                 <a:spcPts val="0"/>
@@ -40798,16 +40540,17 @@
               <a:spcAft>
                 <a:spcPts val="0"/>
               </a:spcAft>
-            </a:pPr>
-            <a:r>
-              <a:rPr sz="2000" b="0" lang="ja-JP">
-                <a:solidFill>
-                  <a:srgbClr val="303437"/>
-                </a:solidFill>
-                <a:latin typeface="Noto Sans"/>
-                <a:ea typeface="Noto Sans CJK JP"/>
-              </a:rPr>
-              <a:t>語の重なりなどの近道を、統語構造を変えた例で検査する。</a:t>
+              <a:buNone/>
+            </a:pPr>
+            <a:r>
+              <a:rPr sz="1550" b="0" lang="ja-JP">
+                <a:solidFill>
+                  <a:srgbClr val="303437"/>
+                </a:solidFill>
+                <a:latin typeface="Noto Sans"/>
+                <a:ea typeface="Noto Sans CJK JP"/>
+              </a:rPr>
+              <a:t>Sentence Transformers contributors (n.d.). Sentence Transformers documentation. 参照 2026-10-15.</a:t>
             </a:r>
           </a:p>
         </p:txBody>
@@ -40820,8 +40563,8 @@
         </p:nvSpPr>
         <p:spPr>
           <a:xfrm>
-            <a:off x="594360" y="2221991"/>
-            <a:ext cx="7955279" cy="228600"/>
+            <a:off x="594360" y="2404453"/>
+            <a:ext cx="7955279" cy="799958"/>
           </a:xfrm>
           <a:prstGeom prst="rect">
             <a:avLst/>
@@ -40829,14 +40572,14 @@
           <a:noFill/>
         </p:spPr>
         <p:txBody>
-          <a:bodyPr wrap="square" lIns="0" rIns="0" tIns="0" bIns="0">
+          <a:bodyPr wrap="square" anchor="t" lIns="0" rIns="0" tIns="0" bIns="0">
             <a:spAutoFit/>
           </a:bodyPr>
           <a:lstStyle/>
           <a:p>
             <a:pPr>
               <a:lnSpc>
-                <a:spcPct val="108000"/>
+                <a:spcPct val="100000"/>
               </a:lnSpc>
               <a:spcBef>
                 <a:spcPts val="0"/>
@@ -40844,17 +40587,17 @@
               <a:spcAft>
                 <a:spcPts val="0"/>
               </a:spcAft>
-            </a:pPr>
-            <a:r>
-              <a:rPr sz="1050" b="0" lang="ja-JP">
-                <a:solidFill>
-                  <a:srgbClr val="626669"/>
-                </a:solidFill>
-                <a:latin typeface="Noto Sans"/>
-                <a:ea typeface="Noto Sans CJK JP"/>
-                <a:hlinkClick r:id="rId2"/>
-              </a:rPr>
-              <a:t>https://aclanthology.org/P19-1334/</a:t>
+              <a:buNone/>
+            </a:pPr>
+            <a:r>
+              <a:rPr sz="2000" b="0" lang="ja-JP">
+                <a:solidFill>
+                  <a:srgbClr val="303437"/>
+                </a:solidFill>
+                <a:latin typeface="Noto Sans"/>
+                <a:ea typeface="Noto Sans CJK JP"/>
+              </a:rPr>
+              <a:t>Sentence Transformersの公式学習例。NLI文対を使う文埋め込みの損失関数と実装を示す。</a:t>
             </a:r>
           </a:p>
         </p:txBody>
@@ -40867,8 +40610,8 @@
         </p:nvSpPr>
         <p:spPr>
           <a:xfrm>
-            <a:off x="594360" y="2487168"/>
-            <a:ext cx="7955279" cy="365760"/>
+            <a:off x="594360" y="3109869"/>
+            <a:ext cx="7955279" cy="317236"/>
           </a:xfrm>
           <a:prstGeom prst="rect">
             <a:avLst/>
@@ -40876,14 +40619,14 @@
           <a:noFill/>
         </p:spPr>
         <p:txBody>
-          <a:bodyPr wrap="square" lIns="0" rIns="0" tIns="0" bIns="0">
+          <a:bodyPr wrap="square" anchor="t" lIns="0" rIns="0" tIns="0" bIns="0">
             <a:spAutoFit/>
           </a:bodyPr>
           <a:lstStyle/>
           <a:p>
             <a:pPr>
               <a:lnSpc>
-                <a:spcPct val="108000"/>
+                <a:spcPct val="100000"/>
               </a:lnSpc>
               <a:spcBef>
                 <a:spcPts val="0"/>
@@ -40891,16 +40634,277 @@
               <a:spcAft>
                 <a:spcPts val="0"/>
               </a:spcAft>
-            </a:pPr>
-            <a:r>
-              <a:rPr sz="2100" b="1" lang="ja-JP">
-                <a:solidFill>
-                  <a:srgbClr val="303437"/>
-                </a:solidFill>
-                <a:latin typeface="Noto Sans"/>
-                <a:ea typeface="Noto Sans CJK JP"/>
-              </a:rPr>
-              <a:t>Nie et al. (2020). Adversarial NLI. ACL.</a:t>
+              <a:buNone/>
+            </a:pPr>
+            <a:r>
+              <a:rPr sz="1100" b="0" lang="ja-JP">
+                <a:solidFill>
+                  <a:srgbClr val="626669"/>
+                </a:solidFill>
+                <a:latin typeface="Noto Sans"/>
+                <a:ea typeface="Noto Sans CJK JP"/>
+                <a:hlinkClick r:id="rId2"/>
+              </a:rPr>
+              <a:t>https://github.com/UKPLab/sentence-transformers/tree/master/examples/sentence_transformer/training/nli</a:t>
+            </a:r>
+          </a:p>
+        </p:txBody>
+      </p:sp>
+    </p:spTree>
+  </p:cSld>
+  <p:clrMapOvr>
+    <a:masterClrMapping/>
+  </p:clrMapOvr>
+</p:sld>
+</file>
+
+<file path=ppt/slides/slide61.xml><?xml version="1.0" encoding="utf-8"?>
+<p:sld xmlns:a="http://schemas.openxmlformats.org/drawingml/2006/main" xmlns:p="http://schemas.openxmlformats.org/presentationml/2006/main" xmlns:r="http://schemas.openxmlformats.org/officeDocument/2006/relationships">
+  <p:cSld>
+    <p:spTree>
+      <p:nvGrpSpPr>
+        <p:cNvPr id="1" name=""/>
+        <p:cNvGrpSpPr/>
+        <p:nvPr/>
+      </p:nvGrpSpPr>
+      <p:grpSpPr/>
+      <p:sp>
+        <p:nvSpPr>
+          <p:cNvPr id="2" name="Title 1"/>
+          <p:cNvSpPr>
+            <a:spLocks noGrp="1"/>
+          </p:cNvSpPr>
+          <p:nvPr>
+            <p:ph type="title"/>
+          </p:nvPr>
+        </p:nvSpPr>
+        <p:spPr/>
+        <p:txBody>
+          <a:bodyPr/>
+          <a:lstStyle/>
+          <a:p>
+            <a:r>
+              <a:rPr sz="2800">
+                <a:latin typeface="Noto Sans"/>
+              </a:rPr>
+              <a:t>参考文献</a:t>
+            </a:r>
+          </a:p>
+        </p:txBody>
+      </p:sp>
+      <p:sp>
+        <p:nvSpPr>
+          <p:cNvPr id="3" name="Title 2"/>
+          <p:cNvSpPr>
+            <a:spLocks noGrp="1"/>
+          </p:cNvSpPr>
+          <p:nvPr>
+            <p:ph type="title" idx="2"/>
+          </p:nvPr>
+        </p:nvSpPr>
+        <p:spPr/>
+        <p:txBody>
+          <a:bodyPr/>
+          <a:lstStyle/>
+          <a:p>
+            <a:r>
+              <a:rPr sz="1400" b="1">
+                <a:solidFill>
+                  <a:srgbClr val="FFFEF8"/>
+                </a:solidFill>
+                <a:latin typeface="Noto Sans"/>
+                <a:ea typeface="Noto Sans CJK JP"/>
+              </a:rPr>
+              <a:t>Appendix: 5 参考文献</a:t>
+            </a:r>
+          </a:p>
+        </p:txBody>
+      </p:sp>
+      <p:sp>
+        <p:nvSpPr>
+          <p:cNvPr id="4" name="TextBox 3"/>
+          <p:cNvSpPr txBox="1"/>
+          <p:nvPr/>
+        </p:nvSpPr>
+        <p:spPr>
+          <a:xfrm>
+            <a:off x="594360" y="1325058"/>
+            <a:ext cx="7955279" cy="744945"/>
+          </a:xfrm>
+          <a:prstGeom prst="rect">
+            <a:avLst/>
+          </a:prstGeom>
+          <a:noFill/>
+        </p:spPr>
+        <p:txBody>
+          <a:bodyPr wrap="square" anchor="t" lIns="0" rIns="0" tIns="0" bIns="0">
+            <a:spAutoFit/>
+          </a:bodyPr>
+          <a:lstStyle/>
+          <a:p>
+            <a:pPr>
+              <a:lnSpc>
+                <a:spcPct val="100000"/>
+              </a:lnSpc>
+              <a:spcBef>
+                <a:spcPts val="0"/>
+              </a:spcBef>
+              <a:spcAft>
+                <a:spcPts val="0"/>
+              </a:spcAft>
+              <a:buNone/>
+            </a:pPr>
+            <a:r>
+              <a:rPr sz="1900" b="1" lang="ja-JP">
+                <a:solidFill>
+                  <a:srgbClr val="303437"/>
+                </a:solidFill>
+                <a:latin typeface="Noto Sans"/>
+                <a:ea typeface="Noto Sans CJK JP"/>
+              </a:rPr>
+              <a:t>Sentence-BERT: Sentence Embeddings using Siamese BERT-Networks</a:t>
+            </a:r>
+          </a:p>
+        </p:txBody>
+      </p:sp>
+      <p:sp>
+        <p:nvSpPr>
+          <p:cNvPr id="5" name="TextBox 4"/>
+          <p:cNvSpPr txBox="1"/>
+          <p:nvPr/>
+        </p:nvSpPr>
+        <p:spPr>
+          <a:xfrm>
+            <a:off x="594360" y="2001290"/>
+            <a:ext cx="7955279" cy="360393"/>
+          </a:xfrm>
+          <a:prstGeom prst="rect">
+            <a:avLst/>
+          </a:prstGeom>
+          <a:noFill/>
+        </p:spPr>
+        <p:txBody>
+          <a:bodyPr wrap="square" anchor="t" lIns="0" rIns="0" tIns="0" bIns="0">
+            <a:spAutoFit/>
+          </a:bodyPr>
+          <a:lstStyle/>
+          <a:p>
+            <a:pPr>
+              <a:lnSpc>
+                <a:spcPct val="100000"/>
+              </a:lnSpc>
+              <a:spcBef>
+                <a:spcPts val="0"/>
+              </a:spcBef>
+              <a:spcAft>
+                <a:spcPts val="0"/>
+              </a:spcAft>
+              <a:buNone/>
+            </a:pPr>
+            <a:r>
+              <a:rPr sz="1350" b="0" lang="ja-JP">
+                <a:solidFill>
+                  <a:srgbClr val="303437"/>
+                </a:solidFill>
+                <a:latin typeface="Noto Sans"/>
+                <a:ea typeface="Noto Sans CJK JP"/>
+              </a:rPr>
+              <a:t>Reimers, N., &amp; Gurevych, I. (2019). EMNLP-IJCNLP, pp. 3982–3992.</a:t>
+            </a:r>
+          </a:p>
+        </p:txBody>
+      </p:sp>
+      <p:sp>
+        <p:nvSpPr>
+          <p:cNvPr id="6" name="TextBox 5"/>
+          <p:cNvSpPr txBox="1"/>
+          <p:nvPr/>
+        </p:nvSpPr>
+        <p:spPr>
+          <a:xfrm>
+            <a:off x="594360" y="2348908"/>
+            <a:ext cx="7955279" cy="732332"/>
+          </a:xfrm>
+          <a:prstGeom prst="rect">
+            <a:avLst/>
+          </a:prstGeom>
+          <a:noFill/>
+        </p:spPr>
+        <p:txBody>
+          <a:bodyPr wrap="square" anchor="t" lIns="0" rIns="0" tIns="0" bIns="0">
+            <a:spAutoFit/>
+          </a:bodyPr>
+          <a:lstStyle/>
+          <a:p>
+            <a:pPr>
+              <a:lnSpc>
+                <a:spcPct val="100000"/>
+              </a:lnSpc>
+              <a:spcBef>
+                <a:spcPts val="0"/>
+              </a:spcBef>
+              <a:spcAft>
+                <a:spcPts val="0"/>
+              </a:spcAft>
+              <a:buNone/>
+            </a:pPr>
+            <a:r>
+              <a:rPr sz="1800" b="0" lang="ja-JP">
+                <a:solidFill>
+                  <a:srgbClr val="303437"/>
+                </a:solidFill>
+                <a:latin typeface="Noto Sans"/>
+                <a:ea typeface="Noto Sans CJK JP"/>
+              </a:rPr>
+              <a:t>Sentence-BERTの原著論文。BERTから文埋め込みを生成し、文間の類似度を計算する。</a:t>
+            </a:r>
+          </a:p>
+        </p:txBody>
+      </p:sp>
+      <p:sp>
+        <p:nvSpPr>
+          <p:cNvPr id="7" name="TextBox 6"/>
+          <p:cNvSpPr txBox="1"/>
+          <p:nvPr/>
+        </p:nvSpPr>
+        <p:spPr>
+          <a:xfrm>
+            <a:off x="594360" y="2990355"/>
+            <a:ext cx="7955279" cy="308415"/>
+          </a:xfrm>
+          <a:prstGeom prst="rect">
+            <a:avLst/>
+          </a:prstGeom>
+          <a:noFill/>
+        </p:spPr>
+        <p:txBody>
+          <a:bodyPr wrap="square" anchor="t" lIns="0" rIns="0" tIns="0" bIns="0">
+            <a:spAutoFit/>
+          </a:bodyPr>
+          <a:lstStyle/>
+          <a:p>
+            <a:pPr>
+              <a:lnSpc>
+                <a:spcPct val="100000"/>
+              </a:lnSpc>
+              <a:spcBef>
+                <a:spcPts val="0"/>
+              </a:spcBef>
+              <a:spcAft>
+                <a:spcPts val="0"/>
+              </a:spcAft>
+              <a:buNone/>
+            </a:pPr>
+            <a:r>
+              <a:rPr sz="1050" b="0" lang="ja-JP">
+                <a:solidFill>
+                  <a:srgbClr val="626669"/>
+                </a:solidFill>
+                <a:latin typeface="Noto Sans"/>
+                <a:ea typeface="Noto Sans CJK JP"/>
+                <a:hlinkClick r:id="rId2"/>
+              </a:rPr>
+              <a:t>https://aclanthology.org/D19-1410/</a:t>
             </a:r>
           </a:p>
         </p:txBody>
@@ -40913,8 +40917,8 @@
         </p:nvSpPr>
         <p:spPr>
           <a:xfrm>
-            <a:off x="594360" y="2880360"/>
-            <a:ext cx="7955279" cy="438912"/>
+            <a:off x="594360" y="3407645"/>
+            <a:ext cx="7955279" cy="455512"/>
           </a:xfrm>
           <a:prstGeom prst="rect">
             <a:avLst/>
@@ -40922,14 +40926,14 @@
           <a:noFill/>
         </p:spPr>
         <p:txBody>
-          <a:bodyPr wrap="square" lIns="0" rIns="0" tIns="0" bIns="0">
+          <a:bodyPr wrap="square" anchor="t" lIns="0" rIns="0" tIns="0" bIns="0">
             <a:spAutoFit/>
           </a:bodyPr>
           <a:lstStyle/>
           <a:p>
             <a:pPr>
               <a:lnSpc>
-                <a:spcPct val="108000"/>
+                <a:spcPct val="100000"/>
               </a:lnSpc>
               <a:spcBef>
                 <a:spcPts val="0"/>
@@ -40937,16 +40941,17 @@
               <a:spcAft>
                 <a:spcPts val="0"/>
               </a:spcAft>
-            </a:pPr>
-            <a:r>
-              <a:rPr sz="2000" b="0" lang="ja-JP">
-                <a:solidFill>
-                  <a:srgbClr val="303437"/>
-                </a:solidFill>
-                <a:latin typeface="Noto Sans"/>
-                <a:ea typeface="Noto Sans CJK JP"/>
-              </a:rPr>
-              <a:t>モデルが誤る文対を人が作る方法から、頑健性の評価を学ぶ。</a:t>
+              <a:buNone/>
+            </a:pPr>
+            <a:r>
+              <a:rPr sz="1900" b="1" lang="ja-JP">
+                <a:solidFill>
+                  <a:srgbClr val="303437"/>
+                </a:solidFill>
+                <a:latin typeface="Noto Sans"/>
+                <a:ea typeface="Noto Sans CJK JP"/>
+              </a:rPr>
+              <a:t>SimCSE: Simple Contrastive Learning of Sentence Embeddings</a:t>
             </a:r>
           </a:p>
         </p:txBody>
@@ -40959,8 +40964,8 @@
         </p:nvSpPr>
         <p:spPr>
           <a:xfrm>
-            <a:off x="594360" y="3355848"/>
-            <a:ext cx="7955279" cy="228600"/>
+            <a:off x="594360" y="3794444"/>
+            <a:ext cx="7955279" cy="360393"/>
           </a:xfrm>
           <a:prstGeom prst="rect">
             <a:avLst/>
@@ -40968,14 +40973,14 @@
           <a:noFill/>
         </p:spPr>
         <p:txBody>
-          <a:bodyPr wrap="square" lIns="0" rIns="0" tIns="0" bIns="0">
+          <a:bodyPr wrap="square" anchor="t" lIns="0" rIns="0" tIns="0" bIns="0">
             <a:spAutoFit/>
           </a:bodyPr>
           <a:lstStyle/>
           <a:p>
             <a:pPr>
               <a:lnSpc>
-                <a:spcPct val="108000"/>
+                <a:spcPct val="100000"/>
               </a:lnSpc>
               <a:spcBef>
                 <a:spcPts val="0"/>
@@ -40983,17 +40988,17 @@
               <a:spcAft>
                 <a:spcPts val="0"/>
               </a:spcAft>
-            </a:pPr>
-            <a:r>
-              <a:rPr sz="1050" b="0" lang="ja-JP">
-                <a:solidFill>
-                  <a:srgbClr val="626669"/>
-                </a:solidFill>
-                <a:latin typeface="Noto Sans"/>
-                <a:ea typeface="Noto Sans CJK JP"/>
-                <a:hlinkClick r:id="rId3"/>
-              </a:rPr>
-              <a:t>https://aclanthology.org/2020.acl-main.441/</a:t>
+              <a:buNone/>
+            </a:pPr>
+            <a:r>
+              <a:rPr sz="1350" b="0" lang="ja-JP">
+                <a:solidFill>
+                  <a:srgbClr val="303437"/>
+                </a:solidFill>
+                <a:latin typeface="Noto Sans"/>
+                <a:ea typeface="Noto Sans CJK JP"/>
+              </a:rPr>
+              <a:t>Gao, T., Yao, X., &amp; Chen, D. (2021). EMNLP.</a:t>
             </a:r>
           </a:p>
         </p:txBody>
@@ -41006,8 +41011,8 @@
         </p:nvSpPr>
         <p:spPr>
           <a:xfrm>
-            <a:off x="594360" y="3621024"/>
-            <a:ext cx="7955279" cy="365760"/>
+            <a:off x="594360" y="4142062"/>
+            <a:ext cx="7955279" cy="732332"/>
           </a:xfrm>
           <a:prstGeom prst="rect">
             <a:avLst/>
@@ -41015,14 +41020,14 @@
           <a:noFill/>
         </p:spPr>
         <p:txBody>
-          <a:bodyPr wrap="square" lIns="0" rIns="0" tIns="0" bIns="0">
+          <a:bodyPr wrap="square" anchor="t" lIns="0" rIns="0" tIns="0" bIns="0">
             <a:spAutoFit/>
           </a:bodyPr>
           <a:lstStyle/>
           <a:p>
             <a:pPr>
               <a:lnSpc>
-                <a:spcPct val="108000"/>
+                <a:spcPct val="100000"/>
               </a:lnSpc>
               <a:spcBef>
                 <a:spcPts val="0"/>
@@ -41030,16 +41035,17 @@
               <a:spcAft>
                 <a:spcPts val="0"/>
               </a:spcAft>
-            </a:pPr>
-            <a:r>
-              <a:rPr sz="2100" b="1" lang="ja-JP">
-                <a:solidFill>
-                  <a:srgbClr val="303437"/>
-                </a:solidFill>
-                <a:latin typeface="Noto Sans"/>
-                <a:ea typeface="Noto Sans CJK JP"/>
-              </a:rPr>
-              <a:t>Camburu et al. (2018). e-SNLI. NeurIPS.</a:t>
+              <a:buNone/>
+            </a:pPr>
+            <a:r>
+              <a:rPr sz="1800" b="0" lang="ja-JP">
+                <a:solidFill>
+                  <a:srgbClr val="303437"/>
+                </a:solidFill>
+                <a:latin typeface="Noto Sans"/>
+                <a:ea typeface="Noto Sans CJK JP"/>
+              </a:rPr>
+              <a:t>文埋め込みの対照学習手法を提案した論文。ドロップアウトとNLI文対を正例の構成に用いる。</a:t>
             </a:r>
           </a:p>
         </p:txBody>
@@ -41052,8 +41058,8 @@
         </p:nvSpPr>
         <p:spPr>
           <a:xfrm>
-            <a:off x="594360" y="4014215"/>
-            <a:ext cx="7955279" cy="438912"/>
+            <a:off x="594360" y="4783509"/>
+            <a:ext cx="7955279" cy="308415"/>
           </a:xfrm>
           <a:prstGeom prst="rect">
             <a:avLst/>
@@ -41061,14 +41067,14 @@
           <a:noFill/>
         </p:spPr>
         <p:txBody>
-          <a:bodyPr wrap="square" lIns="0" rIns="0" tIns="0" bIns="0">
+          <a:bodyPr wrap="square" anchor="t" lIns="0" rIns="0" tIns="0" bIns="0">
             <a:spAutoFit/>
           </a:bodyPr>
           <a:lstStyle/>
           <a:p>
             <a:pPr>
               <a:lnSpc>
-                <a:spcPct val="108000"/>
+                <a:spcPct val="100000"/>
               </a:lnSpc>
               <a:spcBef>
                 <a:spcPts val="0"/>
@@ -41076,30 +41082,102 @@
               <a:spcAft>
                 <a:spcPts val="0"/>
               </a:spcAft>
-            </a:pPr>
-            <a:r>
-              <a:rPr sz="2000" b="0" lang="ja-JP">
-                <a:solidFill>
-                  <a:srgbClr val="303437"/>
-                </a:solidFill>
-                <a:latin typeface="Noto Sans"/>
-                <a:ea typeface="Noto Sans CJK JP"/>
-              </a:rPr>
-              <a:t>判断理由の自然言語説明を使い、正解率以外の検証を考える。</a:t>
+              <a:buNone/>
+            </a:pPr>
+            <a:r>
+              <a:rPr sz="1050" b="0" lang="ja-JP">
+                <a:solidFill>
+                  <a:srgbClr val="626669"/>
+                </a:solidFill>
+                <a:latin typeface="Noto Sans"/>
+                <a:ea typeface="Noto Sans CJK JP"/>
+                <a:hlinkClick r:id="rId3"/>
+              </a:rPr>
+              <a:t>https://aclanthology.org/2021.emnlp-main.552/</a:t>
+            </a:r>
+          </a:p>
+        </p:txBody>
+      </p:sp>
+    </p:spTree>
+  </p:cSld>
+  <p:clrMapOvr>
+    <a:masterClrMapping/>
+  </p:clrMapOvr>
+</p:sld>
+</file>
+
+<file path=ppt/slides/slide62.xml><?xml version="1.0" encoding="utf-8"?>
+<p:sld xmlns:a="http://schemas.openxmlformats.org/drawingml/2006/main" xmlns:p="http://schemas.openxmlformats.org/presentationml/2006/main" xmlns:r="http://schemas.openxmlformats.org/officeDocument/2006/relationships">
+  <p:cSld>
+    <p:spTree>
+      <p:nvGrpSpPr>
+        <p:cNvPr id="1" name=""/>
+        <p:cNvGrpSpPr/>
+        <p:nvPr/>
+      </p:nvGrpSpPr>
+      <p:grpSpPr/>
+      <p:sp>
+        <p:nvSpPr>
+          <p:cNvPr id="2" name="Title 1"/>
+          <p:cNvSpPr>
+            <a:spLocks noGrp="1"/>
+          </p:cNvSpPr>
+          <p:nvPr>
+            <p:ph type="title"/>
+          </p:nvPr>
+        </p:nvSpPr>
+        <p:spPr/>
+        <p:txBody>
+          <a:bodyPr/>
+          <a:lstStyle/>
+          <a:p>
+            <a:r>
+              <a:rPr sz="2800">
+                <a:latin typeface="Noto Sans"/>
+              </a:rPr>
+              <a:t>参考文献</a:t>
             </a:r>
           </a:p>
         </p:txBody>
       </p:sp>
       <p:sp>
         <p:nvSpPr>
-          <p:cNvPr id="12" name="TextBox 11"/>
+          <p:cNvPr id="3" name="Title 2"/>
+          <p:cNvSpPr>
+            <a:spLocks noGrp="1"/>
+          </p:cNvSpPr>
+          <p:nvPr>
+            <p:ph type="title" idx="2"/>
+          </p:nvPr>
+        </p:nvSpPr>
+        <p:spPr/>
+        <p:txBody>
+          <a:bodyPr/>
+          <a:lstStyle/>
+          <a:p>
+            <a:r>
+              <a:rPr sz="1400" b="1">
+                <a:solidFill>
+                  <a:srgbClr val="FFFEF8"/>
+                </a:solidFill>
+                <a:latin typeface="Noto Sans"/>
+                <a:ea typeface="Noto Sans CJK JP"/>
+              </a:rPr>
+              <a:t>Appendix: 5 参考文献</a:t>
+            </a:r>
+          </a:p>
+        </p:txBody>
+      </p:sp>
+      <p:sp>
+        <p:nvSpPr>
+          <p:cNvPr id="4" name="TextBox 3"/>
           <p:cNvSpPr txBox="1"/>
           <p:nvPr/>
         </p:nvSpPr>
         <p:spPr>
           <a:xfrm>
-            <a:off x="594360" y="4489704"/>
-            <a:ext cx="7955279" cy="228600"/>
+            <a:off x="594360" y="1327691"/>
+            <a:ext cx="7955279" cy="842643"/>
           </a:xfrm>
           <a:prstGeom prst="rect">
             <a:avLst/>
@@ -41107,14 +41185,14 @@
           <a:noFill/>
         </p:spPr>
         <p:txBody>
-          <a:bodyPr wrap="square" lIns="0" rIns="0" tIns="0" bIns="0">
+          <a:bodyPr wrap="square" anchor="t" lIns="0" rIns="0" tIns="0" bIns="0">
             <a:spAutoFit/>
           </a:bodyPr>
           <a:lstStyle/>
           <a:p>
             <a:pPr>
               <a:lnSpc>
-                <a:spcPct val="108000"/>
+                <a:spcPct val="100000"/>
               </a:lnSpc>
               <a:spcBef>
                 <a:spcPts val="0"/>
@@ -41122,15 +41200,675 @@
               <a:spcAft>
                 <a:spcPts val="0"/>
               </a:spcAft>
-            </a:pPr>
-            <a:r>
-              <a:rPr sz="1050" b="0" lang="ja-JP">
+              <a:buNone/>
+            </a:pPr>
+            <a:r>
+              <a:rPr sz="2200" b="1" lang="ja-JP">
+                <a:solidFill>
+                  <a:srgbClr val="303437"/>
+                </a:solidFill>
+                <a:latin typeface="Noto Sans"/>
+                <a:ea typeface="Noto Sans CJK JP"/>
+              </a:rPr>
+              <a:t>Right for the Wrong Reasons: Diagnosing Syntactic Heuristics in Natural Language Inference</a:t>
+            </a:r>
+          </a:p>
+        </p:txBody>
+      </p:sp>
+      <p:sp>
+        <p:nvSpPr>
+          <p:cNvPr id="5" name="TextBox 4"/>
+          <p:cNvSpPr txBox="1"/>
+          <p:nvPr/>
+        </p:nvSpPr>
+        <p:spPr>
+          <a:xfrm>
+            <a:off x="594360" y="2100753"/>
+            <a:ext cx="7955279" cy="395213"/>
+          </a:xfrm>
+          <a:prstGeom prst="rect">
+            <a:avLst/>
+          </a:prstGeom>
+          <a:noFill/>
+        </p:spPr>
+        <p:txBody>
+          <a:bodyPr wrap="square" anchor="t" lIns="0" rIns="0" tIns="0" bIns="0">
+            <a:spAutoFit/>
+          </a:bodyPr>
+          <a:lstStyle/>
+          <a:p>
+            <a:pPr>
+              <a:lnSpc>
+                <a:spcPct val="100000"/>
+              </a:lnSpc>
+              <a:spcBef>
+                <a:spcPts val="0"/>
+              </a:spcBef>
+              <a:spcAft>
+                <a:spcPts val="0"/>
+              </a:spcAft>
+              <a:buNone/>
+            </a:pPr>
+            <a:r>
+              <a:rPr sz="1550" b="0" lang="ja-JP">
+                <a:solidFill>
+                  <a:srgbClr val="303437"/>
+                </a:solidFill>
+                <a:latin typeface="Noto Sans"/>
+                <a:ea typeface="Noto Sans CJK JP"/>
+              </a:rPr>
+              <a:t>McCoy, R. T., Pavlick, E., &amp; Linzen, T. (2019). ACL, pp. 3428–3448.</a:t>
+            </a:r>
+          </a:p>
+        </p:txBody>
+      </p:sp>
+      <p:sp>
+        <p:nvSpPr>
+          <p:cNvPr id="6" name="TextBox 5"/>
+          <p:cNvSpPr txBox="1"/>
+          <p:nvPr/>
+        </p:nvSpPr>
+        <p:spPr>
+          <a:xfrm>
+            <a:off x="594360" y="2485529"/>
+            <a:ext cx="7955279" cy="799958"/>
+          </a:xfrm>
+          <a:prstGeom prst="rect">
+            <a:avLst/>
+          </a:prstGeom>
+          <a:noFill/>
+        </p:spPr>
+        <p:txBody>
+          <a:bodyPr wrap="square" anchor="t" lIns="0" rIns="0" tIns="0" bIns="0">
+            <a:spAutoFit/>
+          </a:bodyPr>
+          <a:lstStyle/>
+          <a:p>
+            <a:pPr>
+              <a:lnSpc>
+                <a:spcPct val="100000"/>
+              </a:lnSpc>
+              <a:spcBef>
+                <a:spcPts val="0"/>
+              </a:spcBef>
+              <a:spcAft>
+                <a:spcPts val="0"/>
+              </a:spcAft>
+              <a:buNone/>
+            </a:pPr>
+            <a:r>
+              <a:rPr sz="2000" b="0" lang="ja-JP">
+                <a:solidFill>
+                  <a:srgbClr val="303437"/>
+                </a:solidFill>
+                <a:latin typeface="Noto Sans"/>
+                <a:ea typeface="Noto Sans CJK JP"/>
+              </a:rPr>
+              <a:t>HANSの提案論文。語の重なりや部分列などの統語的な近道にNLIモデルが依存するかを検査する。</a:t>
+            </a:r>
+          </a:p>
+        </p:txBody>
+      </p:sp>
+      <p:sp>
+        <p:nvSpPr>
+          <p:cNvPr id="7" name="TextBox 6"/>
+          <p:cNvSpPr txBox="1"/>
+          <p:nvPr/>
+        </p:nvSpPr>
+        <p:spPr>
+          <a:xfrm>
+            <a:off x="594360" y="3190946"/>
+            <a:ext cx="7955279" cy="317236"/>
+          </a:xfrm>
+          <a:prstGeom prst="rect">
+            <a:avLst/>
+          </a:prstGeom>
+          <a:noFill/>
+        </p:spPr>
+        <p:txBody>
+          <a:bodyPr wrap="square" anchor="t" lIns="0" rIns="0" tIns="0" bIns="0">
+            <a:spAutoFit/>
+          </a:bodyPr>
+          <a:lstStyle/>
+          <a:p>
+            <a:pPr>
+              <a:lnSpc>
+                <a:spcPct val="100000"/>
+              </a:lnSpc>
+              <a:spcBef>
+                <a:spcPts val="0"/>
+              </a:spcBef>
+              <a:spcAft>
+                <a:spcPts val="0"/>
+              </a:spcAft>
+              <a:buNone/>
+            </a:pPr>
+            <a:r>
+              <a:rPr sz="1100" b="0" lang="ja-JP">
                 <a:solidFill>
                   <a:srgbClr val="626669"/>
                 </a:solidFill>
                 <a:latin typeface="Noto Sans"/>
                 <a:ea typeface="Noto Sans CJK JP"/>
-                <a:hlinkClick r:id="rId4"/>
+                <a:hlinkClick r:id="rId2"/>
+              </a:rPr>
+              <a:t>https://aclanthology.org/P19-1334/</a:t>
+            </a:r>
+          </a:p>
+        </p:txBody>
+      </p:sp>
+    </p:spTree>
+  </p:cSld>
+  <p:clrMapOvr>
+    <a:masterClrMapping/>
+  </p:clrMapOvr>
+</p:sld>
+</file>
+
+<file path=ppt/slides/slide63.xml><?xml version="1.0" encoding="utf-8"?>
+<p:sld xmlns:a="http://schemas.openxmlformats.org/drawingml/2006/main" xmlns:p="http://schemas.openxmlformats.org/presentationml/2006/main" xmlns:r="http://schemas.openxmlformats.org/officeDocument/2006/relationships">
+  <p:cSld>
+    <p:spTree>
+      <p:nvGrpSpPr>
+        <p:cNvPr id="1" name=""/>
+        <p:cNvGrpSpPr/>
+        <p:nvPr/>
+      </p:nvGrpSpPr>
+      <p:grpSpPr/>
+      <p:sp>
+        <p:nvSpPr>
+          <p:cNvPr id="2" name="Title 1"/>
+          <p:cNvSpPr>
+            <a:spLocks noGrp="1"/>
+          </p:cNvSpPr>
+          <p:nvPr>
+            <p:ph type="title"/>
+          </p:nvPr>
+        </p:nvSpPr>
+        <p:spPr/>
+        <p:txBody>
+          <a:bodyPr/>
+          <a:lstStyle/>
+          <a:p>
+            <a:r>
+              <a:rPr sz="2800">
+                <a:latin typeface="Noto Sans"/>
+              </a:rPr>
+              <a:t>参考文献</a:t>
+            </a:r>
+          </a:p>
+        </p:txBody>
+      </p:sp>
+      <p:sp>
+        <p:nvSpPr>
+          <p:cNvPr id="3" name="Title 2"/>
+          <p:cNvSpPr>
+            <a:spLocks noGrp="1"/>
+          </p:cNvSpPr>
+          <p:nvPr>
+            <p:ph type="title" idx="2"/>
+          </p:nvPr>
+        </p:nvSpPr>
+        <p:spPr/>
+        <p:txBody>
+          <a:bodyPr/>
+          <a:lstStyle/>
+          <a:p>
+            <a:r>
+              <a:rPr sz="1400" b="1">
+                <a:solidFill>
+                  <a:srgbClr val="FFFEF8"/>
+                </a:solidFill>
+                <a:latin typeface="Noto Sans"/>
+                <a:ea typeface="Noto Sans CJK JP"/>
+              </a:rPr>
+              <a:t>Appendix: 5 参考文献</a:t>
+            </a:r>
+          </a:p>
+        </p:txBody>
+      </p:sp>
+      <p:sp>
+        <p:nvSpPr>
+          <p:cNvPr id="4" name="TextBox 3"/>
+          <p:cNvSpPr txBox="1"/>
+          <p:nvPr/>
+        </p:nvSpPr>
+        <p:spPr>
+          <a:xfrm>
+            <a:off x="594360" y="1327691"/>
+            <a:ext cx="7955279" cy="842643"/>
+          </a:xfrm>
+          <a:prstGeom prst="rect">
+            <a:avLst/>
+          </a:prstGeom>
+          <a:noFill/>
+        </p:spPr>
+        <p:txBody>
+          <a:bodyPr wrap="square" anchor="t" lIns="0" rIns="0" tIns="0" bIns="0">
+            <a:spAutoFit/>
+          </a:bodyPr>
+          <a:lstStyle/>
+          <a:p>
+            <a:pPr>
+              <a:lnSpc>
+                <a:spcPct val="100000"/>
+              </a:lnSpc>
+              <a:spcBef>
+                <a:spcPts val="0"/>
+              </a:spcBef>
+              <a:spcAft>
+                <a:spcPts val="0"/>
+              </a:spcAft>
+              <a:buNone/>
+            </a:pPr>
+            <a:r>
+              <a:rPr sz="2200" b="1" lang="ja-JP">
+                <a:solidFill>
+                  <a:srgbClr val="303437"/>
+                </a:solidFill>
+                <a:latin typeface="Noto Sans"/>
+                <a:ea typeface="Noto Sans CJK JP"/>
+              </a:rPr>
+              <a:t>Adversarial NLI: A New Benchmark for Natural Language Understanding</a:t>
+            </a:r>
+          </a:p>
+        </p:txBody>
+      </p:sp>
+      <p:sp>
+        <p:nvSpPr>
+          <p:cNvPr id="5" name="TextBox 4"/>
+          <p:cNvSpPr txBox="1"/>
+          <p:nvPr/>
+        </p:nvSpPr>
+        <p:spPr>
+          <a:xfrm>
+            <a:off x="594360" y="2100753"/>
+            <a:ext cx="7955279" cy="395213"/>
+          </a:xfrm>
+          <a:prstGeom prst="rect">
+            <a:avLst/>
+          </a:prstGeom>
+          <a:noFill/>
+        </p:spPr>
+        <p:txBody>
+          <a:bodyPr wrap="square" anchor="t" lIns="0" rIns="0" tIns="0" bIns="0">
+            <a:spAutoFit/>
+          </a:bodyPr>
+          <a:lstStyle/>
+          <a:p>
+            <a:pPr>
+              <a:lnSpc>
+                <a:spcPct val="100000"/>
+              </a:lnSpc>
+              <a:spcBef>
+                <a:spcPts val="0"/>
+              </a:spcBef>
+              <a:spcAft>
+                <a:spcPts val="0"/>
+              </a:spcAft>
+              <a:buNone/>
+            </a:pPr>
+            <a:r>
+              <a:rPr sz="1550" b="0" lang="ja-JP">
+                <a:solidFill>
+                  <a:srgbClr val="303437"/>
+                </a:solidFill>
+                <a:latin typeface="Noto Sans"/>
+                <a:ea typeface="Noto Sans CJK JP"/>
+              </a:rPr>
+              <a:t>Nie, Y., Williams, A., Dinan, E., Bansal, M., Weston, J., &amp; Kiela, D. (2020). ACL.</a:t>
+            </a:r>
+          </a:p>
+        </p:txBody>
+      </p:sp>
+      <p:sp>
+        <p:nvSpPr>
+          <p:cNvPr id="6" name="TextBox 5"/>
+          <p:cNvSpPr txBox="1"/>
+          <p:nvPr/>
+        </p:nvSpPr>
+        <p:spPr>
+          <a:xfrm>
+            <a:off x="594360" y="2485529"/>
+            <a:ext cx="7955279" cy="799958"/>
+          </a:xfrm>
+          <a:prstGeom prst="rect">
+            <a:avLst/>
+          </a:prstGeom>
+          <a:noFill/>
+        </p:spPr>
+        <p:txBody>
+          <a:bodyPr wrap="square" anchor="t" lIns="0" rIns="0" tIns="0" bIns="0">
+            <a:spAutoFit/>
+          </a:bodyPr>
+          <a:lstStyle/>
+          <a:p>
+            <a:pPr>
+              <a:lnSpc>
+                <a:spcPct val="100000"/>
+              </a:lnSpc>
+              <a:spcBef>
+                <a:spcPts val="0"/>
+              </a:spcBef>
+              <a:spcAft>
+                <a:spcPts val="0"/>
+              </a:spcAft>
+              <a:buNone/>
+            </a:pPr>
+            <a:r>
+              <a:rPr sz="2000" b="0" lang="ja-JP">
+                <a:solidFill>
+                  <a:srgbClr val="303437"/>
+                </a:solidFill>
+                <a:latin typeface="Noto Sans"/>
+                <a:ea typeface="Noto Sans CJK JP"/>
+              </a:rPr>
+              <a:t>ANLIの原著論文。人がモデルを誤らせる文対を作る反復的なデータ収集を提案する。</a:t>
+            </a:r>
+          </a:p>
+        </p:txBody>
+      </p:sp>
+      <p:sp>
+        <p:nvSpPr>
+          <p:cNvPr id="7" name="TextBox 6"/>
+          <p:cNvSpPr txBox="1"/>
+          <p:nvPr/>
+        </p:nvSpPr>
+        <p:spPr>
+          <a:xfrm>
+            <a:off x="594360" y="3190946"/>
+            <a:ext cx="7955279" cy="317236"/>
+          </a:xfrm>
+          <a:prstGeom prst="rect">
+            <a:avLst/>
+          </a:prstGeom>
+          <a:noFill/>
+        </p:spPr>
+        <p:txBody>
+          <a:bodyPr wrap="square" anchor="t" lIns="0" rIns="0" tIns="0" bIns="0">
+            <a:spAutoFit/>
+          </a:bodyPr>
+          <a:lstStyle/>
+          <a:p>
+            <a:pPr>
+              <a:lnSpc>
+                <a:spcPct val="100000"/>
+              </a:lnSpc>
+              <a:spcBef>
+                <a:spcPts val="0"/>
+              </a:spcBef>
+              <a:spcAft>
+                <a:spcPts val="0"/>
+              </a:spcAft>
+              <a:buNone/>
+            </a:pPr>
+            <a:r>
+              <a:rPr sz="1100" b="0" lang="ja-JP">
+                <a:solidFill>
+                  <a:srgbClr val="626669"/>
+                </a:solidFill>
+                <a:latin typeface="Noto Sans"/>
+                <a:ea typeface="Noto Sans CJK JP"/>
+                <a:hlinkClick r:id="rId2"/>
+              </a:rPr>
+              <a:t>https://aclanthology.org/2020.acl-main.441/</a:t>
+            </a:r>
+          </a:p>
+        </p:txBody>
+      </p:sp>
+    </p:spTree>
+  </p:cSld>
+  <p:clrMapOvr>
+    <a:masterClrMapping/>
+  </p:clrMapOvr>
+</p:sld>
+</file>
+
+<file path=ppt/slides/slide64.xml><?xml version="1.0" encoding="utf-8"?>
+<p:sld xmlns:a="http://schemas.openxmlformats.org/drawingml/2006/main" xmlns:p="http://schemas.openxmlformats.org/presentationml/2006/main" xmlns:r="http://schemas.openxmlformats.org/officeDocument/2006/relationships">
+  <p:cSld>
+    <p:spTree>
+      <p:nvGrpSpPr>
+        <p:cNvPr id="1" name=""/>
+        <p:cNvGrpSpPr/>
+        <p:nvPr/>
+      </p:nvGrpSpPr>
+      <p:grpSpPr/>
+      <p:sp>
+        <p:nvSpPr>
+          <p:cNvPr id="2" name="Title 1"/>
+          <p:cNvSpPr>
+            <a:spLocks noGrp="1"/>
+          </p:cNvSpPr>
+          <p:nvPr>
+            <p:ph type="title"/>
+          </p:nvPr>
+        </p:nvSpPr>
+        <p:spPr/>
+        <p:txBody>
+          <a:bodyPr/>
+          <a:lstStyle/>
+          <a:p>
+            <a:r>
+              <a:rPr sz="2800">
+                <a:latin typeface="Noto Sans"/>
+              </a:rPr>
+              <a:t>参考文献</a:t>
+            </a:r>
+          </a:p>
+        </p:txBody>
+      </p:sp>
+      <p:sp>
+        <p:nvSpPr>
+          <p:cNvPr id="3" name="Title 2"/>
+          <p:cNvSpPr>
+            <a:spLocks noGrp="1"/>
+          </p:cNvSpPr>
+          <p:nvPr>
+            <p:ph type="title" idx="2"/>
+          </p:nvPr>
+        </p:nvSpPr>
+        <p:spPr/>
+        <p:txBody>
+          <a:bodyPr/>
+          <a:lstStyle/>
+          <a:p>
+            <a:r>
+              <a:rPr sz="1400" b="1">
+                <a:solidFill>
+                  <a:srgbClr val="FFFEF8"/>
+                </a:solidFill>
+                <a:latin typeface="Noto Sans"/>
+                <a:ea typeface="Noto Sans CJK JP"/>
+              </a:rPr>
+              <a:t>Appendix: 5 参考文献</a:t>
+            </a:r>
+          </a:p>
+        </p:txBody>
+      </p:sp>
+      <p:sp>
+        <p:nvSpPr>
+          <p:cNvPr id="4" name="TextBox 3"/>
+          <p:cNvSpPr txBox="1"/>
+          <p:nvPr/>
+        </p:nvSpPr>
+        <p:spPr>
+          <a:xfrm>
+            <a:off x="594360" y="1327691"/>
+            <a:ext cx="7955279" cy="842643"/>
+          </a:xfrm>
+          <a:prstGeom prst="rect">
+            <a:avLst/>
+          </a:prstGeom>
+          <a:noFill/>
+        </p:spPr>
+        <p:txBody>
+          <a:bodyPr wrap="square" anchor="t" lIns="0" rIns="0" tIns="0" bIns="0">
+            <a:spAutoFit/>
+          </a:bodyPr>
+          <a:lstStyle/>
+          <a:p>
+            <a:pPr>
+              <a:lnSpc>
+                <a:spcPct val="100000"/>
+              </a:lnSpc>
+              <a:spcBef>
+                <a:spcPts val="0"/>
+              </a:spcBef>
+              <a:spcAft>
+                <a:spcPts val="0"/>
+              </a:spcAft>
+              <a:buNone/>
+            </a:pPr>
+            <a:r>
+              <a:rPr sz="2200" b="1" lang="ja-JP">
+                <a:solidFill>
+                  <a:srgbClr val="303437"/>
+                </a:solidFill>
+                <a:latin typeface="Noto Sans"/>
+                <a:ea typeface="Noto Sans CJK JP"/>
+              </a:rPr>
+              <a:t>e-SNLI: Natural Language Inference with Natural Language Explanations</a:t>
+            </a:r>
+          </a:p>
+        </p:txBody>
+      </p:sp>
+      <p:sp>
+        <p:nvSpPr>
+          <p:cNvPr id="5" name="TextBox 4"/>
+          <p:cNvSpPr txBox="1"/>
+          <p:nvPr/>
+        </p:nvSpPr>
+        <p:spPr>
+          <a:xfrm>
+            <a:off x="594360" y="2100753"/>
+            <a:ext cx="7955279" cy="631369"/>
+          </a:xfrm>
+          <a:prstGeom prst="rect">
+            <a:avLst/>
+          </a:prstGeom>
+          <a:noFill/>
+        </p:spPr>
+        <p:txBody>
+          <a:bodyPr wrap="square" anchor="t" lIns="0" rIns="0" tIns="0" bIns="0">
+            <a:spAutoFit/>
+          </a:bodyPr>
+          <a:lstStyle/>
+          <a:p>
+            <a:pPr>
+              <a:lnSpc>
+                <a:spcPct val="100000"/>
+              </a:lnSpc>
+              <a:spcBef>
+                <a:spcPts val="0"/>
+              </a:spcBef>
+              <a:spcAft>
+                <a:spcPts val="0"/>
+              </a:spcAft>
+              <a:buNone/>
+            </a:pPr>
+            <a:r>
+              <a:rPr sz="1550" b="0" lang="ja-JP">
+                <a:solidFill>
+                  <a:srgbClr val="303437"/>
+                </a:solidFill>
+                <a:latin typeface="Noto Sans"/>
+                <a:ea typeface="Noto Sans CJK JP"/>
+              </a:rPr>
+              <a:t>Camburu, O.-M., Rocktäschel, T., Lukasiewicz, T., &amp; Blunsom, P. (2018). Advances in Neural Information Processing Systems, 31, pp. 9539–9549.</a:t>
+            </a:r>
+          </a:p>
+        </p:txBody>
+      </p:sp>
+      <p:sp>
+        <p:nvSpPr>
+          <p:cNvPr id="6" name="TextBox 5"/>
+          <p:cNvSpPr txBox="1"/>
+          <p:nvPr/>
+        </p:nvSpPr>
+        <p:spPr>
+          <a:xfrm>
+            <a:off x="594360" y="2721686"/>
+            <a:ext cx="7955279" cy="799958"/>
+          </a:xfrm>
+          <a:prstGeom prst="rect">
+            <a:avLst/>
+          </a:prstGeom>
+          <a:noFill/>
+        </p:spPr>
+        <p:txBody>
+          <a:bodyPr wrap="square" anchor="t" lIns="0" rIns="0" tIns="0" bIns="0">
+            <a:spAutoFit/>
+          </a:bodyPr>
+          <a:lstStyle/>
+          <a:p>
+            <a:pPr>
+              <a:lnSpc>
+                <a:spcPct val="100000"/>
+              </a:lnSpc>
+              <a:spcBef>
+                <a:spcPts val="0"/>
+              </a:spcBef>
+              <a:spcAft>
+                <a:spcPts val="0"/>
+              </a:spcAft>
+              <a:buNone/>
+            </a:pPr>
+            <a:r>
+              <a:rPr sz="2000" b="0" lang="ja-JP">
+                <a:solidFill>
+                  <a:srgbClr val="303437"/>
+                </a:solidFill>
+                <a:latin typeface="Noto Sans"/>
+                <a:ea typeface="Noto Sans CJK JP"/>
+              </a:rPr>
+              <a:t>SNLIに自然言語の説明を追加した論文。関係ラベルに加えて、その判断理由を収録する。</a:t>
+            </a:r>
+          </a:p>
+        </p:txBody>
+      </p:sp>
+      <p:sp>
+        <p:nvSpPr>
+          <p:cNvPr id="7" name="TextBox 6"/>
+          <p:cNvSpPr txBox="1"/>
+          <p:nvPr/>
+        </p:nvSpPr>
+        <p:spPr>
+          <a:xfrm>
+            <a:off x="594360" y="3427102"/>
+            <a:ext cx="7955279" cy="317236"/>
+          </a:xfrm>
+          <a:prstGeom prst="rect">
+            <a:avLst/>
+          </a:prstGeom>
+          <a:noFill/>
+        </p:spPr>
+        <p:txBody>
+          <a:bodyPr wrap="square" anchor="t" lIns="0" rIns="0" tIns="0" bIns="0">
+            <a:spAutoFit/>
+          </a:bodyPr>
+          <a:lstStyle/>
+          <a:p>
+            <a:pPr>
+              <a:lnSpc>
+                <a:spcPct val="100000"/>
+              </a:lnSpc>
+              <a:spcBef>
+                <a:spcPts val="0"/>
+              </a:spcBef>
+              <a:spcAft>
+                <a:spcPts val="0"/>
+              </a:spcAft>
+              <a:buNone/>
+            </a:pPr>
+            <a:r>
+              <a:rPr sz="1100" b="0" lang="ja-JP">
+                <a:solidFill>
+                  <a:srgbClr val="626669"/>
+                </a:solidFill>
+                <a:latin typeface="Noto Sans"/>
+                <a:ea typeface="Noto Sans CJK JP"/>
+                <a:hlinkClick r:id="rId2"/>
               </a:rPr>
               <a:t>https://github.com/OanaMariaCamburu/e-SNLI</a:t>
             </a:r>

--- a/slides/datasets-in-10-minutes-snli.pptx
+++ b/slides/datasets-in-10-minutes-snli.pptx
@@ -7378,7 +7378,7 @@
                 <a:ea typeface="Noto Sans CJK JP"/>
                 <a:cs typeface="Noto Sans"/>
               </a:rPr>
-              <a:t>1 SNLIの文対と3つの推論関係</a:t>
+              <a:t>1. SNLIの文対と3つの推論関係</a:t>
             </a:r>
             <a:endParaRPr sz="1400" lang="ja-JP">
               <a:latin typeface="Noto Sans"/>
@@ -7981,7 +7981,7 @@
                 <a:ea typeface="Noto Sans CJK JP"/>
                 <a:cs typeface="Noto Sans"/>
               </a:rPr>
-              <a:t>2 文対の作成方法と収録規模</a:t>
+              <a:t>2. 文対の作成方法と収録規模</a:t>
             </a:r>
             <a:endParaRPr sz="4000" lang="ja-JP">
               <a:latin typeface="Noto Sans"/>
@@ -8026,7 +8026,7 @@
                 <a:ea typeface="Noto Sans CJK JP"/>
                 <a:cs typeface="Noto Sans"/>
               </a:rPr>
-              <a:t>2 文対の作成方法と収録規模</a:t>
+              <a:t>2. 文対の作成方法と収録規模</a:t>
             </a:r>
           </a:p>
         </p:txBody>
@@ -8156,7 +8156,7 @@
                 <a:ea typeface="Noto Sans CJK JP"/>
                 <a:cs typeface="Noto Sans"/>
               </a:rPr>
-              <a:t>2 文対の作成方法と収録規模</a:t>
+              <a:t>2. 文対の作成方法と収録規模</a:t>
             </a:r>
             <a:endParaRPr sz="1400" lang="ja-JP">
               <a:latin typeface="Noto Sans"/>
@@ -8715,7 +8715,7 @@
                 <a:ea typeface="Noto Sans CJK JP"/>
                 <a:cs typeface="Noto Sans"/>
               </a:rPr>
-              <a:t>2 文対の作成方法と収録規模</a:t>
+              <a:t>2. 文対の作成方法と収録規模</a:t>
             </a:r>
             <a:endParaRPr sz="1400" lang="ja-JP">
               <a:latin typeface="Noto Sans"/>
@@ -9097,7 +9097,7 @@
                 <a:ea typeface="Noto Sans CJK JP"/>
                 <a:cs typeface="Noto Sans"/>
               </a:rPr>
-              <a:t>2 文対の作成方法と収録規模</a:t>
+              <a:t>2. 文対の作成方法と収録規模</a:t>
             </a:r>
             <a:endParaRPr sz="1400" lang="ja-JP">
               <a:latin typeface="Noto Sans"/>
@@ -9460,7 +9460,7 @@
                 <a:ea typeface="Noto Sans CJK JP"/>
                 <a:cs typeface="Noto Sans"/>
               </a:rPr>
-              <a:t>2 文対の作成方法と収録規模</a:t>
+              <a:t>2. 文対の作成方法と収録規模</a:t>
             </a:r>
           </a:p>
         </p:txBody>
@@ -10431,7 +10431,7 @@
                 <a:ea typeface="Noto Sans CJK JP"/>
                 <a:cs typeface="Noto Sans"/>
               </a:rPr>
-              <a:t>2 文対の作成方法と収録規模</a:t>
+              <a:t>2. 文対の作成方法と収録規模</a:t>
             </a:r>
             <a:endParaRPr sz="1400" lang="ja-JP">
               <a:latin typeface="Noto Sans"/>
@@ -10883,7 +10883,7 @@
                 <a:ea typeface="Noto Sans CJK JP"/>
                 <a:cs typeface="Noto Sans"/>
               </a:rPr>
-              <a:t>2 文対の作成方法と収録規模</a:t>
+              <a:t>2. 文対の作成方法と収録規模</a:t>
             </a:r>
             <a:endParaRPr sz="1400" lang="ja-JP">
               <a:latin typeface="Noto Sans"/>
@@ -12119,7 +12119,7 @@
                 <a:ea typeface="Noto Sans CJK JP"/>
                 <a:cs typeface="Noto Sans"/>
               </a:rPr>
-              <a:t>2 文対の作成方法と収録規模</a:t>
+              <a:t>2. 文対の作成方法と収録規模</a:t>
             </a:r>
             <a:endParaRPr sz="1400" lang="ja-JP">
               <a:latin typeface="Noto Sans"/>
@@ -13154,7 +13154,7 @@
                 <a:ea typeface="Noto Sans CJK JP"/>
                 <a:cs typeface="Noto Sans"/>
               </a:rPr>
-              <a:t>2 文対の作成方法と収録規模</a:t>
+              <a:t>2. 文対の作成方法と収録規模</a:t>
             </a:r>
           </a:p>
         </p:txBody>
@@ -13806,7 +13806,7 @@
                 <a:ea typeface="Noto Sans CJK JP"/>
                 <a:cs typeface="Noto Sans"/>
               </a:rPr>
-              <a:t>2 文対の作成方法と収録規模</a:t>
+              <a:t>2. 文対の作成方法と収録規模</a:t>
             </a:r>
             <a:endParaRPr sz="1400" lang="ja-JP">
               <a:latin typeface="Noto Sans"/>
@@ -14117,7 +14117,7 @@
                 <a:ea typeface="Noto Sans CJK JP"/>
                 <a:cs typeface="Noto Sans"/>
               </a:rPr>
-              <a:t>2 文対の作成方法と収録規模</a:t>
+              <a:t>2. 文対の作成方法と収録規模</a:t>
             </a:r>
             <a:endParaRPr sz="1400" lang="ja-JP">
               <a:latin typeface="Noto Sans"/>
@@ -14542,7 +14542,7 @@
                 <a:ea typeface="Noto Sans CJK JP"/>
                 <a:cs typeface="Noto Sans"/>
               </a:rPr>
-              <a:t>2 文対の作成方法と収録規模</a:t>
+              <a:t>2. 文対の作成方法と収録規模</a:t>
             </a:r>
           </a:p>
         </p:txBody>
@@ -14787,7 +14787,7 @@
                 <a:ea typeface="Noto Sans CJK JP"/>
                 <a:cs typeface="Noto Sans"/>
               </a:rPr>
-              <a:t>3 自然言語推論の評価とモデル性能</a:t>
+              <a:t>3. 自然言語推論の評価とモデル性能</a:t>
             </a:r>
             <a:endParaRPr sz="4000" lang="ja-JP">
               <a:latin typeface="Noto Sans"/>
@@ -14832,7 +14832,7 @@
                 <a:ea typeface="Noto Sans CJK JP"/>
                 <a:cs typeface="Noto Sans"/>
               </a:rPr>
-              <a:t>3 自然言語推論の評価とモデル性能</a:t>
+              <a:t>3. 自然言語推論の評価とモデル性能</a:t>
             </a:r>
           </a:p>
         </p:txBody>
@@ -14943,7 +14943,7 @@
                 <a:ea typeface="Noto Sans CJK JP"/>
                 <a:cs typeface="Noto Sans"/>
               </a:rPr>
-              <a:t>3 自然言語推論の評価とモデル性能</a:t>
+              <a:t>3. 自然言語推論の評価とモデル性能</a:t>
             </a:r>
           </a:p>
         </p:txBody>
@@ -15853,7 +15853,7 @@
                 <a:ea typeface="Noto Sans CJK JP"/>
                 <a:cs typeface="Noto Sans"/>
               </a:rPr>
-              <a:t>3 自然言語推論の評価とモデル性能</a:t>
+              <a:t>3. 自然言語推論の評価とモデル性能</a:t>
             </a:r>
             <a:endParaRPr sz="1400" lang="ja-JP">
               <a:latin typeface="Noto Sans"/>
@@ -16166,7 +16166,7 @@
                 <a:ea typeface="Noto Sans CJK JP"/>
                 <a:cs typeface="Noto Sans"/>
               </a:rPr>
-              <a:t>3 自然言語推論の評価とモデル性能</a:t>
+              <a:t>3. 自然言語推論の評価とモデル性能</a:t>
             </a:r>
           </a:p>
         </p:txBody>
@@ -16678,7 +16678,7 @@
                 <a:ea typeface="Noto Sans CJK JP"/>
                 <a:cs typeface="Noto Sans"/>
               </a:rPr>
-              <a:t>3 自然言語推論の評価とモデル性能</a:t>
+              <a:t>3. 自然言語推論の評価とモデル性能</a:t>
             </a:r>
             <a:endParaRPr sz="1400" lang="ja-JP">
               <a:latin typeface="Noto Sans"/>
@@ -17532,7 +17532,7 @@
                 <a:ea typeface="Noto Sans CJK JP"/>
                 <a:cs typeface="Noto Sans"/>
               </a:rPr>
-              <a:t>3 自然言語推論の評価とモデル性能</a:t>
+              <a:t>3. 自然言語推論の評価とモデル性能</a:t>
             </a:r>
             <a:endParaRPr sz="1400" lang="ja-JP">
               <a:latin typeface="Noto Sans"/>
@@ -18472,7 +18472,7 @@
                 <a:ea typeface="Noto Sans CJK JP"/>
                 <a:cs typeface="Noto Sans"/>
               </a:rPr>
-              <a:t>3 自然言語推論の評価とモデル性能</a:t>
+              <a:t>3. 自然言語推論の評価とモデル性能</a:t>
             </a:r>
             <a:endParaRPr sz="1400" lang="ja-JP">
               <a:latin typeface="Noto Sans"/>
@@ -18923,7 +18923,7 @@
                 <a:ea typeface="Noto Sans CJK JP"/>
                 <a:cs typeface="Noto Sans"/>
               </a:rPr>
-              <a:t>1 SNLIの文対と3つの推論関係</a:t>
+              <a:t>1. SNLIの文対と3つの推論関係</a:t>
             </a:r>
             <a:endParaRPr sz="4000" lang="ja-JP">
               <a:latin typeface="Noto Sans"/>
@@ -18968,7 +18968,7 @@
                 <a:ea typeface="Noto Sans CJK JP"/>
                 <a:cs typeface="Noto Sans"/>
               </a:rPr>
-              <a:t>1 SNLIの文対と3つの推論関係</a:t>
+              <a:t>1. SNLIの文対と3つの推論関係</a:t>
             </a:r>
           </a:p>
         </p:txBody>
@@ -19037,7 +19037,7 @@
                 <a:ea typeface="Noto Sans CJK JP"/>
                 <a:cs typeface="Noto Sans"/>
               </a:rPr>
-              <a:t>4 SNLIの利用動向と後続データ</a:t>
+              <a:t>4. SNLIの利用動向と後続データ</a:t>
             </a:r>
             <a:endParaRPr sz="4000" lang="ja-JP">
               <a:latin typeface="Noto Sans"/>
@@ -19082,7 +19082,7 @@
                 <a:ea typeface="Noto Sans CJK JP"/>
                 <a:cs typeface="Noto Sans"/>
               </a:rPr>
-              <a:t>4 SNLIの利用動向と後続データ</a:t>
+              <a:t>4. SNLIの利用動向と後続データ</a:t>
             </a:r>
           </a:p>
         </p:txBody>
@@ -19212,7 +19212,7 @@
                 <a:ea typeface="Noto Sans CJK JP"/>
                 <a:cs typeface="Noto Sans"/>
               </a:rPr>
-              <a:t>4 SNLIの利用動向と後続データ</a:t>
+              <a:t>4. SNLIの利用動向と後続データ</a:t>
             </a:r>
             <a:endParaRPr sz="1400" lang="ja-JP">
               <a:latin typeface="Noto Sans"/>
@@ -19718,7 +19718,7 @@
                 <a:ea typeface="Noto Sans CJK JP"/>
                 <a:cs typeface="Noto Sans"/>
               </a:rPr>
-              <a:t>4 SNLIの利用動向と後続データ</a:t>
+              <a:t>4. SNLIの利用動向と後続データ</a:t>
             </a:r>
             <a:endParaRPr sz="1400" lang="ja-JP">
               <a:latin typeface="Noto Sans"/>
@@ -20081,7 +20081,7 @@
                 <a:ea typeface="Noto Sans CJK JP"/>
                 <a:cs typeface="Noto Sans"/>
               </a:rPr>
-              <a:t>4 SNLIの利用動向と後続データ</a:t>
+              <a:t>4. SNLIの利用動向と後続データ</a:t>
             </a:r>
           </a:p>
         </p:txBody>
@@ -20389,7 +20389,7 @@
                 <a:ea typeface="Noto Sans CJK JP"/>
                 <a:cs typeface="Noto Sans"/>
               </a:rPr>
-              <a:t>4 SNLIの利用動向と後続データ</a:t>
+              <a:t>4. SNLIの利用動向と後続データ</a:t>
             </a:r>
           </a:p>
         </p:txBody>
@@ -20716,7 +20716,7 @@
                 <a:ea typeface="Noto Sans CJK JP"/>
                 <a:cs typeface="Noto Sans"/>
               </a:rPr>
-              <a:t>4 SNLIの利用動向と後続データ</a:t>
+              <a:t>4. SNLIの利用動向と後続データ</a:t>
             </a:r>
             <a:endParaRPr sz="1400" lang="ja-JP">
               <a:latin typeface="Noto Sans"/>
@@ -20987,7 +20987,7 @@
                 <a:ea typeface="Noto Sans CJK JP"/>
                 <a:cs typeface="Noto Sans"/>
               </a:rPr>
-              <a:t>5 文対データの入手方法と利用条件</a:t>
+              <a:t>5. 文対データの入手方法と利用条件</a:t>
             </a:r>
             <a:endParaRPr sz="4000" lang="ja-JP">
               <a:latin typeface="Noto Sans"/>
@@ -21032,7 +21032,7 @@
                 <a:ea typeface="Noto Sans CJK JP"/>
                 <a:cs typeface="Noto Sans"/>
               </a:rPr>
-              <a:t>5 文対データの入手方法と利用条件</a:t>
+              <a:t>5. 文対データの入手方法と利用条件</a:t>
             </a:r>
           </a:p>
         </p:txBody>
@@ -21143,7 +21143,7 @@
                 <a:ea typeface="Noto Sans CJK JP"/>
                 <a:cs typeface="Noto Sans"/>
               </a:rPr>
-              <a:t>5 文対データの入手方法と利用条件</a:t>
+              <a:t>5. 文対データの入手方法と利用条件</a:t>
             </a:r>
           </a:p>
         </p:txBody>
@@ -21545,7 +21545,7 @@
                 <a:ea typeface="Noto Sans CJK JP"/>
                 <a:cs typeface="Noto Sans"/>
               </a:rPr>
-              <a:t>5 文対データの入手方法と利用条件</a:t>
+              <a:t>5. 文対データの入手方法と利用条件</a:t>
             </a:r>
           </a:p>
         </p:txBody>
@@ -21872,7 +21872,7 @@
                 <a:ea typeface="Noto Sans CJK JP"/>
                 <a:cs typeface="Noto Sans"/>
               </a:rPr>
-              <a:t>5 文対データの入手方法と利用条件</a:t>
+              <a:t>5. 文対データの入手方法と利用条件</a:t>
             </a:r>
             <a:endParaRPr sz="1400" lang="ja-JP">
               <a:latin typeface="Noto Sans"/>
@@ -22419,7 +22419,7 @@
                 <a:ea typeface="Noto Sans CJK JP"/>
                 <a:cs typeface="Noto Sans"/>
               </a:rPr>
-              <a:t>1 SNLIの文対と3つの推論関係</a:t>
+              <a:t>1. SNLIの文対と3つの推論関係</a:t>
             </a:r>
             <a:endParaRPr sz="1400" lang="ja-JP">
               <a:latin typeface="Noto Sans"/>
@@ -22645,7 +22645,7 @@
                 <a:ea typeface="Noto Sans CJK JP"/>
                 <a:cs typeface="Noto Sans"/>
               </a:rPr>
-              <a:t>5 文対データの入手方法と利用条件</a:t>
+              <a:t>5. 文対データの入手方法と利用条件</a:t>
             </a:r>
             <a:endParaRPr sz="1400" lang="ja-JP">
               <a:latin typeface="Noto Sans"/>
@@ -23394,7 +23394,7 @@
                 <a:ea typeface="Noto Sans CJK JP"/>
                 <a:cs typeface="Noto Sans"/>
               </a:rPr>
-              <a:t>Appendix: 1 開発者の研究と発表先</a:t>
+              <a:t>Appendix: 1. 開発者の研究と発表先</a:t>
             </a:r>
             <a:endParaRPr sz="1400" lang="ja-JP">
               <a:latin typeface="Noto Sans"/>
@@ -24159,7 +24159,7 @@
                 <a:ea typeface="Noto Sans CJK JP"/>
                 <a:cs typeface="Noto Sans"/>
               </a:rPr>
-              <a:t>Appendix: 2 前提・仮説と推論ラベルの追加例</a:t>
+              <a:t>Appendix: 2. 前提・仮説と推論ラベルの追加例</a:t>
             </a:r>
             <a:endParaRPr sz="1400" lang="ja-JP">
               <a:latin typeface="Noto Sans"/>
@@ -24823,7 +24823,7 @@
                 <a:ea typeface="Noto Sans CJK JP"/>
                 <a:cs typeface="Noto Sans"/>
               </a:rPr>
-              <a:t>Appendix: 2 前提・仮説と推論ラベルの追加例</a:t>
+              <a:t>Appendix: 2. 前提・仮説と推論ラベルの追加例</a:t>
             </a:r>
             <a:endParaRPr sz="1400" lang="ja-JP">
               <a:latin typeface="Noto Sans"/>
@@ -25487,7 +25487,7 @@
                 <a:ea typeface="Noto Sans CJK JP"/>
                 <a:cs typeface="Noto Sans"/>
               </a:rPr>
-              <a:t>Appendix: 2 前提・仮説と推論ラベルの追加例</a:t>
+              <a:t>Appendix: 2. 前提・仮説と推論ラベルの追加例</a:t>
             </a:r>
             <a:endParaRPr sz="1400" lang="ja-JP">
               <a:latin typeface="Noto Sans"/>
@@ -26151,7 +26151,7 @@
                 <a:ea typeface="Noto Sans CJK JP"/>
                 <a:cs typeface="Noto Sans"/>
               </a:rPr>
-              <a:t>Appendix: 2 前提・仮説と推論ラベルの追加例</a:t>
+              <a:t>Appendix: 2. 前提・仮説と推論ラベルの追加例</a:t>
             </a:r>
             <a:endParaRPr sz="1400" lang="ja-JP">
               <a:latin typeface="Noto Sans"/>
@@ -26815,7 +26815,7 @@
                 <a:ea typeface="Noto Sans CJK JP"/>
                 <a:cs typeface="Noto Sans"/>
               </a:rPr>
-              <a:t>Appendix: 2 前提・仮説と推論ラベルの追加例</a:t>
+              <a:t>Appendix: 2. 前提・仮説と推論ラベルの追加例</a:t>
             </a:r>
             <a:endParaRPr sz="1400" lang="ja-JP">
               <a:latin typeface="Noto Sans"/>
@@ -27479,7 +27479,7 @@
                 <a:ea typeface="Noto Sans CJK JP"/>
                 <a:cs typeface="Noto Sans"/>
               </a:rPr>
-              <a:t>Appendix: 2 前提・仮説と推論ラベルの追加例</a:t>
+              <a:t>Appendix: 2. 前提・仮説と推論ラベルの追加例</a:t>
             </a:r>
             <a:endParaRPr sz="1400" lang="ja-JP">
               <a:latin typeface="Noto Sans"/>
@@ -28142,7 +28142,7 @@
                 <a:ea typeface="Noto Sans CJK JP"/>
                 <a:cs typeface="Noto Sans"/>
               </a:rPr>
-              <a:t>1 SNLIの文対と3つの推論関係</a:t>
+              <a:t>1. SNLIの文対と3つの推論関係</a:t>
             </a:r>
             <a:endParaRPr sz="1400" lang="ja-JP">
               <a:latin typeface="Noto Sans"/>
@@ -28524,7 +28524,7 @@
                 <a:ea typeface="Noto Sans CJK JP"/>
                 <a:cs typeface="Noto Sans"/>
               </a:rPr>
-              <a:t>Appendix: 2 前提・仮説と推論ラベルの追加例</a:t>
+              <a:t>Appendix: 2. 前提・仮説と推論ラベルの追加例</a:t>
             </a:r>
             <a:endParaRPr sz="1400" lang="ja-JP">
               <a:latin typeface="Noto Sans"/>
@@ -29188,7 +29188,7 @@
                 <a:ea typeface="Noto Sans CJK JP"/>
                 <a:cs typeface="Noto Sans"/>
               </a:rPr>
-              <a:t>Appendix: 2 前提・仮説と推論ラベルの追加例</a:t>
+              <a:t>Appendix: 2. 前提・仮説と推論ラベルの追加例</a:t>
             </a:r>
             <a:endParaRPr sz="1400" lang="ja-JP">
               <a:latin typeface="Noto Sans"/>
@@ -29852,7 +29852,7 @@
                 <a:ea typeface="Noto Sans CJK JP"/>
                 <a:cs typeface="Noto Sans"/>
               </a:rPr>
-              <a:t>Appendix: 2 前提・仮説と推論ラベルの追加例</a:t>
+              <a:t>Appendix: 2. 前提・仮説と推論ラベルの追加例</a:t>
             </a:r>
             <a:endParaRPr sz="1400" lang="ja-JP">
               <a:latin typeface="Noto Sans"/>
@@ -30516,7 +30516,7 @@
                 <a:ea typeface="Noto Sans CJK JP"/>
                 <a:cs typeface="Noto Sans"/>
               </a:rPr>
-              <a:t>Appendix: 2 前提・仮説と推論ラベルの追加例</a:t>
+              <a:t>Appendix: 2. 前提・仮説と推論ラベルの追加例</a:t>
             </a:r>
             <a:endParaRPr sz="1400" lang="ja-JP">
               <a:latin typeface="Noto Sans"/>
@@ -31180,7 +31180,7 @@
                 <a:ea typeface="Noto Sans CJK JP"/>
                 <a:cs typeface="Noto Sans"/>
               </a:rPr>
-              <a:t>Appendix: 3 データの件数と集計条件</a:t>
+              <a:t>Appendix: 3. データの件数と集計条件</a:t>
             </a:r>
             <a:endParaRPr sz="1400" lang="ja-JP">
               <a:latin typeface="Noto Sans"/>
@@ -31600,7 +31600,7 @@
                 <a:ea typeface="Noto Sans CJK JP"/>
                 <a:cs typeface="Noto Sans"/>
               </a:rPr>
-              <a:t>Appendix: 3 データの件数と集計条件</a:t>
+              <a:t>Appendix: 3. データの件数と集計条件</a:t>
             </a:r>
             <a:endParaRPr sz="1400" lang="ja-JP">
               <a:latin typeface="Noto Sans"/>
@@ -33160,7 +33160,7 @@
                 <a:ea typeface="Noto Sans CJK JP"/>
                 <a:cs typeface="Noto Sans"/>
               </a:rPr>
-              <a:t>Appendix: 3 文の長さの統計</a:t>
+              <a:t>Appendix: 3. 文の長さの統計</a:t>
             </a:r>
             <a:endParaRPr sz="1400" lang="ja-JP">
               <a:latin typeface="Noto Sans"/>
@@ -35226,7 +35226,7 @@
                 <a:ea typeface="Noto Sans CJK JP"/>
                 <a:cs typeface="Noto Sans"/>
               </a:rPr>
-              <a:t>Appendix: 3 文の長さの統計</a:t>
+              <a:t>Appendix: 3. 文の長さの統計</a:t>
             </a:r>
             <a:endParaRPr sz="1400" lang="ja-JP">
               <a:latin typeface="Noto Sans"/>
@@ -37292,7 +37292,7 @@
                 <a:ea typeface="Noto Sans CJK JP"/>
                 <a:cs typeface="Noto Sans"/>
               </a:rPr>
-              <a:t>Appendix: 3 前提文の長さ</a:t>
+              <a:t>Appendix: 3. 前提文の長さ</a:t>
             </a:r>
             <a:endParaRPr sz="1400" lang="ja-JP">
               <a:latin typeface="Noto Sans"/>
@@ -37603,7 +37603,7 @@
                 <a:ea typeface="Noto Sans CJK JP"/>
                 <a:cs typeface="Noto Sans"/>
               </a:rPr>
-              <a:t>Appendix: 3 前提文の長さ</a:t>
+              <a:t>Appendix: 3. 前提文の長さ</a:t>
             </a:r>
             <a:endParaRPr sz="1400" lang="ja-JP">
               <a:latin typeface="Noto Sans"/>
@@ -39416,7 +39416,7 @@
                 <a:ea typeface="Noto Sans CJK JP"/>
                 <a:cs typeface="Noto Sans"/>
               </a:rPr>
-              <a:t>1 SNLIの文対と3つの推論関係</a:t>
+              <a:t>1. SNLIの文対と3つの推論関係</a:t>
             </a:r>
             <a:endParaRPr sz="1400" lang="ja-JP">
               <a:latin typeface="Noto Sans"/>
@@ -40080,7 +40080,7 @@
                 <a:ea typeface="Noto Sans CJK JP"/>
                 <a:cs typeface="Noto Sans"/>
               </a:rPr>
-              <a:t>Appendix: 3 仮説文の長さ</a:t>
+              <a:t>Appendix: 3. 仮説文の長さ</a:t>
             </a:r>
             <a:endParaRPr sz="1400" lang="ja-JP">
               <a:latin typeface="Noto Sans"/>
@@ -40391,7 +40391,7 @@
                 <a:ea typeface="Noto Sans CJK JP"/>
                 <a:cs typeface="Noto Sans"/>
               </a:rPr>
-              <a:t>Appendix: 3 仮説文の長さ</a:t>
+              <a:t>Appendix: 3. 仮説文の長さ</a:t>
             </a:r>
             <a:endParaRPr sz="1400" lang="ja-JP">
               <a:latin typeface="Noto Sans"/>
@@ -42204,7 +42204,7 @@
                 <a:ea typeface="Noto Sans CJK JP"/>
                 <a:cs typeface="Noto Sans"/>
               </a:rPr>
-              <a:t>Appendix: 3 仮説文の長さ</a:t>
+              <a:t>Appendix: 3. 仮説文の長さ</a:t>
             </a:r>
             <a:endParaRPr sz="1400" lang="ja-JP">
               <a:latin typeface="Noto Sans"/>
@@ -42644,7 +42644,7 @@
                 <a:ea typeface="Noto Sans CJK JP"/>
                 <a:cs typeface="Noto Sans"/>
               </a:rPr>
-              <a:t>Appendix: 3 仮説文の長さ</a:t>
+              <a:t>Appendix: 3. 仮説文の長さ</a:t>
             </a:r>
             <a:endParaRPr sz="1400" lang="ja-JP">
               <a:latin typeface="Noto Sans"/>
@@ -43083,7 +43083,7 @@
                 <a:ea typeface="Noto Sans CJK JP"/>
                 <a:cs typeface="Noto Sans"/>
               </a:rPr>
-              <a:t>Appendix: 3 仮説文の長さ</a:t>
+              <a:t>Appendix: 3. 仮説文の長さ</a:t>
             </a:r>
             <a:endParaRPr sz="1400" lang="ja-JP">
               <a:latin typeface="Noto Sans"/>
@@ -43522,7 +43522,7 @@
                 <a:ea typeface="Noto Sans CJK JP"/>
                 <a:cs typeface="Noto Sans"/>
               </a:rPr>
-              <a:t>Appendix: 4 モデル評価の補足</a:t>
+              <a:t>Appendix: 4. モデル評価の補足</a:t>
             </a:r>
             <a:endParaRPr sz="1400" lang="ja-JP">
               <a:latin typeface="Noto Sans"/>
@@ -44248,7 +44248,7 @@
                 <a:ea typeface="Noto Sans CJK JP"/>
                 <a:cs typeface="Noto Sans"/>
               </a:rPr>
-              <a:t>Appendix: 4 入手方法の補足</a:t>
+              <a:t>Appendix: 4. 入手方法の補足</a:t>
             </a:r>
             <a:endParaRPr sz="1400" lang="ja-JP">
               <a:latin typeface="Noto Sans"/>
@@ -44897,7 +44897,7 @@
                 <a:ea typeface="Noto Sans CJK JP"/>
                 <a:cs typeface="Noto Sans"/>
               </a:rPr>
-              <a:t>Appendix: 4 作成方法の補足</a:t>
+              <a:t>Appendix: 4. 作成方法の補足</a:t>
             </a:r>
             <a:endParaRPr sz="1400" lang="ja-JP">
               <a:latin typeface="Noto Sans"/>
@@ -45320,7 +45320,7 @@
                 <a:ea typeface="Noto Sans CJK JP"/>
                 <a:cs typeface="Noto Sans"/>
               </a:rPr>
-              <a:t>Appendix: 5 自然言語推論の関連文献</a:t>
+              <a:t>Appendix: 5. 自然言語推論の関連文献</a:t>
             </a:r>
           </a:p>
         </p:txBody>
@@ -45824,7 +45824,7 @@
                 <a:ea typeface="Noto Sans CJK JP"/>
                 <a:cs typeface="Noto Sans"/>
               </a:rPr>
-              <a:t>Appendix: 5 自然言語推論の関連文献</a:t>
+              <a:t>Appendix: 5. 自然言語推論の関連文献</a:t>
             </a:r>
           </a:p>
         </p:txBody>
@@ -46375,7 +46375,7 @@
                 <a:ea typeface="Noto Sans CJK JP"/>
                 <a:cs typeface="Noto Sans"/>
               </a:rPr>
-              <a:t>1 SNLIの文対と3つの推論関係</a:t>
+              <a:t>1. SNLIの文対と3つの推論関係</a:t>
             </a:r>
             <a:endParaRPr sz="1400" lang="ja-JP">
               <a:latin typeface="Noto Sans"/>
@@ -46992,7 +46992,7 @@
                 <a:ea typeface="Noto Sans CJK JP"/>
                 <a:cs typeface="Noto Sans"/>
               </a:rPr>
-              <a:t>Appendix: 5 自然言語推論の関連文献</a:t>
+              <a:t>Appendix: 5. 自然言語推論の関連文献</a:t>
             </a:r>
           </a:p>
         </p:txBody>
@@ -47496,7 +47496,7 @@
                 <a:ea typeface="Noto Sans CJK JP"/>
                 <a:cs typeface="Noto Sans"/>
               </a:rPr>
-              <a:t>Appendix: 5 自然言語推論の関連文献</a:t>
+              <a:t>Appendix: 5. 自然言語推論の関連文献</a:t>
             </a:r>
           </a:p>
         </p:txBody>
@@ -48000,7 +48000,7 @@
                 <a:ea typeface="Noto Sans CJK JP"/>
                 <a:cs typeface="Noto Sans"/>
               </a:rPr>
-              <a:t>Appendix: 5 自然言語推論の関連文献</a:t>
+              <a:t>Appendix: 5. 自然言語推論の関連文献</a:t>
             </a:r>
           </a:p>
         </p:txBody>
@@ -48319,7 +48319,7 @@
                 <a:ea typeface="Noto Sans CJK JP"/>
                 <a:cs typeface="Noto Sans"/>
               </a:rPr>
-              <a:t>1 SNLIの文対と3つの推論関係</a:t>
+              <a:t>1. SNLIの文対と3つの推論関係</a:t>
             </a:r>
             <a:endParaRPr sz="1400" lang="ja-JP">
               <a:latin typeface="Noto Sans"/>
@@ -48964,7 +48964,7 @@
                 <a:ea typeface="Noto Sans CJK JP"/>
                 <a:cs typeface="Noto Sans"/>
               </a:rPr>
-              <a:t>1 SNLIの文対と3つの推論関係</a:t>
+              <a:t>1. SNLIの文対と3つの推論関係</a:t>
             </a:r>
           </a:p>
         </p:txBody>

--- a/slides/datasets-in-10-minutes-snli.pptx
+++ b/slides/datasets-in-10-minutes-snli.pptx
@@ -30,9 +30,9 @@
     <p:sldId id="310" r:id="rId61"/>
     <p:sldId id="325" r:id="rId73"/>
     <p:sldId id="268" r:id="rId19"/>
-    <p:sldId id="326" r:id="rId74"/>
     <p:sldId id="311" r:id="rId62"/>
     <p:sldId id="269" r:id="rId20"/>
+    <p:sldId id="326" r:id="rId74"/>
     <p:sldId id="270" r:id="rId21"/>
     <p:sldId id="312" r:id="rId63"/>
     <p:sldId id="272" r:id="rId23"/>
@@ -13491,7 +13491,7 @@
         </p:nvSpPr>
         <p:spPr>
           <a:xfrm>
-            <a:off x="594360" y="1234440"/>
+            <a:off x="594360" y="1479613"/>
             <a:ext cx="7955279" cy="3749039"/>
           </a:xfrm>
           <a:prstGeom prst="rect">
@@ -18226,7 +18226,7 @@
                 <a:ea typeface="Noto Sans CJK JP"/>
                 <a:cs typeface="Noto Sans"/>
               </a:rPr>
-              <a:t>文間の注意を計算するESIMと、BERTを意味役割で拡張したSemBERT。各公開実装の報告値であり、学習条件は異なる。</a:t>
+              <a:t>ESIMは文間の語の対応に注意を向け、SemBERTは誰が何をしたかを表す意味役割をBERTへ加える。各公開実装の報告値であり、学習条件は異なる。</a:t>
             </a:r>
             <a:endParaRPr sz="1700" lang="ja-JP">
               <a:latin typeface="Noto Sans"/>
@@ -23079,7 +23079,7 @@
         </p:nvSpPr>
         <p:spPr>
           <a:xfrm>
-            <a:off x="594360" y="1234440"/>
+            <a:off x="594360" y="1491132"/>
             <a:ext cx="7955279" cy="3749039"/>
           </a:xfrm>
           <a:prstGeom prst="rect">

--- a/slides/datasets-in-10-minutes-snli.pptx
+++ b/slides/datasets-in-10-minutes-snli.pptx
@@ -780,8 +780,8 @@
         </p:nvSpPr>
         <p:spPr>
           <a:xfrm>
-            <a:off x="8607898" y="-10450"/>
-            <a:ext cx="548701" cy="479700"/>
+            <a:off x="8412480" y="7937"/>
+            <a:ext cx="640080" cy="480059"/>
           </a:xfrm>
           <a:prstGeom prst="rect">
             <a:avLst/>
@@ -792,10 +792,20 @@
           </a:ln>
         </p:spPr>
         <p:txBody>
-          <a:bodyPr anchor="ctr"/>
+          <a:bodyPr anchor="ctr" lIns="0" tIns="0" bIns="0"/>
           <a:lstStyle/>
           <a:p>
-            <a:pPr algn="ctr"/>
+            <a:pPr algn="r">
+              <a:lnSpc>
+                <a:spcPct val="100000"/>
+              </a:lnSpc>
+              <a:spcBef>
+                <a:spcPts val="0"/>
+              </a:spcBef>
+              <a:spcAft>
+                <a:spcPts val="0"/>
+              </a:spcAft>
+            </a:pPr>
             <a:fld id="{00000000-1234-1234-1234-000000000999}" type="slidenum">
               <a:rPr lang="ja-JP" sz="1800" b="1">
                 <a:solidFill>
@@ -2243,8 +2253,8 @@
         </p:nvSpPr>
         <p:spPr>
           <a:xfrm>
-            <a:off x="8501908" y="28683"/>
-            <a:ext cx="548700" cy="393600"/>
+            <a:off x="8412480" y="7937"/>
+            <a:ext cx="640080" cy="480059"/>
           </a:xfrm>
           <a:prstGeom prst="rect">
             <a:avLst/>
@@ -2255,10 +2265,20 @@
           </a:ln>
         </p:spPr>
         <p:txBody>
-          <a:bodyPr anchor="ctr"/>
+          <a:bodyPr anchor="ctr" lIns="0" tIns="0" bIns="0"/>
           <a:lstStyle/>
           <a:p>
-            <a:pPr algn="r"/>
+            <a:pPr algn="r">
+              <a:lnSpc>
+                <a:spcPct val="100000"/>
+              </a:lnSpc>
+              <a:spcBef>
+                <a:spcPts val="0"/>
+              </a:spcBef>
+              <a:spcAft>
+                <a:spcPts val="0"/>
+              </a:spcAft>
+            </a:pPr>
             <a:fld id="{00000000-1234-1234-1234-000000000999}" type="slidenum">
               <a:rPr lang="ja-JP" sz="1800" b="1">
                 <a:solidFill>
@@ -2936,8 +2956,8 @@
         </p:nvSpPr>
         <p:spPr>
           <a:xfrm>
-            <a:off x="8501908" y="28683"/>
-            <a:ext cx="548700" cy="393600"/>
+            <a:off x="8412480" y="7937"/>
+            <a:ext cx="640080" cy="480059"/>
           </a:xfrm>
           <a:prstGeom prst="rect">
             <a:avLst/>
@@ -2948,10 +2968,20 @@
           </a:ln>
         </p:spPr>
         <p:txBody>
-          <a:bodyPr anchor="ctr"/>
+          <a:bodyPr anchor="ctr" lIns="0" tIns="0" bIns="0"/>
           <a:lstStyle/>
           <a:p>
-            <a:pPr algn="r"/>
+            <a:pPr algn="r">
+              <a:lnSpc>
+                <a:spcPct val="100000"/>
+              </a:lnSpc>
+              <a:spcBef>
+                <a:spcPts val="0"/>
+              </a:spcBef>
+              <a:spcAft>
+                <a:spcPts val="0"/>
+              </a:spcAft>
+            </a:pPr>
             <a:fld id="{00000000-1234-1234-1234-000000000999}" type="slidenum">
               <a:rPr lang="ja-JP" sz="1800" b="1">
                 <a:solidFill>
@@ -3397,8 +3427,8 @@
         </p:nvSpPr>
         <p:spPr>
           <a:xfrm>
-            <a:off x="8501908" y="28683"/>
-            <a:ext cx="548700" cy="393600"/>
+            <a:off x="8412480" y="7937"/>
+            <a:ext cx="640080" cy="480059"/>
           </a:xfrm>
           <a:prstGeom prst="rect">
             <a:avLst/>
@@ -3409,10 +3439,20 @@
           </a:ln>
         </p:spPr>
         <p:txBody>
-          <a:bodyPr anchor="ctr"/>
+          <a:bodyPr anchor="ctr" lIns="0" tIns="0" bIns="0"/>
           <a:lstStyle/>
           <a:p>
-            <a:pPr algn="r"/>
+            <a:pPr algn="r">
+              <a:lnSpc>
+                <a:spcPct val="100000"/>
+              </a:lnSpc>
+              <a:spcBef>
+                <a:spcPts val="0"/>
+              </a:spcBef>
+              <a:spcAft>
+                <a:spcPts val="0"/>
+              </a:spcAft>
+            </a:pPr>
             <a:fld id="{00000000-1234-1234-1234-000000000999}" type="slidenum">
               <a:rPr lang="ja-JP" sz="1800" b="1">
                 <a:solidFill>
@@ -3858,8 +3898,8 @@
         </p:nvSpPr>
         <p:spPr>
           <a:xfrm>
-            <a:off x="8501908" y="28683"/>
-            <a:ext cx="548700" cy="393600"/>
+            <a:off x="8412480" y="7937"/>
+            <a:ext cx="640080" cy="480059"/>
           </a:xfrm>
           <a:prstGeom prst="rect">
             <a:avLst/>
@@ -3870,10 +3910,20 @@
           </a:ln>
         </p:spPr>
         <p:txBody>
-          <a:bodyPr anchor="ctr"/>
+          <a:bodyPr anchor="ctr" lIns="0" tIns="0" bIns="0"/>
           <a:lstStyle/>
           <a:p>
-            <a:pPr algn="r"/>
+            <a:pPr algn="r">
+              <a:lnSpc>
+                <a:spcPct val="100000"/>
+              </a:lnSpc>
+              <a:spcBef>
+                <a:spcPts val="0"/>
+              </a:spcBef>
+              <a:spcAft>
+                <a:spcPts val="0"/>
+              </a:spcAft>
+            </a:pPr>
             <a:fld id="{00000000-1234-1234-1234-000000000999}" type="slidenum">
               <a:rPr lang="ja-JP" sz="1800" b="1">
                 <a:solidFill>
@@ -4385,8 +4435,8 @@
         </p:nvSpPr>
         <p:spPr>
           <a:xfrm>
-            <a:off x="8501908" y="28683"/>
-            <a:ext cx="548700" cy="393600"/>
+            <a:off x="8412480" y="7937"/>
+            <a:ext cx="640080" cy="480059"/>
           </a:xfrm>
           <a:prstGeom prst="rect">
             <a:avLst/>
@@ -4397,10 +4447,20 @@
           </a:ln>
         </p:spPr>
         <p:txBody>
-          <a:bodyPr anchor="ctr"/>
+          <a:bodyPr anchor="ctr" lIns="0" tIns="0" bIns="0"/>
           <a:lstStyle/>
           <a:p>
-            <a:pPr algn="r"/>
+            <a:pPr algn="r">
+              <a:lnSpc>
+                <a:spcPct val="100000"/>
+              </a:lnSpc>
+              <a:spcBef>
+                <a:spcPts val="0"/>
+              </a:spcBef>
+              <a:spcAft>
+                <a:spcPts val="0"/>
+              </a:spcAft>
+            </a:pPr>
             <a:fld id="{00000000-1234-1234-1234-000000000999}" type="slidenum">
               <a:rPr lang="ja-JP" sz="1800" b="1">
                 <a:solidFill>
@@ -4680,8 +4740,8 @@
         </p:nvSpPr>
         <p:spPr>
           <a:xfrm>
-            <a:off x="8501908" y="28683"/>
-            <a:ext cx="548700" cy="393600"/>
+            <a:off x="8412480" y="7937"/>
+            <a:ext cx="640080" cy="480059"/>
           </a:xfrm>
           <a:prstGeom prst="rect">
             <a:avLst/>
@@ -4692,10 +4752,20 @@
           </a:ln>
         </p:spPr>
         <p:txBody>
-          <a:bodyPr anchor="ctr"/>
+          <a:bodyPr anchor="ctr" lIns="0" tIns="0" bIns="0"/>
           <a:lstStyle/>
           <a:p>
-            <a:pPr algn="r"/>
+            <a:pPr algn="r">
+              <a:lnSpc>
+                <a:spcPct val="100000"/>
+              </a:lnSpc>
+              <a:spcBef>
+                <a:spcPts val="0"/>
+              </a:spcBef>
+              <a:spcAft>
+                <a:spcPts val="0"/>
+              </a:spcAft>
+            </a:pPr>
             <a:fld id="{00000000-1234-1234-1234-000000000999}" type="slidenum">
               <a:rPr lang="ja-JP" sz="1800" b="1">
                 <a:solidFill>
@@ -5308,8 +5378,8 @@
         </p:nvSpPr>
         <p:spPr>
           <a:xfrm>
-            <a:off x="8501908" y="28683"/>
-            <a:ext cx="548700" cy="393600"/>
+            <a:off x="8412480" y="7937"/>
+            <a:ext cx="640080" cy="480059"/>
           </a:xfrm>
           <a:prstGeom prst="rect">
             <a:avLst/>
@@ -5320,10 +5390,20 @@
           </a:ln>
         </p:spPr>
         <p:txBody>
-          <a:bodyPr anchor="ctr"/>
+          <a:bodyPr anchor="ctr" lIns="0" tIns="0" bIns="0"/>
           <a:lstStyle/>
           <a:p>
-            <a:pPr algn="r"/>
+            <a:pPr algn="r">
+              <a:lnSpc>
+                <a:spcPct val="100000"/>
+              </a:lnSpc>
+              <a:spcBef>
+                <a:spcPts val="0"/>
+              </a:spcBef>
+              <a:spcAft>
+                <a:spcPts val="0"/>
+              </a:spcAft>
+            </a:pPr>
             <a:fld id="{00000000-1234-1234-1234-000000000999}" type="slidenum">
               <a:rPr lang="ja-JP" sz="1800" b="1">
                 <a:solidFill>
@@ -5622,8 +5702,8 @@
         </p:nvSpPr>
         <p:spPr>
           <a:xfrm>
-            <a:off x="8472458" y="28683"/>
-            <a:ext cx="548700" cy="393600"/>
+            <a:off x="8412480" y="7937"/>
+            <a:ext cx="640080" cy="480059"/>
           </a:xfrm>
           <a:prstGeom prst="rect">
             <a:avLst/>
@@ -5634,10 +5714,20 @@
           </a:ln>
         </p:spPr>
         <p:txBody>
-          <a:bodyPr anchor="ctr"/>
+          <a:bodyPr anchor="ctr" lIns="0" tIns="0" bIns="0"/>
           <a:lstStyle/>
           <a:p>
-            <a:pPr algn="r"/>
+            <a:pPr algn="r">
+              <a:lnSpc>
+                <a:spcPct val="100000"/>
+              </a:lnSpc>
+              <a:spcBef>
+                <a:spcPts val="0"/>
+              </a:spcBef>
+              <a:spcAft>
+                <a:spcPts val="0"/>
+              </a:spcAft>
+            </a:pPr>
             <a:fld id="{00000000-1234-1234-1234-000000000999}" type="slidenum">
               <a:rPr lang="ja-JP" sz="1800" b="1">
                 <a:solidFill>
@@ -6183,8 +6273,8 @@
         </p:nvSpPr>
         <p:spPr>
           <a:xfrm>
-            <a:off x="8472458" y="4663217"/>
-            <a:ext cx="548700" cy="393600"/>
+            <a:off x="8412480" y="7937"/>
+            <a:ext cx="640080" cy="480059"/>
           </a:xfrm>
           <a:prstGeom prst="rect">
             <a:avLst/>
@@ -6195,7 +6285,7 @@
           </a:ln>
         </p:spPr>
         <p:txBody>
-          <a:bodyPr spcFirstLastPara="1" wrap="square" lIns="91425" tIns="91425" rIns="91425" bIns="91425" anchor="ctr" anchorCtr="0">
+          <a:bodyPr spcFirstLastPara="1" wrap="square" lIns="0" tIns="0" bIns="0" anchor="ctr" anchorCtr="0">
             <a:normAutofit/>
           </a:bodyPr>
           <a:lstStyle>
@@ -6301,6 +6391,9 @@
           </a:lstStyle>
           <a:p>
             <a:pPr marL="0" lvl="0" indent="0" algn="r" rtl="0">
+              <a:lnSpc>
+                <a:spcPct val="100000"/>
+              </a:lnSpc>
               <a:spcBef>
                 <a:spcPts val="0"/>
               </a:spcBef>
@@ -8539,8 +8632,8 @@
         </p:nvSpPr>
         <p:spPr>
           <a:xfrm>
-            <a:off x="502920" y="4876800"/>
-            <a:ext cx="8183879" cy="177800"/>
+            <a:off x="5921996" y="4717326"/>
+            <a:ext cx="2764803" cy="177800"/>
           </a:xfrm>
           <a:prstGeom prst="rect">
             <a:avLst/>
@@ -8548,7 +8641,7 @@
           <a:noFill/>
         </p:spPr>
         <p:txBody>
-          <a:bodyPr wrap="square" lIns="0" rIns="0" tIns="0" bIns="0">
+          <a:bodyPr wrap="none" lIns="0" rIns="0" tIns="0" bIns="0">
             <a:spAutoFit/>
           </a:bodyPr>
           <a:lstStyle/>
@@ -8921,8 +9014,8 @@
         </p:nvSpPr>
         <p:spPr>
           <a:xfrm>
-            <a:off x="502920" y="4876800"/>
-            <a:ext cx="8183879" cy="177800"/>
+            <a:off x="5921996" y="4717326"/>
+            <a:ext cx="2764803" cy="177800"/>
           </a:xfrm>
           <a:prstGeom prst="rect">
             <a:avLst/>
@@ -8930,7 +9023,7 @@
           <a:noFill/>
         </p:spPr>
         <p:txBody>
-          <a:bodyPr wrap="square" lIns="0" rIns="0" tIns="0" bIns="0">
+          <a:bodyPr wrap="none" lIns="0" rIns="0" tIns="0" bIns="0">
             <a:spAutoFit/>
           </a:bodyPr>
           <a:lstStyle/>
@@ -9303,8 +9396,8 @@
         </p:nvSpPr>
         <p:spPr>
           <a:xfrm>
-            <a:off x="502920" y="4876800"/>
-            <a:ext cx="8183879" cy="177800"/>
+            <a:off x="5921996" y="4717326"/>
+            <a:ext cx="2764803" cy="177800"/>
           </a:xfrm>
           <a:prstGeom prst="rect">
             <a:avLst/>
@@ -9312,7 +9405,7 @@
           <a:noFill/>
         </p:spPr>
         <p:txBody>
-          <a:bodyPr wrap="square" lIns="0" rIns="0" tIns="0" bIns="0">
+          <a:bodyPr wrap="none" lIns="0" rIns="0" tIns="0" bIns="0">
             <a:spAutoFit/>
           </a:bodyPr>
           <a:lstStyle/>
@@ -10255,8 +10348,8 @@
         </p:nvSpPr>
         <p:spPr>
           <a:xfrm>
-            <a:off x="502920" y="4876800"/>
-            <a:ext cx="8183879" cy="177800"/>
+            <a:off x="5921996" y="4717326"/>
+            <a:ext cx="2764803" cy="177800"/>
           </a:xfrm>
           <a:prstGeom prst="rect">
             <a:avLst/>
@@ -10264,7 +10357,7 @@
           <a:noFill/>
         </p:spPr>
         <p:txBody>
-          <a:bodyPr wrap="square" lIns="0" rIns="0" tIns="0" bIns="0">
+          <a:bodyPr wrap="none" lIns="0" rIns="0" tIns="0" bIns="0">
             <a:spAutoFit/>
           </a:bodyPr>
           <a:lstStyle/>
@@ -10637,8 +10730,8 @@
         </p:nvSpPr>
         <p:spPr>
           <a:xfrm>
-            <a:off x="502920" y="4699000"/>
-            <a:ext cx="8183879" cy="177800"/>
+            <a:off x="5921996" y="4539526"/>
+            <a:ext cx="2764803" cy="177800"/>
           </a:xfrm>
           <a:prstGeom prst="rect">
             <a:avLst/>
@@ -10646,7 +10739,7 @@
           <a:noFill/>
         </p:spPr>
         <p:txBody>
-          <a:bodyPr wrap="square" lIns="0" rIns="0" tIns="0" bIns="0">
+          <a:bodyPr wrap="none" lIns="0" rIns="0" tIns="0" bIns="0">
             <a:spAutoFit/>
           </a:bodyPr>
           <a:lstStyle/>
@@ -13505,7 +13598,7 @@
           </a:bodyPr>
           <a:lstStyle/>
           <a:p>
-            <a:pPr lvl="0" marL="457200" indent="-355600">
+            <a:pPr lvl="0" marL="558800" indent="-457200">
               <a:lnSpc>
                 <a:spcPct val="100000"/>
               </a:lnSpc>
@@ -13540,7 +13633,7 @@
             </a:r>
           </a:p>
           <a:p>
-            <a:pPr lvl="0" marL="457200" indent="-355600">
+            <a:pPr lvl="0" marL="558800" indent="-457200">
               <a:lnSpc>
                 <a:spcPct val="100000"/>
               </a:lnSpc>
@@ -13575,7 +13668,7 @@
             </a:r>
           </a:p>
           <a:p>
-            <a:pPr lvl="0" marL="457200" indent="-355600">
+            <a:pPr lvl="0" marL="558800" indent="-457200">
               <a:lnSpc>
                 <a:spcPct val="100000"/>
               </a:lnSpc>
@@ -13610,7 +13703,7 @@
             </a:r>
           </a:p>
           <a:p>
-            <a:pPr lvl="0" marL="457200" indent="-355600">
+            <a:pPr lvl="0" marL="558800" indent="-457200">
               <a:lnSpc>
                 <a:spcPct val="100000"/>
               </a:lnSpc>
@@ -13645,7 +13738,7 @@
             </a:r>
           </a:p>
           <a:p>
-            <a:pPr lvl="0" marL="457200" indent="-355600">
+            <a:pPr lvl="0" marL="558800" indent="-457200">
               <a:lnSpc>
                 <a:spcPct val="100000"/>
               </a:lnSpc>
@@ -16367,8 +16460,8 @@
         </p:nvSpPr>
         <p:spPr>
           <a:xfrm>
-            <a:off x="502920" y="4521200"/>
-            <a:ext cx="8183879" cy="177800"/>
+            <a:off x="5921996" y="4361713"/>
+            <a:ext cx="2764803" cy="177800"/>
           </a:xfrm>
           <a:prstGeom prst="rect">
             <a:avLst/>
@@ -16376,7 +16469,7 @@
           <a:noFill/>
         </p:spPr>
         <p:txBody>
-          <a:bodyPr wrap="square" lIns="0" rIns="0" tIns="0" bIns="0">
+          <a:bodyPr wrap="none" lIns="0" rIns="0" tIns="0" bIns="0">
             <a:spAutoFit/>
           </a:bodyPr>
           <a:lstStyle/>
@@ -17356,8 +17449,8 @@
         </p:nvSpPr>
         <p:spPr>
           <a:xfrm>
-            <a:off x="502920" y="4876800"/>
-            <a:ext cx="8183879" cy="177800"/>
+            <a:off x="6285045" y="4717326"/>
+            <a:ext cx="2401754" cy="177800"/>
           </a:xfrm>
           <a:prstGeom prst="rect">
             <a:avLst/>
@@ -17365,7 +17458,7 @@
           <a:noFill/>
         </p:spPr>
         <p:txBody>
-          <a:bodyPr wrap="square" lIns="0" rIns="0" tIns="0" bIns="0">
+          <a:bodyPr wrap="none" lIns="0" rIns="0" tIns="0" bIns="0">
             <a:spAutoFit/>
           </a:bodyPr>
           <a:lstStyle/>
@@ -18738,8 +18831,8 @@
         </p:nvSpPr>
         <p:spPr>
           <a:xfrm>
-            <a:off x="502920" y="4699000"/>
-            <a:ext cx="8183879" cy="177800"/>
+            <a:off x="5864228" y="4539526"/>
+            <a:ext cx="2822571" cy="177800"/>
           </a:xfrm>
           <a:prstGeom prst="rect">
             <a:avLst/>
@@ -18747,7 +18840,7 @@
           <a:noFill/>
         </p:spPr>
         <p:txBody>
-          <a:bodyPr wrap="square" lIns="0" rIns="0" tIns="0" bIns="0">
+          <a:bodyPr wrap="none" lIns="0" rIns="0" tIns="0" bIns="0">
             <a:spAutoFit/>
           </a:bodyPr>
           <a:lstStyle/>
@@ -19924,8 +20017,8 @@
         </p:nvSpPr>
         <p:spPr>
           <a:xfrm>
-            <a:off x="502920" y="4876800"/>
-            <a:ext cx="8183879" cy="177800"/>
+            <a:off x="1193726" y="4717326"/>
+            <a:ext cx="7493073" cy="177800"/>
           </a:xfrm>
           <a:prstGeom prst="rect">
             <a:avLst/>
@@ -19933,7 +20026,7 @@
           <a:noFill/>
         </p:spPr>
         <p:txBody>
-          <a:bodyPr wrap="square" lIns="0" rIns="0" tIns="0" bIns="0">
+          <a:bodyPr wrap="none" lIns="0" rIns="0" tIns="0" bIns="0">
             <a:spAutoFit/>
           </a:bodyPr>
           <a:lstStyle/>
@@ -23093,7 +23186,7 @@
           </a:bodyPr>
           <a:lstStyle/>
           <a:p>
-            <a:pPr lvl="0" marL="457200" indent="-355600">
+            <a:pPr lvl="0" marL="558800" indent="-457200">
               <a:lnSpc>
                 <a:spcPct val="100000"/>
               </a:lnSpc>
@@ -23128,7 +23221,7 @@
             </a:r>
           </a:p>
           <a:p>
-            <a:pPr lvl="0" marL="457200" indent="-355600">
+            <a:pPr lvl="0" marL="558800" indent="-457200">
               <a:lnSpc>
                 <a:spcPct val="100000"/>
               </a:lnSpc>
@@ -23163,7 +23256,7 @@
             </a:r>
           </a:p>
           <a:p>
-            <a:pPr lvl="0" marL="457200" indent="-355600">
+            <a:pPr lvl="0" marL="558800" indent="-457200">
               <a:lnSpc>
                 <a:spcPct val="100000"/>
               </a:lnSpc>
@@ -23198,7 +23291,7 @@
             </a:r>
           </a:p>
           <a:p>
-            <a:pPr lvl="0" marL="457200" indent="-355600">
+            <a:pPr lvl="0" marL="558800" indent="-457200">
               <a:lnSpc>
                 <a:spcPct val="100000"/>
               </a:lnSpc>
@@ -23233,7 +23326,7 @@
             </a:r>
           </a:p>
           <a:p>
-            <a:pPr lvl="0" marL="457200" indent="-355600">
+            <a:pPr lvl="0" marL="558800" indent="-457200">
               <a:lnSpc>
                 <a:spcPct val="100000"/>
               </a:lnSpc>
@@ -23749,8 +23842,8 @@
         </p:nvSpPr>
         <p:spPr>
           <a:xfrm>
-            <a:off x="502920" y="4165600"/>
-            <a:ext cx="8183879" cy="177800"/>
+            <a:off x="5921996" y="4006114"/>
+            <a:ext cx="2764803" cy="177800"/>
           </a:xfrm>
           <a:prstGeom prst="rect">
             <a:avLst/>
@@ -23758,7 +23851,7 @@
           <a:noFill/>
         </p:spPr>
         <p:txBody>
-          <a:bodyPr wrap="square" lIns="0" rIns="0" tIns="0" bIns="0">
+          <a:bodyPr wrap="none" lIns="0" rIns="0" tIns="0" bIns="0">
             <a:spAutoFit/>
           </a:bodyPr>
           <a:lstStyle/>
@@ -23983,8 +24076,8 @@
         </p:nvSpPr>
         <p:spPr>
           <a:xfrm>
-            <a:off x="502920" y="4876800"/>
-            <a:ext cx="8183879" cy="177800"/>
+            <a:off x="4533251" y="4717326"/>
+            <a:ext cx="4153548" cy="177800"/>
           </a:xfrm>
           <a:prstGeom prst="rect">
             <a:avLst/>
@@ -23992,7 +24085,7 @@
           <a:noFill/>
         </p:spPr>
         <p:txBody>
-          <a:bodyPr wrap="square" lIns="0" rIns="0" tIns="0" bIns="0">
+          <a:bodyPr wrap="none" lIns="0" rIns="0" tIns="0" bIns="0">
             <a:spAutoFit/>
           </a:bodyPr>
           <a:lstStyle/>
@@ -28348,8 +28441,8 @@
         </p:nvSpPr>
         <p:spPr>
           <a:xfrm>
-            <a:off x="502920" y="4876800"/>
-            <a:ext cx="8183879" cy="177800"/>
+            <a:off x="5921996" y="4717326"/>
+            <a:ext cx="2764803" cy="177800"/>
           </a:xfrm>
           <a:prstGeom prst="rect">
             <a:avLst/>
@@ -28357,7 +28450,7 @@
           <a:noFill/>
         </p:spPr>
         <p:txBody>
-          <a:bodyPr wrap="square" lIns="0" rIns="0" tIns="0" bIns="0">
+          <a:bodyPr wrap="none" lIns="0" rIns="0" tIns="0" bIns="0">
             <a:spAutoFit/>
           </a:bodyPr>
           <a:lstStyle/>
@@ -45191,8 +45284,8 @@
         </p:nvSpPr>
         <p:spPr>
           <a:xfrm>
-            <a:off x="502920" y="4876800"/>
-            <a:ext cx="8183879" cy="177800"/>
+            <a:off x="6144130" y="4717326"/>
+            <a:ext cx="2542669" cy="177800"/>
           </a:xfrm>
           <a:prstGeom prst="rect">
             <a:avLst/>
@@ -45200,7 +45293,7 @@
           <a:noFill/>
         </p:spPr>
         <p:txBody>
-          <a:bodyPr wrap="square" lIns="0" rIns="0" tIns="0" bIns="0">
+          <a:bodyPr wrap="none" lIns="0" rIns="0" tIns="0" bIns="0">
             <a:spAutoFit/>
           </a:bodyPr>
           <a:lstStyle/>
@@ -49165,8 +49258,8 @@
         </p:nvSpPr>
         <p:spPr>
           <a:xfrm>
-            <a:off x="502920" y="4876800"/>
-            <a:ext cx="8183879" cy="177800"/>
+            <a:off x="5921996" y="4717326"/>
+            <a:ext cx="2764803" cy="177800"/>
           </a:xfrm>
           <a:prstGeom prst="rect">
             <a:avLst/>
@@ -49174,7 +49267,7 @@
           <a:noFill/>
         </p:spPr>
         <p:txBody>
-          <a:bodyPr wrap="square" lIns="0" rIns="0" tIns="0" bIns="0">
+          <a:bodyPr wrap="none" lIns="0" rIns="0" tIns="0" bIns="0">
             <a:spAutoFit/>
           </a:bodyPr>
           <a:lstStyle/>

--- a/slides/datasets-in-10-minutes-snli.pptx
+++ b/slides/datasets-in-10-minutes-snli.pptx
@@ -9619,13 +9619,13 @@
                     <a:lnR w="0">
                       <a:noFill/>
                     </a:lnR>
-                    <a:lnT w="10160">
+                    <a:lnT w="15240">
                       <a:solidFill>
                         <a:srgbClr val="626669"/>
                       </a:solidFill>
                       <a:prstDash val="solid"/>
                     </a:lnT>
-                    <a:lnB w="10160">
+                    <a:lnB w="7620">
                       <a:solidFill>
                         <a:srgbClr val="626669"/>
                       </a:solidFill>
@@ -9674,13 +9674,13 @@
                     <a:lnR w="0">
                       <a:noFill/>
                     </a:lnR>
-                    <a:lnT w="10160">
+                    <a:lnT w="15240">
                       <a:solidFill>
                         <a:srgbClr val="626669"/>
                       </a:solidFill>
                       <a:prstDash val="solid"/>
                     </a:lnT>
-                    <a:lnB w="10160">
+                    <a:lnB w="7620">
                       <a:solidFill>
                         <a:srgbClr val="626669"/>
                       </a:solidFill>
@@ -9729,13 +9729,13 @@
                     <a:lnR w="0">
                       <a:noFill/>
                     </a:lnR>
-                    <a:lnT w="10160">
+                    <a:lnT w="15240">
                       <a:solidFill>
                         <a:srgbClr val="626669"/>
                       </a:solidFill>
                       <a:prstDash val="solid"/>
                     </a:lnT>
-                    <a:lnB w="10160">
+                    <a:lnB w="7620">
                       <a:solidFill>
                         <a:srgbClr val="626669"/>
                       </a:solidFill>
@@ -9784,13 +9784,13 @@
                     <a:lnR w="0">
                       <a:noFill/>
                     </a:lnR>
-                    <a:lnT w="10160">
+                    <a:lnT w="15240">
                       <a:solidFill>
                         <a:srgbClr val="626669"/>
                       </a:solidFill>
                       <a:prstDash val="solid"/>
                     </a:lnT>
-                    <a:lnB w="10160">
+                    <a:lnB w="7620">
                       <a:solidFill>
                         <a:srgbClr val="626669"/>
                       </a:solidFill>
@@ -9841,7 +9841,7 @@
                     <a:lnR w="0">
                       <a:noFill/>
                     </a:lnR>
-                    <a:lnT w="10160">
+                    <a:lnT w="7620">
                       <a:solidFill>
                         <a:srgbClr val="626669"/>
                       </a:solidFill>
@@ -9893,7 +9893,7 @@
                     <a:lnR w="0">
                       <a:noFill/>
                     </a:lnR>
-                    <a:lnT w="10160">
+                    <a:lnT w="7620">
                       <a:solidFill>
                         <a:srgbClr val="626669"/>
                       </a:solidFill>
@@ -9945,7 +9945,7 @@
                     <a:lnR w="0">
                       <a:noFill/>
                     </a:lnR>
-                    <a:lnT w="10160">
+                    <a:lnT w="7620">
                       <a:solidFill>
                         <a:srgbClr val="626669"/>
                       </a:solidFill>
@@ -9997,7 +9997,7 @@
                     <a:lnR w="0">
                       <a:noFill/>
                     </a:lnR>
-                    <a:lnT w="10160">
+                    <a:lnT w="7620">
                       <a:solidFill>
                         <a:srgbClr val="626669"/>
                       </a:solidFill>
@@ -10054,7 +10054,7 @@
                     <a:lnT w="0">
                       <a:noFill/>
                     </a:lnT>
-                    <a:lnB w="10160">
+                    <a:lnB w="15240">
                       <a:solidFill>
                         <a:srgbClr val="626669"/>
                       </a:solidFill>
@@ -10106,7 +10106,7 @@
                     <a:lnT w="0">
                       <a:noFill/>
                     </a:lnT>
-                    <a:lnB w="10160">
+                    <a:lnB w="15240">
                       <a:solidFill>
                         <a:srgbClr val="626669"/>
                       </a:solidFill>
@@ -10158,7 +10158,7 @@
                     <a:lnT w="0">
                       <a:noFill/>
                     </a:lnT>
-                    <a:lnB w="10160">
+                    <a:lnB w="15240">
                       <a:solidFill>
                         <a:srgbClr val="626669"/>
                       </a:solidFill>
@@ -10210,7 +10210,7 @@
                     <a:lnT w="0">
                       <a:noFill/>
                     </a:lnT>
-                    <a:lnB w="10160">
+                    <a:lnB w="15240">
                       <a:solidFill>
                         <a:srgbClr val="626669"/>
                       </a:solidFill>
@@ -11059,13 +11059,13 @@
                     <a:lnR w="0">
                       <a:noFill/>
                     </a:lnR>
-                    <a:lnT w="10160">
+                    <a:lnT w="15240">
                       <a:solidFill>
                         <a:srgbClr val="626669"/>
                       </a:solidFill>
                       <a:prstDash val="solid"/>
                     </a:lnT>
-                    <a:lnB w="10160">
+                    <a:lnB w="7620">
                       <a:solidFill>
                         <a:srgbClr val="626669"/>
                       </a:solidFill>
@@ -11125,13 +11125,13 @@
                     <a:lnR w="0">
                       <a:noFill/>
                     </a:lnR>
-                    <a:lnT w="10160">
+                    <a:lnT w="15240">
                       <a:solidFill>
                         <a:srgbClr val="626669"/>
                       </a:solidFill>
                       <a:prstDash val="solid"/>
                     </a:lnT>
-                    <a:lnB w="10160">
+                    <a:lnB w="7620">
                       <a:solidFill>
                         <a:srgbClr val="626669"/>
                       </a:solidFill>
@@ -11191,13 +11191,13 @@
                     <a:lnR w="0">
                       <a:noFill/>
                     </a:lnR>
-                    <a:lnT w="10160">
+                    <a:lnT w="15240">
                       <a:solidFill>
                         <a:srgbClr val="626669"/>
                       </a:solidFill>
                       <a:prstDash val="solid"/>
                     </a:lnT>
-                    <a:lnB w="10160">
+                    <a:lnB w="7620">
                       <a:solidFill>
                         <a:srgbClr val="626669"/>
                       </a:solidFill>
@@ -11259,7 +11259,7 @@
                     <a:lnR w="0">
                       <a:noFill/>
                     </a:lnR>
-                    <a:lnT w="10160">
+                    <a:lnT w="7620">
                       <a:solidFill>
                         <a:srgbClr val="626669"/>
                       </a:solidFill>
@@ -11322,7 +11322,7 @@
                     <a:lnR w="0">
                       <a:noFill/>
                     </a:lnR>
-                    <a:lnT w="10160">
+                    <a:lnT w="7620">
                       <a:solidFill>
                         <a:srgbClr val="626669"/>
                       </a:solidFill>
@@ -11385,7 +11385,7 @@
                     <a:lnR w="0">
                       <a:noFill/>
                     </a:lnR>
-                    <a:lnT w="10160">
+                    <a:lnT w="7620">
                       <a:solidFill>
                         <a:srgbClr val="626669"/>
                       </a:solidFill>
@@ -11817,7 +11817,7 @@
                     <a:lnT w="0">
                       <a:noFill/>
                     </a:lnT>
-                    <a:lnB w="10160">
+                    <a:lnB w="15240">
                       <a:solidFill>
                         <a:srgbClr val="626669"/>
                       </a:solidFill>
@@ -11880,7 +11880,7 @@
                     <a:lnT w="0">
                       <a:noFill/>
                     </a:lnT>
-                    <a:lnB w="10160">
+                    <a:lnB w="15240">
                       <a:solidFill>
                         <a:srgbClr val="626669"/>
                       </a:solidFill>
@@ -11943,7 +11943,7 @@
                     <a:lnT w="0">
                       <a:noFill/>
                     </a:lnT>
-                    <a:lnB w="10160">
+                    <a:lnB w="15240">
                       <a:solidFill>
                         <a:srgbClr val="626669"/>
                       </a:solidFill>
@@ -12295,13 +12295,13 @@
                     <a:lnR w="0">
                       <a:noFill/>
                     </a:lnR>
-                    <a:lnT w="10160">
+                    <a:lnT w="15240">
                       <a:solidFill>
                         <a:srgbClr val="626669"/>
                       </a:solidFill>
                       <a:prstDash val="solid"/>
                     </a:lnT>
-                    <a:lnB w="10160">
+                    <a:lnB w="7620">
                       <a:solidFill>
                         <a:srgbClr val="626669"/>
                       </a:solidFill>
@@ -12361,13 +12361,13 @@
                     <a:lnR w="0">
                       <a:noFill/>
                     </a:lnR>
-                    <a:lnT w="10160">
+                    <a:lnT w="15240">
                       <a:solidFill>
                         <a:srgbClr val="626669"/>
                       </a:solidFill>
                       <a:prstDash val="solid"/>
                     </a:lnT>
-                    <a:lnB w="10160">
+                    <a:lnB w="7620">
                       <a:solidFill>
                         <a:srgbClr val="626669"/>
                       </a:solidFill>
@@ -12427,13 +12427,13 @@
                     <a:lnR w="0">
                       <a:noFill/>
                     </a:lnR>
-                    <a:lnT w="10160">
+                    <a:lnT w="15240">
                       <a:solidFill>
                         <a:srgbClr val="626669"/>
                       </a:solidFill>
                       <a:prstDash val="solid"/>
                     </a:lnT>
-                    <a:lnB w="10160">
+                    <a:lnB w="7620">
                       <a:solidFill>
                         <a:srgbClr val="626669"/>
                       </a:solidFill>
@@ -12495,7 +12495,7 @@
                     <a:lnR w="0">
                       <a:noFill/>
                     </a:lnR>
-                    <a:lnT w="10160">
+                    <a:lnT w="7620">
                       <a:solidFill>
                         <a:srgbClr val="626669"/>
                       </a:solidFill>
@@ -12558,7 +12558,7 @@
                     <a:lnR w="0">
                       <a:noFill/>
                     </a:lnR>
-                    <a:lnT w="10160">
+                    <a:lnT w="7620">
                       <a:solidFill>
                         <a:srgbClr val="626669"/>
                       </a:solidFill>
@@ -12621,7 +12621,7 @@
                     <a:lnR w="0">
                       <a:noFill/>
                     </a:lnR>
-                    <a:lnT w="10160">
+                    <a:lnT w="7620">
                       <a:solidFill>
                         <a:srgbClr val="626669"/>
                       </a:solidFill>
@@ -12871,7 +12871,7 @@
                     <a:lnT w="0">
                       <a:noFill/>
                     </a:lnT>
-                    <a:lnB w="10160">
+                    <a:lnB w="15240">
                       <a:solidFill>
                         <a:srgbClr val="626669"/>
                       </a:solidFill>
@@ -12934,7 +12934,7 @@
                     <a:lnT w="0">
                       <a:noFill/>
                     </a:lnT>
-                    <a:lnB w="10160">
+                    <a:lnB w="15240">
                       <a:solidFill>
                         <a:srgbClr val="626669"/>
                       </a:solidFill>
@@ -12997,7 +12997,7 @@
                     <a:lnT w="0">
                       <a:noFill/>
                     </a:lnT>
-                    <a:lnB w="10160">
+                    <a:lnB w="15240">
                       <a:solidFill>
                         <a:srgbClr val="626669"/>
                       </a:solidFill>
@@ -15168,13 +15168,13 @@
                     <a:lnR w="0">
                       <a:noFill/>
                     </a:lnR>
-                    <a:lnT w="10160">
+                    <a:lnT w="15240">
                       <a:solidFill>
                         <a:srgbClr val="626669"/>
                       </a:solidFill>
                       <a:prstDash val="solid"/>
                     </a:lnT>
-                    <a:lnB w="10160">
+                    <a:lnB w="7620">
                       <a:solidFill>
                         <a:srgbClr val="626669"/>
                       </a:solidFill>
@@ -15223,13 +15223,13 @@
                     <a:lnR w="0">
                       <a:noFill/>
                     </a:lnR>
-                    <a:lnT w="10160">
+                    <a:lnT w="15240">
                       <a:solidFill>
                         <a:srgbClr val="626669"/>
                       </a:solidFill>
                       <a:prstDash val="solid"/>
                     </a:lnT>
-                    <a:lnB w="10160">
+                    <a:lnB w="7620">
                       <a:solidFill>
                         <a:srgbClr val="626669"/>
                       </a:solidFill>
@@ -15278,13 +15278,13 @@
                     <a:lnR w="0">
                       <a:noFill/>
                     </a:lnR>
-                    <a:lnT w="10160">
+                    <a:lnT w="15240">
                       <a:solidFill>
                         <a:srgbClr val="626669"/>
                       </a:solidFill>
                       <a:prstDash val="solid"/>
                     </a:lnT>
-                    <a:lnB w="10160">
+                    <a:lnB w="7620">
                       <a:solidFill>
                         <a:srgbClr val="626669"/>
                       </a:solidFill>
@@ -15335,7 +15335,7 @@
                     <a:lnR w="0">
                       <a:noFill/>
                     </a:lnR>
-                    <a:lnT w="10160">
+                    <a:lnT w="7620">
                       <a:solidFill>
                         <a:srgbClr val="626669"/>
                       </a:solidFill>
@@ -15387,7 +15387,7 @@
                     <a:lnR w="0">
                       <a:noFill/>
                     </a:lnR>
-                    <a:lnT w="10160">
+                    <a:lnT w="7620">
                       <a:solidFill>
                         <a:srgbClr val="626669"/>
                       </a:solidFill>
@@ -15439,7 +15439,7 @@
                     <a:lnR w="0">
                       <a:noFill/>
                     </a:lnR>
-                    <a:lnT w="10160">
+                    <a:lnT w="7620">
                       <a:solidFill>
                         <a:srgbClr val="626669"/>
                       </a:solidFill>
@@ -15645,7 +15645,7 @@
                     <a:lnT w="0">
                       <a:noFill/>
                     </a:lnT>
-                    <a:lnB w="10160">
+                    <a:lnB w="15240">
                       <a:solidFill>
                         <a:srgbClr val="626669"/>
                       </a:solidFill>
@@ -15697,7 +15697,7 @@
                     <a:lnT w="0">
                       <a:noFill/>
                     </a:lnT>
-                    <a:lnB w="10160">
+                    <a:lnB w="15240">
                       <a:solidFill>
                         <a:srgbClr val="626669"/>
                       </a:solidFill>
@@ -15749,7 +15749,7 @@
                     <a:lnT w="0">
                       <a:noFill/>
                     </a:lnT>
-                    <a:lnB w="10160">
+                    <a:lnB w="15240">
                       <a:solidFill>
                         <a:srgbClr val="626669"/>
                       </a:solidFill>
@@ -16851,13 +16851,13 @@
                     <a:lnR w="0">
                       <a:noFill/>
                     </a:lnR>
-                    <a:lnT w="10160">
+                    <a:lnT w="15240">
                       <a:solidFill>
                         <a:srgbClr val="626669"/>
                       </a:solidFill>
                       <a:prstDash val="solid"/>
                     </a:lnT>
-                    <a:lnB w="10160">
+                    <a:lnB w="7620">
                       <a:solidFill>
                         <a:srgbClr val="626669"/>
                       </a:solidFill>
@@ -16915,13 +16915,13 @@
                     <a:lnR w="0">
                       <a:noFill/>
                     </a:lnR>
-                    <a:lnT w="10160">
+                    <a:lnT w="15240">
                       <a:solidFill>
                         <a:srgbClr val="626669"/>
                       </a:solidFill>
                       <a:prstDash val="solid"/>
                     </a:lnT>
-                    <a:lnB w="10160">
+                    <a:lnB w="7620">
                       <a:solidFill>
                         <a:srgbClr val="626669"/>
                       </a:solidFill>
@@ -16981,7 +16981,7 @@
                     <a:lnR w="0">
                       <a:noFill/>
                     </a:lnR>
-                    <a:lnT w="10160">
+                    <a:lnT w="7620">
                       <a:solidFill>
                         <a:srgbClr val="626669"/>
                       </a:solidFill>
@@ -17042,7 +17042,7 @@
                     <a:lnR w="0">
                       <a:noFill/>
                     </a:lnR>
-                    <a:lnT w="10160">
+                    <a:lnT w="7620">
                       <a:solidFill>
                         <a:srgbClr val="626669"/>
                       </a:solidFill>
@@ -17226,7 +17226,7 @@
                     <a:lnT w="0">
                       <a:noFill/>
                     </a:lnT>
-                    <a:lnB w="10160">
+                    <a:lnB w="15240">
                       <a:solidFill>
                         <a:srgbClr val="626669"/>
                       </a:solidFill>
@@ -17287,7 +17287,7 @@
                     <a:lnT w="0">
                       <a:noFill/>
                     </a:lnT>
-                    <a:lnB w="10160">
+                    <a:lnB w="15240">
                       <a:solidFill>
                         <a:srgbClr val="626669"/>
                       </a:solidFill>
@@ -17708,13 +17708,13 @@
                     <a:lnR w="0">
                       <a:noFill/>
                     </a:lnR>
-                    <a:lnT w="10160">
+                    <a:lnT w="15240">
                       <a:solidFill>
                         <a:srgbClr val="626669"/>
                       </a:solidFill>
                       <a:prstDash val="solid"/>
                     </a:lnT>
-                    <a:lnB w="10160">
+                    <a:lnB w="7620">
                       <a:solidFill>
                         <a:srgbClr val="626669"/>
                       </a:solidFill>
@@ -17774,13 +17774,13 @@
                     <a:lnR w="0">
                       <a:noFill/>
                     </a:lnR>
-                    <a:lnT w="10160">
+                    <a:lnT w="15240">
                       <a:solidFill>
                         <a:srgbClr val="626669"/>
                       </a:solidFill>
                       <a:prstDash val="solid"/>
                     </a:lnT>
-                    <a:lnB w="10160">
+                    <a:lnB w="7620">
                       <a:solidFill>
                         <a:srgbClr val="626669"/>
                       </a:solidFill>
@@ -17840,13 +17840,13 @@
                     <a:lnR w="0">
                       <a:noFill/>
                     </a:lnR>
-                    <a:lnT w="10160">
+                    <a:lnT w="15240">
                       <a:solidFill>
                         <a:srgbClr val="626669"/>
                       </a:solidFill>
                       <a:prstDash val="solid"/>
                     </a:lnT>
-                    <a:lnB w="10160">
+                    <a:lnB w="7620">
                       <a:solidFill>
                         <a:srgbClr val="626669"/>
                       </a:solidFill>
@@ -17920,7 +17920,7 @@
                     <a:lnR w="0">
                       <a:noFill/>
                     </a:lnR>
-                    <a:lnT w="10160">
+                    <a:lnT w="7620">
                       <a:solidFill>
                         <a:srgbClr val="626669"/>
                       </a:solidFill>
@@ -17983,7 +17983,7 @@
                     <a:lnR w="0">
                       <a:noFill/>
                     </a:lnR>
-                    <a:lnT w="10160">
+                    <a:lnT w="7620">
                       <a:solidFill>
                         <a:srgbClr val="626669"/>
                       </a:solidFill>
@@ -18046,7 +18046,7 @@
                     <a:lnR w="0">
                       <a:noFill/>
                     </a:lnR>
-                    <a:lnT w="10160">
+                    <a:lnT w="7620">
                       <a:solidFill>
                         <a:srgbClr val="626669"/>
                       </a:solidFill>
@@ -18126,7 +18126,7 @@
                     <a:lnT w="0">
                       <a:noFill/>
                     </a:lnT>
-                    <a:lnB w="10160">
+                    <a:lnB w="15240">
                       <a:solidFill>
                         <a:srgbClr val="626669"/>
                       </a:solidFill>
@@ -18189,7 +18189,7 @@
                     <a:lnT w="0">
                       <a:noFill/>
                     </a:lnT>
-                    <a:lnB w="10160">
+                    <a:lnB w="15240">
                       <a:solidFill>
                         <a:srgbClr val="626669"/>
                       </a:solidFill>
@@ -18252,7 +18252,7 @@
                     <a:lnT w="0">
                       <a:noFill/>
                     </a:lnT>
-                    <a:lnB w="10160">
+                    <a:lnB w="15240">
                       <a:solidFill>
                         <a:srgbClr val="626669"/>
                       </a:solidFill>
@@ -31778,13 +31778,13 @@
                     <a:lnR w="0">
                       <a:noFill/>
                     </a:lnR>
-                    <a:lnT w="10160">
+                    <a:lnT w="15240">
                       <a:solidFill>
                         <a:srgbClr val="626669"/>
                       </a:solidFill>
                       <a:prstDash val="solid"/>
                     </a:lnT>
-                    <a:lnB w="10160">
+                    <a:lnB w="7620">
                       <a:solidFill>
                         <a:srgbClr val="626669"/>
                       </a:solidFill>
@@ -31844,13 +31844,13 @@
                     <a:lnR w="0">
                       <a:noFill/>
                     </a:lnR>
-                    <a:lnT w="10160">
+                    <a:lnT w="15240">
                       <a:solidFill>
                         <a:srgbClr val="626669"/>
                       </a:solidFill>
                       <a:prstDash val="solid"/>
                     </a:lnT>
-                    <a:lnB w="10160">
+                    <a:lnB w="7620">
                       <a:solidFill>
                         <a:srgbClr val="626669"/>
                       </a:solidFill>
@@ -31910,13 +31910,13 @@
                     <a:lnR w="0">
                       <a:noFill/>
                     </a:lnR>
-                    <a:lnT w="10160">
+                    <a:lnT w="15240">
                       <a:solidFill>
                         <a:srgbClr val="626669"/>
                       </a:solidFill>
                       <a:prstDash val="solid"/>
                     </a:lnT>
-                    <a:lnB w="10160">
+                    <a:lnB w="7620">
                       <a:solidFill>
                         <a:srgbClr val="626669"/>
                       </a:solidFill>
@@ -31976,13 +31976,13 @@
                     <a:lnR w="0">
                       <a:noFill/>
                     </a:lnR>
-                    <a:lnT w="10160">
+                    <a:lnT w="15240">
                       <a:solidFill>
                         <a:srgbClr val="626669"/>
                       </a:solidFill>
                       <a:prstDash val="solid"/>
                     </a:lnT>
-                    <a:lnB w="10160">
+                    <a:lnB w="7620">
                       <a:solidFill>
                         <a:srgbClr val="626669"/>
                       </a:solidFill>
@@ -32042,13 +32042,13 @@
                     <a:lnR w="0">
                       <a:noFill/>
                     </a:lnR>
-                    <a:lnT w="10160">
+                    <a:lnT w="15240">
                       <a:solidFill>
                         <a:srgbClr val="626669"/>
                       </a:solidFill>
                       <a:prstDash val="solid"/>
                     </a:lnT>
-                    <a:lnB w="10160">
+                    <a:lnB w="7620">
                       <a:solidFill>
                         <a:srgbClr val="626669"/>
                       </a:solidFill>
@@ -32110,7 +32110,7 @@
                     <a:lnR w="0">
                       <a:noFill/>
                     </a:lnR>
-                    <a:lnT w="10160">
+                    <a:lnT w="7620">
                       <a:solidFill>
                         <a:srgbClr val="626669"/>
                       </a:solidFill>
@@ -32173,7 +32173,7 @@
                     <a:lnR w="0">
                       <a:noFill/>
                     </a:lnR>
-                    <a:lnT w="10160">
+                    <a:lnT w="7620">
                       <a:solidFill>
                         <a:srgbClr val="626669"/>
                       </a:solidFill>
@@ -32236,7 +32236,7 @@
                     <a:lnR w="0">
                       <a:noFill/>
                     </a:lnR>
-                    <a:lnT w="10160">
+                    <a:lnT w="7620">
                       <a:solidFill>
                         <a:srgbClr val="626669"/>
                       </a:solidFill>
@@ -32299,7 +32299,7 @@
                     <a:lnR w="0">
                       <a:noFill/>
                     </a:lnR>
-                    <a:lnT w="10160">
+                    <a:lnT w="7620">
                       <a:solidFill>
                         <a:srgbClr val="626669"/>
                       </a:solidFill>
@@ -32362,7 +32362,7 @@
                     <a:lnR w="0">
                       <a:noFill/>
                     </a:lnR>
-                    <a:lnT w="10160">
+                    <a:lnT w="7620">
                       <a:solidFill>
                         <a:srgbClr val="626669"/>
                       </a:solidFill>
@@ -32732,7 +32732,7 @@
                     <a:lnT w="0">
                       <a:noFill/>
                     </a:lnT>
-                    <a:lnB w="10160">
+                    <a:lnB w="15240">
                       <a:solidFill>
                         <a:srgbClr val="626669"/>
                       </a:solidFill>
@@ -32795,7 +32795,7 @@
                     <a:lnT w="0">
                       <a:noFill/>
                     </a:lnT>
-                    <a:lnB w="10160">
+                    <a:lnB w="15240">
                       <a:solidFill>
                         <a:srgbClr val="626669"/>
                       </a:solidFill>
@@ -32858,7 +32858,7 @@
                     <a:lnT w="0">
                       <a:noFill/>
                     </a:lnT>
-                    <a:lnB w="10160">
+                    <a:lnB w="15240">
                       <a:solidFill>
                         <a:srgbClr val="626669"/>
                       </a:solidFill>
@@ -32921,7 +32921,7 @@
                     <a:lnT w="0">
                       <a:noFill/>
                     </a:lnT>
-                    <a:lnB w="10160">
+                    <a:lnB w="15240">
                       <a:solidFill>
                         <a:srgbClr val="626669"/>
                       </a:solidFill>
@@ -32984,7 +32984,7 @@
                     <a:lnT w="0">
                       <a:noFill/>
                     </a:lnT>
-                    <a:lnB w="10160">
+                    <a:lnB w="15240">
                       <a:solidFill>
                         <a:srgbClr val="626669"/>
                       </a:solidFill>
@@ -33342,13 +33342,13 @@
                     <a:lnR w="0">
                       <a:noFill/>
                     </a:lnR>
-                    <a:lnT w="10160">
+                    <a:lnT w="15240">
                       <a:solidFill>
                         <a:srgbClr val="626669"/>
                       </a:solidFill>
                       <a:prstDash val="solid"/>
                     </a:lnT>
-                    <a:lnB w="10160">
+                    <a:lnB w="7620">
                       <a:solidFill>
                         <a:srgbClr val="626669"/>
                       </a:solidFill>
@@ -33408,13 +33408,13 @@
                     <a:lnR w="0">
                       <a:noFill/>
                     </a:lnR>
-                    <a:lnT w="10160">
+                    <a:lnT w="15240">
                       <a:solidFill>
                         <a:srgbClr val="626669"/>
                       </a:solidFill>
                       <a:prstDash val="solid"/>
                     </a:lnT>
-                    <a:lnB w="10160">
+                    <a:lnB w="7620">
                       <a:solidFill>
                         <a:srgbClr val="626669"/>
                       </a:solidFill>
@@ -33474,13 +33474,13 @@
                     <a:lnR w="0">
                       <a:noFill/>
                     </a:lnR>
-                    <a:lnT w="10160">
+                    <a:lnT w="15240">
                       <a:solidFill>
                         <a:srgbClr val="626669"/>
                       </a:solidFill>
                       <a:prstDash val="solid"/>
                     </a:lnT>
-                    <a:lnB w="10160">
+                    <a:lnB w="7620">
                       <a:solidFill>
                         <a:srgbClr val="626669"/>
                       </a:solidFill>
@@ -33540,13 +33540,13 @@
                     <a:lnR w="0">
                       <a:noFill/>
                     </a:lnR>
-                    <a:lnT w="10160">
+                    <a:lnT w="15240">
                       <a:solidFill>
                         <a:srgbClr val="626669"/>
                       </a:solidFill>
                       <a:prstDash val="solid"/>
                     </a:lnT>
-                    <a:lnB w="10160">
+                    <a:lnB w="7620">
                       <a:solidFill>
                         <a:srgbClr val="626669"/>
                       </a:solidFill>
@@ -33606,13 +33606,13 @@
                     <a:lnR w="0">
                       <a:noFill/>
                     </a:lnR>
-                    <a:lnT w="10160">
+                    <a:lnT w="15240">
                       <a:solidFill>
                         <a:srgbClr val="626669"/>
                       </a:solidFill>
                       <a:prstDash val="solid"/>
                     </a:lnT>
-                    <a:lnB w="10160">
+                    <a:lnB w="7620">
                       <a:solidFill>
                         <a:srgbClr val="626669"/>
                       </a:solidFill>
@@ -33672,13 +33672,13 @@
                     <a:lnR w="0">
                       <a:noFill/>
                     </a:lnR>
-                    <a:lnT w="10160">
+                    <a:lnT w="15240">
                       <a:solidFill>
                         <a:srgbClr val="626669"/>
                       </a:solidFill>
                       <a:prstDash val="solid"/>
                     </a:lnT>
-                    <a:lnB w="10160">
+                    <a:lnB w="7620">
                       <a:solidFill>
                         <a:srgbClr val="626669"/>
                       </a:solidFill>
@@ -33738,13 +33738,13 @@
                     <a:lnR w="0">
                       <a:noFill/>
                     </a:lnR>
-                    <a:lnT w="10160">
+                    <a:lnT w="15240">
                       <a:solidFill>
                         <a:srgbClr val="626669"/>
                       </a:solidFill>
                       <a:prstDash val="solid"/>
                     </a:lnT>
-                    <a:lnB w="10160">
+                    <a:lnB w="7620">
                       <a:solidFill>
                         <a:srgbClr val="626669"/>
                       </a:solidFill>
@@ -33804,13 +33804,13 @@
                     <a:lnR w="0">
                       <a:noFill/>
                     </a:lnR>
-                    <a:lnT w="10160">
+                    <a:lnT w="15240">
                       <a:solidFill>
                         <a:srgbClr val="626669"/>
                       </a:solidFill>
                       <a:prstDash val="solid"/>
                     </a:lnT>
-                    <a:lnB w="10160">
+                    <a:lnB w="7620">
                       <a:solidFill>
                         <a:srgbClr val="626669"/>
                       </a:solidFill>
@@ -33870,13 +33870,13 @@
                     <a:lnR w="0">
                       <a:noFill/>
                     </a:lnR>
-                    <a:lnT w="10160">
+                    <a:lnT w="15240">
                       <a:solidFill>
                         <a:srgbClr val="626669"/>
                       </a:solidFill>
                       <a:prstDash val="solid"/>
                     </a:lnT>
-                    <a:lnB w="10160">
+                    <a:lnB w="7620">
                       <a:solidFill>
                         <a:srgbClr val="626669"/>
                       </a:solidFill>
@@ -33938,7 +33938,7 @@
                     <a:lnR w="0">
                       <a:noFill/>
                     </a:lnR>
-                    <a:lnT w="10160">
+                    <a:lnT w="7620">
                       <a:solidFill>
                         <a:srgbClr val="626669"/>
                       </a:solidFill>
@@ -34001,7 +34001,7 @@
                     <a:lnR w="0">
                       <a:noFill/>
                     </a:lnR>
-                    <a:lnT w="10160">
+                    <a:lnT w="7620">
                       <a:solidFill>
                         <a:srgbClr val="626669"/>
                       </a:solidFill>
@@ -34064,7 +34064,7 @@
                     <a:lnR w="0">
                       <a:noFill/>
                     </a:lnR>
-                    <a:lnT w="10160">
+                    <a:lnT w="7620">
                       <a:solidFill>
                         <a:srgbClr val="626669"/>
                       </a:solidFill>
@@ -34127,7 +34127,7 @@
                     <a:lnR w="0">
                       <a:noFill/>
                     </a:lnR>
-                    <a:lnT w="10160">
+                    <a:lnT w="7620">
                       <a:solidFill>
                         <a:srgbClr val="626669"/>
                       </a:solidFill>
@@ -34190,7 +34190,7 @@
                     <a:lnR w="0">
                       <a:noFill/>
                     </a:lnR>
-                    <a:lnT w="10160">
+                    <a:lnT w="7620">
                       <a:solidFill>
                         <a:srgbClr val="626669"/>
                       </a:solidFill>
@@ -34253,7 +34253,7 @@
                     <a:lnR w="0">
                       <a:noFill/>
                     </a:lnR>
-                    <a:lnT w="10160">
+                    <a:lnT w="7620">
                       <a:solidFill>
                         <a:srgbClr val="626669"/>
                       </a:solidFill>
@@ -34316,7 +34316,7 @@
                     <a:lnR w="0">
                       <a:noFill/>
                     </a:lnR>
-                    <a:lnT w="10160">
+                    <a:lnT w="7620">
                       <a:solidFill>
                         <a:srgbClr val="626669"/>
                       </a:solidFill>
@@ -34379,7 +34379,7 @@
                     <a:lnR w="0">
                       <a:noFill/>
                     </a:lnR>
-                    <a:lnT w="10160">
+                    <a:lnT w="7620">
                       <a:solidFill>
                         <a:srgbClr val="626669"/>
                       </a:solidFill>
@@ -34442,7 +34442,7 @@
                     <a:lnR w="0">
                       <a:noFill/>
                     </a:lnR>
-                    <a:lnT w="10160">
+                    <a:lnT w="7620">
                       <a:solidFill>
                         <a:srgbClr val="626669"/>
                       </a:solidFill>
@@ -34510,7 +34510,7 @@
                     <a:lnT w="0">
                       <a:noFill/>
                     </a:lnT>
-                    <a:lnB w="10160">
+                    <a:lnB w="15240">
                       <a:solidFill>
                         <a:srgbClr val="626669"/>
                       </a:solidFill>
@@ -34573,7 +34573,7 @@
                     <a:lnT w="0">
                       <a:noFill/>
                     </a:lnT>
-                    <a:lnB w="10160">
+                    <a:lnB w="15240">
                       <a:solidFill>
                         <a:srgbClr val="626669"/>
                       </a:solidFill>
@@ -34636,7 +34636,7 @@
                     <a:lnT w="0">
                       <a:noFill/>
                     </a:lnT>
-                    <a:lnB w="10160">
+                    <a:lnB w="15240">
                       <a:solidFill>
                         <a:srgbClr val="626669"/>
                       </a:solidFill>
@@ -34699,7 +34699,7 @@
                     <a:lnT w="0">
                       <a:noFill/>
                     </a:lnT>
-                    <a:lnB w="10160">
+                    <a:lnB w="15240">
                       <a:solidFill>
                         <a:srgbClr val="626669"/>
                       </a:solidFill>
@@ -34762,7 +34762,7 @@
                     <a:lnT w="0">
                       <a:noFill/>
                     </a:lnT>
-                    <a:lnB w="10160">
+                    <a:lnB w="15240">
                       <a:solidFill>
                         <a:srgbClr val="626669"/>
                       </a:solidFill>
@@ -34825,7 +34825,7 @@
                     <a:lnT w="0">
                       <a:noFill/>
                     </a:lnT>
-                    <a:lnB w="10160">
+                    <a:lnB w="15240">
                       <a:solidFill>
                         <a:srgbClr val="626669"/>
                       </a:solidFill>
@@ -34888,7 +34888,7 @@
                     <a:lnT w="0">
                       <a:noFill/>
                     </a:lnT>
-                    <a:lnB w="10160">
+                    <a:lnB w="15240">
                       <a:solidFill>
                         <a:srgbClr val="626669"/>
                       </a:solidFill>
@@ -34951,7 +34951,7 @@
                     <a:lnT w="0">
                       <a:noFill/>
                     </a:lnT>
-                    <a:lnB w="10160">
+                    <a:lnB w="15240">
                       <a:solidFill>
                         <a:srgbClr val="626669"/>
                       </a:solidFill>
@@ -35014,7 +35014,7 @@
                     <a:lnT w="0">
                       <a:noFill/>
                     </a:lnT>
-                    <a:lnB w="10160">
+                    <a:lnB w="15240">
                       <a:solidFill>
                         <a:srgbClr val="626669"/>
                       </a:solidFill>
@@ -35408,13 +35408,13 @@
                     <a:lnR w="0">
                       <a:noFill/>
                     </a:lnR>
-                    <a:lnT w="10160">
+                    <a:lnT w="15240">
                       <a:solidFill>
                         <a:srgbClr val="626669"/>
                       </a:solidFill>
                       <a:prstDash val="solid"/>
                     </a:lnT>
-                    <a:lnB w="10160">
+                    <a:lnB w="7620">
                       <a:solidFill>
                         <a:srgbClr val="626669"/>
                       </a:solidFill>
@@ -35474,13 +35474,13 @@
                     <a:lnR w="0">
                       <a:noFill/>
                     </a:lnR>
-                    <a:lnT w="10160">
+                    <a:lnT w="15240">
                       <a:solidFill>
                         <a:srgbClr val="626669"/>
                       </a:solidFill>
                       <a:prstDash val="solid"/>
                     </a:lnT>
-                    <a:lnB w="10160">
+                    <a:lnB w="7620">
                       <a:solidFill>
                         <a:srgbClr val="626669"/>
                       </a:solidFill>
@@ -35540,13 +35540,13 @@
                     <a:lnR w="0">
                       <a:noFill/>
                     </a:lnR>
-                    <a:lnT w="10160">
+                    <a:lnT w="15240">
                       <a:solidFill>
                         <a:srgbClr val="626669"/>
                       </a:solidFill>
                       <a:prstDash val="solid"/>
                     </a:lnT>
-                    <a:lnB w="10160">
+                    <a:lnB w="7620">
                       <a:solidFill>
                         <a:srgbClr val="626669"/>
                       </a:solidFill>
@@ -35606,13 +35606,13 @@
                     <a:lnR w="0">
                       <a:noFill/>
                     </a:lnR>
-                    <a:lnT w="10160">
+                    <a:lnT w="15240">
                       <a:solidFill>
                         <a:srgbClr val="626669"/>
                       </a:solidFill>
                       <a:prstDash val="solid"/>
                     </a:lnT>
-                    <a:lnB w="10160">
+                    <a:lnB w="7620">
                       <a:solidFill>
                         <a:srgbClr val="626669"/>
                       </a:solidFill>
@@ -35672,13 +35672,13 @@
                     <a:lnR w="0">
                       <a:noFill/>
                     </a:lnR>
-                    <a:lnT w="10160">
+                    <a:lnT w="15240">
                       <a:solidFill>
                         <a:srgbClr val="626669"/>
                       </a:solidFill>
                       <a:prstDash val="solid"/>
                     </a:lnT>
-                    <a:lnB w="10160">
+                    <a:lnB w="7620">
                       <a:solidFill>
                         <a:srgbClr val="626669"/>
                       </a:solidFill>
@@ -35738,13 +35738,13 @@
                     <a:lnR w="0">
                       <a:noFill/>
                     </a:lnR>
-                    <a:lnT w="10160">
+                    <a:lnT w="15240">
                       <a:solidFill>
                         <a:srgbClr val="626669"/>
                       </a:solidFill>
                       <a:prstDash val="solid"/>
                     </a:lnT>
-                    <a:lnB w="10160">
+                    <a:lnB w="7620">
                       <a:solidFill>
                         <a:srgbClr val="626669"/>
                       </a:solidFill>
@@ -35804,13 +35804,13 @@
                     <a:lnR w="0">
                       <a:noFill/>
                     </a:lnR>
-                    <a:lnT w="10160">
+                    <a:lnT w="15240">
                       <a:solidFill>
                         <a:srgbClr val="626669"/>
                       </a:solidFill>
                       <a:prstDash val="solid"/>
                     </a:lnT>
-                    <a:lnB w="10160">
+                    <a:lnB w="7620">
                       <a:solidFill>
                         <a:srgbClr val="626669"/>
                       </a:solidFill>
@@ -35870,13 +35870,13 @@
                     <a:lnR w="0">
                       <a:noFill/>
                     </a:lnR>
-                    <a:lnT w="10160">
+                    <a:lnT w="15240">
                       <a:solidFill>
                         <a:srgbClr val="626669"/>
                       </a:solidFill>
                       <a:prstDash val="solid"/>
                     </a:lnT>
-                    <a:lnB w="10160">
+                    <a:lnB w="7620">
                       <a:solidFill>
                         <a:srgbClr val="626669"/>
                       </a:solidFill>
@@ -35936,13 +35936,13 @@
                     <a:lnR w="0">
                       <a:noFill/>
                     </a:lnR>
-                    <a:lnT w="10160">
+                    <a:lnT w="15240">
                       <a:solidFill>
                         <a:srgbClr val="626669"/>
                       </a:solidFill>
                       <a:prstDash val="solid"/>
                     </a:lnT>
-                    <a:lnB w="10160">
+                    <a:lnB w="7620">
                       <a:solidFill>
                         <a:srgbClr val="626669"/>
                       </a:solidFill>
@@ -36004,7 +36004,7 @@
                     <a:lnR w="0">
                       <a:noFill/>
                     </a:lnR>
-                    <a:lnT w="10160">
+                    <a:lnT w="7620">
                       <a:solidFill>
                         <a:srgbClr val="626669"/>
                       </a:solidFill>
@@ -36067,7 +36067,7 @@
                     <a:lnR w="0">
                       <a:noFill/>
                     </a:lnR>
-                    <a:lnT w="10160">
+                    <a:lnT w="7620">
                       <a:solidFill>
                         <a:srgbClr val="626669"/>
                       </a:solidFill>
@@ -36130,7 +36130,7 @@
                     <a:lnR w="0">
                       <a:noFill/>
                     </a:lnR>
-                    <a:lnT w="10160">
+                    <a:lnT w="7620">
                       <a:solidFill>
                         <a:srgbClr val="626669"/>
                       </a:solidFill>
@@ -36193,7 +36193,7 @@
                     <a:lnR w="0">
                       <a:noFill/>
                     </a:lnR>
-                    <a:lnT w="10160">
+                    <a:lnT w="7620">
                       <a:solidFill>
                         <a:srgbClr val="626669"/>
                       </a:solidFill>
@@ -36256,7 +36256,7 @@
                     <a:lnR w="0">
                       <a:noFill/>
                     </a:lnR>
-                    <a:lnT w="10160">
+                    <a:lnT w="7620">
                       <a:solidFill>
                         <a:srgbClr val="626669"/>
                       </a:solidFill>
@@ -36319,7 +36319,7 @@
                     <a:lnR w="0">
                       <a:noFill/>
                     </a:lnR>
-                    <a:lnT w="10160">
+                    <a:lnT w="7620">
                       <a:solidFill>
                         <a:srgbClr val="626669"/>
                       </a:solidFill>
@@ -36382,7 +36382,7 @@
                     <a:lnR w="0">
                       <a:noFill/>
                     </a:lnR>
-                    <a:lnT w="10160">
+                    <a:lnT w="7620">
                       <a:solidFill>
                         <a:srgbClr val="626669"/>
                       </a:solidFill>
@@ -36445,7 +36445,7 @@
                     <a:lnR w="0">
                       <a:noFill/>
                     </a:lnR>
-                    <a:lnT w="10160">
+                    <a:lnT w="7620">
                       <a:solidFill>
                         <a:srgbClr val="626669"/>
                       </a:solidFill>
@@ -36508,7 +36508,7 @@
                     <a:lnR w="0">
                       <a:noFill/>
                     </a:lnR>
-                    <a:lnT w="10160">
+                    <a:lnT w="7620">
                       <a:solidFill>
                         <a:srgbClr val="626669"/>
                       </a:solidFill>
@@ -36576,7 +36576,7 @@
                     <a:lnT w="0">
                       <a:noFill/>
                     </a:lnT>
-                    <a:lnB w="10160">
+                    <a:lnB w="15240">
                       <a:solidFill>
                         <a:srgbClr val="626669"/>
                       </a:solidFill>
@@ -36639,7 +36639,7 @@
                     <a:lnT w="0">
                       <a:noFill/>
                     </a:lnT>
-                    <a:lnB w="10160">
+                    <a:lnB w="15240">
                       <a:solidFill>
                         <a:srgbClr val="626669"/>
                       </a:solidFill>
@@ -36702,7 +36702,7 @@
                     <a:lnT w="0">
                       <a:noFill/>
                     </a:lnT>
-                    <a:lnB w="10160">
+                    <a:lnB w="15240">
                       <a:solidFill>
                         <a:srgbClr val="626669"/>
                       </a:solidFill>
@@ -36765,7 +36765,7 @@
                     <a:lnT w="0">
                       <a:noFill/>
                     </a:lnT>
-                    <a:lnB w="10160">
+                    <a:lnB w="15240">
                       <a:solidFill>
                         <a:srgbClr val="626669"/>
                       </a:solidFill>
@@ -36828,7 +36828,7 @@
                     <a:lnT w="0">
                       <a:noFill/>
                     </a:lnT>
-                    <a:lnB w="10160">
+                    <a:lnB w="15240">
                       <a:solidFill>
                         <a:srgbClr val="626669"/>
                       </a:solidFill>
@@ -36891,7 +36891,7 @@
                     <a:lnT w="0">
                       <a:noFill/>
                     </a:lnT>
-                    <a:lnB w="10160">
+                    <a:lnB w="15240">
                       <a:solidFill>
                         <a:srgbClr val="626669"/>
                       </a:solidFill>
@@ -36954,7 +36954,7 @@
                     <a:lnT w="0">
                       <a:noFill/>
                     </a:lnT>
-                    <a:lnB w="10160">
+                    <a:lnB w="15240">
                       <a:solidFill>
                         <a:srgbClr val="626669"/>
                       </a:solidFill>
@@ -37017,7 +37017,7 @@
                     <a:lnT w="0">
                       <a:noFill/>
                     </a:lnT>
-                    <a:lnB w="10160">
+                    <a:lnB w="15240">
                       <a:solidFill>
                         <a:srgbClr val="626669"/>
                       </a:solidFill>
@@ -37080,7 +37080,7 @@
                     <a:lnT w="0">
                       <a:noFill/>
                     </a:lnT>
-                    <a:lnB w="10160">
+                    <a:lnB w="15240">
                       <a:solidFill>
                         <a:srgbClr val="626669"/>
                       </a:solidFill>
@@ -37782,13 +37782,13 @@
                     <a:lnR w="0">
                       <a:noFill/>
                     </a:lnR>
-                    <a:lnT w="10160">
+                    <a:lnT w="15240">
                       <a:solidFill>
                         <a:srgbClr val="626669"/>
                       </a:solidFill>
                       <a:prstDash val="solid"/>
                     </a:lnT>
-                    <a:lnB w="10160">
+                    <a:lnB w="7620">
                       <a:solidFill>
                         <a:srgbClr val="626669"/>
                       </a:solidFill>
@@ -37848,13 +37848,13 @@
                     <a:lnR w="0">
                       <a:noFill/>
                     </a:lnR>
-                    <a:lnT w="10160">
+                    <a:lnT w="15240">
                       <a:solidFill>
                         <a:srgbClr val="626669"/>
                       </a:solidFill>
                       <a:prstDash val="solid"/>
                     </a:lnT>
-                    <a:lnB w="10160">
+                    <a:lnB w="7620">
                       <a:solidFill>
                         <a:srgbClr val="626669"/>
                       </a:solidFill>
@@ -37914,13 +37914,13 @@
                     <a:lnR w="0">
                       <a:noFill/>
                     </a:lnR>
-                    <a:lnT w="10160">
+                    <a:lnT w="15240">
                       <a:solidFill>
                         <a:srgbClr val="626669"/>
                       </a:solidFill>
                       <a:prstDash val="solid"/>
                     </a:lnT>
-                    <a:lnB w="10160">
+                    <a:lnB w="7620">
                       <a:solidFill>
                         <a:srgbClr val="626669"/>
                       </a:solidFill>
@@ -37980,13 +37980,13 @@
                     <a:lnR w="0">
                       <a:noFill/>
                     </a:lnR>
-                    <a:lnT w="10160">
+                    <a:lnT w="15240">
                       <a:solidFill>
                         <a:srgbClr val="626669"/>
                       </a:solidFill>
                       <a:prstDash val="solid"/>
                     </a:lnT>
-                    <a:lnB w="10160">
+                    <a:lnB w="7620">
                       <a:solidFill>
                         <a:srgbClr val="626669"/>
                       </a:solidFill>
@@ -38046,13 +38046,13 @@
                     <a:lnR w="0">
                       <a:noFill/>
                     </a:lnR>
-                    <a:lnT w="10160">
+                    <a:lnT w="15240">
                       <a:solidFill>
                         <a:srgbClr val="626669"/>
                       </a:solidFill>
                       <a:prstDash val="solid"/>
                     </a:lnT>
-                    <a:lnB w="10160">
+                    <a:lnB w="7620">
                       <a:solidFill>
                         <a:srgbClr val="626669"/>
                       </a:solidFill>
@@ -38112,13 +38112,13 @@
                     <a:lnR w="0">
                       <a:noFill/>
                     </a:lnR>
-                    <a:lnT w="10160">
+                    <a:lnT w="15240">
                       <a:solidFill>
                         <a:srgbClr val="626669"/>
                       </a:solidFill>
                       <a:prstDash val="solid"/>
                     </a:lnT>
-                    <a:lnB w="10160">
+                    <a:lnB w="7620">
                       <a:solidFill>
                         <a:srgbClr val="626669"/>
                       </a:solidFill>
@@ -38180,7 +38180,7 @@
                     <a:lnR w="0">
                       <a:noFill/>
                     </a:lnR>
-                    <a:lnT w="10160">
+                    <a:lnT w="7620">
                       <a:solidFill>
                         <a:srgbClr val="626669"/>
                       </a:solidFill>
@@ -38243,7 +38243,7 @@
                     <a:lnR w="0">
                       <a:noFill/>
                     </a:lnR>
-                    <a:lnT w="10160">
+                    <a:lnT w="7620">
                       <a:solidFill>
                         <a:srgbClr val="626669"/>
                       </a:solidFill>
@@ -38306,7 +38306,7 @@
                     <a:lnR w="0">
                       <a:noFill/>
                     </a:lnR>
-                    <a:lnT w="10160">
+                    <a:lnT w="7620">
                       <a:solidFill>
                         <a:srgbClr val="626669"/>
                       </a:solidFill>
@@ -38369,7 +38369,7 @@
                     <a:lnR w="0">
                       <a:noFill/>
                     </a:lnR>
-                    <a:lnT w="10160">
+                    <a:lnT w="7620">
                       <a:solidFill>
                         <a:srgbClr val="626669"/>
                       </a:solidFill>
@@ -38432,7 +38432,7 @@
                     <a:lnR w="0">
                       <a:noFill/>
                     </a:lnR>
-                    <a:lnT w="10160">
+                    <a:lnT w="7620">
                       <a:solidFill>
                         <a:srgbClr val="626669"/>
                       </a:solidFill>
@@ -38495,7 +38495,7 @@
                     <a:lnR w="0">
                       <a:noFill/>
                     </a:lnR>
-                    <a:lnT w="10160">
+                    <a:lnT w="7620">
                       <a:solidFill>
                         <a:srgbClr val="626669"/>
                       </a:solidFill>
@@ -38925,7 +38925,7 @@
                     <a:lnT w="0">
                       <a:noFill/>
                     </a:lnT>
-                    <a:lnB w="10160">
+                    <a:lnB w="15240">
                       <a:solidFill>
                         <a:srgbClr val="626669"/>
                       </a:solidFill>
@@ -38988,7 +38988,7 @@
                     <a:lnT w="0">
                       <a:noFill/>
                     </a:lnT>
-                    <a:lnB w="10160">
+                    <a:lnB w="15240">
                       <a:solidFill>
                         <a:srgbClr val="626669"/>
                       </a:solidFill>
@@ -39051,7 +39051,7 @@
                     <a:lnT w="0">
                       <a:noFill/>
                     </a:lnT>
-                    <a:lnB w="10160">
+                    <a:lnB w="15240">
                       <a:solidFill>
                         <a:srgbClr val="626669"/>
                       </a:solidFill>
@@ -39114,7 +39114,7 @@
                     <a:lnT w="0">
                       <a:noFill/>
                     </a:lnT>
-                    <a:lnB w="10160">
+                    <a:lnB w="15240">
                       <a:solidFill>
                         <a:srgbClr val="626669"/>
                       </a:solidFill>
@@ -39177,7 +39177,7 @@
                     <a:lnT w="0">
                       <a:noFill/>
                     </a:lnT>
-                    <a:lnB w="10160">
+                    <a:lnB w="15240">
                       <a:solidFill>
                         <a:srgbClr val="626669"/>
                       </a:solidFill>
@@ -39240,7 +39240,7 @@
                     <a:lnT w="0">
                       <a:noFill/>
                     </a:lnT>
-                    <a:lnB w="10160">
+                    <a:lnB w="15240">
                       <a:solidFill>
                         <a:srgbClr val="626669"/>
                       </a:solidFill>
@@ -40570,13 +40570,13 @@
                     <a:lnR w="0">
                       <a:noFill/>
                     </a:lnR>
-                    <a:lnT w="10160">
+                    <a:lnT w="15240">
                       <a:solidFill>
                         <a:srgbClr val="626669"/>
                       </a:solidFill>
                       <a:prstDash val="solid"/>
                     </a:lnT>
-                    <a:lnB w="10160">
+                    <a:lnB w="7620">
                       <a:solidFill>
                         <a:srgbClr val="626669"/>
                       </a:solidFill>
@@ -40636,13 +40636,13 @@
                     <a:lnR w="0">
                       <a:noFill/>
                     </a:lnR>
-                    <a:lnT w="10160">
+                    <a:lnT w="15240">
                       <a:solidFill>
                         <a:srgbClr val="626669"/>
                       </a:solidFill>
                       <a:prstDash val="solid"/>
                     </a:lnT>
-                    <a:lnB w="10160">
+                    <a:lnB w="7620">
                       <a:solidFill>
                         <a:srgbClr val="626669"/>
                       </a:solidFill>
@@ -40702,13 +40702,13 @@
                     <a:lnR w="0">
                       <a:noFill/>
                     </a:lnR>
-                    <a:lnT w="10160">
+                    <a:lnT w="15240">
                       <a:solidFill>
                         <a:srgbClr val="626669"/>
                       </a:solidFill>
                       <a:prstDash val="solid"/>
                     </a:lnT>
-                    <a:lnB w="10160">
+                    <a:lnB w="7620">
                       <a:solidFill>
                         <a:srgbClr val="626669"/>
                       </a:solidFill>
@@ -40768,13 +40768,13 @@
                     <a:lnR w="0">
                       <a:noFill/>
                     </a:lnR>
-                    <a:lnT w="10160">
+                    <a:lnT w="15240">
                       <a:solidFill>
                         <a:srgbClr val="626669"/>
                       </a:solidFill>
                       <a:prstDash val="solid"/>
                     </a:lnT>
-                    <a:lnB w="10160">
+                    <a:lnB w="7620">
                       <a:solidFill>
                         <a:srgbClr val="626669"/>
                       </a:solidFill>
@@ -40834,13 +40834,13 @@
                     <a:lnR w="0">
                       <a:noFill/>
                     </a:lnR>
-                    <a:lnT w="10160">
+                    <a:lnT w="15240">
                       <a:solidFill>
                         <a:srgbClr val="626669"/>
                       </a:solidFill>
                       <a:prstDash val="solid"/>
                     </a:lnT>
-                    <a:lnB w="10160">
+                    <a:lnB w="7620">
                       <a:solidFill>
                         <a:srgbClr val="626669"/>
                       </a:solidFill>
@@ -40900,13 +40900,13 @@
                     <a:lnR w="0">
                       <a:noFill/>
                     </a:lnR>
-                    <a:lnT w="10160">
+                    <a:lnT w="15240">
                       <a:solidFill>
                         <a:srgbClr val="626669"/>
                       </a:solidFill>
                       <a:prstDash val="solid"/>
                     </a:lnT>
-                    <a:lnB w="10160">
+                    <a:lnB w="7620">
                       <a:solidFill>
                         <a:srgbClr val="626669"/>
                       </a:solidFill>
@@ -40968,7 +40968,7 @@
                     <a:lnR w="0">
                       <a:noFill/>
                     </a:lnR>
-                    <a:lnT w="10160">
+                    <a:lnT w="7620">
                       <a:solidFill>
                         <a:srgbClr val="626669"/>
                       </a:solidFill>
@@ -41031,7 +41031,7 @@
                     <a:lnR w="0">
                       <a:noFill/>
                     </a:lnR>
-                    <a:lnT w="10160">
+                    <a:lnT w="7620">
                       <a:solidFill>
                         <a:srgbClr val="626669"/>
                       </a:solidFill>
@@ -41094,7 +41094,7 @@
                     <a:lnR w="0">
                       <a:noFill/>
                     </a:lnR>
-                    <a:lnT w="10160">
+                    <a:lnT w="7620">
                       <a:solidFill>
                         <a:srgbClr val="626669"/>
                       </a:solidFill>
@@ -41157,7 +41157,7 @@
                     <a:lnR w="0">
                       <a:noFill/>
                     </a:lnR>
-                    <a:lnT w="10160">
+                    <a:lnT w="7620">
                       <a:solidFill>
                         <a:srgbClr val="626669"/>
                       </a:solidFill>
@@ -41220,7 +41220,7 @@
                     <a:lnR w="0">
                       <a:noFill/>
                     </a:lnR>
-                    <a:lnT w="10160">
+                    <a:lnT w="7620">
                       <a:solidFill>
                         <a:srgbClr val="626669"/>
                       </a:solidFill>
@@ -41283,7 +41283,7 @@
                     <a:lnR w="0">
                       <a:noFill/>
                     </a:lnR>
-                    <a:lnT w="10160">
+                    <a:lnT w="7620">
                       <a:solidFill>
                         <a:srgbClr val="626669"/>
                       </a:solidFill>
@@ -41713,7 +41713,7 @@
                     <a:lnT w="0">
                       <a:noFill/>
                     </a:lnT>
-                    <a:lnB w="10160">
+                    <a:lnB w="15240">
                       <a:solidFill>
                         <a:srgbClr val="626669"/>
                       </a:solidFill>
@@ -41776,7 +41776,7 @@
                     <a:lnT w="0">
                       <a:noFill/>
                     </a:lnT>
-                    <a:lnB w="10160">
+                    <a:lnB w="15240">
                       <a:solidFill>
                         <a:srgbClr val="626669"/>
                       </a:solidFill>
@@ -41839,7 +41839,7 @@
                     <a:lnT w="0">
                       <a:noFill/>
                     </a:lnT>
-                    <a:lnB w="10160">
+                    <a:lnB w="15240">
                       <a:solidFill>
                         <a:srgbClr val="626669"/>
                       </a:solidFill>
@@ -41902,7 +41902,7 @@
                     <a:lnT w="0">
                       <a:noFill/>
                     </a:lnT>
-                    <a:lnB w="10160">
+                    <a:lnB w="15240">
                       <a:solidFill>
                         <a:srgbClr val="626669"/>
                       </a:solidFill>
@@ -41965,7 +41965,7 @@
                     <a:lnT w="0">
                       <a:noFill/>
                     </a:lnT>
-                    <a:lnB w="10160">
+                    <a:lnB w="15240">
                       <a:solidFill>
                         <a:srgbClr val="626669"/>
                       </a:solidFill>
@@ -42028,7 +42028,7 @@
                     <a:lnT w="0">
                       <a:noFill/>
                     </a:lnT>
-                    <a:lnB w="10160">
+                    <a:lnB w="15240">
                       <a:solidFill>
                         <a:srgbClr val="626669"/>
                       </a:solidFill>
@@ -43698,13 +43698,13 @@
                     <a:lnR w="0">
                       <a:noFill/>
                     </a:lnR>
-                    <a:lnT w="10160">
+                    <a:lnT w="15240">
                       <a:solidFill>
                         <a:srgbClr val="626669"/>
                       </a:solidFill>
                       <a:prstDash val="solid"/>
                     </a:lnT>
-                    <a:lnB w="10160">
+                    <a:lnB w="7620">
                       <a:solidFill>
                         <a:srgbClr val="626669"/>
                       </a:solidFill>
@@ -43764,13 +43764,13 @@
                     <a:lnR w="0">
                       <a:noFill/>
                     </a:lnR>
-                    <a:lnT w="10160">
+                    <a:lnT w="15240">
                       <a:solidFill>
                         <a:srgbClr val="626669"/>
                       </a:solidFill>
                       <a:prstDash val="solid"/>
                     </a:lnT>
-                    <a:lnB w="10160">
+                    <a:lnB w="7620">
                       <a:solidFill>
                         <a:srgbClr val="626669"/>
                       </a:solidFill>
@@ -43830,13 +43830,13 @@
                     <a:lnR w="0">
                       <a:noFill/>
                     </a:lnR>
-                    <a:lnT w="10160">
+                    <a:lnT w="15240">
                       <a:solidFill>
                         <a:srgbClr val="626669"/>
                       </a:solidFill>
                       <a:prstDash val="solid"/>
                     </a:lnT>
-                    <a:lnB w="10160">
+                    <a:lnB w="7620">
                       <a:solidFill>
                         <a:srgbClr val="626669"/>
                       </a:solidFill>
@@ -43898,13 +43898,13 @@
                     <a:lnR w="0">
                       <a:noFill/>
                     </a:lnR>
-                    <a:lnT w="10160">
+                    <a:lnT w="7620">
                       <a:solidFill>
                         <a:srgbClr val="626669"/>
                       </a:solidFill>
                       <a:prstDash val="solid"/>
                     </a:lnT>
-                    <a:lnB w="10160">
+                    <a:lnB w="15240">
                       <a:solidFill>
                         <a:srgbClr val="626669"/>
                       </a:solidFill>
@@ -43964,13 +43964,13 @@
                     <a:lnR w="0">
                       <a:noFill/>
                     </a:lnR>
-                    <a:lnT w="10160">
+                    <a:lnT w="7620">
                       <a:solidFill>
                         <a:srgbClr val="626669"/>
                       </a:solidFill>
                       <a:prstDash val="solid"/>
                     </a:lnT>
-                    <a:lnB w="10160">
+                    <a:lnB w="15240">
                       <a:solidFill>
                         <a:srgbClr val="626669"/>
                       </a:solidFill>
@@ -44030,13 +44030,13 @@
                     <a:lnR w="0">
                       <a:noFill/>
                     </a:lnR>
-                    <a:lnT w="10160">
+                    <a:lnT w="7620">
                       <a:solidFill>
                         <a:srgbClr val="626669"/>
                       </a:solidFill>
                       <a:prstDash val="solid"/>
                     </a:lnT>
-                    <a:lnB w="10160">
+                    <a:lnB w="15240">
                       <a:solidFill>
                         <a:srgbClr val="626669"/>
                       </a:solidFill>

--- a/slides/datasets-in-10-minutes-snli.pptx
+++ b/slides/datasets-in-10-minutes-snli.pptx
@@ -10627,41 +10627,6 @@
               <a:t>検証対象の98%では3票以上が一致し、58.3%では全員が一致した。検証は約30人の信頼された作業者が担当した。</a:t>
             </a:r>
           </a:p>
-          <a:p>
-            <a:pPr lvl="0" marL="457200" indent="-355600">
-              <a:lnSpc>
-                <a:spcPct val="110000"/>
-              </a:lnSpc>
-              <a:spcBef>
-                <a:spcPts val="0"/>
-              </a:spcBef>
-              <a:spcAft>
-                <a:spcPts val="800"/>
-              </a:spcAft>
-              <a:buSzPct val="57826"/>
-              <a:buFont typeface="Noto Sans CJK JP"/>
-              <a:buChar char="●"/>
-              <a:defRPr sz="2300" b="0" lang="ja-JP">
-                <a:solidFill>
-                  <a:srgbClr val="303437"/>
-                </a:solidFill>
-                <a:latin typeface="Noto Sans"/>
-                <a:ea typeface="Noto Sans CJK JP"/>
-                <a:cs typeface="Noto Sans"/>
-              </a:defRPr>
-            </a:pPr>
-            <a:r>
-              <a:rPr sz="2300" b="0" lang="ja-JP">
-                <a:solidFill>
-                  <a:srgbClr val="303437"/>
-                </a:solidFill>
-                <a:latin typeface="Noto Sans"/>
-                <a:ea typeface="Noto Sans CJK JP"/>
-                <a:cs typeface="Noto Sans"/>
-              </a:rPr>
-              <a:t>したがって、配布された文対の総数と、正解ラベル付きで3分類に使う文対数は異なる。</a:t>
-            </a:r>
-          </a:p>
         </p:txBody>
       </p:sp>
       <p:sp>
@@ -12154,7 +12119,7 @@
                 <a:ea typeface="Noto Sans CJK JP"/>
                 <a:cs typeface="Noto Sans"/>
               </a:rPr>
-              <a:t>文対数と前提文の種類数は異なる</a:t>
+              <a:t>文対数と前提文字列の種類数</a:t>
             </a:r>
             <a:endParaRPr sz="2800" lang="ja-JP">
               <a:latin typeface="Noto Sans"/>
@@ -13064,7 +13029,7 @@
                 <a:ea typeface="Noto Sans CJK JP"/>
                 <a:cs typeface="Noto Sans"/>
               </a:rPr>
-              <a:t>同じ前提から複数の仮説が作られるため、前提は繰り返し現れる。種類数は完全一致の文字列数。写真数や説明文ID数とは異なる。</a:t>
+              <a:t>同じ前提から複数の仮説が作られるため、前提は繰り返し現れる。種類数は完全一致の文字列数。</a:t>
             </a:r>
             <a:endParaRPr sz="1700" lang="ja-JP">
               <a:latin typeface="Noto Sans"/>
@@ -16162,504 +16127,6 @@
 </file>
 
 <file path=ppt/slides/slide26.xml><?xml version="1.0" encoding="utf-8"?>
-<p:sld xmlns:a="http://schemas.openxmlformats.org/drawingml/2006/main" xmlns:p="http://schemas.openxmlformats.org/presentationml/2006/main" xmlns:r="http://schemas.openxmlformats.org/officeDocument/2006/relationships">
-  <p:cSld>
-    <p:spTree>
-      <p:nvGrpSpPr>
-        <p:cNvPr id="1" name=""/>
-        <p:cNvGrpSpPr/>
-        <p:nvPr/>
-      </p:nvGrpSpPr>
-      <p:grpSpPr/>
-      <p:sp>
-        <p:nvSpPr>
-          <p:cNvPr id="2" name="Title 1"/>
-          <p:cNvSpPr>
-            <a:spLocks noGrp="1"/>
-          </p:cNvSpPr>
-          <p:nvPr>
-            <p:ph type="title"/>
-          </p:nvPr>
-        </p:nvSpPr>
-        <p:spPr>
-          <a:xfrm>
-            <a:off x="468172" y="650138"/>
-            <a:ext cx="8206740" cy="616305"/>
-          </a:xfrm>
-        </p:spPr>
-        <p:txBody>
-          <a:bodyPr wrap="none" lIns="0" rIns="0" tIns="0" bIns="0"/>
-          <a:lstStyle/>
-          <a:p>
-            <a:pPr algn="l">
-              <a:lnSpc>
-                <a:spcPct val="100000"/>
-              </a:lnSpc>
-              <a:spcBef>
-                <a:spcPts val="0"/>
-              </a:spcBef>
-              <a:spcAft>
-                <a:spcPts val="0"/>
-              </a:spcAft>
-              <a:defRPr sz="2800" b="1" lang="ja-JP">
-                <a:solidFill>
-                  <a:srgbClr val="303437"/>
-                </a:solidFill>
-                <a:latin typeface="Noto Sans"/>
-                <a:ea typeface="Noto Sans CJK JP"/>
-                <a:cs typeface="Noto Sans"/>
-              </a:defRPr>
-            </a:pPr>
-            <a:r>
-              <a:rPr sz="2800" b="1" lang="ja-JP">
-                <a:solidFill>
-                  <a:srgbClr val="303437"/>
-                </a:solidFill>
-                <a:latin typeface="Noto Sans"/>
-                <a:ea typeface="Noto Sans CJK JP"/>
-                <a:cs typeface="Noto Sans"/>
-              </a:rPr>
-              <a:t>文を数値表現へ変換して関係を予測する</a:t>
-            </a:r>
-          </a:p>
-        </p:txBody>
-      </p:sp>
-      <p:sp>
-        <p:nvSpPr>
-          <p:cNvPr id="4" name="Title 3"/>
-          <p:cNvSpPr>
-            <a:spLocks noGrp="1"/>
-          </p:cNvSpPr>
-          <p:nvPr>
-            <p:ph type="title" idx="2"/>
-          </p:nvPr>
-        </p:nvSpPr>
-        <p:spPr/>
-        <p:txBody>
-          <a:bodyPr anchor="ctr" tIns="0" bIns="0"/>
-          <a:lstStyle/>
-          <a:p>
-            <a:pPr>
-              <a:lnSpc>
-                <a:spcPct val="100000"/>
-              </a:lnSpc>
-              <a:spcBef>
-                <a:spcPts val="0"/>
-              </a:spcBef>
-              <a:spcAft>
-                <a:spcPts val="0"/>
-              </a:spcAft>
-            </a:pPr>
-            <a:r>
-              <a:rPr sz="1400" b="1" lang="ja-JP">
-                <a:solidFill>
-                  <a:srgbClr val="FFFEF8"/>
-                </a:solidFill>
-                <a:latin typeface="Noto Sans"/>
-                <a:ea typeface="Noto Sans CJK JP"/>
-                <a:cs typeface="Noto Sans"/>
-              </a:rPr>
-              <a:t>3. 自然言語推論の評価とモデル性能</a:t>
-            </a:r>
-          </a:p>
-        </p:txBody>
-      </p:sp>
-      <p:sp>
-        <p:nvSpPr>
-          <p:cNvPr id="5" name="body"/>
-          <p:cNvSpPr/>
-          <p:nvPr>
-            <p:ph type="body" idx="1"/>
-          </p:nvPr>
-        </p:nvSpPr>
-        <p:spPr>
-          <a:xfrm>
-            <a:off x="594360" y="1262435"/>
-            <a:ext cx="7955279" cy="3200400"/>
-          </a:xfrm>
-          <a:prstGeom prst="rect">
-            <a:avLst/>
-          </a:prstGeom>
-          <a:noFill/>
-        </p:spPr>
-        <p:txBody>
-          <a:bodyPr wrap="square" lIns="0" rIns="0" tIns="0" bIns="0">
-            <a:spAutoFit/>
-          </a:bodyPr>
-          <a:lstStyle/>
-          <a:p>
-            <a:pPr lvl="0" marL="457200" indent="-355600">
-              <a:lnSpc>
-                <a:spcPct val="110000"/>
-              </a:lnSpc>
-              <a:spcBef>
-                <a:spcPts val="0"/>
-              </a:spcBef>
-              <a:spcAft>
-                <a:spcPts val="500"/>
-              </a:spcAft>
-              <a:buSzPct val="63333"/>
-              <a:buFont typeface="Noto Sans CJK JP"/>
-              <a:buChar char="●"/>
-              <a:defRPr sz="2100" b="0" lang="ja-JP">
-                <a:solidFill>
-                  <a:srgbClr val="303437"/>
-                </a:solidFill>
-                <a:latin typeface="Noto Sans"/>
-                <a:ea typeface="Noto Sans CJK JP"/>
-                <a:cs typeface="Noto Sans"/>
-              </a:defRPr>
-            </a:pPr>
-            <a:r>
-              <a:rPr sz="2100" b="0" lang="ja-JP">
-                <a:solidFill>
-                  <a:srgbClr val="303437"/>
-                </a:solidFill>
-                <a:latin typeface="Noto Sans"/>
-                <a:ea typeface="Noto Sans CJK JP"/>
-                <a:cs typeface="Noto Sans"/>
-              </a:rPr>
-              <a:t>ニューラルモデルは、まず単語を数値のベクトルへ変換し、単語列から文の特徴を計算する。</a:t>
-            </a:r>
-          </a:p>
-          <a:p>
-            <a:pPr lvl="0" marL="457200" indent="-355600">
-              <a:lnSpc>
-                <a:spcPct val="110000"/>
-              </a:lnSpc>
-              <a:spcBef>
-                <a:spcPts val="0"/>
-              </a:spcBef>
-              <a:spcAft>
-                <a:spcPts val="500"/>
-              </a:spcAft>
-              <a:buSzPct val="63333"/>
-              <a:buFont typeface="Noto Sans CJK JP"/>
-              <a:buChar char="●"/>
-              <a:defRPr sz="2100" b="0" lang="ja-JP">
-                <a:solidFill>
-                  <a:srgbClr val="303437"/>
-                </a:solidFill>
-                <a:latin typeface="Noto Sans"/>
-                <a:ea typeface="Noto Sans CJK JP"/>
-                <a:cs typeface="Noto Sans"/>
-              </a:defRPr>
-            </a:pPr>
-            <a:r>
-              <a:rPr sz="2100" b="0" lang="ja-JP">
-                <a:solidFill>
-                  <a:srgbClr val="303437"/>
-                </a:solidFill>
-                <a:latin typeface="Noto Sans"/>
-                <a:ea typeface="Noto Sans CJK JP"/>
-                <a:cs typeface="Noto Sans"/>
-              </a:rPr>
-              <a:t>LSTMは、語を順に処理して離れた位置の情報を保持する再帰型ネットワークである。ESIM（2017）は双方向LSTMと、文間の語の対応を重み付けする注意機構を使う。</a:t>
-            </a:r>
-          </a:p>
-          <a:p>
-            <a:pPr lvl="0" marL="457200" indent="-355600">
-              <a:lnSpc>
-                <a:spcPct val="110000"/>
-              </a:lnSpc>
-              <a:spcBef>
-                <a:spcPts val="0"/>
-              </a:spcBef>
-              <a:spcAft>
-                <a:spcPts val="500"/>
-              </a:spcAft>
-              <a:buSzPct val="63333"/>
-              <a:buFont typeface="Noto Sans CJK JP"/>
-              <a:buChar char="●"/>
-              <a:defRPr sz="2100" b="0" lang="ja-JP">
-                <a:solidFill>
-                  <a:srgbClr val="303437"/>
-                </a:solidFill>
-                <a:latin typeface="Noto Sans"/>
-                <a:ea typeface="Noto Sans CJK JP"/>
-                <a:cs typeface="Noto Sans"/>
-              </a:defRPr>
-            </a:pPr>
-            <a:r>
-              <a:rPr sz="2100" b="0" lang="ja-JP">
-                <a:solidFill>
-                  <a:srgbClr val="303437"/>
-                </a:solidFill>
-                <a:latin typeface="Noto Sans"/>
-                <a:ea typeface="Noto Sans CJK JP"/>
-                <a:cs typeface="Noto Sans"/>
-              </a:rPr>
-              <a:t>BERTは大量の文で事前学習した言語モデルである。SemBERT（2020）は、誰が何をしたかなどの意味役割をBERTへ加える。</a:t>
-            </a:r>
-          </a:p>
-        </p:txBody>
-      </p:sp>
-      <p:sp>
-        <p:nvSpPr>
-          <p:cNvPr id="6" name="TextBox 5"/>
-          <p:cNvSpPr txBox="1"/>
-          <p:nvPr/>
-        </p:nvSpPr>
-        <p:spPr>
-          <a:xfrm>
-            <a:off x="502920" y="4343400"/>
-            <a:ext cx="8183879" cy="177800"/>
-          </a:xfrm>
-          <a:prstGeom prst="rect">
-            <a:avLst/>
-          </a:prstGeom>
-          <a:noFill/>
-        </p:spPr>
-        <p:txBody>
-          <a:bodyPr wrap="square" lIns="0" rIns="0" tIns="0" bIns="0">
-            <a:spAutoFit/>
-          </a:bodyPr>
-          <a:lstStyle/>
-          <a:p>
-            <a:pPr algn="l">
-              <a:lnSpc>
-                <a:spcPts val="1400"/>
-              </a:lnSpc>
-              <a:spcBef>
-                <a:spcPts val="0"/>
-              </a:spcBef>
-              <a:spcAft>
-                <a:spcPts val="0"/>
-              </a:spcAft>
-            </a:pPr>
-            <a:r>
-              <a:rPr sz="800" b="0" lang="ja-JP">
-                <a:solidFill>
-                  <a:srgbClr val="626669"/>
-                </a:solidFill>
-                <a:latin typeface="Noto Sans"/>
-                <a:ea typeface="Noto Sans CJK JP"/>
-                <a:cs typeface="Noto Sans"/>
-              </a:rPr>
-              <a:t/>
-            </a:r>
-            <a:r>
-              <a:rPr sz="800" lang="ja-JP">
-                <a:solidFill>
-                  <a:srgbClr val="626669"/>
-                </a:solidFill>
-                <a:latin typeface="Noto Sans"/>
-                <a:ea typeface="Noto Sans CJK JP"/>
-                <a:cs typeface="Noto Sans"/>
-              </a:rPr>
-              <a:t>[1] Bowman et al. (2015). EMNLP, pp. 632–642. A large annotated corpus for learning natural language inference.</a:t>
-            </a:r>
-          </a:p>
-        </p:txBody>
-      </p:sp>
-      <p:sp>
-        <p:nvSpPr>
-          <p:cNvPr id="7" name="TextBox 6"/>
-          <p:cNvSpPr txBox="1"/>
-          <p:nvPr/>
-        </p:nvSpPr>
-        <p:spPr>
-          <a:xfrm>
-            <a:off x="5921996" y="4361713"/>
-            <a:ext cx="2764803" cy="177800"/>
-          </a:xfrm>
-          <a:prstGeom prst="rect">
-            <a:avLst/>
-          </a:prstGeom>
-          <a:noFill/>
-        </p:spPr>
-        <p:txBody>
-          <a:bodyPr wrap="none" lIns="0" rIns="0" tIns="0" bIns="0">
-            <a:spAutoFit/>
-          </a:bodyPr>
-          <a:lstStyle/>
-          <a:p>
-            <a:pPr algn="l">
-              <a:lnSpc>
-                <a:spcPts val="1400"/>
-              </a:lnSpc>
-              <a:spcBef>
-                <a:spcPts val="0"/>
-              </a:spcBef>
-              <a:spcAft>
-                <a:spcPts val="0"/>
-              </a:spcAft>
-            </a:pPr>
-            <a:r>
-              <a:rPr sz="800" b="0" lang="ja-JP">
-                <a:solidFill>
-                  <a:srgbClr val="626669"/>
-                </a:solidFill>
-                <a:latin typeface="Noto Sans"/>
-                <a:ea typeface="Noto Sans CJK JP"/>
-                <a:cs typeface="Noto Sans"/>
-              </a:rPr>
-              <a:t/>
-            </a:r>
-            <a:r>
-              <a:rPr sz="800" lang="ja-JP">
-                <a:solidFill>
-                  <a:srgbClr val="626669"/>
-                </a:solidFill>
-                <a:latin typeface="Noto Sans"/>
-                <a:ea typeface="Noto Sans CJK JP"/>
-                <a:cs typeface="Noto Sans"/>
-                <a:hlinkClick r:id="rId2"/>
-              </a:rPr>
-              <a:t>https://aclanthology.org/D15-1075/</a:t>
-            </a:r>
-          </a:p>
-        </p:txBody>
-      </p:sp>
-      <p:sp>
-        <p:nvSpPr>
-          <p:cNvPr id="8" name="TextBox 7"/>
-          <p:cNvSpPr txBox="1"/>
-          <p:nvPr/>
-        </p:nvSpPr>
-        <p:spPr>
-          <a:xfrm>
-            <a:off x="502920" y="4699000"/>
-            <a:ext cx="8183879" cy="177800"/>
-          </a:xfrm>
-          <a:prstGeom prst="rect">
-            <a:avLst/>
-          </a:prstGeom>
-          <a:noFill/>
-        </p:spPr>
-        <p:txBody>
-          <a:bodyPr wrap="square" lIns="0" rIns="0" tIns="0" bIns="0">
-            <a:spAutoFit/>
-          </a:bodyPr>
-          <a:lstStyle/>
-          <a:p>
-            <a:pPr algn="l">
-              <a:lnSpc>
-                <a:spcPts val="1400"/>
-              </a:lnSpc>
-              <a:spcBef>
-                <a:spcPts val="0"/>
-              </a:spcBef>
-              <a:spcAft>
-                <a:spcPts val="0"/>
-              </a:spcAft>
-            </a:pPr>
-            <a:r>
-              <a:rPr sz="800" b="0" lang="ja-JP">
-                <a:solidFill>
-                  <a:srgbClr val="626669"/>
-                </a:solidFill>
-                <a:latin typeface="Noto Sans"/>
-                <a:ea typeface="Noto Sans CJK JP"/>
-                <a:cs typeface="Noto Sans"/>
-              </a:rPr>
-              <a:t/>
-            </a:r>
-            <a:r>
-              <a:rPr sz="800" lang="ja-JP">
-                <a:solidFill>
-                  <a:srgbClr val="626669"/>
-                </a:solidFill>
-                <a:latin typeface="Noto Sans"/>
-                <a:ea typeface="Noto Sans CJK JP"/>
-                <a:cs typeface="Noto Sans"/>
-              </a:rPr>
-              <a:t>[2] </a:t>
-            </a:r>
-            <a:r>
-              <a:rPr sz="800" lang="ja-JP">
-                <a:solidFill>
-                  <a:srgbClr val="626669"/>
-                </a:solidFill>
-                <a:latin typeface="Noto Sans"/>
-                <a:ea typeface="Noto Sans CJK JP"/>
-                <a:cs typeface="Noto Sans"/>
-                <a:hlinkClick r:id="rId3"/>
-              </a:rPr>
-              <a:t>https://github.com/coetaur0/ESIM</a:t>
-            </a:r>
-          </a:p>
-        </p:txBody>
-      </p:sp>
-      <p:sp>
-        <p:nvSpPr>
-          <p:cNvPr id="9" name="TextBox 8"/>
-          <p:cNvSpPr txBox="1"/>
-          <p:nvPr/>
-        </p:nvSpPr>
-        <p:spPr>
-          <a:xfrm>
-            <a:off x="502920" y="4876800"/>
-            <a:ext cx="8183879" cy="177800"/>
-          </a:xfrm>
-          <a:prstGeom prst="rect">
-            <a:avLst/>
-          </a:prstGeom>
-          <a:noFill/>
-        </p:spPr>
-        <p:txBody>
-          <a:bodyPr wrap="square" lIns="0" rIns="0" tIns="0" bIns="0">
-            <a:spAutoFit/>
-          </a:bodyPr>
-          <a:lstStyle/>
-          <a:p>
-            <a:pPr algn="l">
-              <a:lnSpc>
-                <a:spcPts val="1400"/>
-              </a:lnSpc>
-              <a:spcBef>
-                <a:spcPts val="0"/>
-              </a:spcBef>
-              <a:spcAft>
-                <a:spcPts val="0"/>
-              </a:spcAft>
-            </a:pPr>
-            <a:r>
-              <a:rPr sz="800" b="0" lang="ja-JP">
-                <a:solidFill>
-                  <a:srgbClr val="626669"/>
-                </a:solidFill>
-                <a:latin typeface="Noto Sans"/>
-                <a:ea typeface="Noto Sans CJK JP"/>
-                <a:cs typeface="Noto Sans"/>
-              </a:rPr>
-              <a:t/>
-            </a:r>
-            <a:r>
-              <a:rPr sz="800" lang="ja-JP">
-                <a:solidFill>
-                  <a:srgbClr val="626669"/>
-                </a:solidFill>
-                <a:latin typeface="Noto Sans"/>
-                <a:ea typeface="Noto Sans CJK JP"/>
-                <a:cs typeface="Noto Sans"/>
-              </a:rPr>
-              <a:t>[3] </a:t>
-            </a:r>
-            <a:r>
-              <a:rPr sz="800" lang="ja-JP">
-                <a:solidFill>
-                  <a:srgbClr val="626669"/>
-                </a:solidFill>
-                <a:latin typeface="Noto Sans"/>
-                <a:ea typeface="Noto Sans CJK JP"/>
-                <a:cs typeface="Noto Sans"/>
-                <a:hlinkClick r:id="rId4"/>
-              </a:rPr>
-              <a:t>https://github.com/cooelf/SemBERT</a:t>
-            </a:r>
-          </a:p>
-        </p:txBody>
-      </p:sp>
-    </p:spTree>
-  </p:cSld>
-  <p:clrMapOvr>
-    <a:masterClrMapping/>
-  </p:clrMapOvr>
-</p:sld>
-</file>
-
-<file path=ppt/slides/slide27.xml><?xml version="1.0" encoding="utf-8"?>
 <p:sld xmlns:a="http://schemas.openxmlformats.org/drawingml/2006/main" xmlns:p="http://schemas.openxmlformats.org/presentationml/2006/main" xmlns:r="http://schemas.openxmlformats.org/officeDocument/2006/relationships">
   <p:cSld>
     <p:spTree>
@@ -17508,7 +16975,7 @@
 </p:sld>
 </file>
 
-<file path=ppt/slides/slide28.xml><?xml version="1.0" encoding="utf-8"?>
+<file path=ppt/slides/slide27.xml><?xml version="1.0" encoding="utf-8"?>
 <p:sld xmlns:a="http://schemas.openxmlformats.org/drawingml/2006/main" xmlns:p="http://schemas.openxmlformats.org/presentationml/2006/main" xmlns:r="http://schemas.openxmlformats.org/officeDocument/2006/relationships">
   <p:cSld>
     <p:spTree>
@@ -18319,7 +17786,7 @@
                 <a:ea typeface="Noto Sans CJK JP"/>
                 <a:cs typeface="Noto Sans"/>
               </a:rPr>
-              <a:t>ESIMは文間の語の対応に注意を向け、SemBERTは誰が何をしたかを表す意味役割をBERTへ加える。各公開実装の報告値であり、学習条件は異なる。</a:t>
+              <a:t>ESIMは文間の語の対応に注意を向け、SemBERTは誰が何をしたかを表す意味役割をBERTへ加える。</a:t>
             </a:r>
             <a:endParaRPr sz="1700" lang="ja-JP">
               <a:latin typeface="Noto Sans"/>
@@ -18434,6 +17901,504 @@
                 <a:ea typeface="Noto Sans CJK JP"/>
                 <a:cs typeface="Noto Sans"/>
                 <a:hlinkClick r:id="rId3"/>
+              </a:rPr>
+              <a:t>https://github.com/cooelf/SemBERT</a:t>
+            </a:r>
+          </a:p>
+        </p:txBody>
+      </p:sp>
+    </p:spTree>
+  </p:cSld>
+  <p:clrMapOvr>
+    <a:masterClrMapping/>
+  </p:clrMapOvr>
+</p:sld>
+</file>
+
+<file path=ppt/slides/slide28.xml><?xml version="1.0" encoding="utf-8"?>
+<p:sld xmlns:a="http://schemas.openxmlformats.org/drawingml/2006/main" xmlns:p="http://schemas.openxmlformats.org/presentationml/2006/main" xmlns:r="http://schemas.openxmlformats.org/officeDocument/2006/relationships">
+  <p:cSld>
+    <p:spTree>
+      <p:nvGrpSpPr>
+        <p:cNvPr id="1" name=""/>
+        <p:cNvGrpSpPr/>
+        <p:nvPr/>
+      </p:nvGrpSpPr>
+      <p:grpSpPr/>
+      <p:sp>
+        <p:nvSpPr>
+          <p:cNvPr id="2" name="Title 1"/>
+          <p:cNvSpPr>
+            <a:spLocks noGrp="1"/>
+          </p:cNvSpPr>
+          <p:nvPr>
+            <p:ph type="title"/>
+          </p:nvPr>
+        </p:nvSpPr>
+        <p:spPr>
+          <a:xfrm>
+            <a:off x="468172" y="650138"/>
+            <a:ext cx="8206740" cy="616305"/>
+          </a:xfrm>
+        </p:spPr>
+        <p:txBody>
+          <a:bodyPr wrap="none" lIns="0" rIns="0" tIns="0" bIns="0"/>
+          <a:lstStyle/>
+          <a:p>
+            <a:pPr algn="l">
+              <a:lnSpc>
+                <a:spcPct val="100000"/>
+              </a:lnSpc>
+              <a:spcBef>
+                <a:spcPts val="0"/>
+              </a:spcBef>
+              <a:spcAft>
+                <a:spcPts val="0"/>
+              </a:spcAft>
+              <a:defRPr sz="2800" b="1" lang="ja-JP">
+                <a:solidFill>
+                  <a:srgbClr val="303437"/>
+                </a:solidFill>
+                <a:latin typeface="Noto Sans"/>
+                <a:ea typeface="Noto Sans CJK JP"/>
+                <a:cs typeface="Noto Sans"/>
+              </a:defRPr>
+            </a:pPr>
+            <a:r>
+              <a:rPr sz="2800" b="1" lang="ja-JP">
+                <a:solidFill>
+                  <a:srgbClr val="303437"/>
+                </a:solidFill>
+                <a:latin typeface="Noto Sans"/>
+                <a:ea typeface="Noto Sans CJK JP"/>
+                <a:cs typeface="Noto Sans"/>
+              </a:rPr>
+              <a:t>文を数値表現へ変換して関係を予測する</a:t>
+            </a:r>
+          </a:p>
+        </p:txBody>
+      </p:sp>
+      <p:sp>
+        <p:nvSpPr>
+          <p:cNvPr id="4" name="Title 3"/>
+          <p:cNvSpPr>
+            <a:spLocks noGrp="1"/>
+          </p:cNvSpPr>
+          <p:nvPr>
+            <p:ph type="title" idx="2"/>
+          </p:nvPr>
+        </p:nvSpPr>
+        <p:spPr/>
+        <p:txBody>
+          <a:bodyPr anchor="ctr" tIns="0" bIns="0"/>
+          <a:lstStyle/>
+          <a:p>
+            <a:pPr>
+              <a:lnSpc>
+                <a:spcPct val="100000"/>
+              </a:lnSpc>
+              <a:spcBef>
+                <a:spcPts val="0"/>
+              </a:spcBef>
+              <a:spcAft>
+                <a:spcPts val="0"/>
+              </a:spcAft>
+            </a:pPr>
+            <a:r>
+              <a:rPr sz="1400" b="1" lang="ja-JP">
+                <a:solidFill>
+                  <a:srgbClr val="FFFEF8"/>
+                </a:solidFill>
+                <a:latin typeface="Noto Sans"/>
+                <a:ea typeface="Noto Sans CJK JP"/>
+                <a:cs typeface="Noto Sans"/>
+              </a:rPr>
+              <a:t>3. 自然言語推論の評価とモデル性能</a:t>
+            </a:r>
+          </a:p>
+        </p:txBody>
+      </p:sp>
+      <p:sp>
+        <p:nvSpPr>
+          <p:cNvPr id="5" name="body"/>
+          <p:cNvSpPr/>
+          <p:nvPr>
+            <p:ph type="body" idx="1"/>
+          </p:nvPr>
+        </p:nvSpPr>
+        <p:spPr>
+          <a:xfrm>
+            <a:off x="594360" y="1262435"/>
+            <a:ext cx="7955279" cy="3200400"/>
+          </a:xfrm>
+          <a:prstGeom prst="rect">
+            <a:avLst/>
+          </a:prstGeom>
+          <a:noFill/>
+        </p:spPr>
+        <p:txBody>
+          <a:bodyPr wrap="square" lIns="0" rIns="0" tIns="0" bIns="0">
+            <a:spAutoFit/>
+          </a:bodyPr>
+          <a:lstStyle/>
+          <a:p>
+            <a:pPr lvl="0" marL="457200" indent="-355600">
+              <a:lnSpc>
+                <a:spcPct val="110000"/>
+              </a:lnSpc>
+              <a:spcBef>
+                <a:spcPts val="0"/>
+              </a:spcBef>
+              <a:spcAft>
+                <a:spcPts val="500"/>
+              </a:spcAft>
+              <a:buSzPct val="63333"/>
+              <a:buFont typeface="Noto Sans CJK JP"/>
+              <a:buChar char="●"/>
+              <a:defRPr sz="2100" b="0" lang="ja-JP">
+                <a:solidFill>
+                  <a:srgbClr val="303437"/>
+                </a:solidFill>
+                <a:latin typeface="Noto Sans"/>
+                <a:ea typeface="Noto Sans CJK JP"/>
+                <a:cs typeface="Noto Sans"/>
+              </a:defRPr>
+            </a:pPr>
+            <a:r>
+              <a:rPr sz="2100" b="0" lang="ja-JP">
+                <a:solidFill>
+                  <a:srgbClr val="303437"/>
+                </a:solidFill>
+                <a:latin typeface="Noto Sans"/>
+                <a:ea typeface="Noto Sans CJK JP"/>
+                <a:cs typeface="Noto Sans"/>
+              </a:rPr>
+              <a:t>ニューラルモデルは、まず単語を数値のベクトルへ変換し、単語列から文の特徴を計算する。</a:t>
+            </a:r>
+          </a:p>
+          <a:p>
+            <a:pPr lvl="0" marL="457200" indent="-355600">
+              <a:lnSpc>
+                <a:spcPct val="110000"/>
+              </a:lnSpc>
+              <a:spcBef>
+                <a:spcPts val="0"/>
+              </a:spcBef>
+              <a:spcAft>
+                <a:spcPts val="500"/>
+              </a:spcAft>
+              <a:buSzPct val="63333"/>
+              <a:buFont typeface="Noto Sans CJK JP"/>
+              <a:buChar char="●"/>
+              <a:defRPr sz="2100" b="0" lang="ja-JP">
+                <a:solidFill>
+                  <a:srgbClr val="303437"/>
+                </a:solidFill>
+                <a:latin typeface="Noto Sans"/>
+                <a:ea typeface="Noto Sans CJK JP"/>
+                <a:cs typeface="Noto Sans"/>
+              </a:defRPr>
+            </a:pPr>
+            <a:r>
+              <a:rPr sz="2100" b="0" lang="ja-JP">
+                <a:solidFill>
+                  <a:srgbClr val="303437"/>
+                </a:solidFill>
+                <a:latin typeface="Noto Sans"/>
+                <a:ea typeface="Noto Sans CJK JP"/>
+                <a:cs typeface="Noto Sans"/>
+              </a:rPr>
+              <a:t>LSTMは、語を順に処理して離れた位置の情報を保持する再帰型ネットワークである。ESIM（2017）は双方向LSTMと、文間の語の対応を重み付けする注意機構を使う。</a:t>
+            </a:r>
+          </a:p>
+          <a:p>
+            <a:pPr lvl="0" marL="457200" indent="-355600">
+              <a:lnSpc>
+                <a:spcPct val="110000"/>
+              </a:lnSpc>
+              <a:spcBef>
+                <a:spcPts val="0"/>
+              </a:spcBef>
+              <a:spcAft>
+                <a:spcPts val="500"/>
+              </a:spcAft>
+              <a:buSzPct val="63333"/>
+              <a:buFont typeface="Noto Sans CJK JP"/>
+              <a:buChar char="●"/>
+              <a:defRPr sz="2100" b="0" lang="ja-JP">
+                <a:solidFill>
+                  <a:srgbClr val="303437"/>
+                </a:solidFill>
+                <a:latin typeface="Noto Sans"/>
+                <a:ea typeface="Noto Sans CJK JP"/>
+                <a:cs typeface="Noto Sans"/>
+              </a:defRPr>
+            </a:pPr>
+            <a:r>
+              <a:rPr sz="2100" b="0" lang="ja-JP">
+                <a:solidFill>
+                  <a:srgbClr val="303437"/>
+                </a:solidFill>
+                <a:latin typeface="Noto Sans"/>
+                <a:ea typeface="Noto Sans CJK JP"/>
+                <a:cs typeface="Noto Sans"/>
+              </a:rPr>
+              <a:t>BERTは大量の文で事前学習した言語モデルである。SemBERT（2020）は、誰が何をしたかなどの意味役割をBERTへ加える。</a:t>
+            </a:r>
+          </a:p>
+        </p:txBody>
+      </p:sp>
+      <p:sp>
+        <p:nvSpPr>
+          <p:cNvPr id="6" name="TextBox 5"/>
+          <p:cNvSpPr txBox="1"/>
+          <p:nvPr/>
+        </p:nvSpPr>
+        <p:spPr>
+          <a:xfrm>
+            <a:off x="502920" y="4343400"/>
+            <a:ext cx="8183879" cy="177800"/>
+          </a:xfrm>
+          <a:prstGeom prst="rect">
+            <a:avLst/>
+          </a:prstGeom>
+          <a:noFill/>
+        </p:spPr>
+        <p:txBody>
+          <a:bodyPr wrap="square" lIns="0" rIns="0" tIns="0" bIns="0">
+            <a:spAutoFit/>
+          </a:bodyPr>
+          <a:lstStyle/>
+          <a:p>
+            <a:pPr algn="l">
+              <a:lnSpc>
+                <a:spcPts val="1400"/>
+              </a:lnSpc>
+              <a:spcBef>
+                <a:spcPts val="0"/>
+              </a:spcBef>
+              <a:spcAft>
+                <a:spcPts val="0"/>
+              </a:spcAft>
+            </a:pPr>
+            <a:r>
+              <a:rPr sz="800" b="0" lang="ja-JP">
+                <a:solidFill>
+                  <a:srgbClr val="626669"/>
+                </a:solidFill>
+                <a:latin typeface="Noto Sans"/>
+                <a:ea typeface="Noto Sans CJK JP"/>
+                <a:cs typeface="Noto Sans"/>
+              </a:rPr>
+              <a:t/>
+            </a:r>
+            <a:r>
+              <a:rPr sz="800" lang="ja-JP">
+                <a:solidFill>
+                  <a:srgbClr val="626669"/>
+                </a:solidFill>
+                <a:latin typeface="Noto Sans"/>
+                <a:ea typeface="Noto Sans CJK JP"/>
+                <a:cs typeface="Noto Sans"/>
+              </a:rPr>
+              <a:t>[1] Bowman et al. (2015). EMNLP, pp. 632–642. A large annotated corpus for learning natural language inference.</a:t>
+            </a:r>
+          </a:p>
+        </p:txBody>
+      </p:sp>
+      <p:sp>
+        <p:nvSpPr>
+          <p:cNvPr id="7" name="TextBox 6"/>
+          <p:cNvSpPr txBox="1"/>
+          <p:nvPr/>
+        </p:nvSpPr>
+        <p:spPr>
+          <a:xfrm>
+            <a:off x="5921996" y="4361713"/>
+            <a:ext cx="2764803" cy="177800"/>
+          </a:xfrm>
+          <a:prstGeom prst="rect">
+            <a:avLst/>
+          </a:prstGeom>
+          <a:noFill/>
+        </p:spPr>
+        <p:txBody>
+          <a:bodyPr wrap="none" lIns="0" rIns="0" tIns="0" bIns="0">
+            <a:spAutoFit/>
+          </a:bodyPr>
+          <a:lstStyle/>
+          <a:p>
+            <a:pPr algn="l">
+              <a:lnSpc>
+                <a:spcPts val="1400"/>
+              </a:lnSpc>
+              <a:spcBef>
+                <a:spcPts val="0"/>
+              </a:spcBef>
+              <a:spcAft>
+                <a:spcPts val="0"/>
+              </a:spcAft>
+            </a:pPr>
+            <a:r>
+              <a:rPr sz="800" b="0" lang="ja-JP">
+                <a:solidFill>
+                  <a:srgbClr val="626669"/>
+                </a:solidFill>
+                <a:latin typeface="Noto Sans"/>
+                <a:ea typeface="Noto Sans CJK JP"/>
+                <a:cs typeface="Noto Sans"/>
+              </a:rPr>
+              <a:t/>
+            </a:r>
+            <a:r>
+              <a:rPr sz="800" lang="ja-JP">
+                <a:solidFill>
+                  <a:srgbClr val="626669"/>
+                </a:solidFill>
+                <a:latin typeface="Noto Sans"/>
+                <a:ea typeface="Noto Sans CJK JP"/>
+                <a:cs typeface="Noto Sans"/>
+                <a:hlinkClick r:id="rId2"/>
+              </a:rPr>
+              <a:t>https://aclanthology.org/D15-1075/</a:t>
+            </a:r>
+          </a:p>
+        </p:txBody>
+      </p:sp>
+      <p:sp>
+        <p:nvSpPr>
+          <p:cNvPr id="8" name="TextBox 7"/>
+          <p:cNvSpPr txBox="1"/>
+          <p:nvPr/>
+        </p:nvSpPr>
+        <p:spPr>
+          <a:xfrm>
+            <a:off x="502920" y="4699000"/>
+            <a:ext cx="8183879" cy="177800"/>
+          </a:xfrm>
+          <a:prstGeom prst="rect">
+            <a:avLst/>
+          </a:prstGeom>
+          <a:noFill/>
+        </p:spPr>
+        <p:txBody>
+          <a:bodyPr wrap="square" lIns="0" rIns="0" tIns="0" bIns="0">
+            <a:spAutoFit/>
+          </a:bodyPr>
+          <a:lstStyle/>
+          <a:p>
+            <a:pPr algn="l">
+              <a:lnSpc>
+                <a:spcPts val="1400"/>
+              </a:lnSpc>
+              <a:spcBef>
+                <a:spcPts val="0"/>
+              </a:spcBef>
+              <a:spcAft>
+                <a:spcPts val="0"/>
+              </a:spcAft>
+            </a:pPr>
+            <a:r>
+              <a:rPr sz="800" b="0" lang="ja-JP">
+                <a:solidFill>
+                  <a:srgbClr val="626669"/>
+                </a:solidFill>
+                <a:latin typeface="Noto Sans"/>
+                <a:ea typeface="Noto Sans CJK JP"/>
+                <a:cs typeface="Noto Sans"/>
+              </a:rPr>
+              <a:t/>
+            </a:r>
+            <a:r>
+              <a:rPr sz="800" lang="ja-JP">
+                <a:solidFill>
+                  <a:srgbClr val="626669"/>
+                </a:solidFill>
+                <a:latin typeface="Noto Sans"/>
+                <a:ea typeface="Noto Sans CJK JP"/>
+                <a:cs typeface="Noto Sans"/>
+              </a:rPr>
+              <a:t>[2] </a:t>
+            </a:r>
+            <a:r>
+              <a:rPr sz="800" lang="ja-JP">
+                <a:solidFill>
+                  <a:srgbClr val="626669"/>
+                </a:solidFill>
+                <a:latin typeface="Noto Sans"/>
+                <a:ea typeface="Noto Sans CJK JP"/>
+                <a:cs typeface="Noto Sans"/>
+                <a:hlinkClick r:id="rId3"/>
+              </a:rPr>
+              <a:t>https://github.com/coetaur0/ESIM</a:t>
+            </a:r>
+          </a:p>
+        </p:txBody>
+      </p:sp>
+      <p:sp>
+        <p:nvSpPr>
+          <p:cNvPr id="9" name="TextBox 8"/>
+          <p:cNvSpPr txBox="1"/>
+          <p:nvPr/>
+        </p:nvSpPr>
+        <p:spPr>
+          <a:xfrm>
+            <a:off x="502920" y="4876800"/>
+            <a:ext cx="8183879" cy="177800"/>
+          </a:xfrm>
+          <a:prstGeom prst="rect">
+            <a:avLst/>
+          </a:prstGeom>
+          <a:noFill/>
+        </p:spPr>
+        <p:txBody>
+          <a:bodyPr wrap="square" lIns="0" rIns="0" tIns="0" bIns="0">
+            <a:spAutoFit/>
+          </a:bodyPr>
+          <a:lstStyle/>
+          <a:p>
+            <a:pPr algn="l">
+              <a:lnSpc>
+                <a:spcPts val="1400"/>
+              </a:lnSpc>
+              <a:spcBef>
+                <a:spcPts val="0"/>
+              </a:spcBef>
+              <a:spcAft>
+                <a:spcPts val="0"/>
+              </a:spcAft>
+            </a:pPr>
+            <a:r>
+              <a:rPr sz="800" b="0" lang="ja-JP">
+                <a:solidFill>
+                  <a:srgbClr val="626669"/>
+                </a:solidFill>
+                <a:latin typeface="Noto Sans"/>
+                <a:ea typeface="Noto Sans CJK JP"/>
+                <a:cs typeface="Noto Sans"/>
+              </a:rPr>
+              <a:t/>
+            </a:r>
+            <a:r>
+              <a:rPr sz="800" lang="ja-JP">
+                <a:solidFill>
+                  <a:srgbClr val="626669"/>
+                </a:solidFill>
+                <a:latin typeface="Noto Sans"/>
+                <a:ea typeface="Noto Sans CJK JP"/>
+                <a:cs typeface="Noto Sans"/>
+              </a:rPr>
+              <a:t>[3] </a:t>
+            </a:r>
+            <a:r>
+              <a:rPr sz="800" lang="ja-JP">
+                <a:solidFill>
+                  <a:srgbClr val="626669"/>
+                </a:solidFill>
+                <a:latin typeface="Noto Sans"/>
+                <a:ea typeface="Noto Sans CJK JP"/>
+                <a:cs typeface="Noto Sans"/>
+                <a:hlinkClick r:id="rId4"/>
               </a:rPr>
               <a:t>https://github.com/cooelf/SemBERT</a:t>
             </a:r>
@@ -18507,7 +18472,7 @@
                 <a:ea typeface="Noto Sans CJK JP"/>
                 <a:cs typeface="Noto Sans"/>
               </a:rPr>
-              <a:t>正解率だけでは文の理解を判断できない</a:t>
+              <a:t>仮説文だけで正解率約67%に達する</a:t>
             </a:r>
             <a:endParaRPr sz="2800" lang="ja-JP">
               <a:latin typeface="Noto Sans"/>
@@ -18603,10 +18568,7 @@
               <a:buSzPct val="60455"/>
               <a:buFont typeface="Noto Sans CJK JP"/>
               <a:buChar char="●"/>
-              <a:defRPr sz="2200" b="0" lang="ja-JP">
-                <a:solidFill>
-                  <a:srgbClr val="303437"/>
-                </a:solidFill>
+              <a:defRPr sz="2200" lang="ja-JP">
                 <a:latin typeface="Noto Sans"/>
                 <a:ea typeface="Noto Sans CJK JP"/>
                 <a:cs typeface="Noto Sans"/>
@@ -18621,7 +18583,29 @@
                 <a:ea typeface="Noto Sans CJK JP"/>
                 <a:cs typeface="Noto Sans"/>
               </a:rPr>
-              <a:t>写真説明文に偏り、長文・専門文書を代表しない。</a:t>
+              <a:t>仮説文だけでもラベルを推測できる注釈の偏りがある </a:t>
+            </a:r>
+            <a:r>
+              <a:rPr sz="2200" lang="ja-JP">
+                <a:solidFill>
+                  <a:srgbClr val="303437"/>
+                </a:solidFill>
+                <a:latin typeface="Noto Sans"/>
+                <a:ea typeface="Noto Sans CJK JP"/>
+                <a:cs typeface="Noto Sans"/>
+              </a:rPr>
+              <a:t>[1]</a:t>
+            </a:r>
+            <a:r>
+              <a:rPr sz="2200" lang="ja-JP">
+                <a:solidFill>
+                  <a:srgbClr val="303437"/>
+                </a:solidFill>
+                <a:latin typeface="Noto Sans"/>
+                <a:ea typeface="Noto Sans CJK JP"/>
+                <a:cs typeface="Noto Sans"/>
+              </a:rPr>
+              <a:t>。</a:t>
             </a:r>
             <a:endParaRPr sz="2200" lang="ja-JP">
               <a:latin typeface="Noto Sans"/>
@@ -18630,56 +18614,6 @@
             </a:endParaRPr>
           </a:p>
           <a:p>
-            <a:pPr algn="l" lvl="0" marL="457200" indent="-355600">
-              <a:buSzPct val="60455"/>
-              <a:buFont typeface="Noto Sans CJK JP"/>
-              <a:buChar char="●"/>
-              <a:defRPr sz="2200" lang="ja-JP">
-                <a:latin typeface="Noto Sans"/>
-                <a:ea typeface="Noto Sans CJK JP"/>
-                <a:cs typeface="Noto Sans"/>
-              </a:defRPr>
-            </a:pPr>
-            <a:r>
-              <a:rPr sz="2200" lang="ja-JP">
-                <a:solidFill>
-                  <a:srgbClr val="303437"/>
-                </a:solidFill>
-                <a:latin typeface="Noto Sans"/>
-                <a:ea typeface="Noto Sans CJK JP"/>
-                <a:cs typeface="Noto Sans"/>
-              </a:rPr>
-              <a:t>仮説文だけでもラベルを推測できる注釈の偏りがある </a:t>
-            </a:r>
-            <a:r>
-              <a:rPr sz="2200" lang="ja-JP">
-                <a:solidFill>
-                  <a:srgbClr val="303437"/>
-                </a:solidFill>
-                <a:latin typeface="Noto Sans"/>
-                <a:ea typeface="Noto Sans CJK JP"/>
-                <a:cs typeface="Noto Sans"/>
-              </a:rPr>
-              <a:t>[1]</a:t>
-            </a:r>
-            <a:r>
-              <a:rPr sz="2200" lang="ja-JP">
-                <a:solidFill>
-                  <a:srgbClr val="303437"/>
-                </a:solidFill>
-                <a:latin typeface="Noto Sans"/>
-                <a:ea typeface="Noto Sans CJK JP"/>
-                <a:cs typeface="Noto Sans"/>
-              </a:rPr>
-              <a:t>。</a:t>
-            </a:r>
-            <a:endParaRPr sz="2200" lang="ja-JP">
-              <a:latin typeface="Noto Sans"/>
-              <a:ea typeface="Noto Sans CJK JP"/>
-              <a:cs typeface="Noto Sans"/>
-            </a:endParaRPr>
-          </a:p>
-          <a:p>
             <a:pPr algn="l" lvl="1" marL="914400" indent="-355600">
               <a:buSzPct val="60455"/>
               <a:buFont typeface="Noto Sans CJK JP"/>
@@ -18700,62 +18634,6 @@
                 <a:cs typeface="Noto Sans"/>
               </a:rPr>
               <a:t>仮説だけを使う分類器で約67%という報告がある。</a:t>
-            </a:r>
-            <a:endParaRPr sz="2200" lang="ja-JP">
-              <a:latin typeface="Noto Sans"/>
-              <a:ea typeface="Noto Sans CJK JP"/>
-              <a:cs typeface="Noto Sans"/>
-            </a:endParaRPr>
-          </a:p>
-          <a:p>
-            <a:pPr algn="l" lvl="0" marL="457200" indent="-355600">
-              <a:buSzPct val="60455"/>
-              <a:buFont typeface="Noto Sans CJK JP"/>
-              <a:buChar char="●"/>
-              <a:defRPr sz="2200" lang="ja-JP">
-                <a:latin typeface="Noto Sans"/>
-                <a:ea typeface="Noto Sans CJK JP"/>
-                <a:cs typeface="Noto Sans"/>
-              </a:defRPr>
-            </a:pPr>
-            <a:r>
-              <a:rPr sz="2200" lang="ja-JP">
-                <a:solidFill>
-                  <a:srgbClr val="303437"/>
-                </a:solidFill>
-                <a:latin typeface="Noto Sans"/>
-                <a:ea typeface="Noto Sans CJK JP"/>
-                <a:cs typeface="Noto Sans"/>
-              </a:rPr>
-              <a:t>中立と矛盾の境界には、場面の解釈が関わる。</a:t>
-            </a:r>
-            <a:endParaRPr sz="2200" lang="ja-JP">
-              <a:latin typeface="Noto Sans"/>
-              <a:ea typeface="Noto Sans CJK JP"/>
-              <a:cs typeface="Noto Sans"/>
-            </a:endParaRPr>
-          </a:p>
-          <a:p>
-            <a:pPr algn="l" lvl="0" marL="457200" indent="-355600">
-              <a:buSzPct val="60455"/>
-              <a:buFont typeface="Noto Sans CJK JP"/>
-              <a:buChar char="●"/>
-              <a:defRPr sz="2200" lang="ja-JP">
-                <a:latin typeface="Noto Sans"/>
-                <a:ea typeface="Noto Sans CJK JP"/>
-                <a:cs typeface="Noto Sans"/>
-              </a:defRPr>
-            </a:pPr>
-            <a:r>
-              <a:rPr sz="2200" lang="ja-JP">
-                <a:solidFill>
-                  <a:srgbClr val="303437"/>
-                </a:solidFill>
-                <a:latin typeface="Noto Sans"/>
-                <a:ea typeface="Noto Sans CJK JP"/>
-                <a:cs typeface="Noto Sans"/>
-              </a:rPr>
-              <a:t>文対全体の性能と、推論の種類ごとの性能を分けて見る。</a:t>
             </a:r>
             <a:endParaRPr sz="2200" lang="ja-JP">
               <a:latin typeface="Noto Sans"/>
@@ -19912,41 +19790,6 @@
                 <a:cs typeface="Noto Sans"/>
               </a:rPr>
               <a:t>含意・中立・矛盾というラベルに加えて、なぜその関係になるかを文章として収録する。</a:t>
-            </a:r>
-          </a:p>
-          <a:p>
-            <a:pPr lvl="0" marL="457200" indent="-355600">
-              <a:lnSpc>
-                <a:spcPct val="110000"/>
-              </a:lnSpc>
-              <a:spcBef>
-                <a:spcPts val="0"/>
-              </a:spcBef>
-              <a:spcAft>
-                <a:spcPts val="800"/>
-              </a:spcAft>
-              <a:buSzPct val="57826"/>
-              <a:buFont typeface="Noto Sans CJK JP"/>
-              <a:buChar char="●"/>
-              <a:defRPr sz="2300" b="0" lang="ja-JP">
-                <a:solidFill>
-                  <a:srgbClr val="303437"/>
-                </a:solidFill>
-                <a:latin typeface="Noto Sans"/>
-                <a:ea typeface="Noto Sans CJK JP"/>
-                <a:cs typeface="Noto Sans"/>
-              </a:defRPr>
-            </a:pPr>
-            <a:r>
-              <a:rPr sz="2300" b="0" lang="ja-JP">
-                <a:solidFill>
-                  <a:srgbClr val="303437"/>
-                </a:solidFill>
-                <a:latin typeface="Noto Sans"/>
-                <a:ea typeface="Noto Sans CJK JP"/>
-                <a:cs typeface="Noto Sans"/>
-              </a:rPr>
-              <a:t>SNLIの文対を利用するが、SNLIそのものの版更新ではない。</a:t>
             </a:r>
           </a:p>
         </p:txBody>
@@ -22680,7 +22523,7 @@
                 <a:ea typeface="Noto Sans CJK JP"/>
                 <a:cs typeface="Noto Sans"/>
               </a:rPr>
-              <a:t>SNLIの目的・文対の特徴と評価上の限界</a:t>
+              <a:t>SNLIの目的・文対の特徴と利用動向</a:t>
             </a:r>
             <a:endParaRPr sz="2800" lang="ja-JP">
               <a:latin typeface="Noto Sans"/>
@@ -44110,43 +43953,6 @@
               <a:cs typeface="Noto Sans"/>
             </a:endParaRPr>
           </a:p>
-          <a:p>
-            <a:pPr algn="l">
-              <a:lnSpc>
-                <a:spcPct val="110000"/>
-              </a:lnSpc>
-              <a:spcBef>
-                <a:spcPts val="0"/>
-              </a:spcBef>
-              <a:spcAft>
-                <a:spcPts val="300"/>
-              </a:spcAft>
-              <a:defRPr sz="1700" b="0" lang="ja-JP">
-                <a:solidFill>
-                  <a:srgbClr val="303437"/>
-                </a:solidFill>
-                <a:latin typeface="Noto Sans"/>
-                <a:ea typeface="Noto Sans CJK JP"/>
-                <a:cs typeface="Noto Sans"/>
-              </a:defRPr>
-            </a:pPr>
-            <a:r>
-              <a:rPr sz="2000" b="0" lang="ja-JP">
-                <a:solidFill>
-                  <a:srgbClr val="303437"/>
-                </a:solidFill>
-                <a:latin typeface="Noto Sans"/>
-                <a:ea typeface="Noto Sans CJK JP"/>
-                <a:cs typeface="Noto Sans"/>
-              </a:rPr>
-              <a:t>比較には前処理、学習条件、単一実行か平均かの確認が必要。</a:t>
-            </a:r>
-            <a:endParaRPr sz="1700" lang="ja-JP">
-              <a:latin typeface="Noto Sans"/>
-              <a:ea typeface="Noto Sans CJK JP"/>
-              <a:cs typeface="Noto Sans"/>
-            </a:endParaRPr>
-          </a:p>
         </p:txBody>
       </p:sp>
       <p:sp>
@@ -45133,34 +44939,6 @@
             </a:endParaRPr>
           </a:p>
           <a:p>
-            <a:pPr algn="l" lvl="0" marL="457200" indent="-355600">
-              <a:buSzPct val="63333"/>
-              <a:buFont typeface="Noto Sans CJK JP"/>
-              <a:buChar char="●"/>
-              <a:defRPr sz="2100" lang="ja-JP">
-                <a:latin typeface="Noto Sans"/>
-                <a:ea typeface="Noto Sans CJK JP"/>
-                <a:cs typeface="Noto Sans"/>
-              </a:defRPr>
-            </a:pPr>
-            <a:r>
-              <a:rPr sz="2100" lang="ja-JP">
-                <a:solidFill>
-                  <a:srgbClr val="303437"/>
-                </a:solidFill>
-                <a:latin typeface="Noto Sans"/>
-                <a:ea typeface="Noto Sans CJK JP"/>
-                <a:cs typeface="Noto Sans"/>
-              </a:rPr>
-              <a:t>追加検証の多数決と、作成者のラベルを区別する。</a:t>
-            </a:r>
-            <a:endParaRPr sz="2100" lang="ja-JP">
-              <a:latin typeface="Noto Sans"/>
-              <a:ea typeface="Noto Sans CJK JP"/>
-              <a:cs typeface="Noto Sans"/>
-            </a:endParaRPr>
-          </a:p>
-          <a:p>
             <a:pPr algn="l" lvl="1" marL="914400" indent="-355600">
               <a:buSzPct val="63333"/>
               <a:buFont typeface="Noto Sans CJK JP"/>
@@ -45181,34 +44959,6 @@
                 <a:cs typeface="Noto Sans"/>
               </a:rPr>
               <a:t>開発用とテスト用には複数の判定が付いた文対を使う。</a:t>
-            </a:r>
-            <a:endParaRPr sz="2100" lang="ja-JP">
-              <a:latin typeface="Noto Sans"/>
-              <a:ea typeface="Noto Sans CJK JP"/>
-              <a:cs typeface="Noto Sans"/>
-            </a:endParaRPr>
-          </a:p>
-          <a:p>
-            <a:pPr algn="l" lvl="0" marL="457200" indent="-355600">
-              <a:buSzPct val="63333"/>
-              <a:buFont typeface="Noto Sans CJK JP"/>
-              <a:buChar char="●"/>
-              <a:defRPr sz="2100" lang="ja-JP">
-                <a:latin typeface="Noto Sans"/>
-                <a:ea typeface="Noto Sans CJK JP"/>
-                <a:cs typeface="Noto Sans"/>
-              </a:defRPr>
-            </a:pPr>
-            <a:r>
-              <a:rPr sz="2100" lang="ja-JP">
-                <a:solidFill>
-                  <a:srgbClr val="303437"/>
-                </a:solidFill>
-                <a:latin typeface="Noto Sans"/>
-                <a:ea typeface="Noto Sans CJK JP"/>
-                <a:cs typeface="Noto Sans"/>
-              </a:rPr>
-              <a:t>自然な場面の読みと形式的な論理関係は必ずしも一致しない。</a:t>
             </a:r>
             <a:endParaRPr sz="2100" lang="ja-JP">
               <a:latin typeface="Noto Sans"/>

--- a/slides/datasets-in-10-minutes-snli.pptx
+++ b/slides/datasets-in-10-minutes-snli.pptx
@@ -8943,7 +8943,7 @@
                 <a:ea typeface="Noto Sans CJK JP"/>
                 <a:cs typeface="Noto Sans"/>
               </a:rPr>
-              <a:t>Stanford Natural Language Inference Corpusとして、570,152組を収録し、2015年のEMNLPで発表された。</a:t>
+              <a:t>Stanford Natural Language Inference Corpusとして570,152組が収録され、2015年のEMNLPで発表された。</a:t>
             </a:r>
           </a:p>
         </p:txBody>
@@ -9290,7 +9290,7 @@
                 <a:ea typeface="Noto Sans CJK JP"/>
                 <a:cs typeface="Noto Sans"/>
               </a:rPr>
-              <a:t>作業者には写真を見せず、その説明文だけを提示した。同じ写真の状況について、確実に真・真かもしれない・確実に偽の文を各1つ書いた。</a:t>
+              <a:t>作業者には写真を見せず、その説明文だけを提示した。作業者は同じ写真の状況について、確実に真・真かもしれない・確実に偽の文を各1つ書いた。</a:t>
             </a:r>
           </a:p>
           <a:p>
@@ -9608,7 +9608,7 @@
                           <a:ea typeface="Noto Sans CJK JP"/>
                           <a:cs typeface="Noto Sans"/>
                         </a:rPr>
-                        <a:t>判定者</a:t>
+                        <a:t>区分</a:t>
                       </a:r>
                     </a:p>
                   </a:txBody>
@@ -14255,7 +14255,7 @@
         <p:spPr>
           <a:xfrm>
             <a:off x="548640" y="1787634"/>
-            <a:ext cx="8046720" cy="1552002"/>
+            <a:ext cx="8046720" cy="1755202"/>
           </a:xfrm>
           <a:prstGeom prst="rect">
             <a:avLst/>
@@ -14359,7 +14359,7 @@
         </p:nvSpPr>
         <p:spPr>
           <a:xfrm>
-            <a:off x="548640" y="3517036"/>
+            <a:off x="548640" y="3720236"/>
             <a:ext cx="8046720" cy="1073251"/>
           </a:xfrm>
           <a:prstGeom prst="rect">
@@ -14402,7 +14402,7 @@
                 <a:ea typeface="Noto Sans CJK JP"/>
                 <a:cs typeface="Noto Sans"/>
               </a:rPr>
-              <a:t>仮説は “The people who are shown are not all doing the exact same thing.”正解は含意。</a:t>
+              <a:t>仮説は “The people who are shown are not all doing the exact same thing.” で、正解は含意。</a:t>
             </a:r>
             <a:endParaRPr sz="1700" lang="ja-JP">
               <a:latin typeface="Noto Sans"/>
@@ -16818,7 +16818,7 @@
                 <a:ea typeface="Noto Sans CJK JP"/>
                 <a:cs typeface="Noto Sans"/>
               </a:rPr>
-              <a:t>いずれもSNLIの学習用で学習し、テスト用で評価した </a:t>
+              <a:t>いずれもSNLIの学習データで学習し、テストデータで評価した </a:t>
             </a:r>
             <a:r>
               <a:rPr sz="1900" lang="ja-JP">
@@ -18633,7 +18633,7 @@
                 <a:ea typeface="Noto Sans CJK JP"/>
                 <a:cs typeface="Noto Sans"/>
               </a:rPr>
-              <a:t>仮説だけを使う分類器で約67%という報告がある。</a:t>
+              <a:t>仮説文だけを使う分類器で正解率約67%という報告がある。</a:t>
             </a:r>
             <a:endParaRPr sz="2200" lang="ja-JP">
               <a:latin typeface="Noto Sans"/>
@@ -19317,7 +19317,7 @@
                 <a:ea typeface="Noto Sans CJK JP"/>
                 <a:cs typeface="Noto Sans"/>
               </a:rPr>
-              <a:t>SNLIは写真説明を扱った。これに対し、会話・小説など10ジャンルへ広げた </a:t>
+              <a:t>写真説明を扱ったSNLIに対し、会話・小説など10ジャンルへ対象を広げた </a:t>
             </a:r>
             <a:r>
               <a:rPr sz="2300" lang="ja-JP">
@@ -19367,7 +19367,7 @@
                 <a:ea typeface="Noto Sans CJK JP"/>
                 <a:cs typeface="Noto Sans"/>
               </a:rPr>
-              <a:t>さらに、未知のジャンルへの汎化も評価する。</a:t>
+              <a:t>さらに、未知のジャンルへの汎化性能も評価できる。</a:t>
             </a:r>
             <a:endParaRPr sz="2300" lang="ja-JP">
               <a:latin typeface="Noto Sans"/>
@@ -20112,7 +20112,7 @@
                 <a:ea typeface="Noto Sans CJK JP"/>
                 <a:cs typeface="Noto Sans"/>
               </a:rPr>
-              <a:t>モデルの予測を作業者へ返し、難しい例を集める。この例でモデルを学び直す工程を繰り返す。</a:t>
+              <a:t>モデルの予測を作業者へ返し、難しい例を集める。これらの例でモデルを学習し直す工程を繰り返す。</a:t>
             </a:r>
           </a:p>
           <a:p>
@@ -23454,7 +23454,7 @@
                 <a:ea typeface="Noto Sans CJK JP"/>
                 <a:cs typeface="Noto Sans"/>
               </a:rPr>
-              <a:t>第一著者のSamuel R. Bowmanは自然言語推論を研究する。</a:t>
+              <a:t>第一著者のSamuel R. Bowmanは自然言語推論を研究している。</a:t>
             </a:r>
             <a:endParaRPr sz="2000" lang="ja-JP">
               <a:latin typeface="Noto Sans"/>
@@ -23550,7 +23550,7 @@
                 <a:ea typeface="Noto Sans CJK JP"/>
                 <a:cs typeface="Noto Sans"/>
               </a:rPr>
-              <a:t>最終著者のChristopher D. Manningは単語表現などを研究する。</a:t>
+              <a:t>最終著者のChristopher D. Manningは単語表現などを研究している。</a:t>
             </a:r>
             <a:endParaRPr sz="2000" lang="ja-JP">
               <a:latin typeface="Noto Sans"/>
@@ -31058,7 +31058,7 @@
                 <a:ea typeface="Noto Sans CJK JP"/>
                 <a:cs typeface="Noto Sans"/>
               </a:rPr>
-              <a:t>文長を集計した版・分割と文対数</a:t>
+              <a:t>文長集計の対象データと集計条件</a:t>
             </a:r>
             <a:endParaRPr sz="2800" lang="ja-JP">
               <a:latin typeface="Noto Sans"/>
@@ -31222,7 +31222,7 @@
                 <a:ea typeface="Noto Sans CJK JP"/>
                 <a:cs typeface="Noto Sans"/>
               </a:rPr>
-              <a:t>正解付き569,033組を使い、ラベルが「-」の組は除く。</a:t>
+              <a:t>正解付き569,033組を使い、ラベルが「-」の組は除いた。</a:t>
             </a:r>
             <a:endParaRPr sz="2200" lang="ja-JP">
               <a:latin typeface="Noto Sans"/>
@@ -31278,7 +31278,7 @@
                 <a:ea typeface="Noto Sans CJK JP"/>
                 <a:cs typeface="Noto Sans"/>
               </a:rPr>
-              <a:t>Pythonのlen()で空白・句読点を含むUnicode文字を数える。</a:t>
+              <a:t>Pythonのlen()で空白・句読点を含むUnicode文字を数えた。</a:t>
             </a:r>
             <a:endParaRPr sz="2200" lang="ja-JP">
               <a:latin typeface="Noto Sans"/>
@@ -31306,7 +31306,7 @@
                 <a:ea typeface="Noto Sans CJK JP"/>
                 <a:cs typeface="Noto Sans"/>
               </a:rPr>
-              <a:t>str.split()で空白区切りの単語を数える。</a:t>
+              <a:t>str.split()で空白区切りの単語を数えた。</a:t>
             </a:r>
             <a:endParaRPr sz="2200" lang="ja-JP">
               <a:latin typeface="Noto Sans"/>
@@ -31334,7 +31334,7 @@
                 <a:ea typeface="Noto Sans CJK JP"/>
                 <a:cs typeface="Noto Sans"/>
               </a:rPr>
-              <a:t>前提は文対ごとに繰り返し数える。</a:t>
+              <a:t>前提は文対ごとに重複して数えた。</a:t>
             </a:r>
             <a:endParaRPr sz="2200" lang="ja-JP">
               <a:latin typeface="Noto Sans"/>
@@ -33499,7 +33499,7 @@
                           <a:ea typeface="Noto Sans CJK JP"/>
                           <a:cs typeface="Noto Sans"/>
                         </a:rPr>
-                        <a:t>中央</a:t>
+                        <a:t>中央値</a:t>
                       </a:r>
                       <a:endParaRPr sz="1600" lang="ja-JP">
                         <a:latin typeface="Noto Sans"/>
@@ -34960,7 +34960,7 @@
                 <a:ea typeface="Noto Sans CJK JP"/>
                 <a:cs typeface="Noto Sans"/>
               </a:rPr>
-              <a:t>前提を文対ごとに数える。</a:t>
+              <a:t>前提文は文対ごとに集計。</a:t>
             </a:r>
             <a:endParaRPr sz="1700" lang="ja-JP">
               <a:latin typeface="Noto Sans"/>
@@ -35565,7 +35565,7 @@
                           <a:ea typeface="Noto Sans CJK JP"/>
                           <a:cs typeface="Noto Sans"/>
                         </a:rPr>
-                        <a:t>中央</a:t>
+                        <a:t>中央値</a:t>
                       </a:r>
                       <a:endParaRPr sz="1600" lang="ja-JP">
                         <a:latin typeface="Noto Sans"/>
@@ -37481,7 +37481,7 @@
                 <a:ea typeface="Noto Sans CJK JP"/>
                 <a:cs typeface="Noto Sans"/>
               </a:rPr>
-              <a:t>分割別の前提の単語数</a:t>
+              <a:t>分割別の前提文の単語数</a:t>
             </a:r>
             <a:endParaRPr sz="2800" lang="ja-JP">
               <a:latin typeface="Noto Sans"/>
@@ -37873,7 +37873,7 @@
                           <a:ea typeface="Noto Sans CJK JP"/>
                           <a:cs typeface="Noto Sans"/>
                         </a:rPr>
-                        <a:t>中央</a:t>
+                        <a:t>中央値</a:t>
                       </a:r>
                       <a:endParaRPr sz="2400" lang="ja-JP">
                         <a:latin typeface="Noto Sans"/>
@@ -40269,7 +40269,7 @@
                 <a:ea typeface="Noto Sans CJK JP"/>
                 <a:cs typeface="Noto Sans"/>
               </a:rPr>
-              <a:t>分割別の仮説の単語数</a:t>
+              <a:t>分割別の仮説文の単語数</a:t>
             </a:r>
             <a:endParaRPr sz="2800" lang="ja-JP">
               <a:latin typeface="Noto Sans"/>
@@ -40661,7 +40661,7 @@
                           <a:ea typeface="Noto Sans CJK JP"/>
                           <a:cs typeface="Noto Sans"/>
                         </a:rPr>
-                        <a:t>中央</a:t>
+                        <a:t>中央値</a:t>
                       </a:r>
                       <a:endParaRPr sz="2400" lang="ja-JP">
                         <a:latin typeface="Noto Sans"/>
@@ -42367,7 +42367,7 @@
                 <a:ea typeface="Noto Sans CJK JP"/>
                 <a:cs typeface="Noto Sans"/>
               </a:rPr>
-              <a:t>前提は “A doberman bites a large blue ball.”正解は矛盾。仮説には前提と無関係な描写が多い。</a:t>
+              <a:t>前提は“A doberman bites a large blue ball.”で、正解は矛盾。仮説には前提と無関係な描写が多い。</a:t>
             </a:r>
             <a:endParaRPr sz="1700" lang="ja-JP">
               <a:latin typeface="Noto Sans"/>
@@ -44594,7 +44594,7 @@
                 <a:ea typeface="Noto Sans CJK JP"/>
                 <a:cs typeface="Noto Sans"/>
               </a:rPr>
-              <a:t>公式のJSONLにはsentence1、sentence2、gold_labelなどを含む。</a:t>
+              <a:t>公式のJSONLにはsentence1、sentence2、gold_labelなどが含まれる。</a:t>
             </a:r>
             <a:endParaRPr sz="1700" lang="ja-JP">
               <a:latin typeface="Noto Sans"/>

--- a/slides/datasets-in-10-minutes-snli.pptx
+++ b/slides/datasets-in-10-minutes-snli.pptx
@@ -16302,7 +16302,7 @@
                           <a:ea typeface="Noto Sans CJK JP"/>
                           <a:cs typeface="Noto Sans"/>
                         </a:rPr>
-                        <a:t>原著のモデル</a:t>
+                        <a:t>初期モデル</a:t>
                       </a:r>
                       <a:endParaRPr sz="2200" lang="ja-JP">
                         <a:latin typeface="Noto Sans"/>
@@ -45304,7 +45304,7 @@
                 <a:ea typeface="Noto Sans CJK JP"/>
                 <a:cs typeface="Noto Sans"/>
               </a:rPr>
-              <a:t>SNLIの原著論文。文対の収集、3種類の関係の注釈と検証、初期モデルの評価を報告する。</a:t>
+              <a:t>文対の収集、3種類の関係の注釈と検証、初期モデルの評価を報告する。</a:t>
             </a:r>
           </a:p>
         </p:txBody>
@@ -45493,7 +45493,7 @@
                 <a:ea typeface="Noto Sans CJK JP"/>
                 <a:cs typeface="Noto Sans"/>
               </a:rPr>
-              <a:t>MultiNLIの原著論文。10ジャンルの文対を収集し、分野内・分野間の汎化を評価する。</a:t>
+              <a:t>10ジャンルの文対を収集し、分野内・分野間の汎化を評価する。</a:t>
             </a:r>
           </a:p>
         </p:txBody>
@@ -46976,7 +46976,7 @@
                 <a:ea typeface="Noto Sans CJK JP"/>
                 <a:cs typeface="Noto Sans"/>
               </a:rPr>
-              <a:t>Sentence-BERTの原著論文。BERTから文埋め込みを生成し、文間の類似度を計算する。</a:t>
+              <a:t>BERTから文埋め込みを生成し、文間の類似度を計算する。</a:t>
             </a:r>
           </a:p>
         </p:txBody>
@@ -47669,7 +47669,7 @@
                 <a:ea typeface="Noto Sans CJK JP"/>
                 <a:cs typeface="Noto Sans"/>
               </a:rPr>
-              <a:t>ANLIの原著論文。人がモデルを誤らせる文対を作る反復的なデータ収集を提案する。</a:t>
+              <a:t>人がモデルを誤らせる文対を作る反復的なデータ収集を提案する。</a:t>
             </a:r>
           </a:p>
         </p:txBody>

--- a/slides/datasets-in-10-minutes-snli.pptx
+++ b/slides/datasets-in-10-minutes-snli.pptx
@@ -7820,7 +7820,7 @@
         <p:spPr>
           <a:xfrm>
             <a:off x="548640" y="3147771"/>
-            <a:ext cx="8046720" cy="320040"/>
+            <a:ext cx="8046720" cy="400743"/>
           </a:xfrm>
           <a:prstGeom prst="rect">
             <a:avLst/>
@@ -7853,9 +7853,9 @@
               </a:defRPr>
             </a:pPr>
             <a:r>
-              <a:rPr sz="2100" b="0" lang="ja-JP">
-                <a:solidFill>
-                  <a:srgbClr val="B13731"/>
+              <a:rPr sz="2100" b="1" lang="ja-JP">
+                <a:solidFill>
+                  <a:schemeClr val="accent1"/>
                 </a:solidFill>
                 <a:latin typeface="Noto Sans"/>
                 <a:ea typeface="Noto Sans CJK JP"/>
@@ -24444,7 +24444,7 @@
         <p:spPr>
           <a:xfrm>
             <a:off x="548640" y="3433521"/>
-            <a:ext cx="8046720" cy="320040"/>
+            <a:ext cx="8046720" cy="400832"/>
           </a:xfrm>
           <a:prstGeom prst="rect">
             <a:avLst/>
@@ -24477,9 +24477,9 @@
               </a:defRPr>
             </a:pPr>
             <a:r>
-              <a:rPr sz="2100" b="0" lang="ja-JP">
-                <a:solidFill>
-                  <a:srgbClr val="B13731"/>
+              <a:rPr sz="2100" b="1" lang="ja-JP">
+                <a:solidFill>
+                  <a:schemeClr val="accent1"/>
                 </a:solidFill>
                 <a:latin typeface="Noto Sans"/>
                 <a:ea typeface="Noto Sans CJK JP"/>
@@ -25108,7 +25108,7 @@
         <p:spPr>
           <a:xfrm>
             <a:off x="548640" y="3147771"/>
-            <a:ext cx="8046720" cy="320040"/>
+            <a:ext cx="8046720" cy="400743"/>
           </a:xfrm>
           <a:prstGeom prst="rect">
             <a:avLst/>
@@ -25141,9 +25141,9 @@
               </a:defRPr>
             </a:pPr>
             <a:r>
-              <a:rPr sz="2100" b="0" lang="ja-JP">
-                <a:solidFill>
-                  <a:srgbClr val="B13731"/>
+              <a:rPr sz="2100" b="1" lang="ja-JP">
+                <a:solidFill>
+                  <a:schemeClr val="accent1"/>
                 </a:solidFill>
                 <a:latin typeface="Noto Sans"/>
                 <a:ea typeface="Noto Sans CJK JP"/>
@@ -25772,7 +25772,7 @@
         <p:spPr>
           <a:xfrm>
             <a:off x="548640" y="3147771"/>
-            <a:ext cx="8046720" cy="320040"/>
+            <a:ext cx="8046720" cy="400743"/>
           </a:xfrm>
           <a:prstGeom prst="rect">
             <a:avLst/>
@@ -25805,9 +25805,9 @@
               </a:defRPr>
             </a:pPr>
             <a:r>
-              <a:rPr sz="2100" b="0" lang="ja-JP">
-                <a:solidFill>
-                  <a:srgbClr val="B13731"/>
+              <a:rPr sz="2100" b="1" lang="ja-JP">
+                <a:solidFill>
+                  <a:schemeClr val="accent1"/>
                 </a:solidFill>
                 <a:latin typeface="Noto Sans"/>
                 <a:ea typeface="Noto Sans CJK JP"/>
@@ -26436,7 +26436,7 @@
         <p:spPr>
           <a:xfrm>
             <a:off x="548640" y="3147771"/>
-            <a:ext cx="8046720" cy="320040"/>
+            <a:ext cx="8046720" cy="400743"/>
           </a:xfrm>
           <a:prstGeom prst="rect">
             <a:avLst/>
@@ -26469,9 +26469,9 @@
               </a:defRPr>
             </a:pPr>
             <a:r>
-              <a:rPr sz="2100" b="0" lang="ja-JP">
-                <a:solidFill>
-                  <a:srgbClr val="B13731"/>
+              <a:rPr sz="2100" b="1" lang="ja-JP">
+                <a:solidFill>
+                  <a:schemeClr val="accent1"/>
                 </a:solidFill>
                 <a:latin typeface="Noto Sans"/>
                 <a:ea typeface="Noto Sans CJK JP"/>
@@ -27100,7 +27100,7 @@
         <p:spPr>
           <a:xfrm>
             <a:off x="548640" y="3147771"/>
-            <a:ext cx="8046720" cy="320040"/>
+            <a:ext cx="8046720" cy="400743"/>
           </a:xfrm>
           <a:prstGeom prst="rect">
             <a:avLst/>
@@ -27133,9 +27133,9 @@
               </a:defRPr>
             </a:pPr>
             <a:r>
-              <a:rPr sz="2100" b="0" lang="ja-JP">
-                <a:solidFill>
-                  <a:srgbClr val="B13731"/>
+              <a:rPr sz="2100" b="1" lang="ja-JP">
+                <a:solidFill>
+                  <a:schemeClr val="accent1"/>
                 </a:solidFill>
                 <a:latin typeface="Noto Sans"/>
                 <a:ea typeface="Noto Sans CJK JP"/>
@@ -27764,7 +27764,7 @@
         <p:spPr>
           <a:xfrm>
             <a:off x="548640" y="3433521"/>
-            <a:ext cx="8046720" cy="320040"/>
+            <a:ext cx="8046720" cy="400832"/>
           </a:xfrm>
           <a:prstGeom prst="rect">
             <a:avLst/>
@@ -27797,9 +27797,9 @@
               </a:defRPr>
             </a:pPr>
             <a:r>
-              <a:rPr sz="2100" b="0" lang="ja-JP">
-                <a:solidFill>
-                  <a:srgbClr val="B13731"/>
+              <a:rPr sz="2100" b="1" lang="ja-JP">
+                <a:solidFill>
+                  <a:schemeClr val="accent1"/>
                 </a:solidFill>
                 <a:latin typeface="Noto Sans"/>
                 <a:ea typeface="Noto Sans CJK JP"/>
@@ -28809,7 +28809,7 @@
         <p:spPr>
           <a:xfrm>
             <a:off x="548640" y="3147771"/>
-            <a:ext cx="8046720" cy="320040"/>
+            <a:ext cx="8046720" cy="400743"/>
           </a:xfrm>
           <a:prstGeom prst="rect">
             <a:avLst/>
@@ -28842,9 +28842,9 @@
               </a:defRPr>
             </a:pPr>
             <a:r>
-              <a:rPr sz="2100" b="0" lang="ja-JP">
-                <a:solidFill>
-                  <a:srgbClr val="B13731"/>
+              <a:rPr sz="2100" b="1" lang="ja-JP">
+                <a:solidFill>
+                  <a:schemeClr val="accent1"/>
                 </a:solidFill>
                 <a:latin typeface="Noto Sans"/>
                 <a:ea typeface="Noto Sans CJK JP"/>
@@ -29473,7 +29473,7 @@
         <p:spPr>
           <a:xfrm>
             <a:off x="548640" y="3147771"/>
-            <a:ext cx="8046720" cy="320040"/>
+            <a:ext cx="8046720" cy="400743"/>
           </a:xfrm>
           <a:prstGeom prst="rect">
             <a:avLst/>
@@ -29506,9 +29506,9 @@
               </a:defRPr>
             </a:pPr>
             <a:r>
-              <a:rPr sz="2100" b="0" lang="ja-JP">
-                <a:solidFill>
-                  <a:srgbClr val="B13731"/>
+              <a:rPr sz="2100" b="1" lang="ja-JP">
+                <a:solidFill>
+                  <a:schemeClr val="accent1"/>
                 </a:solidFill>
                 <a:latin typeface="Noto Sans"/>
                 <a:ea typeface="Noto Sans CJK JP"/>
@@ -30137,7 +30137,7 @@
         <p:spPr>
           <a:xfrm>
             <a:off x="548640" y="3147771"/>
-            <a:ext cx="8046720" cy="320040"/>
+            <a:ext cx="8046720" cy="400743"/>
           </a:xfrm>
           <a:prstGeom prst="rect">
             <a:avLst/>
@@ -30170,9 +30170,9 @@
               </a:defRPr>
             </a:pPr>
             <a:r>
-              <a:rPr sz="2100" b="0" lang="ja-JP">
-                <a:solidFill>
-                  <a:srgbClr val="B13731"/>
+              <a:rPr sz="2100" b="1" lang="ja-JP">
+                <a:solidFill>
+                  <a:schemeClr val="accent1"/>
                 </a:solidFill>
                 <a:latin typeface="Noto Sans"/>
                 <a:ea typeface="Noto Sans CJK JP"/>
@@ -30801,7 +30801,7 @@
         <p:spPr>
           <a:xfrm>
             <a:off x="548640" y="3433521"/>
-            <a:ext cx="8046720" cy="320040"/>
+            <a:ext cx="8046720" cy="400832"/>
           </a:xfrm>
           <a:prstGeom prst="rect">
             <a:avLst/>
@@ -30834,9 +30834,9 @@
               </a:defRPr>
             </a:pPr>
             <a:r>
-              <a:rPr sz="2100" b="0" lang="ja-JP">
-                <a:solidFill>
-                  <a:srgbClr val="B13731"/>
+              <a:rPr sz="2100" b="1" lang="ja-JP">
+                <a:solidFill>
+                  <a:schemeClr val="accent1"/>
                 </a:solidFill>
                 <a:latin typeface="Noto Sans"/>
                 <a:ea typeface="Noto Sans CJK JP"/>
@@ -39701,7 +39701,7 @@
         <p:spPr>
           <a:xfrm>
             <a:off x="548640" y="3147771"/>
-            <a:ext cx="8046720" cy="320040"/>
+            <a:ext cx="8046720" cy="400743"/>
           </a:xfrm>
           <a:prstGeom prst="rect">
             <a:avLst/>
@@ -39734,9 +39734,9 @@
               </a:defRPr>
             </a:pPr>
             <a:r>
-              <a:rPr sz="2100" b="0" lang="ja-JP">
-                <a:solidFill>
-                  <a:srgbClr val="B13731"/>
+              <a:rPr sz="2100" b="1" lang="ja-JP">
+                <a:solidFill>
+                  <a:schemeClr val="accent1"/>
                 </a:solidFill>
                 <a:latin typeface="Noto Sans"/>
                 <a:ea typeface="Noto Sans CJK JP"/>
@@ -44386,9 +44386,20 @@
                 <a:latin typeface="Liberation Mono"/>
                 <a:ea typeface="Noto Sans CJK JP"/>
                 <a:cs typeface="Noto Sans"/>
-                <a:hlinkClick r:id="rId3"/>
-              </a:rPr>
-              <a:t>https://nlp.stanford.edu/projects/snli/snli_1.0.zip"</a:t>
+                <a:hlinkClick r:id="rId4"/>
+              </a:rPr>
+              <a:t>https://nlp.stanford.edu/projects/snli/snli_1.0.zip</a:t>
+            </a:r>
+            <a:r>
+              <a:rPr sz="1400" lang="ja-JP">
+                <a:solidFill>
+                  <a:srgbClr val="303437"/>
+                </a:solidFill>
+                <a:latin typeface="Liberation Mono"/>
+                <a:ea typeface="Noto Sans CJK JP"/>
+                <a:cs typeface="Noto Sans"/>
+              </a:rPr>
+              <a:t>"</a:t>
             </a:r>
           </a:p>
           <a:p>
@@ -46567,7 +46578,7 @@
         <p:spPr>
           <a:xfrm>
             <a:off x="548640" y="3147771"/>
-            <a:ext cx="8046720" cy="320040"/>
+            <a:ext cx="8046720" cy="400743"/>
           </a:xfrm>
           <a:prstGeom prst="rect">
             <a:avLst/>
@@ -46600,9 +46611,9 @@
               </a:defRPr>
             </a:pPr>
             <a:r>
-              <a:rPr sz="2100" b="0" lang="ja-JP">
-                <a:solidFill>
-                  <a:srgbClr val="B13731"/>
+              <a:rPr sz="2100" b="1" lang="ja-JP">
+                <a:solidFill>
+                  <a:schemeClr val="accent1"/>
                 </a:solidFill>
                 <a:latin typeface="Noto Sans"/>
                 <a:ea typeface="Noto Sans CJK JP"/>
@@ -48511,7 +48522,7 @@
         <p:spPr>
           <a:xfrm>
             <a:off x="548640" y="3433521"/>
-            <a:ext cx="8046720" cy="320040"/>
+            <a:ext cx="8046720" cy="400832"/>
           </a:xfrm>
           <a:prstGeom prst="rect">
             <a:avLst/>
@@ -48544,9 +48555,9 @@
               </a:defRPr>
             </a:pPr>
             <a:r>
-              <a:rPr sz="2100" b="0" lang="ja-JP">
-                <a:solidFill>
-                  <a:srgbClr val="B13731"/>
+              <a:rPr sz="2100" b="1" lang="ja-JP">
+                <a:solidFill>
+                  <a:schemeClr val="accent1"/>
                 </a:solidFill>
                 <a:latin typeface="Noto Sans"/>
                 <a:ea typeface="Noto Sans CJK JP"/>
